--- a/manaberu/slides/manaberu-09-connect-lark-api.pptx
+++ b/manaberu/slides/manaberu-09-connect-lark-api.pptx
@@ -14,9 +14,10 @@
     <p:sldId id="262" r:id="rId8"/>
     <p:sldId id="263" r:id="rId9"/>
     <p:sldId id="264" r:id="rId10"/>
+    <p:sldId id="265" r:id="rId11"/>
   </p:sldIdLst>
   <p:notesMasterIdLst>
-    <p:notesMasterId r:id="rId11"/>
+    <p:notesMasterId r:id="rId12"/>
   </p:notesMasterIdLst>
   <p:sldSz cx="9144000" cy="5143500"/>
   <p:notesSz cx="5143500" cy="9144000"/>
@@ -115,25 +116,26 @@
   <p:extLst>
     <p:ext uri="{521415D9-36F7-43E2-AB2F-B90AF26B5E84}">
       <p14:sectionLst xmlns:p14="http://schemas.microsoft.com/office/powerpoint/2010/main">
-        <p14:section name="導入" id="{57d70cd2-2830-7fd3-d5b3-442c7f839e66}">
+        <p14:section name="導入" id="{9c3cf212-8264-10f2-88e1-d514ff7e5fc2}">
           <p14:sldIdLst>
             <p14:sldId id="256"/>
             <p14:sldId id="257"/>
           </p14:sldIdLst>
         </p14:section>
-        <p14:section name="本編" id="{6a86f1f1-14d5-7338-2b5a-f3e2113fda43}">
+        <p14:section name="本編" id="{f1a48c61-89da-57b5-8879-9a1bdfb757b1}">
           <p14:sldIdLst>
             <p14:sldId id="258"/>
             <p14:sldId id="259"/>
             <p14:sldId id="260"/>
             <p14:sldId id="261"/>
             <p14:sldId id="262"/>
+            <p14:sldId id="263"/>
           </p14:sldIdLst>
         </p14:section>
-        <p14:section name="まとめ" id="{d1a93ff5-dc0a-e372-3746-765cb98810e1}">
+        <p14:section name="まとめ" id="{6ce92cf0-2b49-4da6-da1e-413478d562db}">
           <p14:sldIdLst>
-            <p14:sldId id="263"/>
             <p14:sldId id="264"/>
+            <p14:sldId id="265"/>
           </p14:sldIdLst>
         </p14:section>
       </p14:sectionLst>
@@ -582,6 +584,94 @@
 </p:notes>
 </file>
 
+<file path=ppt/notesSlides/notesSlide10.xml><?xml version="1.0" encoding="utf-8"?>
+<p:notes xmlns:a="http://schemas.openxmlformats.org/drawingml/2006/main" xmlns:r="http://schemas.openxmlformats.org/officeDocument/2006/relationships" xmlns:p="http://schemas.openxmlformats.org/presentationml/2006/main">
+  <p:cSld>
+    <p:spTree>
+      <p:nvGrpSpPr>
+        <p:cNvPr id="1" name=""/>
+        <p:cNvGrpSpPr/>
+        <p:nvPr/>
+      </p:nvGrpSpPr>
+      <p:grpSpPr>
+        <a:xfrm>
+          <a:off x="0" y="0"/>
+          <a:ext cx="0" cy="0"/>
+          <a:chOff x="0" y="0"/>
+          <a:chExt cx="0" cy="0"/>
+        </a:xfrm>
+      </p:grpSpPr>
+      <p:sp>
+        <p:nvSpPr>
+          <p:cNvPr id="2" name="Slide Image Placeholder 1"/>
+          <p:cNvSpPr>
+            <a:spLocks noGrp="1" noRot="1" noChangeAspect="1"/>
+          </p:cNvSpPr>
+          <p:nvPr>
+            <p:ph type="sldImg"/>
+          </p:nvPr>
+        </p:nvSpPr>
+        <p:spPr/>
+      </p:sp>
+      <p:sp>
+        <p:nvSpPr>
+          <p:cNvPr id="3" name="Notes Placeholder 2"/>
+          <p:cNvSpPr>
+            <a:spLocks noGrp="1"/>
+          </p:cNvSpPr>
+          <p:nvPr>
+            <p:ph type="body" idx="1"/>
+          </p:nvPr>
+        </p:nvSpPr>
+        <p:spPr/>
+        <p:txBody>
+          <a:bodyPr/>
+          <a:lstStyle/>
+          <a:p>
+            <a:r>
+              <a:rPr lang="en-US" dirty="0"/>
+              <a:t>次回までの宿題をもう一度確認して終了。</a:t>
+            </a:r>
+            <a:endParaRPr lang="en-US" dirty="0"/>
+          </a:p>
+        </p:txBody>
+      </p:sp>
+      <p:sp>
+        <p:nvSpPr>
+          <p:cNvPr id="4" name="Slide Number Placeholder 3"/>
+          <p:cNvSpPr>
+            <a:spLocks noGrp="1"/>
+          </p:cNvSpPr>
+          <p:nvPr>
+            <p:ph type="sldNum" sz="quarter" idx="10"/>
+          </p:nvPr>
+        </p:nvSpPr>
+        <p:spPr/>
+        <p:txBody>
+          <a:bodyPr/>
+          <a:lstStyle/>
+          <a:p>
+            <a:fld id="{F7021451-1387-4CA6-816F-3879F97B5CBC}" type="slidenum">
+              <a:rPr lang="en-US"/>
+              <a:t>10</a:t>
+            </a:fld>
+            <a:endParaRPr lang="en-US"/>
+          </a:p>
+        </p:txBody>
+      </p:sp>
+    </p:spTree>
+    <p:extLst>
+      <p:ext uri="{BB962C8B-B14F-4D97-AF65-F5344CB8AC3E}">
+        <p14:creationId xmlns:p14="http://schemas.microsoft.com/office/powerpoint/2010/main" val="1024086991"/>
+      </p:ext>
+    </p:extLst>
+  </p:cSld>
+  <p:clrMapOvr>
+    <a:masterClrMapping/>
+  </p:clrMapOvr>
+</p:notes>
+</file>
+
 <file path=ppt/notesSlides/notesSlide2.xml><?xml version="1.0" encoding="utf-8"?>
 <p:notes xmlns:a="http://schemas.openxmlformats.org/drawingml/2006/main" xmlns:r="http://schemas.openxmlformats.org/officeDocument/2006/relationships" xmlns:p="http://schemas.openxmlformats.org/presentationml/2006/main">
   <p:cSld>
@@ -1068,7 +1158,7 @@
           <a:p>
             <a:r>
               <a:rPr lang="en-US" dirty="0"/>
-              <a:t/>
+              <a:t>BASEに入る瞬間とグループ通知は、講師環境で実演して見せる（Lark画面は講師が画面共有）。</a:t>
             </a:r>
             <a:endParaRPr lang="en-US" dirty="0"/>
           </a:p>
@@ -1156,7 +1246,7 @@
           <a:p>
             <a:r>
               <a:rPr lang="en-US" dirty="0"/>
-              <a:t>宿題の目安時間を伝える。質問は講座グループへ（24時間以内に返信・土日祝を除く）。</a:t>
+              <a:t/>
             </a:r>
             <a:endParaRPr lang="en-US" dirty="0"/>
           </a:p>
@@ -1244,7 +1334,7 @@
           <a:p>
             <a:r>
               <a:rPr lang="en-US" dirty="0"/>
-              <a:t>次回までの宿題をもう一度確認して終了。</a:t>
+              <a:t>宿題の目安時間を伝える。質問は講座グループへ（24時間以内に返信・土日祝を除く）。</a:t>
             </a:r>
             <a:endParaRPr lang="en-US" dirty="0"/>
           </a:p>
@@ -2348,6 +2438,121 @@
 </p:sld>
 </file>
 
+<file path=ppt/slides/slide10.xml><?xml version="1.0" encoding="utf-8"?>
+<p:sld xmlns:a="http://schemas.openxmlformats.org/drawingml/2006/main" xmlns:r="http://schemas.openxmlformats.org/officeDocument/2006/relationships" xmlns:p="http://schemas.openxmlformats.org/presentationml/2006/main">
+  <p:cSld name="Slide 10">
+    <p:spTree>
+      <p:nvGrpSpPr>
+        <p:cNvPr id="1" name=""/>
+        <p:cNvGrpSpPr/>
+        <p:nvPr/>
+      </p:nvGrpSpPr>
+      <p:grpSpPr>
+        <a:xfrm>
+          <a:off x="0" y="0"/>
+          <a:ext cx="0" cy="0"/>
+          <a:chOff x="0" y="0"/>
+          <a:chExt cx="0" cy="0"/>
+        </a:xfrm>
+      </p:grpSpPr>
+      <p:sp>
+        <p:nvSpPr>
+          <p:cNvPr id="2" name="Text 0"/>
+          <p:cNvSpPr/>
+          <p:nvPr>
+            <p:ph idx="100" type="title" hasCustomPrompt="1"/>
+          </p:nvPr>
+        </p:nvSpPr>
+        <p:spPr>
+          <a:xfrm>
+            <a:off x="548640" y="1463040"/>
+            <a:ext cx="8046720" cy="1005840"/>
+          </a:xfrm>
+          <a:prstGeom prst="rect">
+            <a:avLst/>
+          </a:prstGeom>
+          <a:noFill/>
+          <a:ln/>
+        </p:spPr>
+        <p:txBody>
+          <a:bodyPr wrap="square" lIns="0" tIns="0" rIns="0" bIns="0" rtlCol="0" anchor="t"/>
+          <a:lstStyle/>
+          <a:p>
+            <a:pPr algn="l" indent="0" marL="0">
+              <a:buNone/>
+            </a:pPr>
+            <a:r>
+              <a:rPr lang="en-US" sz="3000" b="1" dirty="0">
+                <a:solidFill>
+                  <a:schemeClr val="accent1"/>
+                </a:solidFill>
+              </a:rPr>
+              <a:t>次回：第10回 LINEとつなぐ（LIFF）</a:t>
+            </a:r>
+            <a:endParaRPr lang="en-US" sz="3000" dirty="0"/>
+          </a:p>
+        </p:txBody>
+      </p:sp>
+      <p:sp>
+        <p:nvSpPr>
+          <p:cNvPr id="3" name="Text 0"/>
+          <p:cNvSpPr/>
+          <p:nvPr>
+            <p:ph idx="101" type="body" hasCustomPrompt="1"/>
+          </p:nvPr>
+        </p:nvSpPr>
+        <p:spPr>
+          <a:xfrm>
+            <a:off x="548640" y="2606040"/>
+            <a:ext cx="8046720" cy="1097280"/>
+          </a:xfrm>
+          <a:prstGeom prst="rect">
+            <a:avLst/>
+          </a:prstGeom>
+          <a:noFill/>
+          <a:ln/>
+        </p:spPr>
+        <p:txBody>
+          <a:bodyPr wrap="square" lIns="0" tIns="0" rIns="0" bIns="0" rtlCol="0" anchor="t"/>
+          <a:lstStyle/>
+          <a:p>
+            <a:pPr indent="0" marL="0">
+              <a:buNone/>
+            </a:pPr>
+            <a:r>
+              <a:rPr lang="en-US" sz="1500" dirty="0">
+                <a:solidFill>
+                  <a:schemeClr val="bg1"/>
+                </a:solidFill>
+              </a:rPr>
+              <a:t>わからないところは、講座グループでいつでも質問してください。</a:t>
+            </a:r>
+            <a:endParaRPr lang="en-US" sz="1500" dirty="0"/>
+          </a:p>
+          <a:p>
+            <a:pPr indent="0" marL="0">
+              <a:buNone/>
+            </a:pPr>
+            <a:r>
+              <a:rPr lang="en-US" sz="1500" dirty="0">
+                <a:solidFill>
+                  <a:schemeClr val="bg1"/>
+                </a:solidFill>
+              </a:rPr>
+              <a:t>APIキーやパスワードは送らないでください。</a:t>
+            </a:r>
+            <a:endParaRPr lang="en-US" sz="1500" dirty="0"/>
+          </a:p>
+        </p:txBody>
+      </p:sp>
+    </p:spTree>
+  </p:cSld>
+  <p:clrMapOvr>
+    <a:masterClrMapping/>
+  </p:clrMapOvr>
+</p:sld>
+</file>
+
 <file path=ppt/slides/slide2.xml><?xml version="1.0" encoding="utf-8"?>
 <p:sld xmlns:a="http://schemas.openxmlformats.org/drawingml/2006/main" xmlns:r="http://schemas.openxmlformats.org/officeDocument/2006/relationships" xmlns:p="http://schemas.openxmlformats.org/presentationml/2006/main">
   <p:cSld name="Slide 2">
@@ -6647,7 +6852,7 @@
                   <a:schemeClr val="tx1"/>
                 </a:solidFill>
               </a:rPr>
-              <a:t>よくあるつまずき</a:t>
+              <a:t>送信すると、BASEに1件入る</a:t>
             </a:r>
             <a:endParaRPr lang="en-US" sz="2400" dirty="0"/>
           </a:p>
@@ -6710,6 +6915,512 @@
                   <a:schemeClr val="accent1"/>
                 </a:solidFill>
               </a:rPr>
+              <a:t>完成イメージ</a:t>
+            </a:r>
+            <a:endParaRPr lang="en-US" sz="1100" dirty="0"/>
+          </a:p>
+        </p:txBody>
+      </p:sp>
+      <p:sp>
+        <p:nvSpPr>
+          <p:cNvPr id="6" name="phone-frame"/>
+          <p:cNvSpPr/>
+          <p:nvPr/>
+        </p:nvSpPr>
+        <p:spPr>
+          <a:xfrm>
+            <a:off x="548640" y="1417320"/>
+            <a:ext cx="1563178" cy="3145536"/>
+          </a:xfrm>
+          <a:prstGeom prst="roundRect">
+            <a:avLst>
+              <a:gd name="adj" fmla="val 8189"/>
+            </a:avLst>
+          </a:prstGeom>
+          <a:solidFill>
+            <a:srgbClr val="1A1A1A"/>
+          </a:solidFill>
+          <a:ln w="12700">
+            <a:solidFill>
+              <a:srgbClr val="1A1A1A"/>
+            </a:solidFill>
+            <a:prstDash val="solid"/>
+          </a:ln>
+          <a:effectLst>
+            <a:outerShdw sx="100000" sy="100000" kx="0" ky="0" algn="bl" rotWithShape="0" blurRad="101600" dist="38100" dir="2700000">
+              <a:srgbClr val="000000">
+                <a:alpha val="18000"/>
+              </a:srgbClr>
+            </a:outerShdw>
+          </a:effectLst>
+        </p:spPr>
+      </p:sp>
+      <p:pic>
+        <p:nvPicPr>
+          <p:cNvPr id="7" name="phone-screen" descr="予約を受け付けた後の完了メッセージ">    </p:cNvPr>
+          <p:cNvPicPr>
+            <a:picLocks noChangeAspect="1"/>
+          </p:cNvPicPr>
+          <p:nvPr/>
+        </p:nvPicPr>
+        <p:blipFill>
+          <a:blip r:embed="rId1"/>
+          <a:stretch>
+            <a:fillRect/>
+          </a:stretch>
+        </p:blipFill>
+        <p:spPr>
+          <a:xfrm>
+            <a:off x="612648" y="1481328"/>
+            <a:ext cx="1435162" cy="3017520"/>
+          </a:xfrm>
+          <a:prstGeom prst="rect">
+            <a:avLst/>
+          </a:prstGeom>
+        </p:spPr>
+      </p:pic>
+      <p:sp>
+        <p:nvSpPr>
+          <p:cNvPr id="8" name="phone-num"/>
+          <p:cNvSpPr/>
+          <p:nvPr/>
+        </p:nvSpPr>
+        <p:spPr>
+          <a:xfrm>
+            <a:off x="438912" y="1307592"/>
+            <a:ext cx="365760" cy="365760"/>
+          </a:xfrm>
+          <a:prstGeom prst="ellipse">
+            <a:avLst/>
+          </a:prstGeom>
+          <a:solidFill>
+            <a:schemeClr val="accent1"/>
+          </a:solidFill>
+          <a:ln w="15875">
+            <a:solidFill>
+              <a:srgbClr val="1A1A1A"/>
+            </a:solidFill>
+            <a:prstDash val="solid"/>
+          </a:ln>
+        </p:spPr>
+      </p:sp>
+      <p:sp>
+        <p:nvSpPr>
+          <p:cNvPr id="9" name="Text 5"/>
+          <p:cNvSpPr txBox="1"/>
+          <p:nvPr/>
+        </p:nvSpPr>
+        <p:spPr>
+          <a:xfrm>
+            <a:off x="438912" y="1307592"/>
+            <a:ext cx="365760" cy="365760"/>
+          </a:xfrm>
+          <a:prstGeom prst="rect">
+            <a:avLst/>
+          </a:prstGeom>
+          <a:noFill/>
+          <a:ln/>
+        </p:spPr>
+        <p:txBody>
+          <a:bodyPr wrap="square" lIns="0" tIns="0" rIns="0" bIns="0" rtlCol="0" anchor="ctr"/>
+          <a:lstStyle/>
+          <a:p>
+            <a:pPr algn="ctr" indent="0" marL="0">
+              <a:buNone/>
+            </a:pPr>
+            <a:r>
+              <a:rPr lang="en-US" sz="1300" b="1" dirty="0">
+                <a:solidFill>
+                  <a:schemeClr val="tx1"/>
+                </a:solidFill>
+              </a:rPr>
+              <a:t>1</a:t>
+            </a:r>
+            <a:endParaRPr lang="en-US" sz="1300" dirty="0"/>
+          </a:p>
+        </p:txBody>
+      </p:sp>
+      <p:sp>
+        <p:nvSpPr>
+          <p:cNvPr id="10" name="point-head"/>
+          <p:cNvSpPr txBox="1"/>
+          <p:nvPr/>
+        </p:nvSpPr>
+        <p:spPr>
+          <a:xfrm>
+            <a:off x="2477578" y="1417320"/>
+            <a:ext cx="6117782" cy="365760"/>
+          </a:xfrm>
+          <a:prstGeom prst="rect">
+            <a:avLst/>
+          </a:prstGeom>
+          <a:noFill/>
+          <a:ln/>
+        </p:spPr>
+        <p:txBody>
+          <a:bodyPr wrap="square" lIns="0" tIns="0" rIns="0" bIns="0" rtlCol="0" anchor="t"/>
+          <a:lstStyle/>
+          <a:p>
+            <a:pPr indent="0" marL="0">
+              <a:buNone/>
+            </a:pPr>
+            <a:r>
+              <a:rPr lang="en-US" sz="1500" b="1" dirty="0">
+                <a:solidFill>
+                  <a:schemeClr val="tx1"/>
+                </a:solidFill>
+              </a:rPr>
+              <a:t>1 お客様には「受け付けました」とだけ見せる</a:t>
+            </a:r>
+            <a:endParaRPr lang="en-US" sz="1500" dirty="0"/>
+          </a:p>
+        </p:txBody>
+      </p:sp>
+      <p:sp>
+        <p:nvSpPr>
+          <p:cNvPr id="11" name="point-body"/>
+          <p:cNvSpPr txBox="1"/>
+          <p:nvPr/>
+        </p:nvSpPr>
+        <p:spPr>
+          <a:xfrm>
+            <a:off x="2477578" y="1801368"/>
+            <a:ext cx="6117782" cy="548640"/>
+          </a:xfrm>
+          <a:prstGeom prst="rect">
+            <a:avLst/>
+          </a:prstGeom>
+          <a:noFill/>
+          <a:ln/>
+        </p:spPr>
+        <p:txBody>
+          <a:bodyPr wrap="square" lIns="0" tIns="0" rIns="0" bIns="0" rtlCol="0" anchor="t"/>
+          <a:lstStyle/>
+          <a:p>
+            <a:pPr indent="0" marL="0">
+              <a:buNone/>
+            </a:pPr>
+            <a:r>
+              <a:rPr lang="en-US" sz="1250" dirty="0">
+                <a:solidFill>
+                  <a:schemeClr val="tx1"/>
+                </a:solidFill>
+              </a:rPr>
+              <a:t>裏では受付係（Pages Functions）がLarkのAPIでBASEに1件追加している</a:t>
+            </a:r>
+            <a:endParaRPr lang="en-US" sz="1250" dirty="0"/>
+          </a:p>
+        </p:txBody>
+      </p:sp>
+      <p:sp>
+        <p:nvSpPr>
+          <p:cNvPr id="12" name="point-head"/>
+          <p:cNvSpPr txBox="1"/>
+          <p:nvPr/>
+        </p:nvSpPr>
+        <p:spPr>
+          <a:xfrm>
+            <a:off x="2477578" y="2423160"/>
+            <a:ext cx="6117782" cy="365760"/>
+          </a:xfrm>
+          <a:prstGeom prst="rect">
+            <a:avLst/>
+          </a:prstGeom>
+          <a:noFill/>
+          <a:ln/>
+        </p:spPr>
+        <p:txBody>
+          <a:bodyPr wrap="square" lIns="0" tIns="0" rIns="0" bIns="0" rtlCol="0" anchor="t"/>
+          <a:lstStyle/>
+          <a:p>
+            <a:pPr indent="0" marL="0">
+              <a:buNone/>
+            </a:pPr>
+            <a:r>
+              <a:rPr lang="en-US" sz="1500" b="1" dirty="0">
+                <a:solidFill>
+                  <a:schemeClr val="tx1"/>
+                </a:solidFill>
+              </a:rPr>
+              <a:t>BASEとグループで確かめる</a:t>
+            </a:r>
+            <a:endParaRPr lang="en-US" sz="1500" dirty="0"/>
+          </a:p>
+        </p:txBody>
+      </p:sp>
+      <p:sp>
+        <p:nvSpPr>
+          <p:cNvPr id="13" name="point-body"/>
+          <p:cNvSpPr txBox="1"/>
+          <p:nvPr/>
+        </p:nvSpPr>
+        <p:spPr>
+          <a:xfrm>
+            <a:off x="2477578" y="2807208"/>
+            <a:ext cx="6117782" cy="548640"/>
+          </a:xfrm>
+          <a:prstGeom prst="rect">
+            <a:avLst/>
+          </a:prstGeom>
+          <a:noFill/>
+          <a:ln/>
+        </p:spPr>
+        <p:txBody>
+          <a:bodyPr wrap="square" lIns="0" tIns="0" rIns="0" bIns="0" rtlCol="0" anchor="t"/>
+          <a:lstStyle/>
+          <a:p>
+            <a:pPr indent="0" marL="0">
+              <a:buNone/>
+            </a:pPr>
+            <a:r>
+              <a:rPr lang="en-US" sz="1250" dirty="0">
+                <a:solidFill>
+                  <a:schemeClr val="tx1"/>
+                </a:solidFill>
+              </a:rPr>
+              <a:t>BASEの予約テーブルに1件増え、第6回の自動化で講座グループに通知が届けば完成</a:t>
+            </a:r>
+            <a:endParaRPr lang="en-US" sz="1250" dirty="0"/>
+          </a:p>
+        </p:txBody>
+      </p:sp>
+      <p:sp>
+        <p:nvSpPr>
+          <p:cNvPr id="14" name="point-head"/>
+          <p:cNvSpPr txBox="1"/>
+          <p:nvPr/>
+        </p:nvSpPr>
+        <p:spPr>
+          <a:xfrm>
+            <a:off x="2477578" y="3429000"/>
+            <a:ext cx="6117782" cy="365760"/>
+          </a:xfrm>
+          <a:prstGeom prst="rect">
+            <a:avLst/>
+          </a:prstGeom>
+          <a:noFill/>
+          <a:ln/>
+        </p:spPr>
+        <p:txBody>
+          <a:bodyPr wrap="square" lIns="0" tIns="0" rIns="0" bIns="0" rtlCol="0" anchor="t"/>
+          <a:lstStyle/>
+          <a:p>
+            <a:pPr indent="0" marL="0">
+              <a:buNone/>
+            </a:pPr>
+            <a:r>
+              <a:rPr lang="en-US" sz="1500" b="1" dirty="0">
+                <a:solidFill>
+                  <a:schemeClr val="tx1"/>
+                </a:solidFill>
+              </a:rPr>
+              <a:t>失敗したときの見せ方</a:t>
+            </a:r>
+            <a:endParaRPr lang="en-US" sz="1500" dirty="0"/>
+          </a:p>
+        </p:txBody>
+      </p:sp>
+      <p:sp>
+        <p:nvSpPr>
+          <p:cNvPr id="15" name="point-body"/>
+          <p:cNvSpPr txBox="1"/>
+          <p:nvPr/>
+        </p:nvSpPr>
+        <p:spPr>
+          <a:xfrm>
+            <a:off x="2477578" y="3813048"/>
+            <a:ext cx="6117782" cy="548640"/>
+          </a:xfrm>
+          <a:prstGeom prst="rect">
+            <a:avLst/>
+          </a:prstGeom>
+          <a:noFill/>
+          <a:ln/>
+        </p:spPr>
+        <p:txBody>
+          <a:bodyPr wrap="square" lIns="0" tIns="0" rIns="0" bIns="0" rtlCol="0" anchor="t"/>
+          <a:lstStyle/>
+          <a:p>
+            <a:pPr indent="0" marL="0">
+              <a:buNone/>
+            </a:pPr>
+            <a:r>
+              <a:rPr lang="en-US" sz="1250" dirty="0">
+                <a:solidFill>
+                  <a:schemeClr val="tx1"/>
+                </a:solidFill>
+              </a:rPr>
+              <a:t>エラーの詳しい理由はお客様に見せず、ログにだけ残す。画面には電話での連絡をお願いする</a:t>
+            </a:r>
+            <a:endParaRPr lang="en-US" sz="1250" dirty="0"/>
+          </a:p>
+        </p:txBody>
+      </p:sp>
+      <p:sp>
+        <p:nvSpPr>
+          <p:cNvPr id="25" name="Slide Number Placeholder 0"/>
+          <p:cNvSpPr>
+            <a:spLocks noGrp="1"/>
+          </p:cNvSpPr>
+          <p:nvPr>
+            <p:ph type="sldNum" sz="quarter" idx="4294967295"/>
+          </p:nvPr>
+        </p:nvSpPr>
+        <p:spPr>
+          <a:xfrm>
+            <a:off x="8229600" y="4773168"/>
+            <a:ext cx="365760" cy="228600"/>
+          </a:xfrm>
+          <a:prstGeom prst="rect">
+            <a:avLst/>
+          </a:prstGeom>
+          <a:extLst>
+            <a:ext uri="{C572A759-6A51-4108-AA02-DFA0A04FC94B}">
+              <ma14:wrappingTextBoxFlag xmlns:ma14="http://schemas.microsoft.com/office/mac/drawingml/2011/main" val="0"/>
+            </a:ext>
+          </a:extLst>
+        </p:spPr>
+        <p:txBody>
+          <a:bodyPr/>
+          <a:lstStyle>
+            <a:lvl1pPr>
+              <a:defRPr sz="900">
+                <a:solidFill>
+                  <a:srgbClr val="5A6872"/>
+                </a:solidFill>
+              </a:defRPr>
+            </a:lvl1pPr>
+          </a:lstStyle>
+          <a:p>
+            <a:pPr algn="r"/>
+            <a:fld id="{F7021451-1387-4CA6-816F-3879F97B5CBC}" type="slidenum">
+              <a:rPr b="0" lang="en-US"/>
+              <a:t>7</a:t>
+            </a:fld>
+            <a:endParaRPr lang="en-US"/>
+          </a:p>
+        </p:txBody>
+      </p:sp>
+    </p:spTree>
+  </p:cSld>
+  <p:clrMapOvr>
+    <a:masterClrMapping/>
+  </p:clrMapOvr>
+</p:sld>
+</file>
+
+<file path=ppt/slides/slide8.xml><?xml version="1.0" encoding="utf-8"?>
+<p:sld xmlns:a="http://schemas.openxmlformats.org/drawingml/2006/main" xmlns:r="http://schemas.openxmlformats.org/officeDocument/2006/relationships" xmlns:p="http://schemas.openxmlformats.org/presentationml/2006/main">
+  <p:cSld name="Slide 8">
+    <p:spTree>
+      <p:nvGrpSpPr>
+        <p:cNvPr id="1" name=""/>
+        <p:cNvGrpSpPr/>
+        <p:nvPr/>
+      </p:nvGrpSpPr>
+      <p:grpSpPr>
+        <a:xfrm>
+          <a:off x="0" y="0"/>
+          <a:ext cx="0" cy="0"/>
+          <a:chOff x="0" y="0"/>
+          <a:chExt cx="0" cy="0"/>
+        </a:xfrm>
+      </p:grpSpPr>
+      <p:sp>
+        <p:nvSpPr>
+          <p:cNvPr id="2" name="Text 0"/>
+          <p:cNvSpPr/>
+          <p:nvPr>
+            <p:ph idx="100" type="title" hasCustomPrompt="1"/>
+          </p:nvPr>
+        </p:nvSpPr>
+        <p:spPr>
+          <a:xfrm>
+            <a:off x="548640" y="658368"/>
+            <a:ext cx="8046720" cy="566928"/>
+          </a:xfrm>
+          <a:prstGeom prst="rect">
+            <a:avLst/>
+          </a:prstGeom>
+          <a:noFill/>
+          <a:ln/>
+        </p:spPr>
+        <p:txBody>
+          <a:bodyPr wrap="square" lIns="0" tIns="0" rIns="0" bIns="0" rtlCol="0" anchor="ctr"/>
+          <a:lstStyle/>
+          <a:p>
+            <a:pPr algn="l" indent="0" marL="0">
+              <a:buNone/>
+            </a:pPr>
+            <a:r>
+              <a:rPr lang="en-US" sz="2400" b="1" dirty="0">
+                <a:solidFill>
+                  <a:schemeClr val="tx1"/>
+                </a:solidFill>
+              </a:rPr>
+              <a:t>よくあるつまずき</a:t>
+            </a:r>
+            <a:endParaRPr lang="en-US" sz="2400" dirty="0"/>
+          </a:p>
+        </p:txBody>
+      </p:sp>
+      <p:sp>
+        <p:nvSpPr>
+          <p:cNvPr id="3" name="chip"/>
+          <p:cNvSpPr/>
+          <p:nvPr/>
+        </p:nvSpPr>
+        <p:spPr>
+          <a:xfrm>
+            <a:off x="548640" y="292608"/>
+            <a:ext cx="1207008" cy="292608"/>
+          </a:xfrm>
+          <a:prstGeom prst="roundRect">
+            <a:avLst>
+              <a:gd name="adj" fmla="val 50000"/>
+            </a:avLst>
+          </a:prstGeom>
+          <a:solidFill>
+            <a:schemeClr val="tx1"/>
+          </a:solidFill>
+          <a:ln w="12700">
+            <a:solidFill>
+              <a:schemeClr val="tx1"/>
+            </a:solidFill>
+            <a:prstDash val="solid"/>
+          </a:ln>
+        </p:spPr>
+      </p:sp>
+      <p:sp>
+        <p:nvSpPr>
+          <p:cNvPr id="4" name="chip-text"/>
+          <p:cNvSpPr txBox="1"/>
+          <p:nvPr/>
+        </p:nvSpPr>
+        <p:spPr>
+          <a:xfrm>
+            <a:off x="548640" y="292608"/>
+            <a:ext cx="1207008" cy="292608"/>
+          </a:xfrm>
+          <a:prstGeom prst="rect">
+            <a:avLst/>
+          </a:prstGeom>
+          <a:noFill/>
+          <a:ln/>
+        </p:spPr>
+        <p:txBody>
+          <a:bodyPr wrap="square" lIns="0" tIns="0" rIns="0" bIns="0" rtlCol="0" anchor="ctr"/>
+          <a:lstStyle/>
+          <a:p>
+            <a:pPr algn="ctr" indent="0" marL="0">
+              <a:buNone/>
+            </a:pPr>
+            <a:r>
+              <a:rPr lang="en-US" sz="1100" b="1" dirty="0">
+                <a:solidFill>
+                  <a:schemeClr val="accent1"/>
+                </a:solidFill>
+              </a:rPr>
               <a:t>つまずいたら</a:t>
             </a:r>
             <a:endParaRPr lang="en-US" sz="1100" dirty="0"/>
@@ -6718,7 +7429,7 @@
       </p:sp>
       <p:graphicFrame>
         <p:nvGraphicFramePr>
-          <p:cNvPr id="8" name="table"/>
+          <p:cNvPr id="9" name="table"/>
           <p:cNvGraphicFramePr>
             <a:graphicFrameLocks noGrp="1"/>
           </p:cNvGraphicFramePr>
@@ -7405,529 +8116,6 @@
             <a:pPr algn="r"/>
             <a:fld id="{F7021451-1387-4CA6-816F-3879F97B5CBC}" type="slidenum">
               <a:rPr b="0" lang="en-US"/>
-              <a:t>7</a:t>
-            </a:fld>
-            <a:endParaRPr lang="en-US"/>
-          </a:p>
-        </p:txBody>
-      </p:sp>
-    </p:spTree>
-  </p:cSld>
-  <p:clrMapOvr>
-    <a:masterClrMapping/>
-  </p:clrMapOvr>
-</p:sld>
-</file>
-
-<file path=ppt/slides/slide8.xml><?xml version="1.0" encoding="utf-8"?>
-<p:sld xmlns:a="http://schemas.openxmlformats.org/drawingml/2006/main" xmlns:r="http://schemas.openxmlformats.org/officeDocument/2006/relationships" xmlns:p="http://schemas.openxmlformats.org/presentationml/2006/main">
-  <p:cSld name="Slide 8">
-    <p:spTree>
-      <p:nvGrpSpPr>
-        <p:cNvPr id="1" name=""/>
-        <p:cNvGrpSpPr/>
-        <p:nvPr/>
-      </p:nvGrpSpPr>
-      <p:grpSpPr>
-        <a:xfrm>
-          <a:off x="0" y="0"/>
-          <a:ext cx="0" cy="0"/>
-          <a:chOff x="0" y="0"/>
-          <a:chExt cx="0" cy="0"/>
-        </a:xfrm>
-      </p:grpSpPr>
-      <p:sp>
-        <p:nvSpPr>
-          <p:cNvPr id="2" name="Text 0"/>
-          <p:cNvSpPr/>
-          <p:nvPr>
-            <p:ph idx="100" type="title" hasCustomPrompt="1"/>
-          </p:nvPr>
-        </p:nvSpPr>
-        <p:spPr>
-          <a:xfrm>
-            <a:off x="548640" y="658368"/>
-            <a:ext cx="8046720" cy="566928"/>
-          </a:xfrm>
-          <a:prstGeom prst="rect">
-            <a:avLst/>
-          </a:prstGeom>
-          <a:noFill/>
-          <a:ln/>
-        </p:spPr>
-        <p:txBody>
-          <a:bodyPr wrap="square" lIns="0" tIns="0" rIns="0" bIns="0" rtlCol="0" anchor="ctr"/>
-          <a:lstStyle/>
-          <a:p>
-            <a:pPr algn="l" indent="0" marL="0">
-              <a:buNone/>
-            </a:pPr>
-            <a:r>
-              <a:rPr lang="en-US" sz="2400" b="1" dirty="0">
-                <a:solidFill>
-                  <a:schemeClr val="tx1"/>
-                </a:solidFill>
-              </a:rPr>
-              <a:t>宿題と、今日のチェック</a:t>
-            </a:r>
-            <a:endParaRPr lang="en-US" sz="2400" dirty="0"/>
-          </a:p>
-        </p:txBody>
-      </p:sp>
-      <p:sp>
-        <p:nvSpPr>
-          <p:cNvPr id="3" name="chip"/>
-          <p:cNvSpPr/>
-          <p:nvPr/>
-        </p:nvSpPr>
-        <p:spPr>
-          <a:xfrm>
-            <a:off x="548640" y="292608"/>
-            <a:ext cx="795528" cy="292608"/>
-          </a:xfrm>
-          <a:prstGeom prst="roundRect">
-            <a:avLst>
-              <a:gd name="adj" fmla="val 50000"/>
-            </a:avLst>
-          </a:prstGeom>
-          <a:solidFill>
-            <a:schemeClr val="tx1"/>
-          </a:solidFill>
-          <a:ln w="12700">
-            <a:solidFill>
-              <a:schemeClr val="tx1"/>
-            </a:solidFill>
-            <a:prstDash val="solid"/>
-          </a:ln>
-        </p:spPr>
-      </p:sp>
-      <p:sp>
-        <p:nvSpPr>
-          <p:cNvPr id="4" name="chip-text"/>
-          <p:cNvSpPr txBox="1"/>
-          <p:nvPr/>
-        </p:nvSpPr>
-        <p:spPr>
-          <a:xfrm>
-            <a:off x="548640" y="292608"/>
-            <a:ext cx="795528" cy="292608"/>
-          </a:xfrm>
-          <a:prstGeom prst="rect">
-            <a:avLst/>
-          </a:prstGeom>
-          <a:noFill/>
-          <a:ln/>
-        </p:spPr>
-        <p:txBody>
-          <a:bodyPr wrap="square" lIns="0" tIns="0" rIns="0" bIns="0" rtlCol="0" anchor="ctr"/>
-          <a:lstStyle/>
-          <a:p>
-            <a:pPr algn="ctr" indent="0" marL="0">
-              <a:buNone/>
-            </a:pPr>
-            <a:r>
-              <a:rPr lang="en-US" sz="1100" b="1" dirty="0">
-                <a:solidFill>
-                  <a:schemeClr val="accent1"/>
-                </a:solidFill>
-              </a:rPr>
-              <a:t>まとめ</a:t>
-            </a:r>
-            <a:endParaRPr lang="en-US" sz="1100" dirty="0"/>
-          </a:p>
-        </p:txBody>
-      </p:sp>
-      <p:sp>
-        <p:nvSpPr>
-          <p:cNvPr id="5" name="card"/>
-          <p:cNvSpPr/>
-          <p:nvPr/>
-        </p:nvSpPr>
-        <p:spPr>
-          <a:xfrm>
-            <a:off x="548640" y="1463040"/>
-            <a:ext cx="3886200" cy="3017520"/>
-          </a:xfrm>
-          <a:prstGeom prst="roundRect">
-            <a:avLst>
-              <a:gd name="adj" fmla="val 3636"/>
-            </a:avLst>
-          </a:prstGeom>
-          <a:solidFill>
-            <a:schemeClr val="bg2"/>
-          </a:solidFill>
-          <a:ln w="19050">
-            <a:solidFill>
-              <a:srgbClr val="1A1A1A"/>
-            </a:solidFill>
-            <a:prstDash val="solid"/>
-          </a:ln>
-          <a:effectLst>
-            <a:outerShdw sx="100000" sy="100000" kx="0" ky="0" algn="bl" rotWithShape="0" blurRad="101600" dist="38100" dir="2700000">
-              <a:srgbClr val="000000">
-                <a:alpha val="18000"/>
-              </a:srgbClr>
-            </a:outerShdw>
-          </a:effectLst>
-        </p:spPr>
-      </p:sp>
-      <p:sp>
-        <p:nvSpPr>
-          <p:cNvPr id="6" name="icon-circle"/>
-          <p:cNvSpPr/>
-          <p:nvPr/>
-        </p:nvSpPr>
-        <p:spPr>
-          <a:xfrm>
-            <a:off x="777240" y="1645920"/>
-            <a:ext cx="457200" cy="457200"/>
-          </a:xfrm>
-          <a:prstGeom prst="ellipse">
-            <a:avLst/>
-          </a:prstGeom>
-          <a:solidFill>
-            <a:schemeClr val="accent1"/>
-          </a:solidFill>
-          <a:ln w="15875">
-            <a:solidFill>
-              <a:srgbClr val="1A1A1A"/>
-            </a:solidFill>
-            <a:prstDash val="solid"/>
-          </a:ln>
-        </p:spPr>
-      </p:sp>
-      <p:pic>
-        <p:nvPicPr>
-          <p:cNvPr id="7" name="icon" descr="preencoded.png">    </p:cNvPr>
-          <p:cNvPicPr>
-            <a:picLocks noChangeAspect="1"/>
-          </p:cNvPicPr>
-          <p:nvPr/>
-        </p:nvPicPr>
-        <p:blipFill>
-          <a:blip r:embed="rId1"/>
-          <a:stretch>
-            <a:fillRect/>
-          </a:stretch>
-        </p:blipFill>
-        <p:spPr>
-          <a:xfrm>
-            <a:off x="896112" y="1764792"/>
-            <a:ext cx="219456" cy="219456"/>
-          </a:xfrm>
-          <a:prstGeom prst="rect">
-            <a:avLst/>
-          </a:prstGeom>
-        </p:spPr>
-      </p:pic>
-      <p:sp>
-        <p:nvSpPr>
-          <p:cNvPr id="8" name="Text 5"/>
-          <p:cNvSpPr txBox="1"/>
-          <p:nvPr/>
-        </p:nvSpPr>
-        <p:spPr>
-          <a:xfrm>
-            <a:off x="1371600" y="1645920"/>
-            <a:ext cx="2743200" cy="457200"/>
-          </a:xfrm>
-          <a:prstGeom prst="rect">
-            <a:avLst/>
-          </a:prstGeom>
-          <a:noFill/>
-          <a:ln/>
-        </p:spPr>
-        <p:txBody>
-          <a:bodyPr wrap="square" lIns="0" tIns="0" rIns="0" bIns="0" rtlCol="0" anchor="ctr"/>
-          <a:lstStyle/>
-          <a:p>
-            <a:pPr indent="0" marL="0">
-              <a:buNone/>
-            </a:pPr>
-            <a:r>
-              <a:rPr lang="en-US" sz="1700" b="1" dirty="0">
-                <a:solidFill>
-                  <a:schemeClr val="tx1"/>
-                </a:solidFill>
-              </a:rPr>
-              <a:t>宿題</a:t>
-            </a:r>
-            <a:endParaRPr lang="en-US" sz="1700" dirty="0"/>
-          </a:p>
-        </p:txBody>
-      </p:sp>
-      <p:sp>
-        <p:nvSpPr>
-          <p:cNvPr id="9" name="Text 6"/>
-          <p:cNvSpPr txBox="1"/>
-          <p:nvPr/>
-        </p:nvSpPr>
-        <p:spPr>
-          <a:xfrm>
-            <a:off x="777240" y="2286000"/>
-            <a:ext cx="3474720" cy="2057400"/>
-          </a:xfrm>
-          <a:prstGeom prst="rect">
-            <a:avLst/>
-          </a:prstGeom>
-          <a:noFill/>
-          <a:ln/>
-        </p:spPr>
-        <p:txBody>
-          <a:bodyPr wrap="square" lIns="0" tIns="0" rIns="0" bIns="0" rtlCol="0" anchor="t"/>
-          <a:lstStyle/>
-          <a:p>
-            <a:pPr marL="342900" indent="-342900">
-              <a:spcAft>
-                <a:spcPts val="800"/>
-              </a:spcAft>
-              <a:buSzPct val="100000"/>
-              <a:buChar char="•"/>
-            </a:pPr>
-            <a:r>
-              <a:rPr lang="en-US" sz="1350" dirty="0">
-                <a:solidFill>
-                  <a:schemeClr val="tx1"/>
-                </a:solidFill>
-              </a:rPr>
-              <a:t>BASEのデータを読み出し、ページに一覧表示する機能を足す（個人情報は表示しない）</a:t>
-            </a:r>
-            <a:endParaRPr lang="en-US" sz="1350" dirty="0"/>
-          </a:p>
-          <a:p>
-            <a:pPr marL="342900" indent="-342900">
-              <a:spcAft>
-                <a:spcPts val="800"/>
-              </a:spcAft>
-              <a:buSzPct val="100000"/>
-              <a:buChar char="•"/>
-            </a:pPr>
-            <a:r>
-              <a:rPr lang="en-US" sz="1350" dirty="0">
-                <a:solidFill>
-                  <a:schemeClr val="tx1"/>
-                </a:solidFill>
-              </a:rPr>
-              <a:t>今週中に個別レビュー（30分）を受ける</a:t>
-            </a:r>
-            <a:endParaRPr lang="en-US" sz="1350" dirty="0"/>
-          </a:p>
-        </p:txBody>
-      </p:sp>
-      <p:sp>
-        <p:nvSpPr>
-          <p:cNvPr id="10" name="card"/>
-          <p:cNvSpPr/>
-          <p:nvPr/>
-        </p:nvSpPr>
-        <p:spPr>
-          <a:xfrm>
-            <a:off x="4709160" y="1463040"/>
-            <a:ext cx="3886200" cy="3017520"/>
-          </a:xfrm>
-          <a:prstGeom prst="roundRect">
-            <a:avLst>
-              <a:gd name="adj" fmla="val 3636"/>
-            </a:avLst>
-          </a:prstGeom>
-          <a:solidFill>
-            <a:schemeClr val="bg1"/>
-          </a:solidFill>
-          <a:ln w="19050">
-            <a:solidFill>
-              <a:srgbClr val="1A1A1A"/>
-            </a:solidFill>
-            <a:prstDash val="solid"/>
-          </a:ln>
-          <a:effectLst>
-            <a:outerShdw sx="100000" sy="100000" kx="0" ky="0" algn="bl" rotWithShape="0" blurRad="101600" dist="38100" dir="2700000">
-              <a:srgbClr val="000000">
-                <a:alpha val="18000"/>
-              </a:srgbClr>
-            </a:outerShdw>
-          </a:effectLst>
-        </p:spPr>
-      </p:sp>
-      <p:sp>
-        <p:nvSpPr>
-          <p:cNvPr id="11" name="icon-circle"/>
-          <p:cNvSpPr/>
-          <p:nvPr/>
-        </p:nvSpPr>
-        <p:spPr>
-          <a:xfrm>
-            <a:off x="4937760" y="1645920"/>
-            <a:ext cx="457200" cy="457200"/>
-          </a:xfrm>
-          <a:prstGeom prst="ellipse">
-            <a:avLst/>
-          </a:prstGeom>
-          <a:solidFill>
-            <a:schemeClr val="accent1"/>
-          </a:solidFill>
-          <a:ln w="15875">
-            <a:solidFill>
-              <a:srgbClr val="1A1A1A"/>
-            </a:solidFill>
-            <a:prstDash val="solid"/>
-          </a:ln>
-        </p:spPr>
-      </p:sp>
-      <p:pic>
-        <p:nvPicPr>
-          <p:cNvPr id="12" name="icon" descr="preencoded.png">    </p:cNvPr>
-          <p:cNvPicPr>
-            <a:picLocks noChangeAspect="1"/>
-          </p:cNvPicPr>
-          <p:nvPr/>
-        </p:nvPicPr>
-        <p:blipFill>
-          <a:blip r:embed="rId2"/>
-          <a:stretch>
-            <a:fillRect/>
-          </a:stretch>
-        </p:blipFill>
-        <p:spPr>
-          <a:xfrm>
-            <a:off x="5056632" y="1764792"/>
-            <a:ext cx="219456" cy="219456"/>
-          </a:xfrm>
-          <a:prstGeom prst="rect">
-            <a:avLst/>
-          </a:prstGeom>
-        </p:spPr>
-      </p:pic>
-      <p:sp>
-        <p:nvSpPr>
-          <p:cNvPr id="13" name="Text 9"/>
-          <p:cNvSpPr txBox="1"/>
-          <p:nvPr/>
-        </p:nvSpPr>
-        <p:spPr>
-          <a:xfrm>
-            <a:off x="5532120" y="1645920"/>
-            <a:ext cx="2743200" cy="457200"/>
-          </a:xfrm>
-          <a:prstGeom prst="rect">
-            <a:avLst/>
-          </a:prstGeom>
-          <a:noFill/>
-          <a:ln/>
-        </p:spPr>
-        <p:txBody>
-          <a:bodyPr wrap="square" lIns="0" tIns="0" rIns="0" bIns="0" rtlCol="0" anchor="ctr"/>
-          <a:lstStyle/>
-          <a:p>
-            <a:pPr indent="0" marL="0">
-              <a:buNone/>
-            </a:pPr>
-            <a:r>
-              <a:rPr lang="en-US" sz="1700" b="1" dirty="0">
-                <a:solidFill>
-                  <a:schemeClr val="tx1"/>
-                </a:solidFill>
-              </a:rPr>
-              <a:t>できたらチェック</a:t>
-            </a:r>
-            <a:endParaRPr lang="en-US" sz="1700" dirty="0"/>
-          </a:p>
-        </p:txBody>
-      </p:sp>
-      <p:sp>
-        <p:nvSpPr>
-          <p:cNvPr id="14" name="Text 10"/>
-          <p:cNvSpPr txBox="1"/>
-          <p:nvPr/>
-        </p:nvSpPr>
-        <p:spPr>
-          <a:xfrm>
-            <a:off x="4937760" y="2286000"/>
-            <a:ext cx="3474720" cy="2057400"/>
-          </a:xfrm>
-          <a:prstGeom prst="rect">
-            <a:avLst/>
-          </a:prstGeom>
-          <a:noFill/>
-          <a:ln/>
-        </p:spPr>
-        <p:txBody>
-          <a:bodyPr wrap="square" lIns="0" tIns="0" rIns="0" bIns="0" rtlCol="0" anchor="t"/>
-          <a:lstStyle/>
-          <a:p>
-            <a:pPr indent="0" marL="0">
-              <a:spcAft>
-                <a:spcPts val="800"/>
-              </a:spcAft>
-              <a:buNone/>
-            </a:pPr>
-            <a:r>
-              <a:rPr lang="en-US" sz="1350" dirty="0">
-                <a:solidFill>
-                  <a:schemeClr val="tx1"/>
-                </a:solidFill>
-              </a:rPr>
-              <a:t>☐ App Secretがプログラム・GitHubに書かれていない</a:t>
-            </a:r>
-            <a:endParaRPr lang="en-US" sz="1350" dirty="0"/>
-          </a:p>
-          <a:p>
-            <a:pPr indent="0" marL="0">
-              <a:spcAft>
-                <a:spcPts val="800"/>
-              </a:spcAft>
-              <a:buNone/>
-            </a:pPr>
-            <a:r>
-              <a:rPr lang="en-US" sz="1350" dirty="0">
-                <a:solidFill>
-                  <a:schemeClr val="tx1"/>
-                </a:solidFill>
-              </a:rPr>
-              <a:t>☐ 公開ページから送ったデータがBASEに入った</a:t>
-            </a:r>
-            <a:endParaRPr lang="en-US" sz="1350" dirty="0"/>
-          </a:p>
-        </p:txBody>
-      </p:sp>
-      <p:sp>
-        <p:nvSpPr>
-          <p:cNvPr id="25" name="Slide Number Placeholder 0"/>
-          <p:cNvSpPr>
-            <a:spLocks noGrp="1"/>
-          </p:cNvSpPr>
-          <p:nvPr>
-            <p:ph type="sldNum" sz="quarter" idx="4294967295"/>
-          </p:nvPr>
-        </p:nvSpPr>
-        <p:spPr>
-          <a:xfrm>
-            <a:off x="8229600" y="4773168"/>
-            <a:ext cx="365760" cy="228600"/>
-          </a:xfrm>
-          <a:prstGeom prst="rect">
-            <a:avLst/>
-          </a:prstGeom>
-          <a:extLst>
-            <a:ext uri="{C572A759-6A51-4108-AA02-DFA0A04FC94B}">
-              <ma14:wrappingTextBoxFlag xmlns:ma14="http://schemas.microsoft.com/office/mac/drawingml/2011/main" val="0"/>
-            </a:ext>
-          </a:extLst>
-        </p:spPr>
-        <p:txBody>
-          <a:bodyPr/>
-          <a:lstStyle>
-            <a:lvl1pPr>
-              <a:defRPr sz="900">
-                <a:solidFill>
-                  <a:srgbClr val="5A6872"/>
-                </a:solidFill>
-              </a:defRPr>
-            </a:lvl1pPr>
-          </a:lstStyle>
-          <a:p>
-            <a:pPr algn="r"/>
-            <a:fld id="{F7021451-1387-4CA6-816F-3879F97B5CBC}" type="slidenum">
-              <a:rPr b="0" lang="en-US"/>
               <a:t>8</a:t>
             </a:fld>
             <a:endParaRPr lang="en-US"/>
@@ -7969,8 +8157,8 @@
         </p:nvSpPr>
         <p:spPr>
           <a:xfrm>
-            <a:off x="548640" y="1463040"/>
-            <a:ext cx="8046720" cy="1005840"/>
+            <a:off x="548640" y="658368"/>
+            <a:ext cx="8046720" cy="566928"/>
           </a:xfrm>
           <a:prstGeom prst="rect">
             <a:avLst/>
@@ -7979,36 +8167,61 @@
           <a:ln/>
         </p:spPr>
         <p:txBody>
-          <a:bodyPr wrap="square" lIns="0" tIns="0" rIns="0" bIns="0" rtlCol="0" anchor="t"/>
+          <a:bodyPr wrap="square" lIns="0" tIns="0" rIns="0" bIns="0" rtlCol="0" anchor="ctr"/>
           <a:lstStyle/>
           <a:p>
             <a:pPr algn="l" indent="0" marL="0">
               <a:buNone/>
             </a:pPr>
             <a:r>
-              <a:rPr lang="en-US" sz="3000" b="1" dirty="0">
-                <a:solidFill>
-                  <a:schemeClr val="accent1"/>
+              <a:rPr lang="en-US" sz="2400" b="1" dirty="0">
+                <a:solidFill>
+                  <a:schemeClr val="tx1"/>
                 </a:solidFill>
               </a:rPr>
-              <a:t>次回：第10回 LINEとつなぐ（LIFF）</a:t>
-            </a:r>
-            <a:endParaRPr lang="en-US" sz="3000" dirty="0"/>
-          </a:p>
-        </p:txBody>
-      </p:sp>
-      <p:sp>
-        <p:nvSpPr>
-          <p:cNvPr id="3" name="Text 0"/>
+              <a:t>宿題と、今日のチェック</a:t>
+            </a:r>
+            <a:endParaRPr lang="en-US" sz="2400" dirty="0"/>
+          </a:p>
+        </p:txBody>
+      </p:sp>
+      <p:sp>
+        <p:nvSpPr>
+          <p:cNvPr id="3" name="chip"/>
           <p:cNvSpPr/>
-          <p:nvPr>
-            <p:ph idx="101" type="body" hasCustomPrompt="1"/>
-          </p:nvPr>
-        </p:nvSpPr>
-        <p:spPr>
-          <a:xfrm>
-            <a:off x="548640" y="2606040"/>
-            <a:ext cx="8046720" cy="1097280"/>
+          <p:nvPr/>
+        </p:nvSpPr>
+        <p:spPr>
+          <a:xfrm>
+            <a:off x="548640" y="292608"/>
+            <a:ext cx="795528" cy="292608"/>
+          </a:xfrm>
+          <a:prstGeom prst="roundRect">
+            <a:avLst>
+              <a:gd name="adj" fmla="val 50000"/>
+            </a:avLst>
+          </a:prstGeom>
+          <a:solidFill>
+            <a:schemeClr val="tx1"/>
+          </a:solidFill>
+          <a:ln w="12700">
+            <a:solidFill>
+              <a:schemeClr val="tx1"/>
+            </a:solidFill>
+            <a:prstDash val="solid"/>
+          </a:ln>
+        </p:spPr>
+      </p:sp>
+      <p:sp>
+        <p:nvSpPr>
+          <p:cNvPr id="4" name="chip-text"/>
+          <p:cNvSpPr txBox="1"/>
+          <p:nvPr/>
+        </p:nvSpPr>
+        <p:spPr>
+          <a:xfrm>
+            <a:off x="548640" y="292608"/>
+            <a:ext cx="795528" cy="292608"/>
           </a:xfrm>
           <a:prstGeom prst="rect">
             <a:avLst/>
@@ -8017,35 +8230,418 @@
           <a:ln/>
         </p:spPr>
         <p:txBody>
+          <a:bodyPr wrap="square" lIns="0" tIns="0" rIns="0" bIns="0" rtlCol="0" anchor="ctr"/>
+          <a:lstStyle/>
+          <a:p>
+            <a:pPr algn="ctr" indent="0" marL="0">
+              <a:buNone/>
+            </a:pPr>
+            <a:r>
+              <a:rPr lang="en-US" sz="1100" b="1" dirty="0">
+                <a:solidFill>
+                  <a:schemeClr val="accent1"/>
+                </a:solidFill>
+              </a:rPr>
+              <a:t>まとめ</a:t>
+            </a:r>
+            <a:endParaRPr lang="en-US" sz="1100" dirty="0"/>
+          </a:p>
+        </p:txBody>
+      </p:sp>
+      <p:sp>
+        <p:nvSpPr>
+          <p:cNvPr id="5" name="card"/>
+          <p:cNvSpPr/>
+          <p:nvPr/>
+        </p:nvSpPr>
+        <p:spPr>
+          <a:xfrm>
+            <a:off x="548640" y="1463040"/>
+            <a:ext cx="3886200" cy="3017520"/>
+          </a:xfrm>
+          <a:prstGeom prst="roundRect">
+            <a:avLst>
+              <a:gd name="adj" fmla="val 3636"/>
+            </a:avLst>
+          </a:prstGeom>
+          <a:solidFill>
+            <a:schemeClr val="bg2"/>
+          </a:solidFill>
+          <a:ln w="19050">
+            <a:solidFill>
+              <a:srgbClr val="1A1A1A"/>
+            </a:solidFill>
+            <a:prstDash val="solid"/>
+          </a:ln>
+          <a:effectLst>
+            <a:outerShdw sx="100000" sy="100000" kx="0" ky="0" algn="bl" rotWithShape="0" blurRad="101600" dist="38100" dir="2700000">
+              <a:srgbClr val="000000">
+                <a:alpha val="18000"/>
+              </a:srgbClr>
+            </a:outerShdw>
+          </a:effectLst>
+        </p:spPr>
+      </p:sp>
+      <p:sp>
+        <p:nvSpPr>
+          <p:cNvPr id="6" name="icon-circle"/>
+          <p:cNvSpPr/>
+          <p:nvPr/>
+        </p:nvSpPr>
+        <p:spPr>
+          <a:xfrm>
+            <a:off x="777240" y="1645920"/>
+            <a:ext cx="457200" cy="457200"/>
+          </a:xfrm>
+          <a:prstGeom prst="ellipse">
+            <a:avLst/>
+          </a:prstGeom>
+          <a:solidFill>
+            <a:schemeClr val="accent1"/>
+          </a:solidFill>
+          <a:ln w="15875">
+            <a:solidFill>
+              <a:srgbClr val="1A1A1A"/>
+            </a:solidFill>
+            <a:prstDash val="solid"/>
+          </a:ln>
+        </p:spPr>
+      </p:sp>
+      <p:pic>
+        <p:nvPicPr>
+          <p:cNvPr id="7" name="icon" descr="preencoded.png">    </p:cNvPr>
+          <p:cNvPicPr>
+            <a:picLocks noChangeAspect="1"/>
+          </p:cNvPicPr>
+          <p:nvPr/>
+        </p:nvPicPr>
+        <p:blipFill>
+          <a:blip r:embed="rId1"/>
+          <a:stretch>
+            <a:fillRect/>
+          </a:stretch>
+        </p:blipFill>
+        <p:spPr>
+          <a:xfrm>
+            <a:off x="896112" y="1764792"/>
+            <a:ext cx="219456" cy="219456"/>
+          </a:xfrm>
+          <a:prstGeom prst="rect">
+            <a:avLst/>
+          </a:prstGeom>
+        </p:spPr>
+      </p:pic>
+      <p:sp>
+        <p:nvSpPr>
+          <p:cNvPr id="8" name="Text 5"/>
+          <p:cNvSpPr txBox="1"/>
+          <p:nvPr/>
+        </p:nvSpPr>
+        <p:spPr>
+          <a:xfrm>
+            <a:off x="1371600" y="1645920"/>
+            <a:ext cx="2743200" cy="457200"/>
+          </a:xfrm>
+          <a:prstGeom prst="rect">
+            <a:avLst/>
+          </a:prstGeom>
+          <a:noFill/>
+          <a:ln/>
+        </p:spPr>
+        <p:txBody>
+          <a:bodyPr wrap="square" lIns="0" tIns="0" rIns="0" bIns="0" rtlCol="0" anchor="ctr"/>
+          <a:lstStyle/>
+          <a:p>
+            <a:pPr indent="0" marL="0">
+              <a:buNone/>
+            </a:pPr>
+            <a:r>
+              <a:rPr lang="en-US" sz="1700" b="1" dirty="0">
+                <a:solidFill>
+                  <a:schemeClr val="tx1"/>
+                </a:solidFill>
+              </a:rPr>
+              <a:t>宿題</a:t>
+            </a:r>
+            <a:endParaRPr lang="en-US" sz="1700" dirty="0"/>
+          </a:p>
+        </p:txBody>
+      </p:sp>
+      <p:sp>
+        <p:nvSpPr>
+          <p:cNvPr id="9" name="Text 6"/>
+          <p:cNvSpPr txBox="1"/>
+          <p:nvPr/>
+        </p:nvSpPr>
+        <p:spPr>
+          <a:xfrm>
+            <a:off x="777240" y="2286000"/>
+            <a:ext cx="3474720" cy="2057400"/>
+          </a:xfrm>
+          <a:prstGeom prst="rect">
+            <a:avLst/>
+          </a:prstGeom>
+          <a:noFill/>
+          <a:ln/>
+        </p:spPr>
+        <p:txBody>
           <a:bodyPr wrap="square" lIns="0" tIns="0" rIns="0" bIns="0" rtlCol="0" anchor="t"/>
           <a:lstStyle/>
           <a:p>
+            <a:pPr marL="342900" indent="-342900">
+              <a:spcAft>
+                <a:spcPts val="800"/>
+              </a:spcAft>
+              <a:buSzPct val="100000"/>
+              <a:buChar char="•"/>
+            </a:pPr>
+            <a:r>
+              <a:rPr lang="en-US" sz="1350" dirty="0">
+                <a:solidFill>
+                  <a:schemeClr val="tx1"/>
+                </a:solidFill>
+              </a:rPr>
+              <a:t>BASEのデータを読み出し、ページに一覧表示する機能を足す（個人情報は表示しない）</a:t>
+            </a:r>
+            <a:endParaRPr lang="en-US" sz="1350" dirty="0"/>
+          </a:p>
+          <a:p>
+            <a:pPr marL="342900" indent="-342900">
+              <a:spcAft>
+                <a:spcPts val="800"/>
+              </a:spcAft>
+              <a:buSzPct val="100000"/>
+              <a:buChar char="•"/>
+            </a:pPr>
+            <a:r>
+              <a:rPr lang="en-US" sz="1350" dirty="0">
+                <a:solidFill>
+                  <a:schemeClr val="tx1"/>
+                </a:solidFill>
+              </a:rPr>
+              <a:t>今週中に個別レビュー（30分）を受ける</a:t>
+            </a:r>
+            <a:endParaRPr lang="en-US" sz="1350" dirty="0"/>
+          </a:p>
+        </p:txBody>
+      </p:sp>
+      <p:sp>
+        <p:nvSpPr>
+          <p:cNvPr id="10" name="card"/>
+          <p:cNvSpPr/>
+          <p:nvPr/>
+        </p:nvSpPr>
+        <p:spPr>
+          <a:xfrm>
+            <a:off x="4709160" y="1463040"/>
+            <a:ext cx="3886200" cy="3017520"/>
+          </a:xfrm>
+          <a:prstGeom prst="roundRect">
+            <a:avLst>
+              <a:gd name="adj" fmla="val 3636"/>
+            </a:avLst>
+          </a:prstGeom>
+          <a:solidFill>
+            <a:schemeClr val="bg1"/>
+          </a:solidFill>
+          <a:ln w="19050">
+            <a:solidFill>
+              <a:srgbClr val="1A1A1A"/>
+            </a:solidFill>
+            <a:prstDash val="solid"/>
+          </a:ln>
+          <a:effectLst>
+            <a:outerShdw sx="100000" sy="100000" kx="0" ky="0" algn="bl" rotWithShape="0" blurRad="101600" dist="38100" dir="2700000">
+              <a:srgbClr val="000000">
+                <a:alpha val="18000"/>
+              </a:srgbClr>
+            </a:outerShdw>
+          </a:effectLst>
+        </p:spPr>
+      </p:sp>
+      <p:sp>
+        <p:nvSpPr>
+          <p:cNvPr id="11" name="icon-circle"/>
+          <p:cNvSpPr/>
+          <p:nvPr/>
+        </p:nvSpPr>
+        <p:spPr>
+          <a:xfrm>
+            <a:off x="4937760" y="1645920"/>
+            <a:ext cx="457200" cy="457200"/>
+          </a:xfrm>
+          <a:prstGeom prst="ellipse">
+            <a:avLst/>
+          </a:prstGeom>
+          <a:solidFill>
+            <a:schemeClr val="accent1"/>
+          </a:solidFill>
+          <a:ln w="15875">
+            <a:solidFill>
+              <a:srgbClr val="1A1A1A"/>
+            </a:solidFill>
+            <a:prstDash val="solid"/>
+          </a:ln>
+        </p:spPr>
+      </p:sp>
+      <p:pic>
+        <p:nvPicPr>
+          <p:cNvPr id="12" name="icon" descr="preencoded.png">    </p:cNvPr>
+          <p:cNvPicPr>
+            <a:picLocks noChangeAspect="1"/>
+          </p:cNvPicPr>
+          <p:nvPr/>
+        </p:nvPicPr>
+        <p:blipFill>
+          <a:blip r:embed="rId2"/>
+          <a:stretch>
+            <a:fillRect/>
+          </a:stretch>
+        </p:blipFill>
+        <p:spPr>
+          <a:xfrm>
+            <a:off x="5056632" y="1764792"/>
+            <a:ext cx="219456" cy="219456"/>
+          </a:xfrm>
+          <a:prstGeom prst="rect">
+            <a:avLst/>
+          </a:prstGeom>
+        </p:spPr>
+      </p:pic>
+      <p:sp>
+        <p:nvSpPr>
+          <p:cNvPr id="13" name="Text 9"/>
+          <p:cNvSpPr txBox="1"/>
+          <p:nvPr/>
+        </p:nvSpPr>
+        <p:spPr>
+          <a:xfrm>
+            <a:off x="5532120" y="1645920"/>
+            <a:ext cx="2743200" cy="457200"/>
+          </a:xfrm>
+          <a:prstGeom prst="rect">
+            <a:avLst/>
+          </a:prstGeom>
+          <a:noFill/>
+          <a:ln/>
+        </p:spPr>
+        <p:txBody>
+          <a:bodyPr wrap="square" lIns="0" tIns="0" rIns="0" bIns="0" rtlCol="0" anchor="ctr"/>
+          <a:lstStyle/>
+          <a:p>
             <a:pPr indent="0" marL="0">
               <a:buNone/>
             </a:pPr>
             <a:r>
-              <a:rPr lang="en-US" sz="1500" dirty="0">
-                <a:solidFill>
-                  <a:schemeClr val="bg1"/>
+              <a:rPr lang="en-US" sz="1700" b="1" dirty="0">
+                <a:solidFill>
+                  <a:schemeClr val="tx1"/>
                 </a:solidFill>
               </a:rPr>
-              <a:t>わからないところは、講座グループでいつでも質問してください。</a:t>
-            </a:r>
-            <a:endParaRPr lang="en-US" sz="1500" dirty="0"/>
-          </a:p>
+              <a:t>できたらチェック</a:t>
+            </a:r>
+            <a:endParaRPr lang="en-US" sz="1700" dirty="0"/>
+          </a:p>
+        </p:txBody>
+      </p:sp>
+      <p:sp>
+        <p:nvSpPr>
+          <p:cNvPr id="14" name="Text 10"/>
+          <p:cNvSpPr txBox="1"/>
+          <p:nvPr/>
+        </p:nvSpPr>
+        <p:spPr>
+          <a:xfrm>
+            <a:off x="4937760" y="2286000"/>
+            <a:ext cx="3474720" cy="2057400"/>
+          </a:xfrm>
+          <a:prstGeom prst="rect">
+            <a:avLst/>
+          </a:prstGeom>
+          <a:noFill/>
+          <a:ln/>
+        </p:spPr>
+        <p:txBody>
+          <a:bodyPr wrap="square" lIns="0" tIns="0" rIns="0" bIns="0" rtlCol="0" anchor="t"/>
+          <a:lstStyle/>
           <a:p>
             <a:pPr indent="0" marL="0">
-              <a:buNone/>
-            </a:pPr>
-            <a:r>
-              <a:rPr lang="en-US" sz="1500" dirty="0">
-                <a:solidFill>
-                  <a:schemeClr val="bg1"/>
+              <a:spcAft>
+                <a:spcPts val="800"/>
+              </a:spcAft>
+              <a:buNone/>
+            </a:pPr>
+            <a:r>
+              <a:rPr lang="en-US" sz="1350" dirty="0">
+                <a:solidFill>
+                  <a:schemeClr val="tx1"/>
                 </a:solidFill>
               </a:rPr>
-              <a:t>APIキーやパスワードは送らないでください。</a:t>
-            </a:r>
-            <a:endParaRPr lang="en-US" sz="1500" dirty="0"/>
+              <a:t>☐ App Secretがプログラム・GitHubに書かれていない</a:t>
+            </a:r>
+            <a:endParaRPr lang="en-US" sz="1350" dirty="0"/>
+          </a:p>
+          <a:p>
+            <a:pPr indent="0" marL="0">
+              <a:spcAft>
+                <a:spcPts val="800"/>
+              </a:spcAft>
+              <a:buNone/>
+            </a:pPr>
+            <a:r>
+              <a:rPr lang="en-US" sz="1350" dirty="0">
+                <a:solidFill>
+                  <a:schemeClr val="tx1"/>
+                </a:solidFill>
+              </a:rPr>
+              <a:t>☐ 公開ページから送ったデータがBASEに入った</a:t>
+            </a:r>
+            <a:endParaRPr lang="en-US" sz="1350" dirty="0"/>
+          </a:p>
+        </p:txBody>
+      </p:sp>
+      <p:sp>
+        <p:nvSpPr>
+          <p:cNvPr id="25" name="Slide Number Placeholder 0"/>
+          <p:cNvSpPr>
+            <a:spLocks noGrp="1"/>
+          </p:cNvSpPr>
+          <p:nvPr>
+            <p:ph type="sldNum" sz="quarter" idx="4294967295"/>
+          </p:nvPr>
+        </p:nvSpPr>
+        <p:spPr>
+          <a:xfrm>
+            <a:off x="8229600" y="4773168"/>
+            <a:ext cx="365760" cy="228600"/>
+          </a:xfrm>
+          <a:prstGeom prst="rect">
+            <a:avLst/>
+          </a:prstGeom>
+          <a:extLst>
+            <a:ext uri="{C572A759-6A51-4108-AA02-DFA0A04FC94B}">
+              <ma14:wrappingTextBoxFlag xmlns:ma14="http://schemas.microsoft.com/office/mac/drawingml/2011/main" val="0"/>
+            </a:ext>
+          </a:extLst>
+        </p:spPr>
+        <p:txBody>
+          <a:bodyPr/>
+          <a:lstStyle>
+            <a:lvl1pPr>
+              <a:defRPr sz="900">
+                <a:solidFill>
+                  <a:srgbClr val="5A6872"/>
+                </a:solidFill>
+              </a:defRPr>
+            </a:lvl1pPr>
+          </a:lstStyle>
+          <a:p>
+            <a:pPr algn="r"/>
+            <a:fld id="{F7021451-1387-4CA6-816F-3879F97B5CBC}" type="slidenum">
+              <a:rPr b="0" lang="en-US"/>
+              <a:t>9</a:t>
+            </a:fld>
+            <a:endParaRPr lang="en-US"/>
           </a:p>
         </p:txBody>
       </p:sp>

--- a/manaberu/slides/manaberu-09-connect-lark-api.pptx
+++ b/manaberu/slides/manaberu-09-connect-lark-api.pptx
@@ -116,13 +116,13 @@
   <p:extLst>
     <p:ext uri="{521415D9-36F7-43E2-AB2F-B90AF26B5E84}">
       <p14:sectionLst xmlns:p14="http://schemas.microsoft.com/office/powerpoint/2010/main">
-        <p14:section name="導入" id="{9c3cf212-8264-10f2-88e1-d514ff7e5fc2}">
+        <p14:section name="導入" id="{e9673c70-f261-a528-ed1d-ba26eeaf80c5}">
           <p14:sldIdLst>
             <p14:sldId id="256"/>
             <p14:sldId id="257"/>
           </p14:sldIdLst>
         </p14:section>
-        <p14:section name="本編" id="{f1a48c61-89da-57b5-8879-9a1bdfb757b1}">
+        <p14:section name="本編" id="{25066673-3753-0f5e-ec06-1cde0a768423}">
           <p14:sldIdLst>
             <p14:sldId id="258"/>
             <p14:sldId id="259"/>
@@ -132,7 +132,7 @@
             <p14:sldId id="263"/>
           </p14:sldIdLst>
         </p14:section>
-        <p14:section name="まとめ" id="{6ce92cf0-2b49-4da6-da1e-413478d562db}">
+        <p14:section name="まとめ" id="{d7d042bb-0998-60d5-4df6-0eee1e2d6412}">
           <p14:sldIdLst>
             <p14:sldId id="264"/>
             <p14:sldId id="265"/>
@@ -1408,12 +1408,19 @@
 
 <file path=ppt/slideLayouts/slideLayout2.xml><?xml version="1.0" encoding="utf-8"?>
 <p:sldLayout xmlns:a="http://schemas.openxmlformats.org/drawingml/2006/main" xmlns:r="http://schemas.openxmlformats.org/officeDocument/2006/relationships" xmlns:p="http://schemas.openxmlformats.org/presentationml/2006/main" preserve="1">
-  <p:cSld name="MANA_TITLE">
+  <p:cSld name="MANA_COVER">
     <p:bg>
       <p:bgPr>
-        <a:solidFill>
-          <a:srgbClr val="FFD600"/>
-        </a:solidFill>
+        <a:blipFill dpi="0" rotWithShape="1">
+          <a:blip r:embed="rId1">
+            <a:lum/>
+          </a:blip>
+          <a:srcRect/>
+          <a:stretch>
+            <a:fillRect/>
+          </a:stretch>
+        </a:blipFill>
+        <a:effectLst/>
       </p:bgPr>
     </p:bg>
     <p:spTree>
@@ -1430,156 +1437,6 @@
           <a:chExt cx="0" cy="0"/>
         </a:xfrm>
       </p:grpSpPr>
-      <p:sp>
-        <p:nvSpPr>
-          <p:cNvPr id="2" name="Text 0"/>
-          <p:cNvSpPr/>
-          <p:nvPr>
-            <p:ph idx="100" type="title" hasCustomPrompt="1"/>
-          </p:nvPr>
-        </p:nvSpPr>
-        <p:spPr>
-          <a:xfrm>
-            <a:off x="548640" y="1691640"/>
-            <a:ext cx="5852160" cy="1371600"/>
-          </a:xfrm>
-          <a:prstGeom prst="rect">
-            <a:avLst/>
-          </a:prstGeom>
-          <a:noFill/>
-          <a:ln/>
-        </p:spPr>
-        <p:txBody>
-          <a:bodyPr wrap="square" rtlCol="0"/>
-          <a:lstStyle>
-            <a:lvl1pPr algn="l" indent="0" marL="0">
-              <a:buNone/>
-              <a:defRPr lang="en-US" sz="3200" b="1" dirty="0">
-                <a:solidFill>
-                  <a:schemeClr val="tx1"/>
-                </a:solidFill>
-              </a:defRPr>
-            </a:lvl1pPr>
-          </a:lstStyle>
-          <a:p>
-            <a:pPr algn="l" indent="0" marL="0">
-              <a:buNone/>
-            </a:pPr>
-            <a:endParaRPr lang="en-US" sz="3200" dirty="0"/>
-          </a:p>
-        </p:txBody>
-      </p:sp>
-      <p:sp>
-        <p:nvSpPr>
-          <p:cNvPr id="3" name="Text 0"/>
-          <p:cNvSpPr/>
-          <p:nvPr>
-            <p:ph idx="101" type="body" hasCustomPrompt="1"/>
-          </p:nvPr>
-        </p:nvSpPr>
-        <p:spPr>
-          <a:xfrm>
-            <a:off x="548640" y="3246120"/>
-            <a:ext cx="5852160" cy="457200"/>
-          </a:xfrm>
-          <a:prstGeom prst="rect">
-            <a:avLst/>
-          </a:prstGeom>
-          <a:noFill/>
-          <a:ln/>
-        </p:spPr>
-        <p:txBody>
-          <a:bodyPr wrap="square" rtlCol="0"/>
-          <a:lstStyle>
-            <a:lvl1pPr indent="0" marL="0">
-              <a:buNone/>
-              <a:defRPr lang="en-US" sz="1400" dirty="0">
-                <a:solidFill>
-                  <a:schemeClr val="tx1"/>
-                </a:solidFill>
-              </a:defRPr>
-            </a:lvl1pPr>
-          </a:lstStyle>
-          <a:p>
-            <a:pPr indent="0" marL="0">
-              <a:buNone/>
-            </a:pPr>
-            <a:endParaRPr lang="en-US" sz="1400" dirty="0"/>
-          </a:p>
-        </p:txBody>
-      </p:sp>
-      <p:sp>
-        <p:nvSpPr>
-          <p:cNvPr id="4" name="Text 0"/>
-          <p:cNvSpPr/>
-          <p:nvPr/>
-        </p:nvSpPr>
-        <p:spPr>
-          <a:xfrm>
-            <a:off x="548640" y="4526280"/>
-            <a:ext cx="5486400" cy="274320"/>
-          </a:xfrm>
-          <a:prstGeom prst="rect">
-            <a:avLst/>
-          </a:prstGeom>
-          <a:noFill/>
-          <a:ln/>
-        </p:spPr>
-        <p:txBody>
-          <a:bodyPr wrap="square" lIns="0" tIns="0" rIns="0" bIns="0" rtlCol="0" anchor="ctr"/>
-          <a:lstStyle/>
-          <a:p>
-            <a:pPr indent="0" marL="0">
-              <a:buNone/>
-            </a:pPr>
-            <a:r>
-              <a:rPr lang="en-US" sz="1000" dirty="0">
-                <a:solidFill>
-                  <a:schemeClr val="tx1"/>
-                </a:solidFill>
-              </a:rPr>
-              <a:t>マナベル｜AI×Lark 構築者育成講座</a:t>
-            </a:r>
-            <a:endParaRPr lang="en-US" sz="1000" dirty="0"/>
-          </a:p>
-        </p:txBody>
-      </p:sp>
-      <p:sp>
-        <p:nvSpPr>
-          <p:cNvPr id="5" name="Text 1"/>
-          <p:cNvSpPr/>
-          <p:nvPr/>
-        </p:nvSpPr>
-        <p:spPr>
-          <a:xfrm>
-            <a:off x="6766560" y="4526280"/>
-            <a:ext cx="1828800" cy="274320"/>
-          </a:xfrm>
-          <a:prstGeom prst="rect">
-            <a:avLst/>
-          </a:prstGeom>
-          <a:noFill/>
-          <a:ln/>
-        </p:spPr>
-        <p:txBody>
-          <a:bodyPr wrap="square" lIns="0" tIns="0" rIns="0" bIns="0" rtlCol="0" anchor="ctr"/>
-          <a:lstStyle/>
-          <a:p>
-            <a:pPr algn="r" indent="0" marL="0">
-              <a:buNone/>
-            </a:pPr>
-            <a:r>
-              <a:rPr lang="en-US" sz="1000" b="1" dirty="0">
-                <a:solidFill>
-                  <a:schemeClr val="tx1"/>
-                </a:solidFill>
-              </a:rPr>
-              <a:t>ささエール</a:t>
-            </a:r>
-            <a:endParaRPr lang="en-US" sz="1000" dirty="0"/>
-          </a:p>
-        </p:txBody>
-      </p:sp>
     </p:spTree>
   </p:cSld>
   <p:clrMapOvr>
@@ -1593,9 +1450,16 @@
   <p:cSld name="MANA_CONTENT">
     <p:bg>
       <p:bgPr>
-        <a:solidFill>
-          <a:srgbClr val="FFFFFF"/>
-        </a:solidFill>
+        <a:blipFill dpi="0" rotWithShape="1">
+          <a:blip r:embed="rId1">
+            <a:lum/>
+          </a:blip>
+          <a:srcRect/>
+          <a:stretch>
+            <a:fillRect/>
+          </a:stretch>
+        </a:blipFill>
+        <a:effectLst/>
       </p:bgPr>
     </p:bg>
     <p:spTree>
@@ -1614,53 +1478,36 @@
       </p:grpSpPr>
       <p:sp>
         <p:nvSpPr>
-          <p:cNvPr id="2" name="Text 0"/>
+          <p:cNvPr id="2" name="Shape 0"/>
           <p:cNvSpPr/>
-          <p:nvPr>
-            <p:ph idx="100" type="title" hasCustomPrompt="1"/>
-          </p:nvPr>
-        </p:nvSpPr>
-        <p:spPr>
-          <a:xfrm>
-            <a:off x="548640" y="658368"/>
-            <a:ext cx="8046720" cy="566928"/>
-          </a:xfrm>
-          <a:prstGeom prst="rect">
-            <a:avLst/>
-          </a:prstGeom>
-          <a:noFill/>
+          <p:nvPr/>
+        </p:nvSpPr>
+        <p:spPr>
+          <a:xfrm>
+            <a:off x="6400800" y="4754880"/>
+            <a:ext cx="2423160" cy="274320"/>
+          </a:xfrm>
+          <a:prstGeom prst="rect">
+            <a:avLst>
+              <a:gd name="adj" fmla="val 50000"/>
+            </a:avLst>
+          </a:prstGeom>
+          <a:solidFill>
+            <a:srgbClr val="1A1A1A"/>
+          </a:solidFill>
           <a:ln/>
         </p:spPr>
-        <p:txBody>
-          <a:bodyPr wrap="square" rtlCol="0"/>
-          <a:lstStyle>
-            <a:lvl1pPr algn="l" indent="0" marL="0">
-              <a:buNone/>
-              <a:defRPr lang="en-US" sz="2400" b="1" dirty="0">
-                <a:solidFill>
-                  <a:schemeClr val="tx1"/>
-                </a:solidFill>
-              </a:defRPr>
-            </a:lvl1pPr>
-          </a:lstStyle>
-          <a:p>
-            <a:pPr algn="l" indent="0" marL="0">
-              <a:buNone/>
-            </a:pPr>
-            <a:endParaRPr lang="en-US" sz="2400" dirty="0"/>
-          </a:p>
-        </p:txBody>
-      </p:sp>
-      <p:sp>
-        <p:nvSpPr>
-          <p:cNvPr id="3" name="Text 0"/>
+      </p:sp>
+      <p:sp>
+        <p:nvSpPr>
+          <p:cNvPr id="3" name="Text 1"/>
           <p:cNvSpPr/>
           <p:nvPr/>
         </p:nvSpPr>
         <p:spPr>
           <a:xfrm>
-            <a:off x="548640" y="4773168"/>
-            <a:ext cx="6400800" cy="228600"/>
+            <a:off x="6510528" y="4754880"/>
+            <a:ext cx="1828800" cy="274320"/>
           </a:xfrm>
           <a:prstGeom prst="rect">
             <a:avLst/>
@@ -1676,14 +1523,56 @@
               <a:buNone/>
             </a:pPr>
             <a:r>
-              <a:rPr lang="en-US" sz="900" dirty="0">
-                <a:solidFill>
-                  <a:schemeClr val="tx2"/>
-                </a:solidFill>
+              <a:rPr lang="ja-JP" altLang="en-US" sz="850" b="1" dirty="0">
+                <a:solidFill>
+                  <a:srgbClr val="FFFFFF"/>
+                </a:solidFill>
+                <a:latin typeface="Noto Sans JP" pitchFamily="34" charset="0"/>
+                <a:ea typeface="Noto Sans JP" pitchFamily="34" charset="-122"/>
+                <a:cs typeface="Noto Sans JP" pitchFamily="34" charset="-120"/>
+              </a:rPr>
+              <a:t>ささエール｜OFFICE PLATA</a:t>
+            </a:r>
+            <a:endParaRPr lang="ja-JP" sz="850" dirty="0"/>
+          </a:p>
+        </p:txBody>
+      </p:sp>
+      <p:sp>
+        <p:nvSpPr>
+          <p:cNvPr id="4" name="Text 2"/>
+          <p:cNvSpPr/>
+          <p:nvPr/>
+        </p:nvSpPr>
+        <p:spPr>
+          <a:xfrm>
+            <a:off x="365760" y="4754880"/>
+            <a:ext cx="5852160" cy="274320"/>
+          </a:xfrm>
+          <a:prstGeom prst="rect">
+            <a:avLst/>
+          </a:prstGeom>
+          <a:noFill/>
+          <a:ln/>
+        </p:spPr>
+        <p:txBody>
+          <a:bodyPr wrap="square" lIns="0" tIns="0" rIns="0" bIns="0" rtlCol="0" anchor="ctr"/>
+          <a:lstStyle/>
+          <a:p>
+            <a:pPr indent="0" marL="0">
+              <a:buNone/>
+            </a:pPr>
+            <a:r>
+              <a:rPr lang="ja-JP" altLang="en-US" sz="850" dirty="0">
+                <a:solidFill>
+                  <a:srgbClr val="1A1A1A"/>
+                </a:solidFill>
+                <a:latin typeface="Noto Sans JP Medium" pitchFamily="34" charset="0"/>
+                <a:ea typeface="Noto Sans JP Medium" pitchFamily="34" charset="-122"/>
+                <a:cs typeface="Noto Sans JP Medium" pitchFamily="34" charset="-120"/>
               </a:rPr>
               <a:t>マナベル　第9回　Lark BASEとつなぐ（API）</a:t>
             </a:r>
-            <a:endParaRPr lang="en-US" sz="900" dirty="0"/>
+            <a:endParaRPr lang="ja-JP" sz="850" dirty="0"/>
           </a:p>
         </p:txBody>
       </p:sp>
@@ -1699,8 +1588,8 @@
         </p:nvSpPr>
         <p:spPr>
           <a:xfrm>
-            <a:off x="8229600" y="4773168"/>
-            <a:ext cx="365760" cy="228600"/>
+            <a:off x="8366760" y="4754880"/>
+            <a:ext cx="365760" cy="274320"/>
           </a:xfrm>
           <a:prstGeom prst="rect">
             <a:avLst/>
@@ -1712,169 +1601,26 @@
           </a:extLst>
         </p:spPr>
         <p:txBody>
-          <a:bodyPr/>
+          <a:bodyPr anchor="ctr"/>
           <a:lstStyle>
             <a:lvl1pPr>
-              <a:defRPr sz="900">
-                <a:solidFill>
-                  <a:srgbClr val="5A6872"/>
-                </a:solidFill>
+              <a:defRPr sz="850">
+                <a:solidFill>
+                  <a:srgbClr val="FFFFFF"/>
+                </a:solidFill>
+                <a:latin typeface="Noto Sans JP"/>
+                <a:ea typeface="Noto Sans JP"/>
+                <a:cs typeface="Noto Sans JP"/>
               </a:defRPr>
             </a:lvl1pPr>
           </a:lstStyle>
           <a:p>
             <a:pPr algn="r"/>
             <a:fld id="{F7021451-1387-4CA6-816F-3879F97B5CBC}" type="slidenum">
-              <a:rPr b="0" lang="en-US"/>
+              <a:rPr b="1" lang="en-US"/>
               <a:t>1003</a:t>
             </a:fld>
             <a:endParaRPr lang="en-US"/>
-          </a:p>
-        </p:txBody>
-      </p:sp>
-    </p:spTree>
-  </p:cSld>
-  <p:clrMapOvr>
-    <a:masterClrMapping/>
-  </p:clrMapOvr>
-</p:sldLayout>
-</file>
-
-<file path=ppt/slideLayouts/slideLayout4.xml><?xml version="1.0" encoding="utf-8"?>
-<p:sldLayout xmlns:a="http://schemas.openxmlformats.org/drawingml/2006/main" xmlns:r="http://schemas.openxmlformats.org/officeDocument/2006/relationships" xmlns:p="http://schemas.openxmlformats.org/presentationml/2006/main" preserve="1">
-  <p:cSld name="MANA_DARK">
-    <p:bg>
-      <p:bgPr>
-        <a:solidFill>
-          <a:srgbClr val="1A1A1A"/>
-        </a:solidFill>
-      </p:bgPr>
-    </p:bg>
-    <p:spTree>
-      <p:nvGrpSpPr>
-        <p:cNvPr id="1" name=""/>
-        <p:cNvGrpSpPr/>
-        <p:nvPr/>
-      </p:nvGrpSpPr>
-      <p:grpSpPr>
-        <a:xfrm>
-          <a:off x="0" y="0"/>
-          <a:ext cx="0" cy="0"/>
-          <a:chOff x="0" y="0"/>
-          <a:chExt cx="0" cy="0"/>
-        </a:xfrm>
-      </p:grpSpPr>
-      <p:sp>
-        <p:nvSpPr>
-          <p:cNvPr id="2" name="Text 0"/>
-          <p:cNvSpPr/>
-          <p:nvPr>
-            <p:ph idx="100" type="title" hasCustomPrompt="1"/>
-          </p:nvPr>
-        </p:nvSpPr>
-        <p:spPr>
-          <a:xfrm>
-            <a:off x="548640" y="1463040"/>
-            <a:ext cx="8046720" cy="1005840"/>
-          </a:xfrm>
-          <a:prstGeom prst="rect">
-            <a:avLst/>
-          </a:prstGeom>
-          <a:noFill/>
-          <a:ln/>
-        </p:spPr>
-        <p:txBody>
-          <a:bodyPr wrap="square" rtlCol="0"/>
-          <a:lstStyle>
-            <a:lvl1pPr algn="l" indent="0" marL="0">
-              <a:buNone/>
-              <a:defRPr lang="en-US" sz="3000" b="1" dirty="0">
-                <a:solidFill>
-                  <a:schemeClr val="accent1"/>
-                </a:solidFill>
-              </a:defRPr>
-            </a:lvl1pPr>
-          </a:lstStyle>
-          <a:p>
-            <a:pPr algn="l" indent="0" marL="0">
-              <a:buNone/>
-            </a:pPr>
-            <a:endParaRPr lang="en-US" sz="3000" dirty="0"/>
-          </a:p>
-        </p:txBody>
-      </p:sp>
-      <p:sp>
-        <p:nvSpPr>
-          <p:cNvPr id="3" name="Text 0"/>
-          <p:cNvSpPr/>
-          <p:nvPr>
-            <p:ph idx="101" type="body" hasCustomPrompt="1"/>
-          </p:nvPr>
-        </p:nvSpPr>
-        <p:spPr>
-          <a:xfrm>
-            <a:off x="548640" y="2606040"/>
-            <a:ext cx="8046720" cy="1097280"/>
-          </a:xfrm>
-          <a:prstGeom prst="rect">
-            <a:avLst/>
-          </a:prstGeom>
-          <a:noFill/>
-          <a:ln/>
-        </p:spPr>
-        <p:txBody>
-          <a:bodyPr wrap="square" rtlCol="0"/>
-          <a:lstStyle>
-            <a:lvl1pPr indent="0" marL="0">
-              <a:buNone/>
-              <a:defRPr lang="en-US" sz="1500" dirty="0">
-                <a:solidFill>
-                  <a:schemeClr val="bg1"/>
-                </a:solidFill>
-              </a:defRPr>
-            </a:lvl1pPr>
-          </a:lstStyle>
-          <a:p>
-            <a:pPr indent="0" marL="0">
-              <a:buNone/>
-            </a:pPr>
-            <a:endParaRPr lang="en-US" sz="1500" dirty="0"/>
-          </a:p>
-        </p:txBody>
-      </p:sp>
-      <p:sp>
-        <p:nvSpPr>
-          <p:cNvPr id="4" name="Text 0"/>
-          <p:cNvSpPr/>
-          <p:nvPr/>
-        </p:nvSpPr>
-        <p:spPr>
-          <a:xfrm>
-            <a:off x="548640" y="4526280"/>
-            <a:ext cx="5486400" cy="274320"/>
-          </a:xfrm>
-          <a:prstGeom prst="rect">
-            <a:avLst/>
-          </a:prstGeom>
-          <a:noFill/>
-          <a:ln/>
-        </p:spPr>
-        <p:txBody>
-          <a:bodyPr wrap="square" lIns="0" tIns="0" rIns="0" bIns="0" rtlCol="0" anchor="ctr"/>
-          <a:lstStyle/>
-          <a:p>
-            <a:pPr indent="0" marL="0">
-              <a:buNone/>
-            </a:pPr>
-            <a:r>
-              <a:rPr lang="en-US" sz="1000" dirty="0">
-                <a:solidFill>
-                  <a:schemeClr val="bg1"/>
-                </a:solidFill>
-              </a:rPr>
-              <a:t>マナベル｜AI×Lark 構築者育成講座</a:t>
-            </a:r>
-            <a:endParaRPr lang="en-US" sz="1000" dirty="0"/>
           </a:p>
         </p:txBody>
       </p:sp>
@@ -1915,8 +1661,8 @@
         </p:nvSpPr>
         <p:spPr>
           <a:xfrm>
-            <a:off x="8229600" y="4773168"/>
-            <a:ext cx="365760" cy="228600"/>
+            <a:off x="8366760" y="4754880"/>
+            <a:ext cx="365760" cy="274320"/>
           </a:xfrm>
           <a:prstGeom prst="rect">
             <a:avLst/>
@@ -1928,20 +1674,23 @@
           </a:extLst>
         </p:spPr>
         <p:txBody>
-          <a:bodyPr/>
+          <a:bodyPr anchor="ctr"/>
           <a:lstStyle>
             <a:lvl1pPr>
-              <a:defRPr sz="900">
-                <a:solidFill>
-                  <a:srgbClr val="5A6872"/>
-                </a:solidFill>
+              <a:defRPr sz="850">
+                <a:solidFill>
+                  <a:srgbClr val="FFFFFF"/>
+                </a:solidFill>
+                <a:latin typeface="Noto Sans JP"/>
+                <a:ea typeface="Noto Sans JP"/>
+                <a:cs typeface="Noto Sans JP"/>
               </a:defRPr>
             </a:lvl1pPr>
           </a:lstStyle>
           <a:p>
             <a:pPr algn="r"/>
             <a:fld id="{F7021451-1387-4CA6-816F-3879F97B5CBC}" type="slidenum">
-              <a:rPr b="0" lang="en-US"/>
+              <a:rPr b="1" lang="en-US"/>
               <a:t>null</a:t>
             </a:fld>
             <a:endParaRPr lang="en-US"/>
@@ -1955,7 +1704,6 @@
     <p:sldLayoutId id="2147483649" r:id="rId1"/>
     <p:sldLayoutId id="2147483650" r:id="rId2"/>
     <p:sldLayoutId id="2147483651" r:id="rId3"/>
-    <p:sldLayoutId id="2147483652" r:id="rId4"/>
   </p:sldLayoutIdLst>
   <p:hf sldNum="0" hdr="0" ftr="0" dt="0"/>
   <p:txStyles>
@@ -2228,57 +1976,60 @@
           <a:chExt cx="0" cy="0"/>
         </a:xfrm>
       </p:grpSpPr>
-      <p:sp>
-        <p:nvSpPr>
-          <p:cNvPr id="2" name="lesson-badge"/>
-          <p:cNvSpPr/>
-          <p:nvPr/>
-        </p:nvSpPr>
-        <p:spPr>
-          <a:xfrm>
-            <a:off x="548640" y="822960"/>
-            <a:ext cx="1828800" cy="566928"/>
-          </a:xfrm>
-          <a:prstGeom prst="roundRect">
-            <a:avLst>
-              <a:gd name="adj" fmla="val 50000"/>
-            </a:avLst>
+      <p:pic>
+        <p:nvPicPr>
+          <p:cNvPr id="2" name="portrait" descr="講師 笹原彰朗">    </p:cNvPr>
+          <p:cNvPicPr>
+            <a:picLocks noChangeAspect="1"/>
+          </p:cNvPicPr>
+          <p:nvPr/>
+        </p:nvPicPr>
+        <p:blipFill>
+          <a:blip r:embed="rId1"/>
+          <a:stretch>
+            <a:fillRect/>
+          </a:stretch>
+        </p:blipFill>
+        <p:spPr>
+          <a:xfrm>
+            <a:off x="6003588" y="1211580"/>
+            <a:ext cx="2866092" cy="3931920"/>
+          </a:xfrm>
+          <a:prstGeom prst="rect">
+            <a:avLst/>
+          </a:prstGeom>
+        </p:spPr>
+      </p:pic>
+      <p:sp>
+        <p:nvSpPr>
+          <p:cNvPr id="3" name="Text 0"/>
+          <p:cNvSpPr txBox="1"/>
+          <p:nvPr/>
+        </p:nvSpPr>
+        <p:spPr>
+          <a:xfrm rot="-240000">
+            <a:off x="457200" y="411480"/>
+            <a:ext cx="1600200" cy="603504"/>
+          </a:xfrm>
+          <a:prstGeom prst="rect">
+            <a:avLst/>
           </a:prstGeom>
           <a:solidFill>
             <a:srgbClr val="1A1A1A"/>
           </a:solidFill>
-          <a:ln w="12700">
+          <a:ln>
             <a:solidFill>
               <a:srgbClr val="1A1A1A"/>
             </a:solidFill>
-            <a:prstDash val="solid"/>
           </a:ln>
           <a:effectLst>
             <a:outerShdw sx="100000" sy="100000" kx="0" ky="0" algn="bl" rotWithShape="0" blurRad="101600" dist="38100" dir="2700000">
-              <a:srgbClr val="000000">
-                <a:alpha val="18000"/>
+              <a:srgbClr val="1A1A1A">
+                <a:alpha val="100000"/>
               </a:srgbClr>
             </a:outerShdw>
           </a:effectLst>
         </p:spPr>
-      </p:sp>
-      <p:sp>
-        <p:nvSpPr>
-          <p:cNvPr id="3" name="Text 1"/>
-          <p:cNvSpPr txBox="1"/>
-          <p:nvPr/>
-        </p:nvSpPr>
-        <p:spPr>
-          <a:xfrm>
-            <a:off x="548640" y="822960"/>
-            <a:ext cx="1828800" cy="566928"/>
-          </a:xfrm>
-          <a:prstGeom prst="rect">
-            <a:avLst/>
-          </a:prstGeom>
-          <a:noFill/>
-          <a:ln/>
-        </p:spPr>
         <p:txBody>
           <a:bodyPr wrap="square" lIns="0" tIns="0" rIns="0" bIns="0" rtlCol="0" anchor="ctr"/>
           <a:lstStyle/>
@@ -2287,29 +2038,30 @@
               <a:buNone/>
             </a:pPr>
             <a:r>
-              <a:rPr lang="en-US" sz="2200" b="1" dirty="0">
-                <a:solidFill>
-                  <a:schemeClr val="accent1"/>
-                </a:solidFill>
+              <a:rPr lang="ja-JP" altLang="en-US" sz="2200" dirty="0">
+                <a:solidFill>
+                  <a:srgbClr val="FFD600"/>
+                </a:solidFill>
+                <a:latin typeface="Dela Gothic One" pitchFamily="34" charset="0"/>
+                <a:ea typeface="けいふぉんと" pitchFamily="34" charset="-122"/>
+                <a:cs typeface="Dela Gothic One" pitchFamily="34" charset="-120"/>
               </a:rPr>
               <a:t>第9回</a:t>
             </a:r>
-            <a:endParaRPr lang="en-US" sz="2200" dirty="0"/>
-          </a:p>
-        </p:txBody>
-      </p:sp>
-      <p:sp>
-        <p:nvSpPr>
-          <p:cNvPr id="4" name="Text 0"/>
-          <p:cNvSpPr/>
-          <p:nvPr>
-            <p:ph idx="100" type="title" hasCustomPrompt="1"/>
-          </p:nvPr>
-        </p:nvSpPr>
-        <p:spPr>
-          <a:xfrm>
-            <a:off x="548640" y="1691640"/>
-            <a:ext cx="5852160" cy="1371600"/>
+            <a:endParaRPr lang="ja-JP" sz="2200" dirty="0"/>
+          </a:p>
+        </p:txBody>
+      </p:sp>
+      <p:sp>
+        <p:nvSpPr>
+          <p:cNvPr id="4" name="Text 1"/>
+          <p:cNvSpPr txBox="1"/>
+          <p:nvPr/>
+        </p:nvSpPr>
+        <p:spPr>
+          <a:xfrm>
+            <a:off x="457200" y="1188720"/>
+            <a:ext cx="6035040" cy="1600200"/>
           </a:xfrm>
           <a:prstGeom prst="rect">
             <a:avLst/>
@@ -2318,78 +2070,102 @@
           <a:ln/>
         </p:spPr>
         <p:txBody>
-          <a:bodyPr wrap="square" lIns="0" tIns="0" rIns="0" bIns="0" rtlCol="0" anchor="t"/>
-          <a:lstStyle/>
-          <a:p>
-            <a:pPr algn="l" indent="0" marL="0">
+          <a:bodyPr wrap="square" lIns="0" tIns="0" rIns="0" bIns="0" rtlCol="0" anchor="ctr">
+            <a:normAutofit/>
+          </a:bodyPr>
+          <a:lstStyle/>
+          <a:p>
+            <a:pPr indent="0" marL="0">
+              <a:lnSpc>
+                <a:spcPct val="105000"/>
+              </a:lnSpc>
               <a:buNone/>
             </a:pPr>
             <a:r>
-              <a:rPr lang="en-US" sz="3200" b="1" dirty="0">
-                <a:solidFill>
-                  <a:schemeClr val="tx1"/>
-                </a:solidFill>
+              <a:rPr lang="ja-JP" altLang="en-US" sz="3200" dirty="0">
+                <a:solidFill>
+                  <a:srgbClr val="1A1A1A"/>
+                </a:solidFill>
+                <a:latin typeface="Dela Gothic One" pitchFamily="34" charset="0"/>
+                <a:ea typeface="けいふぉんと" pitchFamily="34" charset="-122"/>
+                <a:cs typeface="Dela Gothic One" pitchFamily="34" charset="-120"/>
               </a:rPr>
               <a:t>Lark BASEとつなぐ（API）</a:t>
             </a:r>
-            <a:endParaRPr lang="en-US" sz="3200" dirty="0"/>
-          </a:p>
-        </p:txBody>
-      </p:sp>
-      <p:sp>
-        <p:nvSpPr>
-          <p:cNvPr id="5" name="Text 0"/>
-          <p:cNvSpPr/>
-          <p:nvPr>
-            <p:ph idx="101" type="body" hasCustomPrompt="1"/>
-          </p:nvPr>
-        </p:nvSpPr>
-        <p:spPr>
-          <a:xfrm>
-            <a:off x="548640" y="3246120"/>
-            <a:ext cx="5852160" cy="457200"/>
-          </a:xfrm>
-          <a:prstGeom prst="rect">
-            <a:avLst/>
-          </a:prstGeom>
-          <a:noFill/>
-          <a:ln/>
-        </p:spPr>
-        <p:txBody>
-          <a:bodyPr wrap="square" lIns="0" tIns="0" rIns="0" bIns="0" rtlCol="0"/>
-          <a:lstStyle/>
-          <a:p>
-            <a:pPr indent="0" marL="0">
+            <a:endParaRPr lang="ja-JP" sz="3200" dirty="0"/>
+          </a:p>
+        </p:txBody>
+      </p:sp>
+      <p:sp>
+        <p:nvSpPr>
+          <p:cNvPr id="5" name="Text 2"/>
+          <p:cNvSpPr txBox="1"/>
+          <p:nvPr/>
+        </p:nvSpPr>
+        <p:spPr>
+          <a:xfrm rot="-120000">
+            <a:off x="457200" y="2971800"/>
+            <a:ext cx="4937760" cy="502920"/>
+          </a:xfrm>
+          <a:prstGeom prst="rect">
+            <a:avLst/>
+          </a:prstGeom>
+          <a:solidFill>
+            <a:srgbClr val="DD6420"/>
+          </a:solidFill>
+          <a:ln w="19050">
+            <a:solidFill>
+              <a:srgbClr val="1A1A1A"/>
+            </a:solidFill>
+          </a:ln>
+          <a:effectLst>
+            <a:outerShdw sx="100000" sy="100000" kx="0" ky="0" algn="bl" rotWithShape="0" blurRad="101600" dist="38100" dir="2700000">
+              <a:srgbClr val="1A1A1A">
+                <a:alpha val="100000"/>
+              </a:srgbClr>
+            </a:outerShdw>
+          </a:effectLst>
+        </p:spPr>
+        <p:txBody>
+          <a:bodyPr wrap="square" lIns="0" tIns="0" rIns="0" bIns="0" rtlCol="0" anchor="ctr"/>
+          <a:lstStyle/>
+          <a:p>
+            <a:pPr algn="ctr" indent="0" marL="0">
               <a:buNone/>
             </a:pPr>
             <a:r>
-              <a:rPr lang="en-US" sz="1400" dirty="0">
-                <a:solidFill>
-                  <a:schemeClr val="tx1"/>
-                </a:solidFill>
+              <a:rPr lang="ja-JP" altLang="en-US" sz="1600" b="1" dirty="0">
+                <a:solidFill>
+                  <a:srgbClr val="FFFFFF"/>
+                </a:solidFill>
+                <a:latin typeface="Noto Sans JP" pitchFamily="34" charset="0"/>
+                <a:ea typeface="Noto Sans JP" pitchFamily="34" charset="-122"/>
+                <a:cs typeface="Noto Sans JP" pitchFamily="34" charset="-120"/>
               </a:rPr>
-              <a:t>フェーズ3 AIで作る　｜　第6週</a:t>
-            </a:r>
-            <a:endParaRPr lang="en-US" sz="1400" dirty="0"/>
-          </a:p>
-        </p:txBody>
-      </p:sp>
-      <p:sp>
-        <p:nvSpPr>
-          <p:cNvPr id="6" name="title-circle"/>
+              <a:t>フェーズ3 AIで作る｜第6週</a:t>
+            </a:r>
+            <a:endParaRPr lang="ja-JP" sz="1600" dirty="0"/>
+          </a:p>
+        </p:txBody>
+      </p:sp>
+      <p:sp>
+        <p:nvSpPr>
+          <p:cNvPr id="6" name="card"/>
           <p:cNvSpPr/>
           <p:nvPr/>
         </p:nvSpPr>
         <p:spPr>
           <a:xfrm>
-            <a:off x="6537960" y="1188720"/>
-            <a:ext cx="2103120" cy="2103120"/>
-          </a:xfrm>
-          <a:prstGeom prst="ellipse">
-            <a:avLst/>
+            <a:off x="457200" y="3730752"/>
+            <a:ext cx="4937760" cy="896112"/>
+          </a:xfrm>
+          <a:prstGeom prst="roundRect">
+            <a:avLst>
+              <a:gd name="adj" fmla="val 10204"/>
+            </a:avLst>
           </a:prstGeom>
           <a:solidFill>
-            <a:schemeClr val="bg1"/>
+            <a:srgbClr val="FFFFFF"/>
           </a:solidFill>
           <a:ln w="25400">
             <a:solidFill>
@@ -2398,38 +2174,76 @@
             <a:prstDash val="solid"/>
           </a:ln>
           <a:effectLst>
-            <a:outerShdw sx="100000" sy="100000" kx="0" ky="0" algn="bl" rotWithShape="0" blurRad="101600" dist="38100" dir="2700000">
-              <a:srgbClr val="000000">
-                <a:alpha val="18000"/>
+            <a:outerShdw sx="100000" sy="100000" kx="0" ky="0" algn="bl" rotWithShape="0" blurRad="101600" dist="50800" dir="2700000">
+              <a:srgbClr val="1A1A1A">
+                <a:alpha val="100000"/>
               </a:srgbClr>
             </a:outerShdw>
           </a:effectLst>
         </p:spPr>
       </p:sp>
-      <p:pic>
-        <p:nvPicPr>
-          <p:cNvPr id="7" name="title-icon" descr="preencoded.png">    </p:cNvPr>
-          <p:cNvPicPr>
-            <a:picLocks noChangeAspect="1"/>
-          </p:cNvPicPr>
-          <p:nvPr/>
-        </p:nvPicPr>
-        <p:blipFill>
-          <a:blip r:embed="rId1"/>
-          <a:stretch>
-            <a:fillRect/>
-          </a:stretch>
-        </p:blipFill>
-        <p:spPr>
-          <a:xfrm>
-            <a:off x="7086600" y="1737360"/>
-            <a:ext cx="1005840" cy="1005840"/>
-          </a:xfrm>
-          <a:prstGeom prst="rect">
-            <a:avLst/>
-          </a:prstGeom>
-        </p:spPr>
-      </p:pic>
+      <p:sp>
+        <p:nvSpPr>
+          <p:cNvPr id="7" name="Text 4"/>
+          <p:cNvSpPr txBox="1"/>
+          <p:nvPr/>
+        </p:nvSpPr>
+        <p:spPr>
+          <a:xfrm>
+            <a:off x="658368" y="3767328"/>
+            <a:ext cx="4572000" cy="822960"/>
+          </a:xfrm>
+          <a:prstGeom prst="rect">
+            <a:avLst/>
+          </a:prstGeom>
+          <a:noFill/>
+          <a:ln/>
+        </p:spPr>
+        <p:txBody>
+          <a:bodyPr wrap="square" lIns="0" tIns="0" rIns="0" bIns="0" rtlCol="0" anchor="ctr"/>
+          <a:lstStyle/>
+          <a:p>
+            <a:pPr indent="0" marL="0">
+              <a:spcAft>
+                <a:spcPts val="200"/>
+              </a:spcAft>
+              <a:buNone/>
+            </a:pPr>
+            <a:r>
+              <a:rPr lang="ja-JP" altLang="en-US" sz="1500" b="1" dirty="0">
+                <a:solidFill>
+                  <a:srgbClr val="1A1A1A"/>
+                </a:solidFill>
+                <a:latin typeface="Noto Sans JP" pitchFamily="34" charset="0"/>
+                <a:ea typeface="Noto Sans JP" pitchFamily="34" charset="-122"/>
+                <a:cs typeface="Noto Sans JP" pitchFamily="34" charset="-120"/>
+              </a:rPr>
+              <a:t>マナベル｜AI×Lark 構築者育成講座</a:t>
+            </a:r>
+            <a:endParaRPr lang="ja-JP" sz="1500" dirty="0"/>
+          </a:p>
+          <a:p>
+            <a:pPr indent="0" marL="0">
+              <a:spcAft>
+                <a:spcPts val="200"/>
+              </a:spcAft>
+              <a:buNone/>
+            </a:pPr>
+            <a:r>
+              <a:rPr lang="ja-JP" altLang="en-US" sz="1150" b="1" dirty="0">
+                <a:solidFill>
+                  <a:srgbClr val="DD6420"/>
+                </a:solidFill>
+                <a:latin typeface="Noto Sans JP" pitchFamily="34" charset="0"/>
+                <a:ea typeface="Noto Sans JP" pitchFamily="34" charset="-122"/>
+                <a:cs typeface="Noto Sans JP" pitchFamily="34" charset="-120"/>
+              </a:rPr>
+              <a:t>ささエール ／ OFFICE PLATA　笹原 彰朗</a:t>
+            </a:r>
+            <a:endParaRPr lang="ja-JP" sz="1500" dirty="0"/>
+          </a:p>
+        </p:txBody>
+      </p:sp>
     </p:spTree>
   </p:cSld>
   <p:clrMapOvr>
@@ -2455,18 +2269,92 @@
           <a:chExt cx="0" cy="0"/>
         </a:xfrm>
       </p:grpSpPr>
-      <p:sp>
-        <p:nvSpPr>
-          <p:cNvPr id="2" name="Text 0"/>
-          <p:cNvSpPr/>
-          <p:nvPr>
-            <p:ph idx="100" type="title" hasCustomPrompt="1"/>
-          </p:nvPr>
-        </p:nvSpPr>
-        <p:spPr>
-          <a:xfrm>
-            <a:off x="548640" y="1463040"/>
-            <a:ext cx="8046720" cy="1005840"/>
+      <p:pic>
+        <p:nvPicPr>
+          <p:cNvPr id="2" name="portrait" descr="講師 笹原彰朗">    </p:cNvPr>
+          <p:cNvPicPr>
+            <a:picLocks noChangeAspect="1"/>
+          </p:cNvPicPr>
+          <p:nvPr/>
+        </p:nvPicPr>
+        <p:blipFill>
+          <a:blip r:embed="rId1"/>
+          <a:stretch>
+            <a:fillRect/>
+          </a:stretch>
+        </p:blipFill>
+        <p:spPr>
+          <a:xfrm>
+            <a:off x="6003588" y="1211580"/>
+            <a:ext cx="2866092" cy="3931920"/>
+          </a:xfrm>
+          <a:prstGeom prst="rect">
+            <a:avLst/>
+          </a:prstGeom>
+        </p:spPr>
+      </p:pic>
+      <p:sp>
+        <p:nvSpPr>
+          <p:cNvPr id="3" name="Text 0"/>
+          <p:cNvSpPr txBox="1"/>
+          <p:nvPr/>
+        </p:nvSpPr>
+        <p:spPr>
+          <a:xfrm rot="-240000">
+            <a:off x="457200" y="548640"/>
+            <a:ext cx="1280160" cy="548640"/>
+          </a:xfrm>
+          <a:prstGeom prst="rect">
+            <a:avLst/>
+          </a:prstGeom>
+          <a:solidFill>
+            <a:srgbClr val="1A1A1A"/>
+          </a:solidFill>
+          <a:ln>
+            <a:solidFill>
+              <a:srgbClr val="1A1A1A"/>
+            </a:solidFill>
+          </a:ln>
+          <a:effectLst>
+            <a:outerShdw sx="100000" sy="100000" kx="0" ky="0" algn="bl" rotWithShape="0" blurRad="101600" dist="38100" dir="2700000">
+              <a:srgbClr val="1A1A1A">
+                <a:alpha val="100000"/>
+              </a:srgbClr>
+            </a:outerShdw>
+          </a:effectLst>
+        </p:spPr>
+        <p:txBody>
+          <a:bodyPr wrap="square" lIns="0" tIns="0" rIns="0" bIns="0" rtlCol="0" anchor="ctr"/>
+          <a:lstStyle/>
+          <a:p>
+            <a:pPr algn="ctr" indent="0" marL="0">
+              <a:buNone/>
+            </a:pPr>
+            <a:r>
+              <a:rPr lang="ja-JP" altLang="en-US" sz="2000" dirty="0">
+                <a:solidFill>
+                  <a:srgbClr val="FFD600"/>
+                </a:solidFill>
+                <a:latin typeface="Dela Gothic One" pitchFamily="34" charset="0"/>
+                <a:ea typeface="けいふぉんと" pitchFamily="34" charset="-122"/>
+                <a:cs typeface="Dela Gothic One" pitchFamily="34" charset="-120"/>
+              </a:rPr>
+              <a:t>次回</a:t>
+            </a:r>
+            <a:endParaRPr lang="ja-JP" sz="2000" dirty="0"/>
+          </a:p>
+        </p:txBody>
+      </p:sp>
+      <p:sp>
+        <p:nvSpPr>
+          <p:cNvPr id="4" name="Text 1"/>
+          <p:cNvSpPr txBox="1"/>
+          <p:nvPr/>
+        </p:nvSpPr>
+        <p:spPr>
+          <a:xfrm>
+            <a:off x="457200" y="1280160"/>
+            <a:ext cx="5852160" cy="1554480"/>
           </a:xfrm>
           <a:prstGeom prst="rect">
             <a:avLst/>
@@ -2475,73 +2363,141 @@
           <a:ln/>
         </p:spPr>
         <p:txBody>
-          <a:bodyPr wrap="square" lIns="0" tIns="0" rIns="0" bIns="0" rtlCol="0" anchor="t"/>
-          <a:lstStyle/>
-          <a:p>
-            <a:pPr algn="l" indent="0" marL="0">
-              <a:buNone/>
-            </a:pPr>
-            <a:r>
-              <a:rPr lang="en-US" sz="3000" b="1" dirty="0">
-                <a:solidFill>
-                  <a:schemeClr val="accent1"/>
-                </a:solidFill>
-              </a:rPr>
-              <a:t>次回：第10回 LINEとつなぐ（LIFF）</a:t>
-            </a:r>
-            <a:endParaRPr lang="en-US" sz="3000" dirty="0"/>
-          </a:p>
-        </p:txBody>
-      </p:sp>
-      <p:sp>
-        <p:nvSpPr>
-          <p:cNvPr id="3" name="Text 0"/>
-          <p:cNvSpPr/>
-          <p:nvPr>
-            <p:ph idx="101" type="body" hasCustomPrompt="1"/>
-          </p:nvPr>
-        </p:nvSpPr>
-        <p:spPr>
-          <a:xfrm>
-            <a:off x="548640" y="2606040"/>
-            <a:ext cx="8046720" cy="1097280"/>
-          </a:xfrm>
-          <a:prstGeom prst="rect">
-            <a:avLst/>
-          </a:prstGeom>
-          <a:noFill/>
-          <a:ln/>
-        </p:spPr>
-        <p:txBody>
-          <a:bodyPr wrap="square" lIns="0" tIns="0" rIns="0" bIns="0" rtlCol="0" anchor="t"/>
+          <a:bodyPr wrap="square" lIns="0" tIns="0" rIns="0" bIns="0" rtlCol="0" anchor="ctr">
+            <a:normAutofit/>
+          </a:bodyPr>
           <a:lstStyle/>
           <a:p>
             <a:pPr indent="0" marL="0">
               <a:buNone/>
             </a:pPr>
             <a:r>
-              <a:rPr lang="en-US" sz="1500" dirty="0">
-                <a:solidFill>
-                  <a:schemeClr val="bg1"/>
-                </a:solidFill>
+              <a:rPr lang="ja-JP" altLang="en-US" sz="3200" dirty="0">
+                <a:solidFill>
+                  <a:srgbClr val="1A1A1A"/>
+                </a:solidFill>
+                <a:latin typeface="Dela Gothic One" pitchFamily="34" charset="0"/>
+                <a:ea typeface="けいふぉんと" pitchFamily="34" charset="-122"/>
+                <a:cs typeface="Dela Gothic One" pitchFamily="34" charset="-120"/>
               </a:rPr>
-              <a:t>わからないところは、講座グループでいつでも質問してください。</a:t>
-            </a:r>
-            <a:endParaRPr lang="en-US" sz="1500" dirty="0"/>
+              <a:t>第10回</a:t>
+            </a:r>
+            <a:endParaRPr lang="ja-JP" sz="3200" dirty="0"/>
           </a:p>
           <a:p>
             <a:pPr indent="0" marL="0">
               <a:buNone/>
             </a:pPr>
             <a:r>
-              <a:rPr lang="en-US" sz="1500" dirty="0">
-                <a:solidFill>
-                  <a:schemeClr val="bg1"/>
-                </a:solidFill>
+              <a:rPr lang="ja-JP" altLang="en-US" sz="3200" dirty="0">
+                <a:solidFill>
+                  <a:srgbClr val="1A1A1A"/>
+                </a:solidFill>
+                <a:latin typeface="Dela Gothic One" pitchFamily="34" charset="0"/>
+                <a:ea typeface="けいふぉんと" pitchFamily="34" charset="-122"/>
+                <a:cs typeface="Dela Gothic One" pitchFamily="34" charset="-120"/>
+              </a:rPr>
+              <a:t>LINEとつなぐ（LIFF）</a:t>
+            </a:r>
+            <a:endParaRPr lang="ja-JP" sz="3200" dirty="0"/>
+          </a:p>
+        </p:txBody>
+      </p:sp>
+      <p:sp>
+        <p:nvSpPr>
+          <p:cNvPr id="5" name="card"/>
+          <p:cNvSpPr/>
+          <p:nvPr/>
+        </p:nvSpPr>
+        <p:spPr>
+          <a:xfrm>
+            <a:off x="457200" y="3108960"/>
+            <a:ext cx="5394960" cy="1325880"/>
+          </a:xfrm>
+          <a:prstGeom prst="roundRect">
+            <a:avLst>
+              <a:gd name="adj" fmla="val 6897"/>
+            </a:avLst>
+          </a:prstGeom>
+          <a:solidFill>
+            <a:srgbClr val="FFFFFF"/>
+          </a:solidFill>
+          <a:ln w="25400">
+            <a:solidFill>
+              <a:srgbClr val="1A1A1A"/>
+            </a:solidFill>
+            <a:prstDash val="solid"/>
+          </a:ln>
+          <a:effectLst>
+            <a:outerShdw sx="100000" sy="100000" kx="0" ky="0" algn="bl" rotWithShape="0" blurRad="101600" dist="50800" dir="2700000">
+              <a:srgbClr val="1A1A1A">
+                <a:alpha val="100000"/>
+              </a:srgbClr>
+            </a:outerShdw>
+          </a:effectLst>
+        </p:spPr>
+      </p:sp>
+      <p:sp>
+        <p:nvSpPr>
+          <p:cNvPr id="6" name="Text 3"/>
+          <p:cNvSpPr txBox="1"/>
+          <p:nvPr/>
+        </p:nvSpPr>
+        <p:spPr>
+          <a:xfrm>
+            <a:off x="685800" y="3200400"/>
+            <a:ext cx="4937760" cy="1143000"/>
+          </a:xfrm>
+          <a:prstGeom prst="rect">
+            <a:avLst/>
+          </a:prstGeom>
+          <a:noFill/>
+          <a:ln/>
+        </p:spPr>
+        <p:txBody>
+          <a:bodyPr wrap="square" lIns="0" tIns="0" rIns="0" bIns="0" rtlCol="0" anchor="ctr">
+            <a:normAutofit/>
+          </a:bodyPr>
+          <a:lstStyle/>
+          <a:p>
+            <a:pPr indent="0" marL="0">
+              <a:spcAft>
+                <a:spcPts val="400"/>
+              </a:spcAft>
+              <a:buNone/>
+            </a:pPr>
+            <a:r>
+              <a:rPr lang="ja-JP" altLang="en-US" sz="1400" b="1" dirty="0">
+                <a:solidFill>
+                  <a:srgbClr val="1A1A1A"/>
+                </a:solidFill>
+                <a:latin typeface="Noto Sans JP" pitchFamily="34" charset="0"/>
+                <a:ea typeface="Noto Sans JP" pitchFamily="34" charset="-122"/>
+                <a:cs typeface="Noto Sans JP" pitchFamily="34" charset="-120"/>
+              </a:rPr>
+              <a:t>わからないところは、講座グループでいつでも質問してください。</a:t>
+            </a:r>
+            <a:endParaRPr lang="ja-JP" sz="1400" dirty="0"/>
+          </a:p>
+          <a:p>
+            <a:pPr indent="0" marL="0">
+              <a:spcAft>
+                <a:spcPts val="400"/>
+              </a:spcAft>
+              <a:buNone/>
+            </a:pPr>
+            <a:r>
+              <a:rPr lang="ja-JP" altLang="en-US" sz="1400" b="1" dirty="0">
+                <a:solidFill>
+                  <a:srgbClr val="1A1A1A"/>
+                </a:solidFill>
+                <a:latin typeface="Noto Sans JP" pitchFamily="34" charset="0"/>
+                <a:ea typeface="Noto Sans JP" pitchFamily="34" charset="-122"/>
+                <a:cs typeface="Noto Sans JP" pitchFamily="34" charset="-120"/>
               </a:rPr>
               <a:t>APIキーやパスワードは送らないでください。</a:t>
             </a:r>
-            <a:endParaRPr lang="en-US" sz="1500" dirty="0"/>
+            <a:endParaRPr lang="ja-JP" sz="1400" dirty="0"/>
           </a:p>
         </p:txBody>
       </p:sp>
@@ -2573,15 +2529,58 @@
       <p:sp>
         <p:nvSpPr>
           <p:cNvPr id="2" name="Text 0"/>
-          <p:cNvSpPr/>
-          <p:nvPr>
-            <p:ph idx="100" type="title" hasCustomPrompt="1"/>
-          </p:nvPr>
-        </p:nvSpPr>
-        <p:spPr>
-          <a:xfrm>
-            <a:off x="548640" y="658368"/>
-            <a:ext cx="8046720" cy="566928"/>
+          <p:cNvSpPr txBox="1"/>
+          <p:nvPr/>
+        </p:nvSpPr>
+        <p:spPr>
+          <a:xfrm rot="-180000">
+            <a:off x="411480" y="201168"/>
+            <a:ext cx="1040587" cy="352044"/>
+          </a:xfrm>
+          <a:prstGeom prst="rect">
+            <a:avLst/>
+          </a:prstGeom>
+          <a:solidFill>
+            <a:srgbClr val="1A1A1A"/>
+          </a:solidFill>
+          <a:ln>
+            <a:solidFill>
+              <a:srgbClr val="1A1A1A"/>
+            </a:solidFill>
+          </a:ln>
+        </p:spPr>
+        <p:txBody>
+          <a:bodyPr wrap="square" lIns="0" tIns="0" rIns="0" bIns="0" rtlCol="0" anchor="ctr"/>
+          <a:lstStyle/>
+          <a:p>
+            <a:pPr algn="ctr" indent="0" marL="0">
+              <a:buNone/>
+            </a:pPr>
+            <a:r>
+              <a:rPr lang="ja-JP" altLang="en-US" sz="1100" dirty="0">
+                <a:solidFill>
+                  <a:srgbClr val="FFFFFF"/>
+                </a:solidFill>
+                <a:latin typeface="Dela Gothic One" pitchFamily="34" charset="0"/>
+                <a:ea typeface="けいふぉんと" pitchFamily="34" charset="-122"/>
+                <a:cs typeface="Dela Gothic One" pitchFamily="34" charset="-120"/>
+              </a:rPr>
+              <a:t>はじめに</a:t>
+            </a:r>
+            <a:endParaRPr lang="ja-JP" sz="1100" dirty="0"/>
+          </a:p>
+        </p:txBody>
+      </p:sp>
+      <p:sp>
+        <p:nvSpPr>
+          <p:cNvPr id="3" name="Text 1"/>
+          <p:cNvSpPr txBox="1"/>
+          <p:nvPr/>
+        </p:nvSpPr>
+        <p:spPr>
+          <a:xfrm>
+            <a:off x="411480" y="502920"/>
+            <a:ext cx="8321040" cy="685800"/>
           </a:xfrm>
           <a:prstGeom prst="rect">
             <a:avLst/>
@@ -2590,105 +2589,79 @@
           <a:ln/>
         </p:spPr>
         <p:txBody>
-          <a:bodyPr wrap="square" lIns="0" tIns="0" rIns="0" bIns="0" rtlCol="0" anchor="ctr"/>
-          <a:lstStyle/>
-          <a:p>
-            <a:pPr algn="l" indent="0" marL="0">
+          <a:bodyPr wrap="square" lIns="0" tIns="0" rIns="0" bIns="0" rtlCol="0" anchor="ctr">
+            <a:normAutofit/>
+          </a:bodyPr>
+          <a:lstStyle/>
+          <a:p>
+            <a:pPr indent="0" marL="0">
               <a:buNone/>
             </a:pPr>
             <a:r>
-              <a:rPr lang="en-US" sz="2400" b="1" dirty="0">
-                <a:solidFill>
-                  <a:schemeClr val="tx1"/>
-                </a:solidFill>
+              <a:rPr lang="ja-JP" altLang="en-US" sz="2600" dirty="0">
+                <a:solidFill>
+                  <a:srgbClr val="1A1A1A"/>
+                </a:solidFill>
+                <a:latin typeface="Dela Gothic One" pitchFamily="34" charset="0"/>
+                <a:ea typeface="けいふぉんと" pitchFamily="34" charset="-122"/>
+                <a:cs typeface="Dela Gothic One" pitchFamily="34" charset="-120"/>
               </a:rPr>
               <a:t>今日のゴールと流れ</a:t>
             </a:r>
-            <a:endParaRPr lang="en-US" sz="2400" dirty="0"/>
-          </a:p>
-        </p:txBody>
-      </p:sp>
-      <p:sp>
-        <p:nvSpPr>
-          <p:cNvPr id="3" name="chip"/>
+            <a:endParaRPr lang="ja-JP" sz="2600" dirty="0"/>
+          </a:p>
+        </p:txBody>
+      </p:sp>
+      <p:sp>
+        <p:nvSpPr>
+          <p:cNvPr id="4" name="card"/>
           <p:cNvSpPr/>
           <p:nvPr/>
         </p:nvSpPr>
         <p:spPr>
           <a:xfrm>
-            <a:off x="548640" y="292608"/>
-            <a:ext cx="932688" cy="292608"/>
+            <a:off x="502920" y="1371600"/>
+            <a:ext cx="3941064" cy="1280160"/>
           </a:xfrm>
           <a:prstGeom prst="roundRect">
             <a:avLst>
-              <a:gd name="adj" fmla="val 50000"/>
+              <a:gd name="adj" fmla="val 7143"/>
             </a:avLst>
           </a:prstGeom>
           <a:solidFill>
-            <a:schemeClr val="tx1"/>
+            <a:srgbClr val="FFFFFF"/>
           </a:solidFill>
-          <a:ln w="12700">
+          <a:ln w="25400">
             <a:solidFill>
-              <a:schemeClr val="tx1"/>
+              <a:srgbClr val="1A1A1A"/>
             </a:solidFill>
             <a:prstDash val="solid"/>
           </a:ln>
-        </p:spPr>
-      </p:sp>
-      <p:sp>
-        <p:nvSpPr>
-          <p:cNvPr id="4" name="chip-text"/>
-          <p:cNvSpPr txBox="1"/>
-          <p:nvPr/>
-        </p:nvSpPr>
-        <p:spPr>
-          <a:xfrm>
-            <a:off x="548640" y="292608"/>
-            <a:ext cx="932688" cy="292608"/>
-          </a:xfrm>
-          <a:prstGeom prst="rect">
-            <a:avLst/>
-          </a:prstGeom>
-          <a:noFill/>
-          <a:ln/>
-        </p:spPr>
-        <p:txBody>
-          <a:bodyPr wrap="square" lIns="0" tIns="0" rIns="0" bIns="0" rtlCol="0" anchor="ctr"/>
-          <a:lstStyle/>
-          <a:p>
-            <a:pPr algn="ctr" indent="0" marL="0">
-              <a:buNone/>
-            </a:pPr>
-            <a:r>
-              <a:rPr lang="en-US" sz="1100" b="1" dirty="0">
-                <a:solidFill>
-                  <a:schemeClr val="accent1"/>
-                </a:solidFill>
-              </a:rPr>
-              <a:t>はじめに</a:t>
-            </a:r>
-            <a:endParaRPr lang="en-US" sz="1100" dirty="0"/>
-          </a:p>
-        </p:txBody>
-      </p:sp>
-      <p:sp>
-        <p:nvSpPr>
-          <p:cNvPr id="5" name="card"/>
+          <a:effectLst>
+            <a:outerShdw sx="100000" sy="100000" kx="0" ky="0" algn="bl" rotWithShape="0" blurRad="101600" dist="50800" dir="2700000">
+              <a:srgbClr val="1A1A1A">
+                <a:alpha val="100000"/>
+              </a:srgbClr>
+            </a:outerShdw>
+          </a:effectLst>
+        </p:spPr>
+      </p:sp>
+      <p:sp>
+        <p:nvSpPr>
+          <p:cNvPr id="5" name="icon-circle"/>
           <p:cNvSpPr/>
           <p:nvPr/>
         </p:nvSpPr>
         <p:spPr>
           <a:xfrm>
-            <a:off x="548640" y="1417320"/>
-            <a:ext cx="3909060" cy="1280160"/>
-          </a:xfrm>
-          <a:prstGeom prst="roundRect">
-            <a:avLst>
-              <a:gd name="adj" fmla="val 8571"/>
-            </a:avLst>
+            <a:off x="685800" y="1572768"/>
+            <a:ext cx="438912" cy="438912"/>
+          </a:xfrm>
+          <a:prstGeom prst="ellipse">
+            <a:avLst/>
           </a:prstGeom>
           <a:solidFill>
-            <a:schemeClr val="bg2"/>
+            <a:srgbClr val="DD6420"/>
           </a:solidFill>
           <a:ln w="19050">
             <a:solidFill>
@@ -2696,43 +2669,11 @@
             </a:solidFill>
             <a:prstDash val="solid"/>
           </a:ln>
-          <a:effectLst>
-            <a:outerShdw sx="100000" sy="100000" kx="0" ky="0" algn="bl" rotWithShape="0" blurRad="101600" dist="38100" dir="2700000">
-              <a:srgbClr val="000000">
-                <a:alpha val="18000"/>
-              </a:srgbClr>
-            </a:outerShdw>
-          </a:effectLst>
-        </p:spPr>
-      </p:sp>
-      <p:sp>
-        <p:nvSpPr>
-          <p:cNvPr id="6" name="icon-circle"/>
-          <p:cNvSpPr/>
-          <p:nvPr/>
-        </p:nvSpPr>
-        <p:spPr>
-          <a:xfrm>
-            <a:off x="731520" y="1600200"/>
-            <a:ext cx="411480" cy="411480"/>
-          </a:xfrm>
-          <a:prstGeom prst="ellipse">
-            <a:avLst/>
-          </a:prstGeom>
-          <a:solidFill>
-            <a:schemeClr val="accent1"/>
-          </a:solidFill>
-          <a:ln w="15875">
-            <a:solidFill>
-              <a:srgbClr val="1A1A1A"/>
-            </a:solidFill>
-            <a:prstDash val="solid"/>
-          </a:ln>
         </p:spPr>
       </p:sp>
       <p:pic>
         <p:nvPicPr>
-          <p:cNvPr id="7" name="icon" descr="preencoded.png">    </p:cNvPr>
+          <p:cNvPr id="6" name="icon" descr="preencoded.png">    </p:cNvPr>
           <p:cNvPicPr>
             <a:picLocks noChangeAspect="1"/>
           </p:cNvPicPr>
@@ -2746,8 +2687,8 @@
         </p:blipFill>
         <p:spPr>
           <a:xfrm>
-            <a:off x="838505" y="1707185"/>
-            <a:ext cx="197510" cy="197510"/>
+            <a:off x="795528" y="1682496"/>
+            <a:ext cx="219456" cy="219456"/>
           </a:xfrm>
           <a:prstGeom prst="rect">
             <a:avLst/>
@@ -2756,14 +2697,14 @@
       </p:pic>
       <p:sp>
         <p:nvSpPr>
-          <p:cNvPr id="8" name="goal"/>
+          <p:cNvPr id="7" name="goal"/>
           <p:cNvSpPr txBox="1"/>
           <p:nvPr/>
         </p:nvSpPr>
         <p:spPr>
           <a:xfrm>
-            <a:off x="1280160" y="1508760"/>
-            <a:ext cx="2994660" cy="1097280"/>
+            <a:off x="1252728" y="1463040"/>
+            <a:ext cx="3026664" cy="1097280"/>
           </a:xfrm>
           <a:prstGeom prst="rect">
             <a:avLst/>
@@ -2772,42 +2713,79 @@
           <a:ln/>
         </p:spPr>
         <p:txBody>
-          <a:bodyPr wrap="square" lIns="0" tIns="0" rIns="0" bIns="0" rtlCol="0" anchor="ctr"/>
+          <a:bodyPr wrap="square" lIns="0" tIns="0" rIns="0" bIns="0" rtlCol="0" anchor="ctr">
+            <a:normAutofit/>
+          </a:bodyPr>
           <a:lstStyle/>
           <a:p>
             <a:pPr indent="0" marL="0">
               <a:buNone/>
             </a:pPr>
             <a:r>
-              <a:rPr lang="en-US" sz="1400" b="1" dirty="0">
-                <a:solidFill>
-                  <a:schemeClr val="tx1"/>
-                </a:solidFill>
+              <a:rPr lang="ja-JP" altLang="en-US" sz="1400" b="1" dirty="0">
+                <a:solidFill>
+                  <a:srgbClr val="1A1A1A"/>
+                </a:solidFill>
+                <a:latin typeface="Noto Sans JP" pitchFamily="34" charset="0"/>
+                <a:ea typeface="Noto Sans JP" pitchFamily="34" charset="-122"/>
+                <a:cs typeface="Noto Sans JP" pitchFamily="34" charset="-120"/>
               </a:rPr>
               <a:t>APIのしくみと、秘密情報（APIキー）の守り方がわかる</a:t>
             </a:r>
-            <a:endParaRPr lang="en-US" sz="1400" dirty="0"/>
-          </a:p>
-        </p:txBody>
-      </p:sp>
-      <p:sp>
-        <p:nvSpPr>
-          <p:cNvPr id="9" name="card"/>
+            <a:endParaRPr lang="ja-JP" sz="1400" dirty="0"/>
+          </a:p>
+        </p:txBody>
+      </p:sp>
+      <p:sp>
+        <p:nvSpPr>
+          <p:cNvPr id="8" name="card"/>
           <p:cNvSpPr/>
           <p:nvPr/>
         </p:nvSpPr>
         <p:spPr>
           <a:xfrm>
-            <a:off x="4686300" y="1417320"/>
-            <a:ext cx="3909060" cy="1280160"/>
+            <a:off x="4700016" y="1371600"/>
+            <a:ext cx="3941064" cy="1280160"/>
           </a:xfrm>
           <a:prstGeom prst="roundRect">
             <a:avLst>
-              <a:gd name="adj" fmla="val 8571"/>
+              <a:gd name="adj" fmla="val 7143"/>
             </a:avLst>
           </a:prstGeom>
           <a:solidFill>
-            <a:schemeClr val="bg2"/>
+            <a:srgbClr val="FFFFFF"/>
+          </a:solidFill>
+          <a:ln w="25400">
+            <a:solidFill>
+              <a:srgbClr val="1A1A1A"/>
+            </a:solidFill>
+            <a:prstDash val="solid"/>
+          </a:ln>
+          <a:effectLst>
+            <a:outerShdw sx="100000" sy="100000" kx="0" ky="0" algn="bl" rotWithShape="0" blurRad="101600" dist="50800" dir="2700000">
+              <a:srgbClr val="1A1A1A">
+                <a:alpha val="100000"/>
+              </a:srgbClr>
+            </a:outerShdw>
+          </a:effectLst>
+        </p:spPr>
+      </p:sp>
+      <p:sp>
+        <p:nvSpPr>
+          <p:cNvPr id="9" name="icon-circle"/>
+          <p:cNvSpPr/>
+          <p:nvPr/>
+        </p:nvSpPr>
+        <p:spPr>
+          <a:xfrm>
+            <a:off x="4882896" y="1572768"/>
+            <a:ext cx="438912" cy="438912"/>
+          </a:xfrm>
+          <a:prstGeom prst="ellipse">
+            <a:avLst/>
+          </a:prstGeom>
+          <a:solidFill>
+            <a:srgbClr val="DD6420"/>
           </a:solidFill>
           <a:ln w="19050">
             <a:solidFill>
@@ -2815,43 +2793,11 @@
             </a:solidFill>
             <a:prstDash val="solid"/>
           </a:ln>
-          <a:effectLst>
-            <a:outerShdw sx="100000" sy="100000" kx="0" ky="0" algn="bl" rotWithShape="0" blurRad="101600" dist="38100" dir="2700000">
-              <a:srgbClr val="000000">
-                <a:alpha val="18000"/>
-              </a:srgbClr>
-            </a:outerShdw>
-          </a:effectLst>
-        </p:spPr>
-      </p:sp>
-      <p:sp>
-        <p:nvSpPr>
-          <p:cNvPr id="10" name="icon-circle"/>
-          <p:cNvSpPr/>
-          <p:nvPr/>
-        </p:nvSpPr>
-        <p:spPr>
-          <a:xfrm>
-            <a:off x="4869180" y="1600200"/>
-            <a:ext cx="411480" cy="411480"/>
-          </a:xfrm>
-          <a:prstGeom prst="ellipse">
-            <a:avLst/>
-          </a:prstGeom>
-          <a:solidFill>
-            <a:schemeClr val="accent1"/>
-          </a:solidFill>
-          <a:ln w="15875">
-            <a:solidFill>
-              <a:srgbClr val="1A1A1A"/>
-            </a:solidFill>
-            <a:prstDash val="solid"/>
-          </a:ln>
         </p:spPr>
       </p:sp>
       <p:pic>
         <p:nvPicPr>
-          <p:cNvPr id="11" name="icon" descr="preencoded.png">    </p:cNvPr>
+          <p:cNvPr id="10" name="icon" descr="preencoded.png">    </p:cNvPr>
           <p:cNvPicPr>
             <a:picLocks noChangeAspect="1"/>
           </p:cNvPicPr>
@@ -2865,8 +2811,8 @@
         </p:blipFill>
         <p:spPr>
           <a:xfrm>
-            <a:off x="4976165" y="1707185"/>
-            <a:ext cx="197510" cy="197510"/>
+            <a:off x="4992624" y="1682496"/>
+            <a:ext cx="219456" cy="219456"/>
           </a:xfrm>
           <a:prstGeom prst="rect">
             <a:avLst/>
@@ -2875,14 +2821,14 @@
       </p:pic>
       <p:sp>
         <p:nvSpPr>
-          <p:cNvPr id="12" name="goal"/>
+          <p:cNvPr id="11" name="goal"/>
           <p:cNvSpPr txBox="1"/>
           <p:nvPr/>
         </p:nvSpPr>
         <p:spPr>
           <a:xfrm>
-            <a:off x="5417820" y="1508760"/>
-            <a:ext cx="2994660" cy="1097280"/>
+            <a:off x="5449824" y="1463040"/>
+            <a:ext cx="3026664" cy="1097280"/>
           </a:xfrm>
           <a:prstGeom prst="rect">
             <a:avLst/>
@@ -2891,59 +2837,105 @@
           <a:ln/>
         </p:spPr>
         <p:txBody>
-          <a:bodyPr wrap="square" lIns="0" tIns="0" rIns="0" bIns="0" rtlCol="0" anchor="ctr"/>
+          <a:bodyPr wrap="square" lIns="0" tIns="0" rIns="0" bIns="0" rtlCol="0" anchor="ctr">
+            <a:normAutofit/>
+          </a:bodyPr>
           <a:lstStyle/>
           <a:p>
             <a:pPr indent="0" marL="0">
               <a:buNone/>
             </a:pPr>
             <a:r>
-              <a:rPr lang="en-US" sz="1400" b="1" dirty="0">
-                <a:solidFill>
-                  <a:schemeClr val="tx1"/>
-                </a:solidFill>
+              <a:rPr lang="ja-JP" altLang="en-US" sz="1400" b="1" dirty="0">
+                <a:solidFill>
+                  <a:srgbClr val="1A1A1A"/>
+                </a:solidFill>
+                <a:latin typeface="Noto Sans JP" pitchFamily="34" charset="0"/>
+                <a:ea typeface="Noto Sans JP" pitchFamily="34" charset="-122"/>
+                <a:cs typeface="Noto Sans JP" pitchFamily="34" charset="-120"/>
               </a:rPr>
               <a:t>自作の受付ページから送ったデータが、Lark BASEに入る</a:t>
             </a:r>
-            <a:endParaRPr lang="en-US" sz="1400" dirty="0"/>
-          </a:p>
-        </p:txBody>
-      </p:sp>
-      <p:sp>
-        <p:nvSpPr>
-          <p:cNvPr id="13" name="Text 9"/>
+            <a:endParaRPr lang="ja-JP" sz="1400" dirty="0"/>
+          </a:p>
+        </p:txBody>
+      </p:sp>
+      <p:sp>
+        <p:nvSpPr>
+          <p:cNvPr id="12" name="Text 8"/>
           <p:cNvSpPr txBox="1"/>
           <p:nvPr/>
         </p:nvSpPr>
         <p:spPr>
-          <a:xfrm>
-            <a:off x="548640" y="2971800"/>
-            <a:ext cx="3657600" cy="320040"/>
-          </a:xfrm>
-          <a:prstGeom prst="rect">
-            <a:avLst/>
-          </a:prstGeom>
-          <a:noFill/>
-          <a:ln/>
+          <a:xfrm rot="-120000">
+            <a:off x="457200" y="2907792"/>
+            <a:ext cx="1915668" cy="352044"/>
+          </a:xfrm>
+          <a:prstGeom prst="rect">
+            <a:avLst/>
+          </a:prstGeom>
+          <a:solidFill>
+            <a:srgbClr val="1A1A1A"/>
+          </a:solidFill>
+          <a:ln>
+            <a:solidFill>
+              <a:srgbClr val="1A1A1A"/>
+            </a:solidFill>
+          </a:ln>
         </p:spPr>
         <p:txBody>
           <a:bodyPr wrap="square" lIns="0" tIns="0" rIns="0" bIns="0" rtlCol="0" anchor="ctr"/>
           <a:lstStyle/>
           <a:p>
-            <a:pPr indent="0" marL="0">
+            <a:pPr algn="ctr" indent="0" marL="0">
               <a:buNone/>
             </a:pPr>
             <a:r>
-              <a:rPr lang="en-US" sz="1300" b="1" dirty="0">
-                <a:solidFill>
-                  <a:schemeClr val="tx1"/>
-                </a:solidFill>
+              <a:rPr lang="ja-JP" altLang="en-US" sz="1100" dirty="0">
+                <a:solidFill>
+                  <a:srgbClr val="FFFFFF"/>
+                </a:solidFill>
+                <a:latin typeface="Dela Gothic One" pitchFamily="34" charset="0"/>
+                <a:ea typeface="けいふぉんと" pitchFamily="34" charset="-122"/>
+                <a:cs typeface="Dela Gothic One" pitchFamily="34" charset="-120"/>
               </a:rPr>
               <a:t>今日の流れ（90分）</a:t>
             </a:r>
-            <a:endParaRPr lang="en-US" sz="1300" dirty="0"/>
-          </a:p>
-        </p:txBody>
+            <a:endParaRPr lang="ja-JP" sz="1100" dirty="0"/>
+          </a:p>
+        </p:txBody>
+      </p:sp>
+      <p:sp>
+        <p:nvSpPr>
+          <p:cNvPr id="13" name="Shape 9"/>
+          <p:cNvSpPr/>
+          <p:nvPr/>
+        </p:nvSpPr>
+        <p:spPr>
+          <a:xfrm>
+            <a:off x="502920" y="3364992"/>
+            <a:ext cx="8138160" cy="685800"/>
+          </a:xfrm>
+          <a:prstGeom prst="rect">
+            <a:avLst/>
+          </a:prstGeom>
+          <a:solidFill>
+            <a:srgbClr val="FFFFFF"/>
+          </a:solidFill>
+          <a:ln w="25400">
+            <a:solidFill>
+              <a:srgbClr val="1A1A1A"/>
+            </a:solidFill>
+            <a:prstDash val="solid"/>
+          </a:ln>
+          <a:effectLst>
+            <a:outerShdw sx="100000" sy="100000" kx="0" ky="0" algn="bl" rotWithShape="0" blurRad="101600" dist="50800" dir="2700000">
+              <a:srgbClr val="1A1A1A">
+                <a:alpha val="100000"/>
+              </a:srgbClr>
+            </a:outerShdw>
+          </a:effectLst>
+        </p:spPr>
       </p:sp>
       <p:sp>
         <p:nvSpPr>
@@ -2953,8 +2945,8 @@
         </p:nvSpPr>
         <p:spPr>
           <a:xfrm>
-            <a:off x="548640" y="3383280"/>
-            <a:ext cx="894080" cy="685800"/>
+            <a:off x="502920" y="3364992"/>
+            <a:ext cx="904240" cy="685800"/>
           </a:xfrm>
           <a:prstGeom prst="rect">
             <a:avLst/>
@@ -2978,8 +2970,8 @@
         </p:nvSpPr>
         <p:spPr>
           <a:xfrm>
-            <a:off x="548640" y="3383280"/>
-            <a:ext cx="894080" cy="685800"/>
+            <a:off x="502920" y="3364992"/>
+            <a:ext cx="904240" cy="685800"/>
           </a:xfrm>
           <a:prstGeom prst="rect">
             <a:avLst/>
@@ -2995,28 +2987,34 @@
               <a:buNone/>
             </a:pPr>
             <a:r>
-              <a:rPr lang="en-US" sz="1050" b="1" dirty="0">
+              <a:rPr lang="ja-JP" altLang="en-US" sz="1050" b="1" dirty="0">
                 <a:solidFill>
                   <a:srgbClr val="FFD600"/>
                 </a:solidFill>
+                <a:latin typeface="Noto Sans JP" pitchFamily="34" charset="0"/>
+                <a:ea typeface="Noto Sans JP" pitchFamily="34" charset="-122"/>
+                <a:cs typeface="Noto Sans JP" pitchFamily="34" charset="-120"/>
               </a:rPr>
               <a:t>ふりかえり</a:t>
             </a:r>
-            <a:endParaRPr lang="en-US" sz="1050" dirty="0"/>
+            <a:endParaRPr lang="ja-JP" sz="1050" dirty="0"/>
           </a:p>
           <a:p>
             <a:pPr algn="ctr" indent="0" marL="0">
               <a:buNone/>
             </a:pPr>
             <a:r>
-              <a:rPr lang="en-US" sz="900" b="1" dirty="0">
+              <a:rPr lang="ja-JP" altLang="en-US" sz="900" b="1" dirty="0">
                 <a:solidFill>
                   <a:srgbClr val="FFD600"/>
                 </a:solidFill>
+                <a:latin typeface="Noto Sans JP" pitchFamily="34" charset="0"/>
+                <a:ea typeface="Noto Sans JP" pitchFamily="34" charset="-122"/>
+                <a:cs typeface="Noto Sans JP" pitchFamily="34" charset="-120"/>
               </a:rPr>
               <a:t>10分</a:t>
             </a:r>
-            <a:endParaRPr lang="en-US" sz="1050" dirty="0"/>
+            <a:endParaRPr lang="ja-JP" sz="1050" dirty="0"/>
           </a:p>
         </p:txBody>
       </p:sp>
@@ -3028,8 +3026,8 @@
         </p:nvSpPr>
         <p:spPr>
           <a:xfrm>
-            <a:off x="1442720" y="3383280"/>
-            <a:ext cx="894080" cy="685800"/>
+            <a:off x="1407160" y="3364992"/>
+            <a:ext cx="904240" cy="685800"/>
           </a:xfrm>
           <a:prstGeom prst="rect">
             <a:avLst/>
@@ -3053,8 +3051,8 @@
         </p:nvSpPr>
         <p:spPr>
           <a:xfrm>
-            <a:off x="1442720" y="3383280"/>
-            <a:ext cx="894080" cy="685800"/>
+            <a:off x="1407160" y="3364992"/>
+            <a:ext cx="904240" cy="685800"/>
           </a:xfrm>
           <a:prstGeom prst="rect">
             <a:avLst/>
@@ -3070,28 +3068,34 @@
               <a:buNone/>
             </a:pPr>
             <a:r>
-              <a:rPr lang="en-US" sz="1050" b="1" dirty="0">
+              <a:rPr lang="ja-JP" altLang="en-US" sz="1050" b="1" dirty="0">
                 <a:solidFill>
                   <a:srgbClr val="FFD600"/>
                 </a:solidFill>
+                <a:latin typeface="Noto Sans JP" pitchFamily="34" charset="0"/>
+                <a:ea typeface="Noto Sans JP" pitchFamily="34" charset="-122"/>
+                <a:cs typeface="Noto Sans JP" pitchFamily="34" charset="-120"/>
               </a:rPr>
               <a:t>説明①</a:t>
             </a:r>
-            <a:endParaRPr lang="en-US" sz="1050" dirty="0"/>
+            <a:endParaRPr lang="ja-JP" sz="1050" dirty="0"/>
           </a:p>
           <a:p>
             <a:pPr algn="ctr" indent="0" marL="0">
               <a:buNone/>
             </a:pPr>
             <a:r>
-              <a:rPr lang="en-US" sz="900" b="1" dirty="0">
+              <a:rPr lang="ja-JP" altLang="en-US" sz="900" b="1" dirty="0">
                 <a:solidFill>
                   <a:srgbClr val="FFD600"/>
                 </a:solidFill>
+                <a:latin typeface="Noto Sans JP" pitchFamily="34" charset="0"/>
+                <a:ea typeface="Noto Sans JP" pitchFamily="34" charset="-122"/>
+                <a:cs typeface="Noto Sans JP" pitchFamily="34" charset="-120"/>
               </a:rPr>
               <a:t>10分</a:t>
             </a:r>
-            <a:endParaRPr lang="en-US" sz="1050" dirty="0"/>
+            <a:endParaRPr lang="ja-JP" sz="1050" dirty="0"/>
           </a:p>
         </p:txBody>
       </p:sp>
@@ -3103,8 +3107,8 @@
         </p:nvSpPr>
         <p:spPr>
           <a:xfrm>
-            <a:off x="2336800" y="3383280"/>
-            <a:ext cx="1788160" cy="685800"/>
+            <a:off x="2311400" y="3364992"/>
+            <a:ext cx="1808480" cy="685800"/>
           </a:xfrm>
           <a:prstGeom prst="rect">
             <a:avLst/>
@@ -3128,8 +3132,8 @@
         </p:nvSpPr>
         <p:spPr>
           <a:xfrm>
-            <a:off x="2336800" y="3383280"/>
-            <a:ext cx="1788160" cy="685800"/>
+            <a:off x="2311400" y="3364992"/>
+            <a:ext cx="1808480" cy="685800"/>
           </a:xfrm>
           <a:prstGeom prst="rect">
             <a:avLst/>
@@ -3145,28 +3149,34 @@
               <a:buNone/>
             </a:pPr>
             <a:r>
-              <a:rPr lang="en-US" sz="1050" b="1" dirty="0">
+              <a:rPr lang="ja-JP" altLang="en-US" sz="1050" b="1" dirty="0">
                 <a:solidFill>
                   <a:srgbClr val="FFFFFF"/>
                 </a:solidFill>
+                <a:latin typeface="Noto Sans JP" pitchFamily="34" charset="0"/>
+                <a:ea typeface="Noto Sans JP" pitchFamily="34" charset="-122"/>
+                <a:cs typeface="Noto Sans JP" pitchFamily="34" charset="-120"/>
               </a:rPr>
               <a:t>ハンズオン①</a:t>
             </a:r>
-            <a:endParaRPr lang="en-US" sz="1050" dirty="0"/>
+            <a:endParaRPr lang="ja-JP" sz="1050" dirty="0"/>
           </a:p>
           <a:p>
             <a:pPr algn="ctr" indent="0" marL="0">
               <a:buNone/>
             </a:pPr>
             <a:r>
-              <a:rPr lang="en-US" sz="900" b="1" dirty="0">
+              <a:rPr lang="ja-JP" altLang="en-US" sz="900" b="1" dirty="0">
                 <a:solidFill>
                   <a:srgbClr val="FFFFFF"/>
                 </a:solidFill>
+                <a:latin typeface="Noto Sans JP" pitchFamily="34" charset="0"/>
+                <a:ea typeface="Noto Sans JP" pitchFamily="34" charset="-122"/>
+                <a:cs typeface="Noto Sans JP" pitchFamily="34" charset="-120"/>
               </a:rPr>
               <a:t>20分</a:t>
             </a:r>
-            <a:endParaRPr lang="en-US" sz="1050" dirty="0"/>
+            <a:endParaRPr lang="ja-JP" sz="1050" dirty="0"/>
           </a:p>
         </p:txBody>
       </p:sp>
@@ -3178,8 +3188,8 @@
         </p:nvSpPr>
         <p:spPr>
           <a:xfrm>
-            <a:off x="4124960" y="3383280"/>
-            <a:ext cx="894080" cy="685800"/>
+            <a:off x="4119880" y="3364992"/>
+            <a:ext cx="904240" cy="685800"/>
           </a:xfrm>
           <a:prstGeom prst="rect">
             <a:avLst/>
@@ -3203,8 +3213,8 @@
         </p:nvSpPr>
         <p:spPr>
           <a:xfrm>
-            <a:off x="4124960" y="3383280"/>
-            <a:ext cx="894080" cy="685800"/>
+            <a:off x="4119880" y="3364992"/>
+            <a:ext cx="904240" cy="685800"/>
           </a:xfrm>
           <a:prstGeom prst="rect">
             <a:avLst/>
@@ -3220,28 +3230,34 @@
               <a:buNone/>
             </a:pPr>
             <a:r>
-              <a:rPr lang="en-US" sz="1050" b="1" dirty="0">
+              <a:rPr lang="ja-JP" altLang="en-US" sz="1050" b="1" dirty="0">
                 <a:solidFill>
                   <a:srgbClr val="FFD600"/>
                 </a:solidFill>
+                <a:latin typeface="Noto Sans JP" pitchFamily="34" charset="0"/>
+                <a:ea typeface="Noto Sans JP" pitchFamily="34" charset="-122"/>
+                <a:cs typeface="Noto Sans JP" pitchFamily="34" charset="-120"/>
               </a:rPr>
               <a:t>説明②</a:t>
             </a:r>
-            <a:endParaRPr lang="en-US" sz="1050" dirty="0"/>
+            <a:endParaRPr lang="ja-JP" sz="1050" dirty="0"/>
           </a:p>
           <a:p>
             <a:pPr algn="ctr" indent="0" marL="0">
               <a:buNone/>
             </a:pPr>
             <a:r>
-              <a:rPr lang="en-US" sz="900" b="1" dirty="0">
+              <a:rPr lang="ja-JP" altLang="en-US" sz="900" b="1" dirty="0">
                 <a:solidFill>
                   <a:srgbClr val="FFD600"/>
                 </a:solidFill>
+                <a:latin typeface="Noto Sans JP" pitchFamily="34" charset="0"/>
+                <a:ea typeface="Noto Sans JP" pitchFamily="34" charset="-122"/>
+                <a:cs typeface="Noto Sans JP" pitchFamily="34" charset="-120"/>
               </a:rPr>
               <a:t>10分</a:t>
             </a:r>
-            <a:endParaRPr lang="en-US" sz="1050" dirty="0"/>
+            <a:endParaRPr lang="ja-JP" sz="1050" dirty="0"/>
           </a:p>
         </p:txBody>
       </p:sp>
@@ -3253,8 +3269,8 @@
         </p:nvSpPr>
         <p:spPr>
           <a:xfrm>
-            <a:off x="5019040" y="3383280"/>
-            <a:ext cx="1788160" cy="685800"/>
+            <a:off x="5024120" y="3364992"/>
+            <a:ext cx="1808480" cy="685800"/>
           </a:xfrm>
           <a:prstGeom prst="rect">
             <a:avLst/>
@@ -3278,8 +3294,8 @@
         </p:nvSpPr>
         <p:spPr>
           <a:xfrm>
-            <a:off x="5019040" y="3383280"/>
-            <a:ext cx="1788160" cy="685800"/>
+            <a:off x="5024120" y="3364992"/>
+            <a:ext cx="1808480" cy="685800"/>
           </a:xfrm>
           <a:prstGeom prst="rect">
             <a:avLst/>
@@ -3295,28 +3311,34 @@
               <a:buNone/>
             </a:pPr>
             <a:r>
-              <a:rPr lang="en-US" sz="1050" b="1" dirty="0">
+              <a:rPr lang="ja-JP" altLang="en-US" sz="1050" b="1" dirty="0">
                 <a:solidFill>
                   <a:srgbClr val="FFFFFF"/>
                 </a:solidFill>
+                <a:latin typeface="Noto Sans JP" pitchFamily="34" charset="0"/>
+                <a:ea typeface="Noto Sans JP" pitchFamily="34" charset="-122"/>
+                <a:cs typeface="Noto Sans JP" pitchFamily="34" charset="-120"/>
               </a:rPr>
               <a:t>ハンズオン②</a:t>
             </a:r>
-            <a:endParaRPr lang="en-US" sz="1050" dirty="0"/>
+            <a:endParaRPr lang="ja-JP" sz="1050" dirty="0"/>
           </a:p>
           <a:p>
             <a:pPr algn="ctr" indent="0" marL="0">
               <a:buNone/>
             </a:pPr>
             <a:r>
-              <a:rPr lang="en-US" sz="900" b="1" dirty="0">
+              <a:rPr lang="ja-JP" altLang="en-US" sz="900" b="1" dirty="0">
                 <a:solidFill>
                   <a:srgbClr val="FFFFFF"/>
                 </a:solidFill>
+                <a:latin typeface="Noto Sans JP" pitchFamily="34" charset="0"/>
+                <a:ea typeface="Noto Sans JP" pitchFamily="34" charset="-122"/>
+                <a:cs typeface="Noto Sans JP" pitchFamily="34" charset="-120"/>
               </a:rPr>
               <a:t>20分</a:t>
             </a:r>
-            <a:endParaRPr lang="en-US" sz="1050" dirty="0"/>
+            <a:endParaRPr lang="ja-JP" sz="1050" dirty="0"/>
           </a:p>
         </p:txBody>
       </p:sp>
@@ -3328,8 +3350,8 @@
         </p:nvSpPr>
         <p:spPr>
           <a:xfrm>
-            <a:off x="6807200" y="3383280"/>
-            <a:ext cx="1341120" cy="685800"/>
+            <a:off x="6832600" y="3364992"/>
+            <a:ext cx="1356360" cy="685800"/>
           </a:xfrm>
           <a:prstGeom prst="rect">
             <a:avLst/>
@@ -3353,8 +3375,8 @@
         </p:nvSpPr>
         <p:spPr>
           <a:xfrm>
-            <a:off x="6807200" y="3383280"/>
-            <a:ext cx="1341120" cy="685800"/>
+            <a:off x="6832600" y="3364992"/>
+            <a:ext cx="1356360" cy="685800"/>
           </a:xfrm>
           <a:prstGeom prst="rect">
             <a:avLst/>
@@ -3370,28 +3392,34 @@
               <a:buNone/>
             </a:pPr>
             <a:r>
-              <a:rPr lang="en-US" sz="1050" b="1" dirty="0">
+              <a:rPr lang="ja-JP" altLang="en-US" sz="1050" b="1" dirty="0">
                 <a:solidFill>
                   <a:srgbClr val="FFD600"/>
                 </a:solidFill>
+                <a:latin typeface="Noto Sans JP" pitchFamily="34" charset="0"/>
+                <a:ea typeface="Noto Sans JP" pitchFamily="34" charset="-122"/>
+                <a:cs typeface="Noto Sans JP" pitchFamily="34" charset="-120"/>
               </a:rPr>
               <a:t>質問・共有</a:t>
             </a:r>
-            <a:endParaRPr lang="en-US" sz="1050" dirty="0"/>
+            <a:endParaRPr lang="ja-JP" sz="1050" dirty="0"/>
           </a:p>
           <a:p>
             <a:pPr algn="ctr" indent="0" marL="0">
               <a:buNone/>
             </a:pPr>
             <a:r>
-              <a:rPr lang="en-US" sz="900" b="1" dirty="0">
+              <a:rPr lang="ja-JP" altLang="en-US" sz="900" b="1" dirty="0">
                 <a:solidFill>
                   <a:srgbClr val="FFD600"/>
                 </a:solidFill>
+                <a:latin typeface="Noto Sans JP" pitchFamily="34" charset="0"/>
+                <a:ea typeface="Noto Sans JP" pitchFamily="34" charset="-122"/>
+                <a:cs typeface="Noto Sans JP" pitchFamily="34" charset="-120"/>
               </a:rPr>
               <a:t>15分</a:t>
             </a:r>
-            <a:endParaRPr lang="en-US" sz="1050" dirty="0"/>
+            <a:endParaRPr lang="ja-JP" sz="1050" dirty="0"/>
           </a:p>
         </p:txBody>
       </p:sp>
@@ -3403,8 +3431,8 @@
         </p:nvSpPr>
         <p:spPr>
           <a:xfrm>
-            <a:off x="8148320" y="3383280"/>
-            <a:ext cx="447040" cy="685800"/>
+            <a:off x="8188960" y="3364992"/>
+            <a:ext cx="452120" cy="685800"/>
           </a:xfrm>
           <a:prstGeom prst="rect">
             <a:avLst/>
@@ -3428,8 +3456,8 @@
         </p:nvSpPr>
         <p:spPr>
           <a:xfrm>
-            <a:off x="8148320" y="3383280"/>
-            <a:ext cx="447040" cy="685800"/>
+            <a:off x="8188960" y="3364992"/>
+            <a:ext cx="452120" cy="685800"/>
           </a:xfrm>
           <a:prstGeom prst="rect">
             <a:avLst/>
@@ -3445,28 +3473,34 @@
               <a:buNone/>
             </a:pPr>
             <a:r>
-              <a:rPr lang="en-US" sz="850" b="1" dirty="0">
+              <a:rPr lang="ja-JP" altLang="en-US" sz="850" b="1" dirty="0">
                 <a:solidFill>
                   <a:srgbClr val="FFD600"/>
                 </a:solidFill>
+                <a:latin typeface="Noto Sans JP" pitchFamily="34" charset="0"/>
+                <a:ea typeface="Noto Sans JP" pitchFamily="34" charset="-122"/>
+                <a:cs typeface="Noto Sans JP" pitchFamily="34" charset="-120"/>
               </a:rPr>
               <a:t>宿題</a:t>
             </a:r>
-            <a:endParaRPr lang="en-US" sz="850" dirty="0"/>
+            <a:endParaRPr lang="ja-JP" sz="850" dirty="0"/>
           </a:p>
           <a:p>
             <a:pPr algn="ctr" indent="0" marL="0">
               <a:buNone/>
             </a:pPr>
             <a:r>
-              <a:rPr lang="en-US" sz="900" b="1" dirty="0">
+              <a:rPr lang="ja-JP" altLang="en-US" sz="900" b="1" dirty="0">
                 <a:solidFill>
                   <a:srgbClr val="FFD600"/>
                 </a:solidFill>
+                <a:latin typeface="Noto Sans JP" pitchFamily="34" charset="0"/>
+                <a:ea typeface="Noto Sans JP" pitchFamily="34" charset="-122"/>
+                <a:cs typeface="Noto Sans JP" pitchFamily="34" charset="-120"/>
               </a:rPr>
               <a:t>5分</a:t>
             </a:r>
-            <a:endParaRPr lang="en-US" sz="850" dirty="0"/>
+            <a:endParaRPr lang="ja-JP" sz="850" dirty="0"/>
           </a:p>
         </p:txBody>
       </p:sp>
@@ -3478,7 +3512,7 @@
         </p:nvSpPr>
         <p:spPr>
           <a:xfrm>
-            <a:off x="548640" y="4160520"/>
+            <a:off x="502920" y="4187952"/>
             <a:ext cx="3657600" cy="274320"/>
           </a:xfrm>
           <a:prstGeom prst="rect">
@@ -3495,10 +3529,13 @@
               <a:buNone/>
             </a:pPr>
             <a:r>
-              <a:rPr lang="en-US" sz="1000" dirty="0">
+              <a:rPr lang="ja-JP" altLang="en-US" sz="1050" b="1" dirty="0">
                 <a:solidFill>
                   <a:srgbClr val="1A1A1A"/>
                 </a:solidFill>
+                <a:latin typeface="Noto Sans JP" pitchFamily="34" charset="0"/>
+                <a:ea typeface="Noto Sans JP" pitchFamily="34" charset="-122"/>
+                <a:cs typeface="Noto Sans JP" pitchFamily="34" charset="-120"/>
               </a:rPr>
               <a:t>■ </a:t>
             </a:r>
@@ -3506,10 +3543,13 @@
               <a:buNone/>
             </a:pPr>
             <a:r>
-              <a:rPr lang="en-US" sz="1000" dirty="0">
-                <a:solidFill>
-                  <a:schemeClr val="tx2"/>
-                </a:solidFill>
+              <a:rPr lang="ja-JP" altLang="en-US" sz="1050" b="1" dirty="0">
+                <a:solidFill>
+                  <a:srgbClr val="1A1A1A"/>
+                </a:solidFill>
+                <a:latin typeface="Noto Sans JP" pitchFamily="34" charset="0"/>
+                <a:ea typeface="Noto Sans JP" pitchFamily="34" charset="-122"/>
+                <a:cs typeface="Noto Sans JP" pitchFamily="34" charset="-120"/>
               </a:rPr>
               <a:t>聞く　</a:t>
             </a:r>
@@ -3517,10 +3557,13 @@
               <a:buNone/>
             </a:pPr>
             <a:r>
-              <a:rPr lang="en-US" sz="1000" dirty="0">
+              <a:rPr lang="ja-JP" altLang="en-US" sz="1050" b="1" dirty="0">
                 <a:solidFill>
                   <a:srgbClr val="DD6420"/>
                 </a:solidFill>
+                <a:latin typeface="Noto Sans JP" pitchFamily="34" charset="0"/>
+                <a:ea typeface="Noto Sans JP" pitchFamily="34" charset="-122"/>
+                <a:cs typeface="Noto Sans JP" pitchFamily="34" charset="-120"/>
               </a:rPr>
               <a:t>■ </a:t>
             </a:r>
@@ -3528,14 +3571,17 @@
               <a:buNone/>
             </a:pPr>
             <a:r>
-              <a:rPr lang="en-US" sz="1000" dirty="0">
-                <a:solidFill>
-                  <a:schemeClr val="tx2"/>
-                </a:solidFill>
+              <a:rPr lang="ja-JP" altLang="en-US" sz="1050" b="1" dirty="0">
+                <a:solidFill>
+                  <a:srgbClr val="1A1A1A"/>
+                </a:solidFill>
+                <a:latin typeface="Noto Sans JP" pitchFamily="34" charset="0"/>
+                <a:ea typeface="Noto Sans JP" pitchFamily="34" charset="-122"/>
+                <a:cs typeface="Noto Sans JP" pitchFamily="34" charset="-120"/>
               </a:rPr>
               <a:t>手を動かす</a:t>
             </a:r>
-            <a:endParaRPr lang="en-US" sz="1000" dirty="0"/>
+            <a:endParaRPr lang="ja-JP" sz="1050" dirty="0"/>
           </a:p>
         </p:txBody>
       </p:sp>
@@ -3551,8 +3597,8 @@
         </p:nvSpPr>
         <p:spPr>
           <a:xfrm>
-            <a:off x="8229600" y="4773168"/>
-            <a:ext cx="365760" cy="228600"/>
+            <a:off x="8366760" y="4754880"/>
+            <a:ext cx="365760" cy="274320"/>
           </a:xfrm>
           <a:prstGeom prst="rect">
             <a:avLst/>
@@ -3564,20 +3610,23 @@
           </a:extLst>
         </p:spPr>
         <p:txBody>
-          <a:bodyPr/>
+          <a:bodyPr anchor="ctr"/>
           <a:lstStyle>
             <a:lvl1pPr>
-              <a:defRPr sz="900">
-                <a:solidFill>
-                  <a:srgbClr val="5A6872"/>
-                </a:solidFill>
+              <a:defRPr sz="850">
+                <a:solidFill>
+                  <a:srgbClr val="FFFFFF"/>
+                </a:solidFill>
+                <a:latin typeface="Noto Sans JP"/>
+                <a:ea typeface="Noto Sans JP"/>
+                <a:cs typeface="Noto Sans JP"/>
               </a:defRPr>
             </a:lvl1pPr>
           </a:lstStyle>
           <a:p>
             <a:pPr algn="r"/>
             <a:fld id="{F7021451-1387-4CA6-816F-3879F97B5CBC}" type="slidenum">
-              <a:rPr b="0" lang="en-US"/>
+              <a:rPr b="1" lang="en-US"/>
               <a:t>2</a:t>
             </a:fld>
             <a:endParaRPr lang="en-US"/>
@@ -3612,15 +3661,58 @@
       <p:sp>
         <p:nvSpPr>
           <p:cNvPr id="2" name="Text 0"/>
-          <p:cNvSpPr/>
-          <p:nvPr>
-            <p:ph idx="100" type="title" hasCustomPrompt="1"/>
-          </p:nvPr>
-        </p:nvSpPr>
-        <p:spPr>
-          <a:xfrm>
-            <a:off x="548640" y="658368"/>
-            <a:ext cx="8046720" cy="566928"/>
+          <p:cNvSpPr txBox="1"/>
+          <p:nvPr/>
+        </p:nvSpPr>
+        <p:spPr>
+          <a:xfrm rot="-180000">
+            <a:off x="411480" y="201168"/>
+            <a:ext cx="1478128" cy="352044"/>
+          </a:xfrm>
+          <a:prstGeom prst="rect">
+            <a:avLst/>
+          </a:prstGeom>
+          <a:solidFill>
+            <a:srgbClr val="1A1A1A"/>
+          </a:solidFill>
+          <a:ln>
+            <a:solidFill>
+              <a:srgbClr val="1A1A1A"/>
+            </a:solidFill>
+          </a:ln>
+        </p:spPr>
+        <p:txBody>
+          <a:bodyPr wrap="square" lIns="0" tIns="0" rIns="0" bIns="0" rtlCol="0" anchor="ctr"/>
+          <a:lstStyle/>
+          <a:p>
+            <a:pPr algn="ctr" indent="0" marL="0">
+              <a:buNone/>
+            </a:pPr>
+            <a:r>
+              <a:rPr lang="ja-JP" altLang="en-US" sz="1100" dirty="0">
+                <a:solidFill>
+                  <a:srgbClr val="FFFFFF"/>
+                </a:solidFill>
+                <a:latin typeface="Dela Gothic One" pitchFamily="34" charset="0"/>
+                <a:ea typeface="けいふぉんと" pitchFamily="34" charset="-122"/>
+                <a:cs typeface="Dela Gothic One" pitchFamily="34" charset="-120"/>
+              </a:rPr>
+              <a:t>説明① 10分</a:t>
+            </a:r>
+            <a:endParaRPr lang="ja-JP" sz="1100" dirty="0"/>
+          </a:p>
+        </p:txBody>
+      </p:sp>
+      <p:sp>
+        <p:nvSpPr>
+          <p:cNvPr id="3" name="Text 1"/>
+          <p:cNvSpPr txBox="1"/>
+          <p:nvPr/>
+        </p:nvSpPr>
+        <p:spPr>
+          <a:xfrm>
+            <a:off x="411480" y="502920"/>
+            <a:ext cx="8321040" cy="685800"/>
           </a:xfrm>
           <a:prstGeom prst="rect">
             <a:avLst/>
@@ -3629,86 +3721,74 @@
           <a:ln/>
         </p:spPr>
         <p:txBody>
-          <a:bodyPr wrap="square" lIns="0" tIns="0" rIns="0" bIns="0" rtlCol="0" anchor="ctr"/>
-          <a:lstStyle/>
-          <a:p>
-            <a:pPr algn="l" indent="0" marL="0">
+          <a:bodyPr wrap="square" lIns="0" tIns="0" rIns="0" bIns="0" rtlCol="0" anchor="ctr">
+            <a:normAutofit/>
+          </a:bodyPr>
+          <a:lstStyle/>
+          <a:p>
+            <a:pPr indent="0" marL="0">
               <a:buNone/>
             </a:pPr>
             <a:r>
-              <a:rPr lang="en-US" sz="2400" b="1" dirty="0">
-                <a:solidFill>
-                  <a:schemeClr val="tx1"/>
-                </a:solidFill>
+              <a:rPr lang="ja-JP" altLang="en-US" sz="2600" dirty="0">
+                <a:solidFill>
+                  <a:srgbClr val="1A1A1A"/>
+                </a:solidFill>
+                <a:latin typeface="Dela Gothic One" pitchFamily="34" charset="0"/>
+                <a:ea typeface="けいふぉんと" pitchFamily="34" charset="-122"/>
+                <a:cs typeface="Dela Gothic One" pitchFamily="34" charset="-120"/>
               </a:rPr>
-              <a:t>APIは「お店の注文窓口」</a:t>
-            </a:r>
-            <a:endParaRPr lang="en-US" sz="2400" dirty="0"/>
-          </a:p>
-        </p:txBody>
-      </p:sp>
-      <p:sp>
-        <p:nvSpPr>
-          <p:cNvPr id="3" name="chip"/>
+              <a:t>APIは</a:t>
+            </a:r>
+            <a:pPr indent="0" marL="0">
+              <a:buNone/>
+            </a:pPr>
+            <a:r>
+              <a:rPr lang="ja-JP" altLang="en-US" sz="2600" dirty="0">
+                <a:solidFill>
+                  <a:srgbClr val="DD6420"/>
+                </a:solidFill>
+                <a:latin typeface="Dela Gothic One" pitchFamily="34" charset="0"/>
+                <a:ea typeface="けいふぉんと" pitchFamily="34" charset="-122"/>
+                <a:cs typeface="Dela Gothic One" pitchFamily="34" charset="-120"/>
+              </a:rPr>
+              <a:t>「お店の注文窓口」</a:t>
+            </a:r>
+            <a:endParaRPr lang="ja-JP" sz="2600" dirty="0"/>
+          </a:p>
+        </p:txBody>
+      </p:sp>
+      <p:sp>
+        <p:nvSpPr>
+          <p:cNvPr id="5" name="Shape 2"/>
           <p:cNvSpPr/>
           <p:nvPr/>
         </p:nvSpPr>
         <p:spPr>
           <a:xfrm>
-            <a:off x="548640" y="292608"/>
-            <a:ext cx="1344168" cy="292608"/>
-          </a:xfrm>
-          <a:prstGeom prst="roundRect">
-            <a:avLst>
-              <a:gd name="adj" fmla="val 50000"/>
-            </a:avLst>
+            <a:off x="502920" y="1417320"/>
+            <a:ext cx="8138160" cy="2194560"/>
+          </a:xfrm>
+          <a:prstGeom prst="rect">
+            <a:avLst/>
           </a:prstGeom>
           <a:solidFill>
-            <a:schemeClr val="tx1"/>
+            <a:srgbClr val="FFFFFF"/>
           </a:solidFill>
-          <a:ln w="12700">
+          <a:ln w="25400">
             <a:solidFill>
-              <a:schemeClr val="tx1"/>
+              <a:srgbClr val="1A1A1A"/>
             </a:solidFill>
             <a:prstDash val="solid"/>
           </a:ln>
-        </p:spPr>
-      </p:sp>
-      <p:sp>
-        <p:nvSpPr>
-          <p:cNvPr id="4" name="chip-text"/>
-          <p:cNvSpPr txBox="1"/>
-          <p:nvPr/>
-        </p:nvSpPr>
-        <p:spPr>
-          <a:xfrm>
-            <a:off x="548640" y="292608"/>
-            <a:ext cx="1344168" cy="292608"/>
-          </a:xfrm>
-          <a:prstGeom prst="rect">
-            <a:avLst/>
-          </a:prstGeom>
-          <a:noFill/>
-          <a:ln/>
-        </p:spPr>
-        <p:txBody>
-          <a:bodyPr wrap="square" lIns="0" tIns="0" rIns="0" bIns="0" rtlCol="0" anchor="ctr"/>
-          <a:lstStyle/>
-          <a:p>
-            <a:pPr algn="ctr" indent="0" marL="0">
-              <a:buNone/>
-            </a:pPr>
-            <a:r>
-              <a:rPr lang="en-US" sz="1100" b="1" dirty="0">
-                <a:solidFill>
-                  <a:schemeClr val="accent1"/>
-                </a:solidFill>
-              </a:rPr>
-              <a:t>説明① 10分</a:t>
-            </a:r>
-            <a:endParaRPr lang="en-US" sz="1100" dirty="0"/>
-          </a:p>
-        </p:txBody>
+          <a:effectLst>
+            <a:outerShdw sx="100000" sy="100000" kx="0" ky="0" algn="bl" rotWithShape="0" blurRad="101600" dist="50800" dir="2700000">
+              <a:srgbClr val="1A1A1A">
+                <a:alpha val="100000"/>
+              </a:srgbClr>
+            </a:outerShdw>
+          </a:effectLst>
+        </p:spPr>
       </p:sp>
       <p:graphicFrame>
         <p:nvGraphicFramePr>
@@ -3725,17 +3805,17 @@
           </p:nvPr>
         </p:nvGraphicFramePr>
         <p:xfrm>
-          <a:off x="548640" y="1463040"/>
-          <a:ext cx="8046720" cy="914400"/>
+          <a:off x="502920" y="1417320"/>
+          <a:ext cx="8138160" cy="914400"/>
         </p:xfrm>
         <a:graphic>
           <a:graphicData uri="http://schemas.openxmlformats.org/drawingml/2006/table">
             <a:tbl>
               <a:tblPr/>
               <a:tblGrid>
-                <a:gridCol w="2145792"/>
-                <a:gridCol w="3218688"/>
-                <a:gridCol w="2682240"/>
+                <a:gridCol w="2170176"/>
+                <a:gridCol w="3255264"/>
+                <a:gridCol w="2712720"/>
               </a:tblGrid>
               <a:tr h="438912">
                 <a:tc>
@@ -3747,47 +3827,54 @@
                         <a:buNone/>
                       </a:pPr>
                       <a:r>
-                        <a:rPr lang="en-US" sz="1200" b="1" dirty="0">
+                        <a:rPr lang="en-US" sz="1250" b="1" dirty="0">
                           <a:solidFill>
-                            <a:srgbClr val="FFD600"/>
+                            <a:srgbClr val="FFFFFF"/>
                           </a:solidFill>
+                          <a:latin typeface="Noto Sans JP" pitchFamily="34" charset="0"/>
+                          <a:ea typeface="Noto Sans JP" pitchFamily="34" charset="-122"/>
+                          <a:cs typeface="Noto Sans JP" pitchFamily="34" charset="-120"/>
                         </a:rPr>
                         <a:t>登場人物</a:t>
                       </a:r>
-                      <a:endParaRPr lang="en-US" sz="1200" dirty="0"/>
+                      <a:endParaRPr lang="en-US" sz="1250" dirty="0">
+                        <a:latin typeface="Noto Sans JP" charset="0"/>
+                        <a:ea typeface="Noto Sans JP" charset="0"/>
+                        <a:cs typeface="Noto Sans JP" charset="0"/>
+                      </a:endParaRPr>
                     </a:p>
                   </a:txBody>
                   <a:tcPr marL="91440" marR="91440" marT="0" marB="0" anchor="ctr">
-                    <a:lnL w="9525" cap="flat" cmpd="sng" algn="ctr">
-                      <a:solidFill>
-                        <a:srgbClr val="BBBBBB"/>
+                    <a:lnL w="12700" cap="flat" cmpd="sng" algn="ctr">
+                      <a:solidFill>
+                        <a:srgbClr val="1A1A1A"/>
                       </a:solidFill>
                       <a:prstDash val="solid"/>
                       <a:round/>
                       <a:headEnd type="none" w="med" len="med"/>
                       <a:tailEnd type="none" w="med" len="med"/>
                     </a:lnL>
-                    <a:lnR w="9525" cap="flat" cmpd="sng" algn="ctr">
-                      <a:solidFill>
-                        <a:srgbClr val="BBBBBB"/>
+                    <a:lnR w="12700" cap="flat" cmpd="sng" algn="ctr">
+                      <a:solidFill>
+                        <a:srgbClr val="1A1A1A"/>
                       </a:solidFill>
                       <a:prstDash val="solid"/>
                       <a:round/>
                       <a:headEnd type="none" w="med" len="med"/>
                       <a:tailEnd type="none" w="med" len="med"/>
                     </a:lnR>
-                    <a:lnT w="9525" cap="flat" cmpd="sng" algn="ctr">
-                      <a:solidFill>
-                        <a:srgbClr val="BBBBBB"/>
+                    <a:lnT w="12700" cap="flat" cmpd="sng" algn="ctr">
+                      <a:solidFill>
+                        <a:srgbClr val="1A1A1A"/>
                       </a:solidFill>
                       <a:prstDash val="solid"/>
                       <a:round/>
                       <a:headEnd type="none" w="med" len="med"/>
                       <a:tailEnd type="none" w="med" len="med"/>
                     </a:lnT>
-                    <a:lnB w="9525" cap="flat" cmpd="sng" algn="ctr">
-                      <a:solidFill>
-                        <a:srgbClr val="BBBBBB"/>
+                    <a:lnB w="12700" cap="flat" cmpd="sng" algn="ctr">
+                      <a:solidFill>
+                        <a:srgbClr val="1A1A1A"/>
                       </a:solidFill>
                       <a:prstDash val="solid"/>
                       <a:round/>
@@ -3808,47 +3895,54 @@
                         <a:buNone/>
                       </a:pPr>
                       <a:r>
-                        <a:rPr lang="en-US" sz="1200" b="1" dirty="0">
+                        <a:rPr lang="en-US" sz="1250" b="1" dirty="0">
                           <a:solidFill>
-                            <a:srgbClr val="FFD600"/>
+                            <a:srgbClr val="FFFFFF"/>
                           </a:solidFill>
+                          <a:latin typeface="Noto Sans JP" pitchFamily="34" charset="0"/>
+                          <a:ea typeface="Noto Sans JP" pitchFamily="34" charset="-122"/>
+                          <a:cs typeface="Noto Sans JP" pitchFamily="34" charset="-120"/>
                         </a:rPr>
                         <a:t>中身</a:t>
                       </a:r>
-                      <a:endParaRPr lang="en-US" sz="1200" dirty="0"/>
+                      <a:endParaRPr lang="en-US" sz="1250" dirty="0">
+                        <a:latin typeface="Noto Sans JP" charset="0"/>
+                        <a:ea typeface="Noto Sans JP" charset="0"/>
+                        <a:cs typeface="Noto Sans JP" charset="0"/>
+                      </a:endParaRPr>
                     </a:p>
                   </a:txBody>
                   <a:tcPr marL="91440" marR="91440" marT="0" marB="0" anchor="ctr">
-                    <a:lnL w="9525" cap="flat" cmpd="sng" algn="ctr">
-                      <a:solidFill>
-                        <a:srgbClr val="BBBBBB"/>
+                    <a:lnL w="12700" cap="flat" cmpd="sng" algn="ctr">
+                      <a:solidFill>
+                        <a:srgbClr val="1A1A1A"/>
                       </a:solidFill>
                       <a:prstDash val="solid"/>
                       <a:round/>
                       <a:headEnd type="none" w="med" len="med"/>
                       <a:tailEnd type="none" w="med" len="med"/>
                     </a:lnL>
-                    <a:lnR w="9525" cap="flat" cmpd="sng" algn="ctr">
-                      <a:solidFill>
-                        <a:srgbClr val="BBBBBB"/>
+                    <a:lnR w="12700" cap="flat" cmpd="sng" algn="ctr">
+                      <a:solidFill>
+                        <a:srgbClr val="1A1A1A"/>
                       </a:solidFill>
                       <a:prstDash val="solid"/>
                       <a:round/>
                       <a:headEnd type="none" w="med" len="med"/>
                       <a:tailEnd type="none" w="med" len="med"/>
                     </a:lnR>
-                    <a:lnT w="9525" cap="flat" cmpd="sng" algn="ctr">
-                      <a:solidFill>
-                        <a:srgbClr val="BBBBBB"/>
+                    <a:lnT w="12700" cap="flat" cmpd="sng" algn="ctr">
+                      <a:solidFill>
+                        <a:srgbClr val="1A1A1A"/>
                       </a:solidFill>
                       <a:prstDash val="solid"/>
                       <a:round/>
                       <a:headEnd type="none" w="med" len="med"/>
                       <a:tailEnd type="none" w="med" len="med"/>
                     </a:lnT>
-                    <a:lnB w="9525" cap="flat" cmpd="sng" algn="ctr">
-                      <a:solidFill>
-                        <a:srgbClr val="BBBBBB"/>
+                    <a:lnB w="12700" cap="flat" cmpd="sng" algn="ctr">
+                      <a:solidFill>
+                        <a:srgbClr val="1A1A1A"/>
                       </a:solidFill>
                       <a:prstDash val="solid"/>
                       <a:round/>
@@ -3869,47 +3963,54 @@
                         <a:buNone/>
                       </a:pPr>
                       <a:r>
-                        <a:rPr lang="en-US" sz="1200" b="1" dirty="0">
+                        <a:rPr lang="en-US" sz="1250" b="1" dirty="0">
                           <a:solidFill>
-                            <a:srgbClr val="FFD600"/>
+                            <a:srgbClr val="FFFFFF"/>
                           </a:solidFill>
+                          <a:latin typeface="Noto Sans JP" pitchFamily="34" charset="0"/>
+                          <a:ea typeface="Noto Sans JP" pitchFamily="34" charset="-122"/>
+                          <a:cs typeface="Noto Sans JP" pitchFamily="34" charset="-120"/>
                         </a:rPr>
                         <a:t>どこで手に入る</a:t>
                       </a:r>
-                      <a:endParaRPr lang="en-US" sz="1200" dirty="0"/>
+                      <a:endParaRPr lang="en-US" sz="1250" dirty="0">
+                        <a:latin typeface="Noto Sans JP" charset="0"/>
+                        <a:ea typeface="Noto Sans JP" charset="0"/>
+                        <a:cs typeface="Noto Sans JP" charset="0"/>
+                      </a:endParaRPr>
                     </a:p>
                   </a:txBody>
                   <a:tcPr marL="91440" marR="91440" marT="0" marB="0" anchor="ctr">
-                    <a:lnL w="9525" cap="flat" cmpd="sng" algn="ctr">
-                      <a:solidFill>
-                        <a:srgbClr val="BBBBBB"/>
+                    <a:lnL w="12700" cap="flat" cmpd="sng" algn="ctr">
+                      <a:solidFill>
+                        <a:srgbClr val="1A1A1A"/>
                       </a:solidFill>
                       <a:prstDash val="solid"/>
                       <a:round/>
                       <a:headEnd type="none" w="med" len="med"/>
                       <a:tailEnd type="none" w="med" len="med"/>
                     </a:lnL>
-                    <a:lnR w="9525" cap="flat" cmpd="sng" algn="ctr">
-                      <a:solidFill>
-                        <a:srgbClr val="BBBBBB"/>
+                    <a:lnR w="12700" cap="flat" cmpd="sng" algn="ctr">
+                      <a:solidFill>
+                        <a:srgbClr val="1A1A1A"/>
                       </a:solidFill>
                       <a:prstDash val="solid"/>
                       <a:round/>
                       <a:headEnd type="none" w="med" len="med"/>
                       <a:tailEnd type="none" w="med" len="med"/>
                     </a:lnR>
-                    <a:lnT w="9525" cap="flat" cmpd="sng" algn="ctr">
-                      <a:solidFill>
-                        <a:srgbClr val="BBBBBB"/>
+                    <a:lnT w="12700" cap="flat" cmpd="sng" algn="ctr">
+                      <a:solidFill>
+                        <a:srgbClr val="1A1A1A"/>
                       </a:solidFill>
                       <a:prstDash val="solid"/>
                       <a:round/>
                       <a:headEnd type="none" w="med" len="med"/>
                       <a:tailEnd type="none" w="med" len="med"/>
                     </a:lnT>
-                    <a:lnB w="9525" cap="flat" cmpd="sng" algn="ctr">
-                      <a:solidFill>
-                        <a:srgbClr val="BBBBBB"/>
+                    <a:lnB w="12700" cap="flat" cmpd="sng" algn="ctr">
+                      <a:solidFill>
+                        <a:srgbClr val="1A1A1A"/>
                       </a:solidFill>
                       <a:prstDash val="solid"/>
                       <a:round/>
@@ -3934,45 +4035,52 @@
                       <a:r>
                         <a:rPr lang="en-US" sz="1200" b="1" dirty="0">
                           <a:solidFill>
-                            <a:srgbClr val="1A1A1A"/>
+                            <a:srgbClr val="DD6420"/>
                           </a:solidFill>
+                          <a:latin typeface="Noto Sans JP" pitchFamily="34" charset="0"/>
+                          <a:ea typeface="Noto Sans JP" pitchFamily="34" charset="-122"/>
+                          <a:cs typeface="Noto Sans JP" pitchFamily="34" charset="-120"/>
                         </a:rPr>
                         <a:t>Larkアプリ</a:t>
                       </a:r>
-                      <a:endParaRPr lang="en-US" sz="1200" dirty="0"/>
+                      <a:endParaRPr lang="en-US" sz="1200" dirty="0">
+                        <a:latin typeface="Noto Sans JP" charset="0"/>
+                        <a:ea typeface="Noto Sans JP" charset="0"/>
+                        <a:cs typeface="Noto Sans JP" charset="0"/>
+                      </a:endParaRPr>
                     </a:p>
                   </a:txBody>
                   <a:tcPr marL="91440" marR="91440" marT="0" marB="0" anchor="ctr">
-                    <a:lnL w="9525" cap="flat" cmpd="sng" algn="ctr">
-                      <a:solidFill>
-                        <a:srgbClr val="BBBBBB"/>
+                    <a:lnL w="12700" cap="flat" cmpd="sng" algn="ctr">
+                      <a:solidFill>
+                        <a:srgbClr val="1A1A1A"/>
                       </a:solidFill>
                       <a:prstDash val="solid"/>
                       <a:round/>
                       <a:headEnd type="none" w="med" len="med"/>
                       <a:tailEnd type="none" w="med" len="med"/>
                     </a:lnL>
-                    <a:lnR w="9525" cap="flat" cmpd="sng" algn="ctr">
-                      <a:solidFill>
-                        <a:srgbClr val="BBBBBB"/>
+                    <a:lnR w="12700" cap="flat" cmpd="sng" algn="ctr">
+                      <a:solidFill>
+                        <a:srgbClr val="1A1A1A"/>
                       </a:solidFill>
                       <a:prstDash val="solid"/>
                       <a:round/>
                       <a:headEnd type="none" w="med" len="med"/>
                       <a:tailEnd type="none" w="med" len="med"/>
                     </a:lnR>
-                    <a:lnT w="9525" cap="flat" cmpd="sng" algn="ctr">
-                      <a:solidFill>
-                        <a:srgbClr val="BBBBBB"/>
+                    <a:lnT w="12700" cap="flat" cmpd="sng" algn="ctr">
+                      <a:solidFill>
+                        <a:srgbClr val="1A1A1A"/>
                       </a:solidFill>
                       <a:prstDash val="solid"/>
                       <a:round/>
                       <a:headEnd type="none" w="med" len="med"/>
                       <a:tailEnd type="none" w="med" len="med"/>
                     </a:lnT>
-                    <a:lnB w="9525" cap="flat" cmpd="sng" algn="ctr">
-                      <a:solidFill>
-                        <a:srgbClr val="BBBBBB"/>
+                    <a:lnB w="12700" cap="flat" cmpd="sng" algn="ctr">
+                      <a:solidFill>
+                        <a:srgbClr val="1A1A1A"/>
                       </a:solidFill>
                       <a:prstDash val="solid"/>
                       <a:round/>
@@ -3993,47 +4101,54 @@
                         <a:buNone/>
                       </a:pPr>
                       <a:r>
-                        <a:rPr lang="en-US" sz="1200" dirty="0">
+                        <a:rPr lang="en-US" sz="1200" b="1" dirty="0">
                           <a:solidFill>
                             <a:srgbClr val="1A1A1A"/>
                           </a:solidFill>
+                          <a:latin typeface="Noto Sans JP Medium" pitchFamily="34" charset="0"/>
+                          <a:ea typeface="Noto Sans JP Medium" pitchFamily="34" charset="-122"/>
+                          <a:cs typeface="Noto Sans JP Medium" pitchFamily="34" charset="-120"/>
                         </a:rPr>
                         <a:t>Larkにアクセスする「代理人」</a:t>
                       </a:r>
-                      <a:endParaRPr lang="en-US" sz="1200" dirty="0"/>
+                      <a:endParaRPr lang="en-US" sz="1200" dirty="0">
+                        <a:latin typeface="Noto Sans JP Medium" charset="0"/>
+                        <a:ea typeface="Noto Sans JP Medium" charset="0"/>
+                        <a:cs typeface="Noto Sans JP Medium" charset="0"/>
+                      </a:endParaRPr>
                     </a:p>
                   </a:txBody>
                   <a:tcPr marL="91440" marR="91440" marT="0" marB="0" anchor="ctr">
-                    <a:lnL w="9525" cap="flat" cmpd="sng" algn="ctr">
-                      <a:solidFill>
-                        <a:srgbClr val="BBBBBB"/>
+                    <a:lnL w="12700" cap="flat" cmpd="sng" algn="ctr">
+                      <a:solidFill>
+                        <a:srgbClr val="1A1A1A"/>
                       </a:solidFill>
                       <a:prstDash val="solid"/>
                       <a:round/>
                       <a:headEnd type="none" w="med" len="med"/>
                       <a:tailEnd type="none" w="med" len="med"/>
                     </a:lnL>
-                    <a:lnR w="9525" cap="flat" cmpd="sng" algn="ctr">
-                      <a:solidFill>
-                        <a:srgbClr val="BBBBBB"/>
+                    <a:lnR w="12700" cap="flat" cmpd="sng" algn="ctr">
+                      <a:solidFill>
+                        <a:srgbClr val="1A1A1A"/>
                       </a:solidFill>
                       <a:prstDash val="solid"/>
                       <a:round/>
                       <a:headEnd type="none" w="med" len="med"/>
                       <a:tailEnd type="none" w="med" len="med"/>
                     </a:lnR>
-                    <a:lnT w="9525" cap="flat" cmpd="sng" algn="ctr">
-                      <a:solidFill>
-                        <a:srgbClr val="BBBBBB"/>
+                    <a:lnT w="12700" cap="flat" cmpd="sng" algn="ctr">
+                      <a:solidFill>
+                        <a:srgbClr val="1A1A1A"/>
                       </a:solidFill>
                       <a:prstDash val="solid"/>
                       <a:round/>
                       <a:headEnd type="none" w="med" len="med"/>
                       <a:tailEnd type="none" w="med" len="med"/>
                     </a:lnT>
-                    <a:lnB w="9525" cap="flat" cmpd="sng" algn="ctr">
-                      <a:solidFill>
-                        <a:srgbClr val="BBBBBB"/>
+                    <a:lnB w="12700" cap="flat" cmpd="sng" algn="ctr">
+                      <a:solidFill>
+                        <a:srgbClr val="1A1A1A"/>
                       </a:solidFill>
                       <a:prstDash val="solid"/>
                       <a:round/>
@@ -4054,47 +4169,54 @@
                         <a:buNone/>
                       </a:pPr>
                       <a:r>
-                        <a:rPr lang="en-US" sz="1200" dirty="0">
+                        <a:rPr lang="en-US" sz="1200" b="1" dirty="0">
                           <a:solidFill>
                             <a:srgbClr val="1A1A1A"/>
                           </a:solidFill>
+                          <a:latin typeface="Noto Sans JP Medium" pitchFamily="34" charset="0"/>
+                          <a:ea typeface="Noto Sans JP Medium" pitchFamily="34" charset="-122"/>
+                          <a:cs typeface="Noto Sans JP Medium" pitchFamily="34" charset="-120"/>
                         </a:rPr>
                         <a:t>Lark開発者コンソール</a:t>
                       </a:r>
-                      <a:endParaRPr lang="en-US" sz="1200" dirty="0"/>
+                      <a:endParaRPr lang="en-US" sz="1200" dirty="0">
+                        <a:latin typeface="Noto Sans JP Medium" charset="0"/>
+                        <a:ea typeface="Noto Sans JP Medium" charset="0"/>
+                        <a:cs typeface="Noto Sans JP Medium" charset="0"/>
+                      </a:endParaRPr>
                     </a:p>
                   </a:txBody>
                   <a:tcPr marL="91440" marR="91440" marT="0" marB="0" anchor="ctr">
-                    <a:lnL w="9525" cap="flat" cmpd="sng" algn="ctr">
-                      <a:solidFill>
-                        <a:srgbClr val="BBBBBB"/>
+                    <a:lnL w="12700" cap="flat" cmpd="sng" algn="ctr">
+                      <a:solidFill>
+                        <a:srgbClr val="1A1A1A"/>
                       </a:solidFill>
                       <a:prstDash val="solid"/>
                       <a:round/>
                       <a:headEnd type="none" w="med" len="med"/>
                       <a:tailEnd type="none" w="med" len="med"/>
                     </a:lnL>
-                    <a:lnR w="9525" cap="flat" cmpd="sng" algn="ctr">
-                      <a:solidFill>
-                        <a:srgbClr val="BBBBBB"/>
+                    <a:lnR w="12700" cap="flat" cmpd="sng" algn="ctr">
+                      <a:solidFill>
+                        <a:srgbClr val="1A1A1A"/>
                       </a:solidFill>
                       <a:prstDash val="solid"/>
                       <a:round/>
                       <a:headEnd type="none" w="med" len="med"/>
                       <a:tailEnd type="none" w="med" len="med"/>
                     </a:lnR>
-                    <a:lnT w="9525" cap="flat" cmpd="sng" algn="ctr">
-                      <a:solidFill>
-                        <a:srgbClr val="BBBBBB"/>
+                    <a:lnT w="12700" cap="flat" cmpd="sng" algn="ctr">
+                      <a:solidFill>
+                        <a:srgbClr val="1A1A1A"/>
                       </a:solidFill>
                       <a:prstDash val="solid"/>
                       <a:round/>
                       <a:headEnd type="none" w="med" len="med"/>
                       <a:tailEnd type="none" w="med" len="med"/>
                     </a:lnT>
-                    <a:lnB w="9525" cap="flat" cmpd="sng" algn="ctr">
-                      <a:solidFill>
-                        <a:srgbClr val="BBBBBB"/>
+                    <a:lnB w="12700" cap="flat" cmpd="sng" algn="ctr">
+                      <a:solidFill>
+                        <a:srgbClr val="1A1A1A"/>
                       </a:solidFill>
                       <a:prstDash val="solid"/>
                       <a:round/>
@@ -4119,230 +4241,52 @@
                       <a:r>
                         <a:rPr lang="en-US" sz="1200" b="1" dirty="0">
                           <a:solidFill>
-                            <a:srgbClr val="1A1A1A"/>
+                            <a:srgbClr val="DD6420"/>
                           </a:solidFill>
+                          <a:latin typeface="Noto Sans JP" pitchFamily="34" charset="0"/>
+                          <a:ea typeface="Noto Sans JP" pitchFamily="34" charset="-122"/>
+                          <a:cs typeface="Noto Sans JP" pitchFamily="34" charset="-120"/>
                         </a:rPr>
                         <a:t>App ID / Secret</a:t>
                       </a:r>
-                      <a:endParaRPr lang="en-US" sz="1200" dirty="0"/>
+                      <a:endParaRPr lang="en-US" sz="1200" dirty="0">
+                        <a:latin typeface="Noto Sans JP" charset="0"/>
+                        <a:ea typeface="Noto Sans JP" charset="0"/>
+                        <a:cs typeface="Noto Sans JP" charset="0"/>
+                      </a:endParaRPr>
                     </a:p>
                   </a:txBody>
                   <a:tcPr marL="91440" marR="91440" marT="0" marB="0" anchor="ctr">
-                    <a:lnL w="9525" cap="flat" cmpd="sng" algn="ctr">
-                      <a:solidFill>
-                        <a:srgbClr val="BBBBBB"/>
+                    <a:lnL w="12700" cap="flat" cmpd="sng" algn="ctr">
+                      <a:solidFill>
+                        <a:srgbClr val="1A1A1A"/>
                       </a:solidFill>
                       <a:prstDash val="solid"/>
                       <a:round/>
                       <a:headEnd type="none" w="med" len="med"/>
                       <a:tailEnd type="none" w="med" len="med"/>
                     </a:lnL>
-                    <a:lnR w="9525" cap="flat" cmpd="sng" algn="ctr">
-                      <a:solidFill>
-                        <a:srgbClr val="BBBBBB"/>
+                    <a:lnR w="12700" cap="flat" cmpd="sng" algn="ctr">
+                      <a:solidFill>
+                        <a:srgbClr val="1A1A1A"/>
                       </a:solidFill>
                       <a:prstDash val="solid"/>
                       <a:round/>
                       <a:headEnd type="none" w="med" len="med"/>
                       <a:tailEnd type="none" w="med" len="med"/>
                     </a:lnR>
-                    <a:lnT w="9525" cap="flat" cmpd="sng" algn="ctr">
-                      <a:solidFill>
-                        <a:srgbClr val="BBBBBB"/>
+                    <a:lnT w="12700" cap="flat" cmpd="sng" algn="ctr">
+                      <a:solidFill>
+                        <a:srgbClr val="1A1A1A"/>
                       </a:solidFill>
                       <a:prstDash val="solid"/>
                       <a:round/>
                       <a:headEnd type="none" w="med" len="med"/>
                       <a:tailEnd type="none" w="med" len="med"/>
                     </a:lnT>
-                    <a:lnB w="9525" cap="flat" cmpd="sng" algn="ctr">
-                      <a:solidFill>
-                        <a:srgbClr val="BBBBBB"/>
-                      </a:solidFill>
-                      <a:prstDash val="solid"/>
-                      <a:round/>
-                      <a:headEnd type="none" w="med" len="med"/>
-                      <a:tailEnd type="none" w="med" len="med"/>
-                    </a:lnB>
-                    <a:solidFill>
-                      <a:srgbClr val="F4F4F4"/>
-                    </a:solidFill>
-                  </a:tcPr>
-                </a:tc>
-                <a:tc>
-                  <a:txBody>
-                    <a:bodyPr/>
-                    <a:lstStyle/>
-                    <a:p>
-                      <a:pPr indent="0" marL="0">
-                        <a:buNone/>
-                      </a:pPr>
-                      <a:r>
-                        <a:rPr lang="en-US" sz="1200" dirty="0">
-                          <a:solidFill>
-                            <a:srgbClr val="1A1A1A"/>
-                          </a:solidFill>
-                        </a:rPr>
-                        <a:t>代理人の身分証。Secretは絶対に秘密</a:t>
-                      </a:r>
-                      <a:endParaRPr lang="en-US" sz="1200" dirty="0"/>
-                    </a:p>
-                  </a:txBody>
-                  <a:tcPr marL="91440" marR="91440" marT="0" marB="0" anchor="ctr">
-                    <a:lnL w="9525" cap="flat" cmpd="sng" algn="ctr">
-                      <a:solidFill>
-                        <a:srgbClr val="BBBBBB"/>
-                      </a:solidFill>
-                      <a:prstDash val="solid"/>
-                      <a:round/>
-                      <a:headEnd type="none" w="med" len="med"/>
-                      <a:tailEnd type="none" w="med" len="med"/>
-                    </a:lnL>
-                    <a:lnR w="9525" cap="flat" cmpd="sng" algn="ctr">
-                      <a:solidFill>
-                        <a:srgbClr val="BBBBBB"/>
-                      </a:solidFill>
-                      <a:prstDash val="solid"/>
-                      <a:round/>
-                      <a:headEnd type="none" w="med" len="med"/>
-                      <a:tailEnd type="none" w="med" len="med"/>
-                    </a:lnR>
-                    <a:lnT w="9525" cap="flat" cmpd="sng" algn="ctr">
-                      <a:solidFill>
-                        <a:srgbClr val="BBBBBB"/>
-                      </a:solidFill>
-                      <a:prstDash val="solid"/>
-                      <a:round/>
-                      <a:headEnd type="none" w="med" len="med"/>
-                      <a:tailEnd type="none" w="med" len="med"/>
-                    </a:lnT>
-                    <a:lnB w="9525" cap="flat" cmpd="sng" algn="ctr">
-                      <a:solidFill>
-                        <a:srgbClr val="BBBBBB"/>
-                      </a:solidFill>
-                      <a:prstDash val="solid"/>
-                      <a:round/>
-                      <a:headEnd type="none" w="med" len="med"/>
-                      <a:tailEnd type="none" w="med" len="med"/>
-                    </a:lnB>
-                    <a:solidFill>
-                      <a:srgbClr val="F4F4F4"/>
-                    </a:solidFill>
-                  </a:tcPr>
-                </a:tc>
-                <a:tc>
-                  <a:txBody>
-                    <a:bodyPr/>
-                    <a:lstStyle/>
-                    <a:p>
-                      <a:pPr indent="0" marL="0">
-                        <a:buNone/>
-                      </a:pPr>
-                      <a:r>
-                        <a:rPr lang="en-US" sz="1200" dirty="0">
-                          <a:solidFill>
-                            <a:srgbClr val="1A1A1A"/>
-                          </a:solidFill>
-                        </a:rPr>
-                        <a:t>アプリの認証情報画面</a:t>
-                      </a:r>
-                      <a:endParaRPr lang="en-US" sz="1200" dirty="0"/>
-                    </a:p>
-                  </a:txBody>
-                  <a:tcPr marL="91440" marR="91440" marT="0" marB="0" anchor="ctr">
-                    <a:lnL w="9525" cap="flat" cmpd="sng" algn="ctr">
-                      <a:solidFill>
-                        <a:srgbClr val="BBBBBB"/>
-                      </a:solidFill>
-                      <a:prstDash val="solid"/>
-                      <a:round/>
-                      <a:headEnd type="none" w="med" len="med"/>
-                      <a:tailEnd type="none" w="med" len="med"/>
-                    </a:lnL>
-                    <a:lnR w="9525" cap="flat" cmpd="sng" algn="ctr">
-                      <a:solidFill>
-                        <a:srgbClr val="BBBBBB"/>
-                      </a:solidFill>
-                      <a:prstDash val="solid"/>
-                      <a:round/>
-                      <a:headEnd type="none" w="med" len="med"/>
-                      <a:tailEnd type="none" w="med" len="med"/>
-                    </a:lnR>
-                    <a:lnT w="9525" cap="flat" cmpd="sng" algn="ctr">
-                      <a:solidFill>
-                        <a:srgbClr val="BBBBBB"/>
-                      </a:solidFill>
-                      <a:prstDash val="solid"/>
-                      <a:round/>
-                      <a:headEnd type="none" w="med" len="med"/>
-                      <a:tailEnd type="none" w="med" len="med"/>
-                    </a:lnT>
-                    <a:lnB w="9525" cap="flat" cmpd="sng" algn="ctr">
-                      <a:solidFill>
-                        <a:srgbClr val="BBBBBB"/>
-                      </a:solidFill>
-                      <a:prstDash val="solid"/>
-                      <a:round/>
-                      <a:headEnd type="none" w="med" len="med"/>
-                      <a:tailEnd type="none" w="med" len="med"/>
-                    </a:lnB>
-                    <a:solidFill>
-                      <a:srgbClr val="F4F4F4"/>
-                    </a:solidFill>
-                  </a:tcPr>
-                </a:tc>
-              </a:tr>
-              <a:tr h="438912">
-                <a:tc>
-                  <a:txBody>
-                    <a:bodyPr/>
-                    <a:lstStyle/>
-                    <a:p>
-                      <a:pPr indent="0" marL="0">
-                        <a:buNone/>
-                      </a:pPr>
-                      <a:r>
-                        <a:rPr lang="en-US" sz="1200" b="1" dirty="0">
-                          <a:solidFill>
-                            <a:srgbClr val="1A1A1A"/>
-                          </a:solidFill>
-                        </a:rPr>
-                        <a:t>権限（スコープ）</a:t>
-                      </a:r>
-                      <a:endParaRPr lang="en-US" sz="1200" dirty="0"/>
-                    </a:p>
-                  </a:txBody>
-                  <a:tcPr marL="91440" marR="91440" marT="0" marB="0" anchor="ctr">
-                    <a:lnL w="9525" cap="flat" cmpd="sng" algn="ctr">
-                      <a:solidFill>
-                        <a:srgbClr val="BBBBBB"/>
-                      </a:solidFill>
-                      <a:prstDash val="solid"/>
-                      <a:round/>
-                      <a:headEnd type="none" w="med" len="med"/>
-                      <a:tailEnd type="none" w="med" len="med"/>
-                    </a:lnL>
-                    <a:lnR w="9525" cap="flat" cmpd="sng" algn="ctr">
-                      <a:solidFill>
-                        <a:srgbClr val="BBBBBB"/>
-                      </a:solidFill>
-                      <a:prstDash val="solid"/>
-                      <a:round/>
-                      <a:headEnd type="none" w="med" len="med"/>
-                      <a:tailEnd type="none" w="med" len="med"/>
-                    </a:lnR>
-                    <a:lnT w="9525" cap="flat" cmpd="sng" algn="ctr">
-                      <a:solidFill>
-                        <a:srgbClr val="BBBBBB"/>
-                      </a:solidFill>
-                      <a:prstDash val="solid"/>
-                      <a:round/>
-                      <a:headEnd type="none" w="med" len="med"/>
-                      <a:tailEnd type="none" w="med" len="med"/>
-                    </a:lnT>
-                    <a:lnB w="9525" cap="flat" cmpd="sng" algn="ctr">
-                      <a:solidFill>
-                        <a:srgbClr val="BBBBBB"/>
+                    <a:lnB w="12700" cap="flat" cmpd="sng" algn="ctr">
+                      <a:solidFill>
+                        <a:srgbClr val="1A1A1A"/>
                       </a:solidFill>
                       <a:prstDash val="solid"/>
                       <a:round/>
@@ -4363,47 +4307,54 @@
                         <a:buNone/>
                       </a:pPr>
                       <a:r>
-                        <a:rPr lang="en-US" sz="1200" dirty="0">
+                        <a:rPr lang="en-US" sz="1200" b="1" dirty="0">
                           <a:solidFill>
                             <a:srgbClr val="1A1A1A"/>
                           </a:solidFill>
+                          <a:latin typeface="Noto Sans JP Medium" pitchFamily="34" charset="0"/>
+                          <a:ea typeface="Noto Sans JP Medium" pitchFamily="34" charset="-122"/>
+                          <a:cs typeface="Noto Sans JP Medium" pitchFamily="34" charset="-120"/>
                         </a:rPr>
-                        <a:t>代理人に許すこと（BASEを読む・書く）</a:t>
+                        <a:t>代理人の身分証。Secretは絶対に秘密</a:t>
                       </a:r>
-                      <a:endParaRPr lang="en-US" sz="1200" dirty="0"/>
+                      <a:endParaRPr lang="en-US" sz="1200" dirty="0">
+                        <a:latin typeface="Noto Sans JP Medium" charset="0"/>
+                        <a:ea typeface="Noto Sans JP Medium" charset="0"/>
+                        <a:cs typeface="Noto Sans JP Medium" charset="0"/>
+                      </a:endParaRPr>
                     </a:p>
                   </a:txBody>
                   <a:tcPr marL="91440" marR="91440" marT="0" marB="0" anchor="ctr">
-                    <a:lnL w="9525" cap="flat" cmpd="sng" algn="ctr">
-                      <a:solidFill>
-                        <a:srgbClr val="BBBBBB"/>
+                    <a:lnL w="12700" cap="flat" cmpd="sng" algn="ctr">
+                      <a:solidFill>
+                        <a:srgbClr val="1A1A1A"/>
                       </a:solidFill>
                       <a:prstDash val="solid"/>
                       <a:round/>
                       <a:headEnd type="none" w="med" len="med"/>
                       <a:tailEnd type="none" w="med" len="med"/>
                     </a:lnL>
-                    <a:lnR w="9525" cap="flat" cmpd="sng" algn="ctr">
-                      <a:solidFill>
-                        <a:srgbClr val="BBBBBB"/>
+                    <a:lnR w="12700" cap="flat" cmpd="sng" algn="ctr">
+                      <a:solidFill>
+                        <a:srgbClr val="1A1A1A"/>
                       </a:solidFill>
                       <a:prstDash val="solid"/>
                       <a:round/>
                       <a:headEnd type="none" w="med" len="med"/>
                       <a:tailEnd type="none" w="med" len="med"/>
                     </a:lnR>
-                    <a:lnT w="9525" cap="flat" cmpd="sng" algn="ctr">
-                      <a:solidFill>
-                        <a:srgbClr val="BBBBBB"/>
+                    <a:lnT w="12700" cap="flat" cmpd="sng" algn="ctr">
+                      <a:solidFill>
+                        <a:srgbClr val="1A1A1A"/>
                       </a:solidFill>
                       <a:prstDash val="solid"/>
                       <a:round/>
                       <a:headEnd type="none" w="med" len="med"/>
                       <a:tailEnd type="none" w="med" len="med"/>
                     </a:lnT>
-                    <a:lnB w="9525" cap="flat" cmpd="sng" algn="ctr">
-                      <a:solidFill>
-                        <a:srgbClr val="BBBBBB"/>
+                    <a:lnB w="12700" cap="flat" cmpd="sng" algn="ctr">
+                      <a:solidFill>
+                        <a:srgbClr val="1A1A1A"/>
                       </a:solidFill>
                       <a:prstDash val="solid"/>
                       <a:round/>
@@ -4424,47 +4375,54 @@
                         <a:buNone/>
                       </a:pPr>
                       <a:r>
-                        <a:rPr lang="en-US" sz="1200" dirty="0">
+                        <a:rPr lang="en-US" sz="1200" b="1" dirty="0">
                           <a:solidFill>
                             <a:srgbClr val="1A1A1A"/>
                           </a:solidFill>
+                          <a:latin typeface="Noto Sans JP Medium" pitchFamily="34" charset="0"/>
+                          <a:ea typeface="Noto Sans JP Medium" pitchFamily="34" charset="-122"/>
+                          <a:cs typeface="Noto Sans JP Medium" pitchFamily="34" charset="-120"/>
                         </a:rPr>
-                        <a:t>アプリの権限画面</a:t>
+                        <a:t>アプリの認証情報画面</a:t>
                       </a:r>
-                      <a:endParaRPr lang="en-US" sz="1200" dirty="0"/>
+                      <a:endParaRPr lang="en-US" sz="1200" dirty="0">
+                        <a:latin typeface="Noto Sans JP Medium" charset="0"/>
+                        <a:ea typeface="Noto Sans JP Medium" charset="0"/>
+                        <a:cs typeface="Noto Sans JP Medium" charset="0"/>
+                      </a:endParaRPr>
                     </a:p>
                   </a:txBody>
                   <a:tcPr marL="91440" marR="91440" marT="0" marB="0" anchor="ctr">
-                    <a:lnL w="9525" cap="flat" cmpd="sng" algn="ctr">
-                      <a:solidFill>
-                        <a:srgbClr val="BBBBBB"/>
+                    <a:lnL w="12700" cap="flat" cmpd="sng" algn="ctr">
+                      <a:solidFill>
+                        <a:srgbClr val="1A1A1A"/>
                       </a:solidFill>
                       <a:prstDash val="solid"/>
                       <a:round/>
                       <a:headEnd type="none" w="med" len="med"/>
                       <a:tailEnd type="none" w="med" len="med"/>
                     </a:lnL>
-                    <a:lnR w="9525" cap="flat" cmpd="sng" algn="ctr">
-                      <a:solidFill>
-                        <a:srgbClr val="BBBBBB"/>
+                    <a:lnR w="12700" cap="flat" cmpd="sng" algn="ctr">
+                      <a:solidFill>
+                        <a:srgbClr val="1A1A1A"/>
                       </a:solidFill>
                       <a:prstDash val="solid"/>
                       <a:round/>
                       <a:headEnd type="none" w="med" len="med"/>
                       <a:tailEnd type="none" w="med" len="med"/>
                     </a:lnR>
-                    <a:lnT w="9525" cap="flat" cmpd="sng" algn="ctr">
-                      <a:solidFill>
-                        <a:srgbClr val="BBBBBB"/>
+                    <a:lnT w="12700" cap="flat" cmpd="sng" algn="ctr">
+                      <a:solidFill>
+                        <a:srgbClr val="1A1A1A"/>
                       </a:solidFill>
                       <a:prstDash val="solid"/>
                       <a:round/>
                       <a:headEnd type="none" w="med" len="med"/>
                       <a:tailEnd type="none" w="med" len="med"/>
                     </a:lnT>
-                    <a:lnB w="9525" cap="flat" cmpd="sng" algn="ctr">
-                      <a:solidFill>
-                        <a:srgbClr val="BBBBBB"/>
+                    <a:lnB w="12700" cap="flat" cmpd="sng" algn="ctr">
+                      <a:solidFill>
+                        <a:srgbClr val="1A1A1A"/>
                       </a:solidFill>
                       <a:prstDash val="solid"/>
                       <a:round/>
@@ -4489,45 +4447,52 @@
                       <a:r>
                         <a:rPr lang="en-US" sz="1200" b="1" dirty="0">
                           <a:solidFill>
-                            <a:srgbClr val="1A1A1A"/>
+                            <a:srgbClr val="DD6420"/>
                           </a:solidFill>
+                          <a:latin typeface="Noto Sans JP" pitchFamily="34" charset="0"/>
+                          <a:ea typeface="Noto Sans JP" pitchFamily="34" charset="-122"/>
+                          <a:cs typeface="Noto Sans JP" pitchFamily="34" charset="-120"/>
                         </a:rPr>
-                        <a:t>BASEトークン・テーブルID</a:t>
+                        <a:t>権限（スコープ）</a:t>
                       </a:r>
-                      <a:endParaRPr lang="en-US" sz="1200" dirty="0"/>
+                      <a:endParaRPr lang="en-US" sz="1200" dirty="0">
+                        <a:latin typeface="Noto Sans JP" charset="0"/>
+                        <a:ea typeface="Noto Sans JP" charset="0"/>
+                        <a:cs typeface="Noto Sans JP" charset="0"/>
+                      </a:endParaRPr>
                     </a:p>
                   </a:txBody>
                   <a:tcPr marL="91440" marR="91440" marT="0" marB="0" anchor="ctr">
-                    <a:lnL w="9525" cap="flat" cmpd="sng" algn="ctr">
-                      <a:solidFill>
-                        <a:srgbClr val="BBBBBB"/>
+                    <a:lnL w="12700" cap="flat" cmpd="sng" algn="ctr">
+                      <a:solidFill>
+                        <a:srgbClr val="1A1A1A"/>
                       </a:solidFill>
                       <a:prstDash val="solid"/>
                       <a:round/>
                       <a:headEnd type="none" w="med" len="med"/>
                       <a:tailEnd type="none" w="med" len="med"/>
                     </a:lnL>
-                    <a:lnR w="9525" cap="flat" cmpd="sng" algn="ctr">
-                      <a:solidFill>
-                        <a:srgbClr val="BBBBBB"/>
+                    <a:lnR w="12700" cap="flat" cmpd="sng" algn="ctr">
+                      <a:solidFill>
+                        <a:srgbClr val="1A1A1A"/>
                       </a:solidFill>
                       <a:prstDash val="solid"/>
                       <a:round/>
                       <a:headEnd type="none" w="med" len="med"/>
                       <a:tailEnd type="none" w="med" len="med"/>
                     </a:lnR>
-                    <a:lnT w="9525" cap="flat" cmpd="sng" algn="ctr">
-                      <a:solidFill>
-                        <a:srgbClr val="BBBBBB"/>
+                    <a:lnT w="12700" cap="flat" cmpd="sng" algn="ctr">
+                      <a:solidFill>
+                        <a:srgbClr val="1A1A1A"/>
                       </a:solidFill>
                       <a:prstDash val="solid"/>
                       <a:round/>
                       <a:headEnd type="none" w="med" len="med"/>
                       <a:tailEnd type="none" w="med" len="med"/>
                     </a:lnT>
-                    <a:lnB w="9525" cap="flat" cmpd="sng" algn="ctr">
-                      <a:solidFill>
-                        <a:srgbClr val="BBBBBB"/>
+                    <a:lnB w="12700" cap="flat" cmpd="sng" algn="ctr">
+                      <a:solidFill>
+                        <a:srgbClr val="1A1A1A"/>
                       </a:solidFill>
                       <a:prstDash val="solid"/>
                       <a:round/>
@@ -4535,7 +4500,7 @@
                       <a:tailEnd type="none" w="med" len="med"/>
                     </a:lnB>
                     <a:solidFill>
-                      <a:srgbClr val="F4F4F4"/>
+                      <a:srgbClr val="FFFFFF"/>
                     </a:solidFill>
                   </a:tcPr>
                 </a:tc>
@@ -4548,47 +4513,54 @@
                         <a:buNone/>
                       </a:pPr>
                       <a:r>
-                        <a:rPr lang="en-US" sz="1200" dirty="0">
+                        <a:rPr lang="en-US" sz="1200" b="1" dirty="0">
                           <a:solidFill>
                             <a:srgbClr val="1A1A1A"/>
                           </a:solidFill>
+                          <a:latin typeface="Noto Sans JP Medium" pitchFamily="34" charset="0"/>
+                          <a:ea typeface="Noto Sans JP Medium" pitchFamily="34" charset="-122"/>
+                          <a:cs typeface="Noto Sans JP Medium" pitchFamily="34" charset="-120"/>
                         </a:rPr>
-                        <a:t>どの台帳のどの1冊か</a:t>
+                        <a:t>代理人に許すこと（BASEを読む・書く）</a:t>
                       </a:r>
-                      <a:endParaRPr lang="en-US" sz="1200" dirty="0"/>
+                      <a:endParaRPr lang="en-US" sz="1200" dirty="0">
+                        <a:latin typeface="Noto Sans JP Medium" charset="0"/>
+                        <a:ea typeface="Noto Sans JP Medium" charset="0"/>
+                        <a:cs typeface="Noto Sans JP Medium" charset="0"/>
+                      </a:endParaRPr>
                     </a:p>
                   </a:txBody>
                   <a:tcPr marL="91440" marR="91440" marT="0" marB="0" anchor="ctr">
-                    <a:lnL w="9525" cap="flat" cmpd="sng" algn="ctr">
-                      <a:solidFill>
-                        <a:srgbClr val="BBBBBB"/>
+                    <a:lnL w="12700" cap="flat" cmpd="sng" algn="ctr">
+                      <a:solidFill>
+                        <a:srgbClr val="1A1A1A"/>
                       </a:solidFill>
                       <a:prstDash val="solid"/>
                       <a:round/>
                       <a:headEnd type="none" w="med" len="med"/>
                       <a:tailEnd type="none" w="med" len="med"/>
                     </a:lnL>
-                    <a:lnR w="9525" cap="flat" cmpd="sng" algn="ctr">
-                      <a:solidFill>
-                        <a:srgbClr val="BBBBBB"/>
+                    <a:lnR w="12700" cap="flat" cmpd="sng" algn="ctr">
+                      <a:solidFill>
+                        <a:srgbClr val="1A1A1A"/>
                       </a:solidFill>
                       <a:prstDash val="solid"/>
                       <a:round/>
                       <a:headEnd type="none" w="med" len="med"/>
                       <a:tailEnd type="none" w="med" len="med"/>
                     </a:lnR>
-                    <a:lnT w="9525" cap="flat" cmpd="sng" algn="ctr">
-                      <a:solidFill>
-                        <a:srgbClr val="BBBBBB"/>
+                    <a:lnT w="12700" cap="flat" cmpd="sng" algn="ctr">
+                      <a:solidFill>
+                        <a:srgbClr val="1A1A1A"/>
                       </a:solidFill>
                       <a:prstDash val="solid"/>
                       <a:round/>
                       <a:headEnd type="none" w="med" len="med"/>
                       <a:tailEnd type="none" w="med" len="med"/>
                     </a:lnT>
-                    <a:lnB w="9525" cap="flat" cmpd="sng" algn="ctr">
-                      <a:solidFill>
-                        <a:srgbClr val="BBBBBB"/>
+                    <a:lnB w="12700" cap="flat" cmpd="sng" algn="ctr">
+                      <a:solidFill>
+                        <a:srgbClr val="1A1A1A"/>
                       </a:solidFill>
                       <a:prstDash val="solid"/>
                       <a:round/>
@@ -4596,7 +4568,7 @@
                       <a:tailEnd type="none" w="med" len="med"/>
                     </a:lnB>
                     <a:solidFill>
-                      <a:srgbClr val="F4F4F4"/>
+                      <a:srgbClr val="FFFFFF"/>
                     </a:solidFill>
                   </a:tcPr>
                 </a:tc>
@@ -4609,47 +4581,260 @@
                         <a:buNone/>
                       </a:pPr>
                       <a:r>
-                        <a:rPr lang="en-US" sz="1200" dirty="0">
+                        <a:rPr lang="en-US" sz="1200" b="1" dirty="0">
                           <a:solidFill>
                             <a:srgbClr val="1A1A1A"/>
                           </a:solidFill>
+                          <a:latin typeface="Noto Sans JP Medium" pitchFamily="34" charset="0"/>
+                          <a:ea typeface="Noto Sans JP Medium" pitchFamily="34" charset="-122"/>
+                          <a:cs typeface="Noto Sans JP Medium" pitchFamily="34" charset="-120"/>
+                        </a:rPr>
+                        <a:t>アプリの権限画面</a:t>
+                      </a:r>
+                      <a:endParaRPr lang="en-US" sz="1200" dirty="0">
+                        <a:latin typeface="Noto Sans JP Medium" charset="0"/>
+                        <a:ea typeface="Noto Sans JP Medium" charset="0"/>
+                        <a:cs typeface="Noto Sans JP Medium" charset="0"/>
+                      </a:endParaRPr>
+                    </a:p>
+                  </a:txBody>
+                  <a:tcPr marL="91440" marR="91440" marT="0" marB="0" anchor="ctr">
+                    <a:lnL w="12700" cap="flat" cmpd="sng" algn="ctr">
+                      <a:solidFill>
+                        <a:srgbClr val="1A1A1A"/>
+                      </a:solidFill>
+                      <a:prstDash val="solid"/>
+                      <a:round/>
+                      <a:headEnd type="none" w="med" len="med"/>
+                      <a:tailEnd type="none" w="med" len="med"/>
+                    </a:lnL>
+                    <a:lnR w="12700" cap="flat" cmpd="sng" algn="ctr">
+                      <a:solidFill>
+                        <a:srgbClr val="1A1A1A"/>
+                      </a:solidFill>
+                      <a:prstDash val="solid"/>
+                      <a:round/>
+                      <a:headEnd type="none" w="med" len="med"/>
+                      <a:tailEnd type="none" w="med" len="med"/>
+                    </a:lnR>
+                    <a:lnT w="12700" cap="flat" cmpd="sng" algn="ctr">
+                      <a:solidFill>
+                        <a:srgbClr val="1A1A1A"/>
+                      </a:solidFill>
+                      <a:prstDash val="solid"/>
+                      <a:round/>
+                      <a:headEnd type="none" w="med" len="med"/>
+                      <a:tailEnd type="none" w="med" len="med"/>
+                    </a:lnT>
+                    <a:lnB w="12700" cap="flat" cmpd="sng" algn="ctr">
+                      <a:solidFill>
+                        <a:srgbClr val="1A1A1A"/>
+                      </a:solidFill>
+                      <a:prstDash val="solid"/>
+                      <a:round/>
+                      <a:headEnd type="none" w="med" len="med"/>
+                      <a:tailEnd type="none" w="med" len="med"/>
+                    </a:lnB>
+                    <a:solidFill>
+                      <a:srgbClr val="FFFFFF"/>
+                    </a:solidFill>
+                  </a:tcPr>
+                </a:tc>
+              </a:tr>
+              <a:tr h="438912">
+                <a:tc>
+                  <a:txBody>
+                    <a:bodyPr/>
+                    <a:lstStyle/>
+                    <a:p>
+                      <a:pPr indent="0" marL="0">
+                        <a:buNone/>
+                      </a:pPr>
+                      <a:r>
+                        <a:rPr lang="en-US" sz="1200" b="1" dirty="0">
+                          <a:solidFill>
+                            <a:srgbClr val="DD6420"/>
+                          </a:solidFill>
+                          <a:latin typeface="Noto Sans JP" pitchFamily="34" charset="0"/>
+                          <a:ea typeface="Noto Sans JP" pitchFamily="34" charset="-122"/>
+                          <a:cs typeface="Noto Sans JP" pitchFamily="34" charset="-120"/>
+                        </a:rPr>
+                        <a:t>BASEトークン・テーブルID</a:t>
+                      </a:r>
+                      <a:endParaRPr lang="en-US" sz="1200" dirty="0">
+                        <a:latin typeface="Noto Sans JP" charset="0"/>
+                        <a:ea typeface="Noto Sans JP" charset="0"/>
+                        <a:cs typeface="Noto Sans JP" charset="0"/>
+                      </a:endParaRPr>
+                    </a:p>
+                  </a:txBody>
+                  <a:tcPr marL="91440" marR="91440" marT="0" marB="0" anchor="ctr">
+                    <a:lnL w="12700" cap="flat" cmpd="sng" algn="ctr">
+                      <a:solidFill>
+                        <a:srgbClr val="1A1A1A"/>
+                      </a:solidFill>
+                      <a:prstDash val="solid"/>
+                      <a:round/>
+                      <a:headEnd type="none" w="med" len="med"/>
+                      <a:tailEnd type="none" w="med" len="med"/>
+                    </a:lnL>
+                    <a:lnR w="12700" cap="flat" cmpd="sng" algn="ctr">
+                      <a:solidFill>
+                        <a:srgbClr val="1A1A1A"/>
+                      </a:solidFill>
+                      <a:prstDash val="solid"/>
+                      <a:round/>
+                      <a:headEnd type="none" w="med" len="med"/>
+                      <a:tailEnd type="none" w="med" len="med"/>
+                    </a:lnR>
+                    <a:lnT w="12700" cap="flat" cmpd="sng" algn="ctr">
+                      <a:solidFill>
+                        <a:srgbClr val="1A1A1A"/>
+                      </a:solidFill>
+                      <a:prstDash val="solid"/>
+                      <a:round/>
+                      <a:headEnd type="none" w="med" len="med"/>
+                      <a:tailEnd type="none" w="med" len="med"/>
+                    </a:lnT>
+                    <a:lnB w="12700" cap="flat" cmpd="sng" algn="ctr">
+                      <a:solidFill>
+                        <a:srgbClr val="1A1A1A"/>
+                      </a:solidFill>
+                      <a:prstDash val="solid"/>
+                      <a:round/>
+                      <a:headEnd type="none" w="med" len="med"/>
+                      <a:tailEnd type="none" w="med" len="med"/>
+                    </a:lnB>
+                    <a:solidFill>
+                      <a:srgbClr val="FFFFFF"/>
+                    </a:solidFill>
+                  </a:tcPr>
+                </a:tc>
+                <a:tc>
+                  <a:txBody>
+                    <a:bodyPr/>
+                    <a:lstStyle/>
+                    <a:p>
+                      <a:pPr indent="0" marL="0">
+                        <a:buNone/>
+                      </a:pPr>
+                      <a:r>
+                        <a:rPr lang="en-US" sz="1200" b="1" dirty="0">
+                          <a:solidFill>
+                            <a:srgbClr val="1A1A1A"/>
+                          </a:solidFill>
+                          <a:latin typeface="Noto Sans JP Medium" pitchFamily="34" charset="0"/>
+                          <a:ea typeface="Noto Sans JP Medium" pitchFamily="34" charset="-122"/>
+                          <a:cs typeface="Noto Sans JP Medium" pitchFamily="34" charset="-120"/>
+                        </a:rPr>
+                        <a:t>どの台帳のどの1冊か</a:t>
+                      </a:r>
+                      <a:endParaRPr lang="en-US" sz="1200" dirty="0">
+                        <a:latin typeface="Noto Sans JP Medium" charset="0"/>
+                        <a:ea typeface="Noto Sans JP Medium" charset="0"/>
+                        <a:cs typeface="Noto Sans JP Medium" charset="0"/>
+                      </a:endParaRPr>
+                    </a:p>
+                  </a:txBody>
+                  <a:tcPr marL="91440" marR="91440" marT="0" marB="0" anchor="ctr">
+                    <a:lnL w="12700" cap="flat" cmpd="sng" algn="ctr">
+                      <a:solidFill>
+                        <a:srgbClr val="1A1A1A"/>
+                      </a:solidFill>
+                      <a:prstDash val="solid"/>
+                      <a:round/>
+                      <a:headEnd type="none" w="med" len="med"/>
+                      <a:tailEnd type="none" w="med" len="med"/>
+                    </a:lnL>
+                    <a:lnR w="12700" cap="flat" cmpd="sng" algn="ctr">
+                      <a:solidFill>
+                        <a:srgbClr val="1A1A1A"/>
+                      </a:solidFill>
+                      <a:prstDash val="solid"/>
+                      <a:round/>
+                      <a:headEnd type="none" w="med" len="med"/>
+                      <a:tailEnd type="none" w="med" len="med"/>
+                    </a:lnR>
+                    <a:lnT w="12700" cap="flat" cmpd="sng" algn="ctr">
+                      <a:solidFill>
+                        <a:srgbClr val="1A1A1A"/>
+                      </a:solidFill>
+                      <a:prstDash val="solid"/>
+                      <a:round/>
+                      <a:headEnd type="none" w="med" len="med"/>
+                      <a:tailEnd type="none" w="med" len="med"/>
+                    </a:lnT>
+                    <a:lnB w="12700" cap="flat" cmpd="sng" algn="ctr">
+                      <a:solidFill>
+                        <a:srgbClr val="1A1A1A"/>
+                      </a:solidFill>
+                      <a:prstDash val="solid"/>
+                      <a:round/>
+                      <a:headEnd type="none" w="med" len="med"/>
+                      <a:tailEnd type="none" w="med" len="med"/>
+                    </a:lnB>
+                    <a:solidFill>
+                      <a:srgbClr val="FFFFFF"/>
+                    </a:solidFill>
+                  </a:tcPr>
+                </a:tc>
+                <a:tc>
+                  <a:txBody>
+                    <a:bodyPr/>
+                    <a:lstStyle/>
+                    <a:p>
+                      <a:pPr indent="0" marL="0">
+                        <a:buNone/>
+                      </a:pPr>
+                      <a:r>
+                        <a:rPr lang="en-US" sz="1200" b="1" dirty="0">
+                          <a:solidFill>
+                            <a:srgbClr val="1A1A1A"/>
+                          </a:solidFill>
+                          <a:latin typeface="Noto Sans JP Medium" pitchFamily="34" charset="0"/>
+                          <a:ea typeface="Noto Sans JP Medium" pitchFamily="34" charset="-122"/>
+                          <a:cs typeface="Noto Sans JP Medium" pitchFamily="34" charset="-120"/>
                         </a:rPr>
                         <a:t>BASEのURL</a:t>
                       </a:r>
-                      <a:endParaRPr lang="en-US" sz="1200" dirty="0"/>
+                      <a:endParaRPr lang="en-US" sz="1200" dirty="0">
+                        <a:latin typeface="Noto Sans JP Medium" charset="0"/>
+                        <a:ea typeface="Noto Sans JP Medium" charset="0"/>
+                        <a:cs typeface="Noto Sans JP Medium" charset="0"/>
+                      </a:endParaRPr>
                     </a:p>
                   </a:txBody>
                   <a:tcPr marL="91440" marR="91440" marT="0" marB="0" anchor="ctr">
-                    <a:lnL w="9525" cap="flat" cmpd="sng" algn="ctr">
-                      <a:solidFill>
-                        <a:srgbClr val="BBBBBB"/>
+                    <a:lnL w="12700" cap="flat" cmpd="sng" algn="ctr">
+                      <a:solidFill>
+                        <a:srgbClr val="1A1A1A"/>
                       </a:solidFill>
                       <a:prstDash val="solid"/>
                       <a:round/>
                       <a:headEnd type="none" w="med" len="med"/>
                       <a:tailEnd type="none" w="med" len="med"/>
                     </a:lnL>
-                    <a:lnR w="9525" cap="flat" cmpd="sng" algn="ctr">
-                      <a:solidFill>
-                        <a:srgbClr val="BBBBBB"/>
+                    <a:lnR w="12700" cap="flat" cmpd="sng" algn="ctr">
+                      <a:solidFill>
+                        <a:srgbClr val="1A1A1A"/>
                       </a:solidFill>
                       <a:prstDash val="solid"/>
                       <a:round/>
                       <a:headEnd type="none" w="med" len="med"/>
                       <a:tailEnd type="none" w="med" len="med"/>
                     </a:lnR>
-                    <a:lnT w="9525" cap="flat" cmpd="sng" algn="ctr">
-                      <a:solidFill>
-                        <a:srgbClr val="BBBBBB"/>
+                    <a:lnT w="12700" cap="flat" cmpd="sng" algn="ctr">
+                      <a:solidFill>
+                        <a:srgbClr val="1A1A1A"/>
                       </a:solidFill>
                       <a:prstDash val="solid"/>
                       <a:round/>
                       <a:headEnd type="none" w="med" len="med"/>
                       <a:tailEnd type="none" w="med" len="med"/>
                     </a:lnT>
-                    <a:lnB w="9525" cap="flat" cmpd="sng" algn="ctr">
-                      <a:solidFill>
-                        <a:srgbClr val="BBBBBB"/>
+                    <a:lnB w="12700" cap="flat" cmpd="sng" algn="ctr">
+                      <a:solidFill>
+                        <a:srgbClr val="1A1A1A"/>
                       </a:solidFill>
                       <a:prstDash val="solid"/>
                       <a:round/>
@@ -4657,7 +4842,7 @@
                       <a:tailEnd type="none" w="med" len="med"/>
                     </a:lnB>
                     <a:solidFill>
-                      <a:srgbClr val="F4F4F4"/>
+                      <a:srgbClr val="FFFFFF"/>
                     </a:solidFill>
                   </a:tcPr>
                 </a:tc>
@@ -4678,8 +4863,8 @@
         </p:nvSpPr>
         <p:spPr>
           <a:xfrm>
-            <a:off x="8229600" y="4773168"/>
-            <a:ext cx="365760" cy="228600"/>
+            <a:off x="8366760" y="4754880"/>
+            <a:ext cx="365760" cy="274320"/>
           </a:xfrm>
           <a:prstGeom prst="rect">
             <a:avLst/>
@@ -4691,20 +4876,23 @@
           </a:extLst>
         </p:spPr>
         <p:txBody>
-          <a:bodyPr/>
+          <a:bodyPr anchor="ctr"/>
           <a:lstStyle>
             <a:lvl1pPr>
-              <a:defRPr sz="900">
-                <a:solidFill>
-                  <a:srgbClr val="5A6872"/>
-                </a:solidFill>
+              <a:defRPr sz="850">
+                <a:solidFill>
+                  <a:srgbClr val="FFFFFF"/>
+                </a:solidFill>
+                <a:latin typeface="Noto Sans JP"/>
+                <a:ea typeface="Noto Sans JP"/>
+                <a:cs typeface="Noto Sans JP"/>
               </a:defRPr>
             </a:lvl1pPr>
           </a:lstStyle>
           <a:p>
             <a:pPr algn="r"/>
             <a:fld id="{F7021451-1387-4CA6-816F-3879F97B5CBC}" type="slidenum">
-              <a:rPr b="0" lang="en-US"/>
+              <a:rPr b="1" lang="en-US"/>
               <a:t>3</a:t>
             </a:fld>
             <a:endParaRPr lang="en-US"/>
@@ -4739,84 +4927,25 @@
       <p:sp>
         <p:nvSpPr>
           <p:cNvPr id="2" name="Text 0"/>
-          <p:cNvSpPr/>
-          <p:nvPr>
-            <p:ph idx="100" type="title" hasCustomPrompt="1"/>
-          </p:nvPr>
-        </p:nvSpPr>
-        <p:spPr>
-          <a:xfrm>
-            <a:off x="548640" y="658368"/>
-            <a:ext cx="8046720" cy="566928"/>
-          </a:xfrm>
-          <a:prstGeom prst="rect">
-            <a:avLst/>
-          </a:prstGeom>
-          <a:noFill/>
-          <a:ln/>
-        </p:spPr>
-        <p:txBody>
-          <a:bodyPr wrap="square" lIns="0" tIns="0" rIns="0" bIns="0" rtlCol="0" anchor="ctr"/>
-          <a:lstStyle/>
-          <a:p>
-            <a:pPr algn="l" indent="0" marL="0">
-              <a:buNone/>
-            </a:pPr>
-            <a:r>
-              <a:rPr lang="en-US" sz="2400" b="1" dirty="0">
-                <a:solidFill>
-                  <a:schemeClr val="tx1"/>
-                </a:solidFill>
-              </a:rPr>
-              <a:t>Larkアプリを作り、BASEに招く</a:t>
-            </a:r>
-            <a:endParaRPr lang="en-US" sz="2400" dirty="0"/>
-          </a:p>
-        </p:txBody>
-      </p:sp>
-      <p:sp>
-        <p:nvSpPr>
-          <p:cNvPr id="3" name="chip"/>
-          <p:cNvSpPr/>
-          <p:nvPr/>
-        </p:nvSpPr>
-        <p:spPr>
-          <a:xfrm>
-            <a:off x="548640" y="292608"/>
-            <a:ext cx="1755648" cy="292608"/>
-          </a:xfrm>
-          <a:prstGeom prst="roundRect">
-            <a:avLst>
-              <a:gd name="adj" fmla="val 50000"/>
-            </a:avLst>
+          <p:cNvSpPr txBox="1"/>
+          <p:nvPr/>
+        </p:nvSpPr>
+        <p:spPr>
+          <a:xfrm rot="-180000">
+            <a:off x="411480" y="201168"/>
+            <a:ext cx="1915668" cy="352044"/>
+          </a:xfrm>
+          <a:prstGeom prst="rect">
+            <a:avLst/>
           </a:prstGeom>
           <a:solidFill>
-            <a:schemeClr val="accent2"/>
+            <a:srgbClr val="DD6420"/>
           </a:solidFill>
-          <a:ln w="12700">
+          <a:ln>
             <a:solidFill>
-              <a:schemeClr val="accent2"/>
+              <a:srgbClr val="DD6420"/>
             </a:solidFill>
-            <a:prstDash val="solid"/>
           </a:ln>
-        </p:spPr>
-      </p:sp>
-      <p:sp>
-        <p:nvSpPr>
-          <p:cNvPr id="4" name="chip-text"/>
-          <p:cNvSpPr txBox="1"/>
-          <p:nvPr/>
-        </p:nvSpPr>
-        <p:spPr>
-          <a:xfrm>
-            <a:off x="548640" y="292608"/>
-            <a:ext cx="1755648" cy="292608"/>
-          </a:xfrm>
-          <a:prstGeom prst="rect">
-            <a:avLst/>
-          </a:prstGeom>
-          <a:noFill/>
-          <a:ln/>
         </p:spPr>
         <p:txBody>
           <a:bodyPr wrap="square" lIns="0" tIns="0" rIns="0" bIns="0" rtlCol="0" anchor="ctr"/>
@@ -4826,58 +4955,117 @@
               <a:buNone/>
             </a:pPr>
             <a:r>
-              <a:rPr lang="en-US" sz="1100" b="1" dirty="0">
-                <a:solidFill>
-                  <a:schemeClr val="bg1"/>
-                </a:solidFill>
+              <a:rPr lang="ja-JP" altLang="en-US" sz="1100" dirty="0">
+                <a:solidFill>
+                  <a:srgbClr val="FFFFFF"/>
+                </a:solidFill>
+                <a:latin typeface="Dela Gothic One" pitchFamily="34" charset="0"/>
+                <a:ea typeface="けいふぉんと" pitchFamily="34" charset="-122"/>
+                <a:cs typeface="Dela Gothic One" pitchFamily="34" charset="-120"/>
               </a:rPr>
               <a:t>ハンズオン① 20分</a:t>
             </a:r>
-            <a:endParaRPr lang="en-US" sz="1100" dirty="0"/>
-          </a:p>
-        </p:txBody>
-      </p:sp>
-      <p:sp>
-        <p:nvSpPr>
-          <p:cNvPr id="6" name="step-num"/>
+            <a:endParaRPr lang="ja-JP" sz="1100" dirty="0"/>
+          </a:p>
+        </p:txBody>
+      </p:sp>
+      <p:sp>
+        <p:nvSpPr>
+          <p:cNvPr id="3" name="Text 1"/>
+          <p:cNvSpPr txBox="1"/>
+          <p:nvPr/>
+        </p:nvSpPr>
+        <p:spPr>
+          <a:xfrm>
+            <a:off x="411480" y="502920"/>
+            <a:ext cx="8321040" cy="685800"/>
+          </a:xfrm>
+          <a:prstGeom prst="rect">
+            <a:avLst/>
+          </a:prstGeom>
+          <a:noFill/>
+          <a:ln/>
+        </p:spPr>
+        <p:txBody>
+          <a:bodyPr wrap="square" lIns="0" tIns="0" rIns="0" bIns="0" rtlCol="0" anchor="ctr">
+            <a:normAutofit/>
+          </a:bodyPr>
+          <a:lstStyle/>
+          <a:p>
+            <a:pPr indent="0" marL="0">
+              <a:buNone/>
+            </a:pPr>
+            <a:r>
+              <a:rPr lang="ja-JP" altLang="en-US" sz="2600" dirty="0">
+                <a:solidFill>
+                  <a:srgbClr val="1A1A1A"/>
+                </a:solidFill>
+                <a:latin typeface="Dela Gothic One" pitchFamily="34" charset="0"/>
+                <a:ea typeface="けいふぉんと" pitchFamily="34" charset="-122"/>
+                <a:cs typeface="Dela Gothic One" pitchFamily="34" charset="-120"/>
+              </a:rPr>
+              <a:t>Larkアプリを作り、BASEに招く</a:t>
+            </a:r>
+            <a:endParaRPr lang="ja-JP" sz="2600" dirty="0"/>
+          </a:p>
+        </p:txBody>
+      </p:sp>
+      <p:sp>
+        <p:nvSpPr>
+          <p:cNvPr id="5" name="card"/>
           <p:cNvSpPr/>
           <p:nvPr/>
         </p:nvSpPr>
         <p:spPr>
           <a:xfrm>
-            <a:off x="548640" y="1513332"/>
-            <a:ext cx="384048" cy="384048"/>
-          </a:xfrm>
-          <a:prstGeom prst="ellipse">
-            <a:avLst/>
+            <a:off x="502920" y="1417320"/>
+            <a:ext cx="8138160" cy="382219"/>
+          </a:xfrm>
+          <a:prstGeom prst="roundRect">
+            <a:avLst>
+              <a:gd name="adj" fmla="val 23923"/>
+            </a:avLst>
           </a:prstGeom>
           <a:solidFill>
-            <a:schemeClr val="accent1"/>
+            <a:srgbClr val="FFFFFF"/>
           </a:solidFill>
-          <a:ln w="15875">
+          <a:ln w="25400">
             <a:solidFill>
               <a:srgbClr val="1A1A1A"/>
             </a:solidFill>
             <a:prstDash val="solid"/>
           </a:ln>
-        </p:spPr>
-      </p:sp>
-      <p:sp>
-        <p:nvSpPr>
-          <p:cNvPr id="7" name="step-num-text"/>
+          <a:effectLst>
+            <a:outerShdw sx="100000" sy="100000" kx="0" ky="0" algn="bl" rotWithShape="0" blurRad="101600" dist="38100" dir="2700000">
+              <a:srgbClr val="1A1A1A">
+                <a:alpha val="100000"/>
+              </a:srgbClr>
+            </a:outerShdw>
+          </a:effectLst>
+        </p:spPr>
+      </p:sp>
+      <p:sp>
+        <p:nvSpPr>
+          <p:cNvPr id="6" name="Text 3"/>
           <p:cNvSpPr txBox="1"/>
           <p:nvPr/>
         </p:nvSpPr>
         <p:spPr>
           <a:xfrm>
-            <a:off x="548640" y="1513332"/>
-            <a:ext cx="384048" cy="384048"/>
-          </a:xfrm>
-          <a:prstGeom prst="rect">
-            <a:avLst/>
-          </a:prstGeom>
-          <a:noFill/>
-          <a:ln/>
+            <a:off x="640080" y="1472184"/>
+            <a:ext cx="272491" cy="272491"/>
+          </a:xfrm>
+          <a:prstGeom prst="ellipse">
+            <a:avLst/>
+          </a:prstGeom>
+          <a:solidFill>
+            <a:srgbClr val="DD6420"/>
+          </a:solidFill>
+          <a:ln w="19050">
+            <a:solidFill>
+              <a:srgbClr val="1A1A1A"/>
+            </a:solidFill>
+          </a:ln>
         </p:spPr>
         <p:txBody>
           <a:bodyPr wrap="square" lIns="0" tIns="0" rIns="0" bIns="0" rtlCol="0" anchor="ctr"/>
@@ -4887,27 +5075,30 @@
               <a:buNone/>
             </a:pPr>
             <a:r>
-              <a:rPr lang="en-US" sz="1400" b="1" dirty="0">
-                <a:solidFill>
-                  <a:schemeClr val="tx1"/>
-                </a:solidFill>
+              <a:rPr lang="ja-JP" altLang="en-US" sz="1500" dirty="0">
+                <a:solidFill>
+                  <a:srgbClr val="FFFFFF"/>
+                </a:solidFill>
+                <a:latin typeface="Dela Gothic One" pitchFamily="34" charset="0"/>
+                <a:ea typeface="けいふぉんと" pitchFamily="34" charset="-122"/>
+                <a:cs typeface="Dela Gothic One" pitchFamily="34" charset="-120"/>
               </a:rPr>
               <a:t>1</a:t>
             </a:r>
-            <a:endParaRPr lang="en-US" sz="1400" dirty="0"/>
-          </a:p>
-        </p:txBody>
-      </p:sp>
-      <p:sp>
-        <p:nvSpPr>
-          <p:cNvPr id="8" name="step-text"/>
+            <a:endParaRPr lang="ja-JP" sz="1500" dirty="0"/>
+          </a:p>
+        </p:txBody>
+      </p:sp>
+      <p:sp>
+        <p:nvSpPr>
+          <p:cNvPr id="7" name="step-text"/>
           <p:cNvSpPr txBox="1"/>
           <p:nvPr/>
         </p:nvSpPr>
         <p:spPr>
           <a:xfrm>
-            <a:off x="1097280" y="1463040"/>
-            <a:ext cx="7498080" cy="484632"/>
+            <a:off x="1234440" y="1417320"/>
+            <a:ext cx="7269480" cy="382219"/>
           </a:xfrm>
           <a:prstGeom prst="rect">
             <a:avLst/>
@@ -4916,65 +5107,85 @@
           <a:ln/>
         </p:spPr>
         <p:txBody>
-          <a:bodyPr wrap="square" lIns="0" tIns="0" rIns="0" bIns="0" rtlCol="0" anchor="ctr"/>
+          <a:bodyPr wrap="square" lIns="0" tIns="0" rIns="0" bIns="0" rtlCol="0" anchor="ctr">
+            <a:normAutofit/>
+          </a:bodyPr>
           <a:lstStyle/>
           <a:p>
             <a:pPr indent="0" marL="0">
               <a:buNone/>
             </a:pPr>
             <a:r>
-              <a:rPr lang="en-US" sz="1450" dirty="0">
-                <a:solidFill>
-                  <a:schemeClr val="tx1"/>
-                </a:solidFill>
+              <a:rPr lang="ja-JP" altLang="en-US" sz="1400" b="1" dirty="0">
+                <a:solidFill>
+                  <a:srgbClr val="1A1A1A"/>
+                </a:solidFill>
+                <a:latin typeface="Noto Sans JP" pitchFamily="34" charset="0"/>
+                <a:ea typeface="Noto Sans JP" pitchFamily="34" charset="-122"/>
+                <a:cs typeface="Noto Sans JP" pitchFamily="34" charset="-120"/>
               </a:rPr>
               <a:t>開発者コンソールでカスタムアプリを作り、ボットを有効にする</a:t>
             </a:r>
-            <a:endParaRPr lang="en-US" sz="1450" dirty="0"/>
-          </a:p>
-        </p:txBody>
-      </p:sp>
-      <p:sp>
-        <p:nvSpPr>
-          <p:cNvPr id="9" name="step-num"/>
+            <a:endParaRPr lang="ja-JP" sz="1400" dirty="0"/>
+          </a:p>
+        </p:txBody>
+      </p:sp>
+      <p:sp>
+        <p:nvSpPr>
+          <p:cNvPr id="8" name="card"/>
           <p:cNvSpPr/>
           <p:nvPr/>
         </p:nvSpPr>
         <p:spPr>
           <a:xfrm>
-            <a:off x="548640" y="1997964"/>
-            <a:ext cx="384048" cy="384048"/>
-          </a:xfrm>
-          <a:prstGeom prst="ellipse">
-            <a:avLst/>
+            <a:off x="502920" y="1927555"/>
+            <a:ext cx="8138160" cy="382219"/>
+          </a:xfrm>
+          <a:prstGeom prst="roundRect">
+            <a:avLst>
+              <a:gd name="adj" fmla="val 23923"/>
+            </a:avLst>
           </a:prstGeom>
           <a:solidFill>
-            <a:schemeClr val="accent1"/>
+            <a:srgbClr val="FFFFFF"/>
           </a:solidFill>
-          <a:ln w="15875">
+          <a:ln w="25400">
             <a:solidFill>
               <a:srgbClr val="1A1A1A"/>
             </a:solidFill>
             <a:prstDash val="solid"/>
           </a:ln>
-        </p:spPr>
-      </p:sp>
-      <p:sp>
-        <p:nvSpPr>
-          <p:cNvPr id="10" name="step-num-text"/>
+          <a:effectLst>
+            <a:outerShdw sx="100000" sy="100000" kx="0" ky="0" algn="bl" rotWithShape="0" blurRad="101600" dist="38100" dir="2700000">
+              <a:srgbClr val="1A1A1A">
+                <a:alpha val="100000"/>
+              </a:srgbClr>
+            </a:outerShdw>
+          </a:effectLst>
+        </p:spPr>
+      </p:sp>
+      <p:sp>
+        <p:nvSpPr>
+          <p:cNvPr id="9" name="Text 6"/>
           <p:cNvSpPr txBox="1"/>
           <p:nvPr/>
         </p:nvSpPr>
         <p:spPr>
           <a:xfrm>
-            <a:off x="548640" y="1997964"/>
-            <a:ext cx="384048" cy="384048"/>
-          </a:xfrm>
-          <a:prstGeom prst="rect">
-            <a:avLst/>
-          </a:prstGeom>
-          <a:noFill/>
-          <a:ln/>
+            <a:off x="640080" y="1982419"/>
+            <a:ext cx="272491" cy="272491"/>
+          </a:xfrm>
+          <a:prstGeom prst="ellipse">
+            <a:avLst/>
+          </a:prstGeom>
+          <a:solidFill>
+            <a:srgbClr val="DD6420"/>
+          </a:solidFill>
+          <a:ln w="19050">
+            <a:solidFill>
+              <a:srgbClr val="1A1A1A"/>
+            </a:solidFill>
+          </a:ln>
         </p:spPr>
         <p:txBody>
           <a:bodyPr wrap="square" lIns="0" tIns="0" rIns="0" bIns="0" rtlCol="0" anchor="ctr"/>
@@ -4984,27 +5195,30 @@
               <a:buNone/>
             </a:pPr>
             <a:r>
-              <a:rPr lang="en-US" sz="1400" b="1" dirty="0">
-                <a:solidFill>
-                  <a:schemeClr val="tx1"/>
-                </a:solidFill>
+              <a:rPr lang="ja-JP" altLang="en-US" sz="1500" dirty="0">
+                <a:solidFill>
+                  <a:srgbClr val="FFFFFF"/>
+                </a:solidFill>
+                <a:latin typeface="Dela Gothic One" pitchFamily="34" charset="0"/>
+                <a:ea typeface="けいふぉんと" pitchFamily="34" charset="-122"/>
+                <a:cs typeface="Dela Gothic One" pitchFamily="34" charset="-120"/>
               </a:rPr>
               <a:t>2</a:t>
             </a:r>
-            <a:endParaRPr lang="en-US" sz="1400" dirty="0"/>
-          </a:p>
-        </p:txBody>
-      </p:sp>
-      <p:sp>
-        <p:nvSpPr>
-          <p:cNvPr id="11" name="step-text"/>
+            <a:endParaRPr lang="ja-JP" sz="1500" dirty="0"/>
+          </a:p>
+        </p:txBody>
+      </p:sp>
+      <p:sp>
+        <p:nvSpPr>
+          <p:cNvPr id="10" name="step-text"/>
           <p:cNvSpPr txBox="1"/>
           <p:nvPr/>
         </p:nvSpPr>
         <p:spPr>
           <a:xfrm>
-            <a:off x="1097280" y="1947672"/>
-            <a:ext cx="7498080" cy="484632"/>
+            <a:off x="1234440" y="1927555"/>
+            <a:ext cx="7269480" cy="382219"/>
           </a:xfrm>
           <a:prstGeom prst="rect">
             <a:avLst/>
@@ -5013,65 +5227,85 @@
           <a:ln/>
         </p:spPr>
         <p:txBody>
-          <a:bodyPr wrap="square" lIns="0" tIns="0" rIns="0" bIns="0" rtlCol="0" anchor="ctr"/>
+          <a:bodyPr wrap="square" lIns="0" tIns="0" rIns="0" bIns="0" rtlCol="0" anchor="ctr">
+            <a:normAutofit/>
+          </a:bodyPr>
           <a:lstStyle/>
           <a:p>
             <a:pPr indent="0" marL="0">
               <a:buNone/>
             </a:pPr>
             <a:r>
-              <a:rPr lang="en-US" sz="1450" dirty="0">
-                <a:solidFill>
-                  <a:schemeClr val="tx1"/>
-                </a:solidFill>
+              <a:rPr lang="ja-JP" altLang="en-US" sz="1400" b="1" dirty="0">
+                <a:solidFill>
+                  <a:srgbClr val="1A1A1A"/>
+                </a:solidFill>
+                <a:latin typeface="Noto Sans JP" pitchFamily="34" charset="0"/>
+                <a:ea typeface="Noto Sans JP" pitchFamily="34" charset="-122"/>
+                <a:cs typeface="Noto Sans JP" pitchFamily="34" charset="-120"/>
               </a:rPr>
               <a:t>BASE（Bitable）の閲覧・編集の権限を追加する</a:t>
             </a:r>
-            <a:endParaRPr lang="en-US" sz="1450" dirty="0"/>
-          </a:p>
-        </p:txBody>
-      </p:sp>
-      <p:sp>
-        <p:nvSpPr>
-          <p:cNvPr id="12" name="step-num"/>
+            <a:endParaRPr lang="ja-JP" sz="1400" dirty="0"/>
+          </a:p>
+        </p:txBody>
+      </p:sp>
+      <p:sp>
+        <p:nvSpPr>
+          <p:cNvPr id="11" name="card"/>
           <p:cNvSpPr/>
           <p:nvPr/>
         </p:nvSpPr>
         <p:spPr>
           <a:xfrm>
-            <a:off x="548640" y="2482596"/>
-            <a:ext cx="384048" cy="384048"/>
-          </a:xfrm>
-          <a:prstGeom prst="ellipse">
-            <a:avLst/>
+            <a:off x="502920" y="2437790"/>
+            <a:ext cx="8138160" cy="382219"/>
+          </a:xfrm>
+          <a:prstGeom prst="roundRect">
+            <a:avLst>
+              <a:gd name="adj" fmla="val 23923"/>
+            </a:avLst>
           </a:prstGeom>
           <a:solidFill>
-            <a:schemeClr val="accent1"/>
+            <a:srgbClr val="FFFFFF"/>
           </a:solidFill>
-          <a:ln w="15875">
+          <a:ln w="25400">
             <a:solidFill>
               <a:srgbClr val="1A1A1A"/>
             </a:solidFill>
             <a:prstDash val="solid"/>
           </a:ln>
-        </p:spPr>
-      </p:sp>
-      <p:sp>
-        <p:nvSpPr>
-          <p:cNvPr id="13" name="step-num-text"/>
+          <a:effectLst>
+            <a:outerShdw sx="100000" sy="100000" kx="0" ky="0" algn="bl" rotWithShape="0" blurRad="101600" dist="38100" dir="2700000">
+              <a:srgbClr val="1A1A1A">
+                <a:alpha val="100000"/>
+              </a:srgbClr>
+            </a:outerShdw>
+          </a:effectLst>
+        </p:spPr>
+      </p:sp>
+      <p:sp>
+        <p:nvSpPr>
+          <p:cNvPr id="12" name="Text 9"/>
           <p:cNvSpPr txBox="1"/>
           <p:nvPr/>
         </p:nvSpPr>
         <p:spPr>
           <a:xfrm>
-            <a:off x="548640" y="2482596"/>
-            <a:ext cx="384048" cy="384048"/>
-          </a:xfrm>
-          <a:prstGeom prst="rect">
-            <a:avLst/>
-          </a:prstGeom>
-          <a:noFill/>
-          <a:ln/>
+            <a:off x="640080" y="2492654"/>
+            <a:ext cx="272491" cy="272491"/>
+          </a:xfrm>
+          <a:prstGeom prst="ellipse">
+            <a:avLst/>
+          </a:prstGeom>
+          <a:solidFill>
+            <a:srgbClr val="DD6420"/>
+          </a:solidFill>
+          <a:ln w="19050">
+            <a:solidFill>
+              <a:srgbClr val="1A1A1A"/>
+            </a:solidFill>
+          </a:ln>
         </p:spPr>
         <p:txBody>
           <a:bodyPr wrap="square" lIns="0" tIns="0" rIns="0" bIns="0" rtlCol="0" anchor="ctr"/>
@@ -5081,27 +5315,30 @@
               <a:buNone/>
             </a:pPr>
             <a:r>
-              <a:rPr lang="en-US" sz="1400" b="1" dirty="0">
-                <a:solidFill>
-                  <a:schemeClr val="tx1"/>
-                </a:solidFill>
+              <a:rPr lang="ja-JP" altLang="en-US" sz="1500" dirty="0">
+                <a:solidFill>
+                  <a:srgbClr val="FFFFFF"/>
+                </a:solidFill>
+                <a:latin typeface="Dela Gothic One" pitchFamily="34" charset="0"/>
+                <a:ea typeface="けいふぉんと" pitchFamily="34" charset="-122"/>
+                <a:cs typeface="Dela Gothic One" pitchFamily="34" charset="-120"/>
               </a:rPr>
               <a:t>3</a:t>
             </a:r>
-            <a:endParaRPr lang="en-US" sz="1400" dirty="0"/>
-          </a:p>
-        </p:txBody>
-      </p:sp>
-      <p:sp>
-        <p:nvSpPr>
-          <p:cNvPr id="14" name="step-text"/>
+            <a:endParaRPr lang="ja-JP" sz="1500" dirty="0"/>
+          </a:p>
+        </p:txBody>
+      </p:sp>
+      <p:sp>
+        <p:nvSpPr>
+          <p:cNvPr id="13" name="step-text"/>
           <p:cNvSpPr txBox="1"/>
           <p:nvPr/>
         </p:nvSpPr>
         <p:spPr>
           <a:xfrm>
-            <a:off x="1097280" y="2432304"/>
-            <a:ext cx="7498080" cy="484632"/>
+            <a:off x="1234440" y="2437790"/>
+            <a:ext cx="7269480" cy="382219"/>
           </a:xfrm>
           <a:prstGeom prst="rect">
             <a:avLst/>
@@ -5110,65 +5347,85 @@
           <a:ln/>
         </p:spPr>
         <p:txBody>
-          <a:bodyPr wrap="square" lIns="0" tIns="0" rIns="0" bIns="0" rtlCol="0" anchor="ctr"/>
+          <a:bodyPr wrap="square" lIns="0" tIns="0" rIns="0" bIns="0" rtlCol="0" anchor="ctr">
+            <a:normAutofit/>
+          </a:bodyPr>
           <a:lstStyle/>
           <a:p>
             <a:pPr indent="0" marL="0">
               <a:buNone/>
             </a:pPr>
             <a:r>
-              <a:rPr lang="en-US" sz="1450" dirty="0">
-                <a:solidFill>
-                  <a:schemeClr val="tx1"/>
-                </a:solidFill>
+              <a:rPr lang="ja-JP" altLang="en-US" sz="1400" b="1" dirty="0">
+                <a:solidFill>
+                  <a:srgbClr val="1A1A1A"/>
+                </a:solidFill>
+                <a:latin typeface="Noto Sans JP" pitchFamily="34" charset="0"/>
+                <a:ea typeface="Noto Sans JP" pitchFamily="34" charset="-122"/>
+                <a:cs typeface="Noto Sans JP" pitchFamily="34" charset="-120"/>
               </a:rPr>
               <a:t>バージョンを作成して公開を申請する（管理者の承認が必要な場合あり）</a:t>
             </a:r>
-            <a:endParaRPr lang="en-US" sz="1450" dirty="0"/>
-          </a:p>
-        </p:txBody>
-      </p:sp>
-      <p:sp>
-        <p:nvSpPr>
-          <p:cNvPr id="15" name="step-num"/>
+            <a:endParaRPr lang="ja-JP" sz="1400" dirty="0"/>
+          </a:p>
+        </p:txBody>
+      </p:sp>
+      <p:sp>
+        <p:nvSpPr>
+          <p:cNvPr id="14" name="card"/>
           <p:cNvSpPr/>
           <p:nvPr/>
         </p:nvSpPr>
         <p:spPr>
           <a:xfrm>
-            <a:off x="548640" y="2967228"/>
-            <a:ext cx="384048" cy="384048"/>
-          </a:xfrm>
-          <a:prstGeom prst="ellipse">
-            <a:avLst/>
+            <a:off x="502920" y="2948026"/>
+            <a:ext cx="8138160" cy="382219"/>
+          </a:xfrm>
+          <a:prstGeom prst="roundRect">
+            <a:avLst>
+              <a:gd name="adj" fmla="val 23923"/>
+            </a:avLst>
           </a:prstGeom>
           <a:solidFill>
-            <a:schemeClr val="accent1"/>
+            <a:srgbClr val="FFFFFF"/>
           </a:solidFill>
-          <a:ln w="15875">
+          <a:ln w="25400">
             <a:solidFill>
               <a:srgbClr val="1A1A1A"/>
             </a:solidFill>
             <a:prstDash val="solid"/>
           </a:ln>
-        </p:spPr>
-      </p:sp>
-      <p:sp>
-        <p:nvSpPr>
-          <p:cNvPr id="16" name="step-num-text"/>
+          <a:effectLst>
+            <a:outerShdw sx="100000" sy="100000" kx="0" ky="0" algn="bl" rotWithShape="0" blurRad="101600" dist="38100" dir="2700000">
+              <a:srgbClr val="1A1A1A">
+                <a:alpha val="100000"/>
+              </a:srgbClr>
+            </a:outerShdw>
+          </a:effectLst>
+        </p:spPr>
+      </p:sp>
+      <p:sp>
+        <p:nvSpPr>
+          <p:cNvPr id="15" name="Text 12"/>
           <p:cNvSpPr txBox="1"/>
           <p:nvPr/>
         </p:nvSpPr>
         <p:spPr>
           <a:xfrm>
-            <a:off x="548640" y="2967228"/>
-            <a:ext cx="384048" cy="384048"/>
-          </a:xfrm>
-          <a:prstGeom prst="rect">
-            <a:avLst/>
-          </a:prstGeom>
-          <a:noFill/>
-          <a:ln/>
+            <a:off x="640080" y="3002890"/>
+            <a:ext cx="272491" cy="272491"/>
+          </a:xfrm>
+          <a:prstGeom prst="ellipse">
+            <a:avLst/>
+          </a:prstGeom>
+          <a:solidFill>
+            <a:srgbClr val="DD6420"/>
+          </a:solidFill>
+          <a:ln w="19050">
+            <a:solidFill>
+              <a:srgbClr val="1A1A1A"/>
+            </a:solidFill>
+          </a:ln>
         </p:spPr>
         <p:txBody>
           <a:bodyPr wrap="square" lIns="0" tIns="0" rIns="0" bIns="0" rtlCol="0" anchor="ctr"/>
@@ -5178,27 +5435,30 @@
               <a:buNone/>
             </a:pPr>
             <a:r>
-              <a:rPr lang="en-US" sz="1400" b="1" dirty="0">
-                <a:solidFill>
-                  <a:schemeClr val="tx1"/>
-                </a:solidFill>
+              <a:rPr lang="ja-JP" altLang="en-US" sz="1500" dirty="0">
+                <a:solidFill>
+                  <a:srgbClr val="FFFFFF"/>
+                </a:solidFill>
+                <a:latin typeface="Dela Gothic One" pitchFamily="34" charset="0"/>
+                <a:ea typeface="けいふぉんと" pitchFamily="34" charset="-122"/>
+                <a:cs typeface="Dela Gothic One" pitchFamily="34" charset="-120"/>
               </a:rPr>
               <a:t>4</a:t>
             </a:r>
-            <a:endParaRPr lang="en-US" sz="1400" dirty="0"/>
-          </a:p>
-        </p:txBody>
-      </p:sp>
-      <p:sp>
-        <p:nvSpPr>
-          <p:cNvPr id="17" name="step-text"/>
+            <a:endParaRPr lang="ja-JP" sz="1500" dirty="0"/>
+          </a:p>
+        </p:txBody>
+      </p:sp>
+      <p:sp>
+        <p:nvSpPr>
+          <p:cNvPr id="16" name="step-text"/>
           <p:cNvSpPr txBox="1"/>
           <p:nvPr/>
         </p:nvSpPr>
         <p:spPr>
           <a:xfrm>
-            <a:off x="1097280" y="2916936"/>
-            <a:ext cx="7498080" cy="484632"/>
+            <a:off x="1234440" y="2948026"/>
+            <a:ext cx="7269480" cy="382219"/>
           </a:xfrm>
           <a:prstGeom prst="rect">
             <a:avLst/>
@@ -5207,65 +5467,85 @@
           <a:ln/>
         </p:spPr>
         <p:txBody>
-          <a:bodyPr wrap="square" lIns="0" tIns="0" rIns="0" bIns="0" rtlCol="0" anchor="ctr"/>
+          <a:bodyPr wrap="square" lIns="0" tIns="0" rIns="0" bIns="0" rtlCol="0" anchor="ctr">
+            <a:normAutofit/>
+          </a:bodyPr>
           <a:lstStyle/>
           <a:p>
             <a:pPr indent="0" marL="0">
               <a:buNone/>
             </a:pPr>
             <a:r>
-              <a:rPr lang="en-US" sz="1450" dirty="0">
-                <a:solidFill>
-                  <a:schemeClr val="tx1"/>
-                </a:solidFill>
+              <a:rPr lang="ja-JP" altLang="en-US" sz="1400" b="1" dirty="0">
+                <a:solidFill>
+                  <a:srgbClr val="1A1A1A"/>
+                </a:solidFill>
+                <a:latin typeface="Noto Sans JP" pitchFamily="34" charset="0"/>
+                <a:ea typeface="Noto Sans JP" pitchFamily="34" charset="-122"/>
+                <a:cs typeface="Noto Sans JP" pitchFamily="34" charset="-120"/>
               </a:rPr>
               <a:t>使うBASEの「…」メニューから、作ったアプリを追加する</a:t>
             </a:r>
-            <a:endParaRPr lang="en-US" sz="1450" dirty="0"/>
-          </a:p>
-        </p:txBody>
-      </p:sp>
-      <p:sp>
-        <p:nvSpPr>
-          <p:cNvPr id="18" name="step-num"/>
+            <a:endParaRPr lang="ja-JP" sz="1400" dirty="0"/>
+          </a:p>
+        </p:txBody>
+      </p:sp>
+      <p:sp>
+        <p:nvSpPr>
+          <p:cNvPr id="17" name="card"/>
           <p:cNvSpPr/>
           <p:nvPr/>
         </p:nvSpPr>
         <p:spPr>
           <a:xfrm>
-            <a:off x="548640" y="3451860"/>
-            <a:ext cx="384048" cy="384048"/>
-          </a:xfrm>
-          <a:prstGeom prst="ellipse">
-            <a:avLst/>
+            <a:off x="502920" y="3458261"/>
+            <a:ext cx="8138160" cy="382219"/>
+          </a:xfrm>
+          <a:prstGeom prst="roundRect">
+            <a:avLst>
+              <a:gd name="adj" fmla="val 23923"/>
+            </a:avLst>
           </a:prstGeom>
           <a:solidFill>
-            <a:schemeClr val="accent1"/>
+            <a:srgbClr val="FFFFFF"/>
           </a:solidFill>
-          <a:ln w="15875">
+          <a:ln w="25400">
             <a:solidFill>
               <a:srgbClr val="1A1A1A"/>
             </a:solidFill>
             <a:prstDash val="solid"/>
           </a:ln>
-        </p:spPr>
-      </p:sp>
-      <p:sp>
-        <p:nvSpPr>
-          <p:cNvPr id="19" name="step-num-text"/>
+          <a:effectLst>
+            <a:outerShdw sx="100000" sy="100000" kx="0" ky="0" algn="bl" rotWithShape="0" blurRad="101600" dist="38100" dir="2700000">
+              <a:srgbClr val="1A1A1A">
+                <a:alpha val="100000"/>
+              </a:srgbClr>
+            </a:outerShdw>
+          </a:effectLst>
+        </p:spPr>
+      </p:sp>
+      <p:sp>
+        <p:nvSpPr>
+          <p:cNvPr id="18" name="Text 15"/>
           <p:cNvSpPr txBox="1"/>
           <p:nvPr/>
         </p:nvSpPr>
         <p:spPr>
           <a:xfrm>
-            <a:off x="548640" y="3451860"/>
-            <a:ext cx="384048" cy="384048"/>
-          </a:xfrm>
-          <a:prstGeom prst="rect">
-            <a:avLst/>
-          </a:prstGeom>
-          <a:noFill/>
-          <a:ln/>
+            <a:off x="640080" y="3513125"/>
+            <a:ext cx="272491" cy="272491"/>
+          </a:xfrm>
+          <a:prstGeom prst="ellipse">
+            <a:avLst/>
+          </a:prstGeom>
+          <a:solidFill>
+            <a:srgbClr val="DD6420"/>
+          </a:solidFill>
+          <a:ln w="19050">
+            <a:solidFill>
+              <a:srgbClr val="1A1A1A"/>
+            </a:solidFill>
+          </a:ln>
         </p:spPr>
         <p:txBody>
           <a:bodyPr wrap="square" lIns="0" tIns="0" rIns="0" bIns="0" rtlCol="0" anchor="ctr"/>
@@ -5275,27 +5555,30 @@
               <a:buNone/>
             </a:pPr>
             <a:r>
-              <a:rPr lang="en-US" sz="1400" b="1" dirty="0">
-                <a:solidFill>
-                  <a:schemeClr val="tx1"/>
-                </a:solidFill>
+              <a:rPr lang="ja-JP" altLang="en-US" sz="1500" dirty="0">
+                <a:solidFill>
+                  <a:srgbClr val="FFFFFF"/>
+                </a:solidFill>
+                <a:latin typeface="Dela Gothic One" pitchFamily="34" charset="0"/>
+                <a:ea typeface="けいふぉんと" pitchFamily="34" charset="-122"/>
+                <a:cs typeface="Dela Gothic One" pitchFamily="34" charset="-120"/>
               </a:rPr>
               <a:t>5</a:t>
             </a:r>
-            <a:endParaRPr lang="en-US" sz="1400" dirty="0"/>
-          </a:p>
-        </p:txBody>
-      </p:sp>
-      <p:sp>
-        <p:nvSpPr>
-          <p:cNvPr id="20" name="step-text"/>
+            <a:endParaRPr lang="ja-JP" sz="1500" dirty="0"/>
+          </a:p>
+        </p:txBody>
+      </p:sp>
+      <p:sp>
+        <p:nvSpPr>
+          <p:cNvPr id="19" name="step-text"/>
           <p:cNvSpPr txBox="1"/>
           <p:nvPr/>
         </p:nvSpPr>
         <p:spPr>
           <a:xfrm>
-            <a:off x="1097280" y="3401568"/>
-            <a:ext cx="7498080" cy="484632"/>
+            <a:off x="1234440" y="3458261"/>
+            <a:ext cx="7269480" cy="382219"/>
           </a:xfrm>
           <a:prstGeom prst="rect">
             <a:avLst/>
@@ -5304,108 +5587,80 @@
           <a:ln/>
         </p:spPr>
         <p:txBody>
-          <a:bodyPr wrap="square" lIns="0" tIns="0" rIns="0" bIns="0" rtlCol="0" anchor="ctr"/>
+          <a:bodyPr wrap="square" lIns="0" tIns="0" rIns="0" bIns="0" rtlCol="0" anchor="ctr">
+            <a:normAutofit/>
+          </a:bodyPr>
           <a:lstStyle/>
           <a:p>
             <a:pPr indent="0" marL="0">
               <a:buNone/>
             </a:pPr>
             <a:r>
-              <a:rPr lang="en-US" sz="1450" dirty="0">
-                <a:solidFill>
-                  <a:schemeClr val="tx1"/>
-                </a:solidFill>
+              <a:rPr lang="ja-JP" altLang="en-US" sz="1400" b="1" dirty="0">
+                <a:solidFill>
+                  <a:srgbClr val="1A1A1A"/>
+                </a:solidFill>
+                <a:latin typeface="Noto Sans JP" pitchFamily="34" charset="0"/>
+                <a:ea typeface="Noto Sans JP" pitchFamily="34" charset="-122"/>
+                <a:cs typeface="Noto Sans JP" pitchFamily="34" charset="-120"/>
               </a:rPr>
               <a:t>App ID / Secret を安全な場所に控える</a:t>
             </a:r>
-            <a:endParaRPr lang="en-US" sz="1450" dirty="0"/>
-          </a:p>
-        </p:txBody>
-      </p:sp>
-      <p:sp>
-        <p:nvSpPr>
-          <p:cNvPr id="21" name="foot-box"/>
-          <p:cNvSpPr/>
-          <p:nvPr/>
-        </p:nvSpPr>
-        <p:spPr>
-          <a:xfrm>
-            <a:off x="548640" y="3977640"/>
-            <a:ext cx="8046720" cy="502920"/>
-          </a:xfrm>
-          <a:prstGeom prst="roundRect">
-            <a:avLst>
-              <a:gd name="adj" fmla="val 18182"/>
-            </a:avLst>
+            <a:endParaRPr lang="ja-JP" sz="1400" dirty="0"/>
+          </a:p>
+        </p:txBody>
+      </p:sp>
+      <p:sp>
+        <p:nvSpPr>
+          <p:cNvPr id="20" name="Text 17"/>
+          <p:cNvSpPr txBox="1"/>
+          <p:nvPr/>
+        </p:nvSpPr>
+        <p:spPr>
+          <a:xfrm rot="-60000">
+            <a:off x="502920" y="4005072"/>
+            <a:ext cx="8138160" cy="502920"/>
+          </a:xfrm>
+          <a:prstGeom prst="rect">
+            <a:avLst/>
           </a:prstGeom>
           <a:solidFill>
-            <a:schemeClr val="bg2"/>
+            <a:srgbClr val="DD6420"/>
           </a:solidFill>
-          <a:ln w="12700">
+          <a:ln w="19050">
             <a:solidFill>
-              <a:schemeClr val="bg2"/>
+              <a:srgbClr val="1A1A1A"/>
             </a:solidFill>
-            <a:prstDash val="solid"/>
           </a:ln>
-        </p:spPr>
-      </p:sp>
-      <p:pic>
-        <p:nvPicPr>
-          <p:cNvPr id="22" name="foot-icon" descr="preencoded.png">    </p:cNvPr>
-          <p:cNvPicPr>
-            <a:picLocks noChangeAspect="1"/>
-          </p:cNvPicPr>
-          <p:nvPr/>
-        </p:nvPicPr>
-        <p:blipFill>
-          <a:blip r:embed="rId1"/>
-          <a:stretch>
-            <a:fillRect/>
-          </a:stretch>
-        </p:blipFill>
-        <p:spPr>
-          <a:xfrm>
-            <a:off x="685800" y="4105656"/>
-            <a:ext cx="246888" cy="246888"/>
-          </a:xfrm>
-          <a:prstGeom prst="rect">
-            <a:avLst/>
-          </a:prstGeom>
-        </p:spPr>
-      </p:pic>
-      <p:sp>
-        <p:nvSpPr>
-          <p:cNvPr id="23" name="foot-text"/>
-          <p:cNvSpPr txBox="1"/>
-          <p:nvPr/>
-        </p:nvSpPr>
-        <p:spPr>
-          <a:xfrm>
-            <a:off x="1051560" y="3977640"/>
-            <a:ext cx="7406640" cy="502920"/>
-          </a:xfrm>
-          <a:prstGeom prst="rect">
-            <a:avLst/>
-          </a:prstGeom>
-          <a:noFill/>
-          <a:ln/>
-        </p:spPr>
-        <p:txBody>
-          <a:bodyPr wrap="square" lIns="0" tIns="0" rIns="0" bIns="0" rtlCol="0" anchor="ctr"/>
-          <a:lstStyle/>
-          <a:p>
-            <a:pPr indent="0" marL="0">
+          <a:effectLst>
+            <a:outerShdw sx="100000" sy="100000" kx="0" ky="0" algn="bl" rotWithShape="0" blurRad="101600" dist="38100" dir="2700000">
+              <a:srgbClr val="1A1A1A">
+                <a:alpha val="100000"/>
+              </a:srgbClr>
+            </a:outerShdw>
+          </a:effectLst>
+        </p:spPr>
+        <p:txBody>
+          <a:bodyPr wrap="square" lIns="0" tIns="1905" rIns="1905" bIns="0" rtlCol="0" anchor="ctr">
+            <a:normAutofit/>
+          </a:bodyPr>
+          <a:lstStyle/>
+          <a:p>
+            <a:pPr algn="ctr" indent="0" marL="0">
               <a:buNone/>
             </a:pPr>
             <a:r>
-              <a:rPr lang="en-US" sz="1150" dirty="0">
-                <a:solidFill>
-                  <a:schemeClr val="tx1"/>
-                </a:solidFill>
+              <a:rPr lang="ja-JP" altLang="en-US" sz="1300" b="1" dirty="0">
+                <a:solidFill>
+                  <a:srgbClr val="FFFFFF"/>
+                </a:solidFill>
+                <a:latin typeface="Noto Sans JP" pitchFamily="34" charset="0"/>
+                <a:ea typeface="Noto Sans JP" pitchFamily="34" charset="-122"/>
+                <a:cs typeface="Noto Sans JP" pitchFamily="34" charset="-120"/>
               </a:rPr>
               <a:t>画面が見つからないときは、Secretを隠してスクリーンショットを講師に</a:t>
             </a:r>
-            <a:endParaRPr lang="en-US" sz="1150" dirty="0"/>
+            <a:endParaRPr lang="ja-JP" sz="1300" dirty="0"/>
           </a:p>
         </p:txBody>
       </p:sp>
@@ -5421,8 +5676,8 @@
         </p:nvSpPr>
         <p:spPr>
           <a:xfrm>
-            <a:off x="8229600" y="4773168"/>
-            <a:ext cx="365760" cy="228600"/>
+            <a:off x="8366760" y="4754880"/>
+            <a:ext cx="365760" cy="274320"/>
           </a:xfrm>
           <a:prstGeom prst="rect">
             <a:avLst/>
@@ -5434,20 +5689,23 @@
           </a:extLst>
         </p:spPr>
         <p:txBody>
-          <a:bodyPr/>
+          <a:bodyPr anchor="ctr"/>
           <a:lstStyle>
             <a:lvl1pPr>
-              <a:defRPr sz="900">
-                <a:solidFill>
-                  <a:srgbClr val="5A6872"/>
-                </a:solidFill>
+              <a:defRPr sz="850">
+                <a:solidFill>
+                  <a:srgbClr val="FFFFFF"/>
+                </a:solidFill>
+                <a:latin typeface="Noto Sans JP"/>
+                <a:ea typeface="Noto Sans JP"/>
+                <a:cs typeface="Noto Sans JP"/>
               </a:defRPr>
             </a:lvl1pPr>
           </a:lstStyle>
           <a:p>
             <a:pPr algn="r"/>
             <a:fld id="{F7021451-1387-4CA6-816F-3879F97B5CBC}" type="slidenum">
-              <a:rPr b="0" lang="en-US"/>
+              <a:rPr b="1" lang="en-US"/>
               <a:t>4</a:t>
             </a:fld>
             <a:endParaRPr lang="en-US"/>
@@ -5482,84 +5740,25 @@
       <p:sp>
         <p:nvSpPr>
           <p:cNvPr id="2" name="Text 0"/>
-          <p:cNvSpPr/>
-          <p:nvPr>
-            <p:ph idx="100" type="title" hasCustomPrompt="1"/>
-          </p:nvPr>
-        </p:nvSpPr>
-        <p:spPr>
-          <a:xfrm>
-            <a:off x="548640" y="658368"/>
-            <a:ext cx="8046720" cy="566928"/>
-          </a:xfrm>
-          <a:prstGeom prst="rect">
-            <a:avLst/>
-          </a:prstGeom>
-          <a:noFill/>
-          <a:ln/>
-        </p:spPr>
-        <p:txBody>
-          <a:bodyPr wrap="square" lIns="0" tIns="0" rIns="0" bIns="0" rtlCol="0" anchor="ctr"/>
-          <a:lstStyle/>
-          <a:p>
-            <a:pPr algn="l" indent="0" marL="0">
-              <a:buNone/>
-            </a:pPr>
-            <a:r>
-              <a:rPr lang="en-US" sz="2400" b="1" dirty="0">
-                <a:solidFill>
-                  <a:schemeClr val="tx1"/>
-                </a:solidFill>
-              </a:rPr>
-              <a:t>秘密情報は「受付係」だけが知っている</a:t>
-            </a:r>
-            <a:endParaRPr lang="en-US" sz="2400" dirty="0"/>
-          </a:p>
-        </p:txBody>
-      </p:sp>
-      <p:sp>
-        <p:nvSpPr>
-          <p:cNvPr id="3" name="chip"/>
-          <p:cNvSpPr/>
-          <p:nvPr/>
-        </p:nvSpPr>
-        <p:spPr>
-          <a:xfrm>
-            <a:off x="548640" y="292608"/>
-            <a:ext cx="1344168" cy="292608"/>
-          </a:xfrm>
-          <a:prstGeom prst="roundRect">
-            <a:avLst>
-              <a:gd name="adj" fmla="val 50000"/>
-            </a:avLst>
+          <p:cNvSpPr txBox="1"/>
+          <p:nvPr/>
+        </p:nvSpPr>
+        <p:spPr>
+          <a:xfrm rot="-180000">
+            <a:off x="411480" y="201168"/>
+            <a:ext cx="1478128" cy="352044"/>
+          </a:xfrm>
+          <a:prstGeom prst="rect">
+            <a:avLst/>
           </a:prstGeom>
           <a:solidFill>
-            <a:schemeClr val="tx1"/>
+            <a:srgbClr val="1A1A1A"/>
           </a:solidFill>
-          <a:ln w="12700">
+          <a:ln>
             <a:solidFill>
-              <a:schemeClr val="tx1"/>
+              <a:srgbClr val="1A1A1A"/>
             </a:solidFill>
-            <a:prstDash val="solid"/>
           </a:ln>
-        </p:spPr>
-      </p:sp>
-      <p:sp>
-        <p:nvSpPr>
-          <p:cNvPr id="4" name="chip-text"/>
-          <p:cNvSpPr txBox="1"/>
-          <p:nvPr/>
-        </p:nvSpPr>
-        <p:spPr>
-          <a:xfrm>
-            <a:off x="548640" y="292608"/>
-            <a:ext cx="1344168" cy="292608"/>
-          </a:xfrm>
-          <a:prstGeom prst="rect">
-            <a:avLst/>
-          </a:prstGeom>
-          <a:noFill/>
-          <a:ln/>
         </p:spPr>
         <p:txBody>
           <a:bodyPr wrap="square" lIns="0" tIns="0" rIns="0" bIns="0" rtlCol="0" anchor="ctr"/>
@@ -5569,46 +5768,118 @@
               <a:buNone/>
             </a:pPr>
             <a:r>
-              <a:rPr lang="en-US" sz="1100" b="1" dirty="0">
-                <a:solidFill>
-                  <a:schemeClr val="accent1"/>
-                </a:solidFill>
+              <a:rPr lang="ja-JP" altLang="en-US" sz="1100" dirty="0">
+                <a:solidFill>
+                  <a:srgbClr val="FFFFFF"/>
+                </a:solidFill>
+                <a:latin typeface="Dela Gothic One" pitchFamily="34" charset="0"/>
+                <a:ea typeface="けいふぉんと" pitchFamily="34" charset="-122"/>
+                <a:cs typeface="Dela Gothic One" pitchFamily="34" charset="-120"/>
               </a:rPr>
               <a:t>説明② 10分</a:t>
             </a:r>
-            <a:endParaRPr lang="en-US" sz="1100" dirty="0"/>
-          </a:p>
-        </p:txBody>
-      </p:sp>
-      <p:sp>
-        <p:nvSpPr>
-          <p:cNvPr id="6" name="card"/>
+            <a:endParaRPr lang="ja-JP" sz="1100" dirty="0"/>
+          </a:p>
+        </p:txBody>
+      </p:sp>
+      <p:sp>
+        <p:nvSpPr>
+          <p:cNvPr id="3" name="Text 1"/>
+          <p:cNvSpPr txBox="1"/>
+          <p:nvPr/>
+        </p:nvSpPr>
+        <p:spPr>
+          <a:xfrm>
+            <a:off x="411480" y="502920"/>
+            <a:ext cx="8321040" cy="685800"/>
+          </a:xfrm>
+          <a:prstGeom prst="rect">
+            <a:avLst/>
+          </a:prstGeom>
+          <a:noFill/>
+          <a:ln/>
+        </p:spPr>
+        <p:txBody>
+          <a:bodyPr wrap="square" lIns="0" tIns="0" rIns="0" bIns="0" rtlCol="0" anchor="ctr">
+            <a:normAutofit/>
+          </a:bodyPr>
+          <a:lstStyle/>
+          <a:p>
+            <a:pPr indent="0" marL="0">
+              <a:buNone/>
+            </a:pPr>
+            <a:r>
+              <a:rPr lang="ja-JP" altLang="en-US" sz="2600" dirty="0">
+                <a:solidFill>
+                  <a:srgbClr val="1A1A1A"/>
+                </a:solidFill>
+                <a:latin typeface="Dela Gothic One" pitchFamily="34" charset="0"/>
+                <a:ea typeface="けいふぉんと" pitchFamily="34" charset="-122"/>
+                <a:cs typeface="Dela Gothic One" pitchFamily="34" charset="-120"/>
+              </a:rPr>
+              <a:t>秘密情報は</a:t>
+            </a:r>
+            <a:pPr indent="0" marL="0">
+              <a:buNone/>
+            </a:pPr>
+            <a:r>
+              <a:rPr lang="ja-JP" altLang="en-US" sz="2600" dirty="0">
+                <a:solidFill>
+                  <a:srgbClr val="DD6420"/>
+                </a:solidFill>
+                <a:latin typeface="Dela Gothic One" pitchFamily="34" charset="0"/>
+                <a:ea typeface="けいふぉんと" pitchFamily="34" charset="-122"/>
+                <a:cs typeface="Dela Gothic One" pitchFamily="34" charset="-120"/>
+              </a:rPr>
+              <a:t>「受付係」</a:t>
+            </a:r>
+            <a:pPr indent="0" marL="0">
+              <a:buNone/>
+            </a:pPr>
+            <a:r>
+              <a:rPr lang="ja-JP" altLang="en-US" sz="2600" dirty="0">
+                <a:solidFill>
+                  <a:srgbClr val="1A1A1A"/>
+                </a:solidFill>
+                <a:latin typeface="Dela Gothic One" pitchFamily="34" charset="0"/>
+                <a:ea typeface="けいふぉんと" pitchFamily="34" charset="-122"/>
+                <a:cs typeface="Dela Gothic One" pitchFamily="34" charset="-120"/>
+              </a:rPr>
+              <a:t>だけが知っている</a:t>
+            </a:r>
+            <a:endParaRPr lang="ja-JP" sz="2600" dirty="0"/>
+          </a:p>
+        </p:txBody>
+      </p:sp>
+      <p:sp>
+        <p:nvSpPr>
+          <p:cNvPr id="5" name="card"/>
           <p:cNvSpPr/>
           <p:nvPr/>
         </p:nvSpPr>
         <p:spPr>
           <a:xfrm>
-            <a:off x="548640" y="1828800"/>
-            <a:ext cx="1723644" cy="1463040"/>
+            <a:off x="502920" y="1691640"/>
+            <a:ext cx="1746504" cy="1600200"/>
           </a:xfrm>
           <a:prstGeom prst="roundRect">
             <a:avLst>
-              <a:gd name="adj" fmla="val 7500"/>
+              <a:gd name="adj" fmla="val 5714"/>
             </a:avLst>
           </a:prstGeom>
           <a:solidFill>
-            <a:schemeClr val="bg1"/>
+            <a:srgbClr val="FFFFFF"/>
           </a:solidFill>
-          <a:ln w="19050">
+          <a:ln w="25400">
             <a:solidFill>
               <a:srgbClr val="1A1A1A"/>
             </a:solidFill>
             <a:prstDash val="solid"/>
           </a:ln>
           <a:effectLst>
-            <a:outerShdw sx="100000" sy="100000" kx="0" ky="0" algn="bl" rotWithShape="0" blurRad="101600" dist="38100" dir="2700000">
-              <a:srgbClr val="000000">
-                <a:alpha val="18000"/>
+            <a:outerShdw sx="100000" sy="100000" kx="0" ky="0" algn="bl" rotWithShape="0" blurRad="101600" dist="50800" dir="2700000">
+              <a:srgbClr val="1A1A1A">
+                <a:alpha val="100000"/>
               </a:srgbClr>
             </a:outerShdw>
           </a:effectLst>
@@ -5616,20 +5887,26 @@
       </p:sp>
       <p:sp>
         <p:nvSpPr>
-          <p:cNvPr id="7" name="Text 4"/>
+          <p:cNvPr id="6" name="Text 3"/>
           <p:cNvSpPr txBox="1"/>
           <p:nvPr/>
         </p:nvSpPr>
         <p:spPr>
-          <a:xfrm>
-            <a:off x="548640" y="1993392"/>
-            <a:ext cx="1723644" cy="274320"/>
-          </a:xfrm>
-          <a:prstGeom prst="rect">
-            <a:avLst/>
-          </a:prstGeom>
-          <a:noFill/>
-          <a:ln/>
+          <a:xfrm rot="-180000">
+            <a:off x="918972" y="1545336"/>
+            <a:ext cx="914400" cy="292608"/>
+          </a:xfrm>
+          <a:prstGeom prst="rect">
+            <a:avLst/>
+          </a:prstGeom>
+          <a:solidFill>
+            <a:srgbClr val="1A1A1A"/>
+          </a:solidFill>
+          <a:ln>
+            <a:solidFill>
+              <a:srgbClr val="1A1A1A"/>
+            </a:solidFill>
+          </a:ln>
         </p:spPr>
         <p:txBody>
           <a:bodyPr wrap="square" lIns="0" tIns="0" rIns="0" bIns="0" rtlCol="0" anchor="ctr"/>
@@ -5639,27 +5916,30 @@
               <a:buNone/>
             </a:pPr>
             <a:r>
-              <a:rPr lang="en-US" sz="1000" b="1" dirty="0">
-                <a:solidFill>
-                  <a:schemeClr val="accent2"/>
-                </a:solidFill>
+              <a:rPr lang="ja-JP" altLang="en-US" sz="1000" dirty="0">
+                <a:solidFill>
+                  <a:srgbClr val="FFFFFF"/>
+                </a:solidFill>
+                <a:latin typeface="Dela Gothic One" pitchFamily="34" charset="0"/>
+                <a:ea typeface="けいふぉんと" pitchFamily="34" charset="-122"/>
+                <a:cs typeface="Dela Gothic One" pitchFamily="34" charset="-120"/>
               </a:rPr>
               <a:t>STEP 1</a:t>
             </a:r>
-            <a:endParaRPr lang="en-US" sz="1000" dirty="0"/>
-          </a:p>
-        </p:txBody>
-      </p:sp>
-      <p:sp>
-        <p:nvSpPr>
-          <p:cNvPr id="8" name="flow-node"/>
+            <a:endParaRPr lang="ja-JP" sz="1000" dirty="0"/>
+          </a:p>
+        </p:txBody>
+      </p:sp>
+      <p:sp>
+        <p:nvSpPr>
+          <p:cNvPr id="7" name="flow-node"/>
           <p:cNvSpPr txBox="1"/>
           <p:nvPr/>
         </p:nvSpPr>
         <p:spPr>
           <a:xfrm>
-            <a:off x="640080" y="2286000"/>
-            <a:ext cx="1540764" cy="868680"/>
+            <a:off x="612648" y="1965960"/>
+            <a:ext cx="1527048" cy="1234440"/>
           </a:xfrm>
           <a:prstGeom prst="rect">
             <a:avLst/>
@@ -5668,41 +5948,49 @@
           <a:ln/>
         </p:spPr>
         <p:txBody>
-          <a:bodyPr wrap="square" lIns="0" tIns="0" rIns="0" bIns="0" rtlCol="0" anchor="ctr"/>
+          <a:bodyPr wrap="square" lIns="0" tIns="0" rIns="0" bIns="0" rtlCol="0" anchor="ctr">
+            <a:normAutofit/>
+          </a:bodyPr>
           <a:lstStyle/>
           <a:p>
             <a:pPr algn="ctr" indent="0" marL="0">
               <a:buNone/>
             </a:pPr>
             <a:r>
-              <a:rPr lang="en-US" sz="1400" b="1" dirty="0">
-                <a:solidFill>
-                  <a:schemeClr val="tx1"/>
-                </a:solidFill>
+              <a:rPr lang="ja-JP" altLang="en-US" sz="1400" b="1" dirty="0">
+                <a:solidFill>
+                  <a:srgbClr val="1A1A1A"/>
+                </a:solidFill>
+                <a:latin typeface="Noto Sans JP" pitchFamily="34" charset="0"/>
+                <a:ea typeface="Noto Sans JP" pitchFamily="34" charset="-122"/>
+                <a:cs typeface="Noto Sans JP" pitchFamily="34" charset="-120"/>
               </a:rPr>
               <a:t>お客様のスマホ</a:t>
             </a:r>
-            <a:endParaRPr lang="en-US" sz="1400" dirty="0"/>
+            <a:endParaRPr lang="ja-JP" sz="1400" dirty="0"/>
           </a:p>
           <a:p>
             <a:pPr algn="ctr" indent="0" marL="0">
               <a:buNone/>
             </a:pPr>
             <a:r>
-              <a:rPr lang="en-US" sz="1400" b="1" dirty="0">
-                <a:solidFill>
-                  <a:schemeClr val="tx1"/>
-                </a:solidFill>
+              <a:rPr lang="ja-JP" altLang="en-US" sz="1400" b="1" dirty="0">
+                <a:solidFill>
+                  <a:srgbClr val="1A1A1A"/>
+                </a:solidFill>
+                <a:latin typeface="Noto Sans JP" pitchFamily="34" charset="0"/>
+                <a:ea typeface="Noto Sans JP" pitchFamily="34" charset="-122"/>
+                <a:cs typeface="Noto Sans JP" pitchFamily="34" charset="-120"/>
               </a:rPr>
               <a:t>公開ページ</a:t>
             </a:r>
-            <a:endParaRPr lang="en-US" sz="1400" dirty="0"/>
+            <a:endParaRPr lang="ja-JP" sz="1400" dirty="0"/>
           </a:p>
         </p:txBody>
       </p:sp>
       <p:pic>
         <p:nvPicPr>
-          <p:cNvPr id="9" name="flow-arrow" descr="preencoded.png">    </p:cNvPr>
+          <p:cNvPr id="8" name="flow-arrow" descr="preencoded.png">    </p:cNvPr>
           <p:cNvPicPr>
             <a:picLocks noChangeAspect="1"/>
           </p:cNvPicPr>
@@ -5716,8 +6004,8 @@
         </p:blipFill>
         <p:spPr>
           <a:xfrm>
-            <a:off x="2345436" y="2441448"/>
-            <a:ext cx="237744" cy="237744"/>
+            <a:off x="2313432" y="2363724"/>
+            <a:ext cx="256032" cy="256032"/>
           </a:xfrm>
           <a:prstGeom prst="rect">
             <a:avLst/>
@@ -5726,33 +6014,33 @@
       </p:pic>
       <p:sp>
         <p:nvSpPr>
-          <p:cNvPr id="10" name="card"/>
+          <p:cNvPr id="9" name="card"/>
           <p:cNvSpPr/>
           <p:nvPr/>
         </p:nvSpPr>
         <p:spPr>
           <a:xfrm>
-            <a:off x="2656332" y="1828800"/>
-            <a:ext cx="1723644" cy="1463040"/>
+            <a:off x="2633472" y="1691640"/>
+            <a:ext cx="1746504" cy="1600200"/>
           </a:xfrm>
           <a:prstGeom prst="roundRect">
             <a:avLst>
-              <a:gd name="adj" fmla="val 7500"/>
+              <a:gd name="adj" fmla="val 5714"/>
             </a:avLst>
           </a:prstGeom>
           <a:solidFill>
-            <a:schemeClr val="bg1"/>
+            <a:srgbClr val="FFFFFF"/>
           </a:solidFill>
-          <a:ln w="19050">
+          <a:ln w="25400">
             <a:solidFill>
               <a:srgbClr val="1A1A1A"/>
             </a:solidFill>
             <a:prstDash val="solid"/>
           </a:ln>
           <a:effectLst>
-            <a:outerShdw sx="100000" sy="100000" kx="0" ky="0" algn="bl" rotWithShape="0" blurRad="101600" dist="38100" dir="2700000">
-              <a:srgbClr val="000000">
-                <a:alpha val="18000"/>
+            <a:outerShdw sx="100000" sy="100000" kx="0" ky="0" algn="bl" rotWithShape="0" blurRad="101600" dist="50800" dir="2700000">
+              <a:srgbClr val="1A1A1A">
+                <a:alpha val="100000"/>
               </a:srgbClr>
             </a:outerShdw>
           </a:effectLst>
@@ -5760,20 +6048,26 @@
       </p:sp>
       <p:sp>
         <p:nvSpPr>
-          <p:cNvPr id="11" name="Text 7"/>
+          <p:cNvPr id="10" name="Text 6"/>
           <p:cNvSpPr txBox="1"/>
           <p:nvPr/>
         </p:nvSpPr>
         <p:spPr>
-          <a:xfrm>
-            <a:off x="2656332" y="1993392"/>
-            <a:ext cx="1723644" cy="274320"/>
-          </a:xfrm>
-          <a:prstGeom prst="rect">
-            <a:avLst/>
-          </a:prstGeom>
-          <a:noFill/>
-          <a:ln/>
+          <a:xfrm rot="-180000">
+            <a:off x="3049524" y="1545336"/>
+            <a:ext cx="914400" cy="292608"/>
+          </a:xfrm>
+          <a:prstGeom prst="rect">
+            <a:avLst/>
+          </a:prstGeom>
+          <a:solidFill>
+            <a:srgbClr val="1A1A1A"/>
+          </a:solidFill>
+          <a:ln>
+            <a:solidFill>
+              <a:srgbClr val="1A1A1A"/>
+            </a:solidFill>
+          </a:ln>
         </p:spPr>
         <p:txBody>
           <a:bodyPr wrap="square" lIns="0" tIns="0" rIns="0" bIns="0" rtlCol="0" anchor="ctr"/>
@@ -5783,27 +6077,30 @@
               <a:buNone/>
             </a:pPr>
             <a:r>
-              <a:rPr lang="en-US" sz="1000" b="1" dirty="0">
-                <a:solidFill>
-                  <a:schemeClr val="accent2"/>
-                </a:solidFill>
+              <a:rPr lang="ja-JP" altLang="en-US" sz="1000" dirty="0">
+                <a:solidFill>
+                  <a:srgbClr val="FFFFFF"/>
+                </a:solidFill>
+                <a:latin typeface="Dela Gothic One" pitchFamily="34" charset="0"/>
+                <a:ea typeface="けいふぉんと" pitchFamily="34" charset="-122"/>
+                <a:cs typeface="Dela Gothic One" pitchFamily="34" charset="-120"/>
               </a:rPr>
               <a:t>STEP 2</a:t>
             </a:r>
-            <a:endParaRPr lang="en-US" sz="1000" dirty="0"/>
-          </a:p>
-        </p:txBody>
-      </p:sp>
-      <p:sp>
-        <p:nvSpPr>
-          <p:cNvPr id="12" name="flow-node"/>
+            <a:endParaRPr lang="ja-JP" sz="1000" dirty="0"/>
+          </a:p>
+        </p:txBody>
+      </p:sp>
+      <p:sp>
+        <p:nvSpPr>
+          <p:cNvPr id="11" name="flow-node"/>
           <p:cNvSpPr txBox="1"/>
           <p:nvPr/>
         </p:nvSpPr>
         <p:spPr>
           <a:xfrm>
-            <a:off x="2747772" y="2286000"/>
-            <a:ext cx="1540764" cy="868680"/>
+            <a:off x="2743200" y="1965960"/>
+            <a:ext cx="1527048" cy="1234440"/>
           </a:xfrm>
           <a:prstGeom prst="rect">
             <a:avLst/>
@@ -5812,41 +6109,49 @@
           <a:ln/>
         </p:spPr>
         <p:txBody>
-          <a:bodyPr wrap="square" lIns="0" tIns="0" rIns="0" bIns="0" rtlCol="0" anchor="ctr"/>
+          <a:bodyPr wrap="square" lIns="0" tIns="0" rIns="0" bIns="0" rtlCol="0" anchor="ctr">
+            <a:normAutofit/>
+          </a:bodyPr>
           <a:lstStyle/>
           <a:p>
             <a:pPr algn="ctr" indent="0" marL="0">
               <a:buNone/>
             </a:pPr>
             <a:r>
-              <a:rPr lang="en-US" sz="1400" b="1" dirty="0">
-                <a:solidFill>
-                  <a:schemeClr val="tx1"/>
-                </a:solidFill>
+              <a:rPr lang="ja-JP" altLang="en-US" sz="1400" b="1" dirty="0">
+                <a:solidFill>
+                  <a:srgbClr val="1A1A1A"/>
+                </a:solidFill>
+                <a:latin typeface="Noto Sans JP" pitchFamily="34" charset="0"/>
+                <a:ea typeface="Noto Sans JP" pitchFamily="34" charset="-122"/>
+                <a:cs typeface="Noto Sans JP" pitchFamily="34" charset="-120"/>
               </a:rPr>
               <a:t>受付係</a:t>
             </a:r>
-            <a:endParaRPr lang="en-US" sz="1400" dirty="0"/>
+            <a:endParaRPr lang="ja-JP" sz="1400" dirty="0"/>
           </a:p>
           <a:p>
             <a:pPr algn="ctr" indent="0" marL="0">
               <a:buNone/>
             </a:pPr>
             <a:r>
-              <a:rPr lang="en-US" sz="1400" b="1" dirty="0">
-                <a:solidFill>
-                  <a:schemeClr val="tx1"/>
-                </a:solidFill>
+              <a:rPr lang="ja-JP" altLang="en-US" sz="1400" b="1" dirty="0">
+                <a:solidFill>
+                  <a:srgbClr val="1A1A1A"/>
+                </a:solidFill>
+                <a:latin typeface="Noto Sans JP" pitchFamily="34" charset="0"/>
+                <a:ea typeface="Noto Sans JP" pitchFamily="34" charset="-122"/>
+                <a:cs typeface="Noto Sans JP" pitchFamily="34" charset="-120"/>
               </a:rPr>
               <a:t>Pages Functions</a:t>
             </a:r>
-            <a:endParaRPr lang="en-US" sz="1400" dirty="0"/>
+            <a:endParaRPr lang="ja-JP" sz="1400" dirty="0"/>
           </a:p>
         </p:txBody>
       </p:sp>
       <p:pic>
         <p:nvPicPr>
-          <p:cNvPr id="13" name="flow-arrow" descr="preencoded.png">    </p:cNvPr>
+          <p:cNvPr id="12" name="flow-arrow" descr="preencoded.png">    </p:cNvPr>
           <p:cNvPicPr>
             <a:picLocks noChangeAspect="1"/>
           </p:cNvPicPr>
@@ -5860,8 +6165,8 @@
         </p:blipFill>
         <p:spPr>
           <a:xfrm>
-            <a:off x="4453128" y="2441448"/>
-            <a:ext cx="237744" cy="237744"/>
+            <a:off x="4443984" y="2363724"/>
+            <a:ext cx="256032" cy="256032"/>
           </a:xfrm>
           <a:prstGeom prst="rect">
             <a:avLst/>
@@ -5870,33 +6175,33 @@
       </p:pic>
       <p:sp>
         <p:nvSpPr>
-          <p:cNvPr id="14" name="card"/>
+          <p:cNvPr id="13" name="card"/>
           <p:cNvSpPr/>
           <p:nvPr/>
         </p:nvSpPr>
         <p:spPr>
           <a:xfrm>
-            <a:off x="4764024" y="1828800"/>
-            <a:ext cx="1723644" cy="1463040"/>
+            <a:off x="4764024" y="1691640"/>
+            <a:ext cx="1746504" cy="1600200"/>
           </a:xfrm>
           <a:prstGeom prst="roundRect">
             <a:avLst>
-              <a:gd name="adj" fmla="val 7500"/>
+              <a:gd name="adj" fmla="val 5714"/>
             </a:avLst>
           </a:prstGeom>
           <a:solidFill>
-            <a:schemeClr val="bg1"/>
+            <a:srgbClr val="FFFFFF"/>
           </a:solidFill>
-          <a:ln w="19050">
+          <a:ln w="25400">
             <a:solidFill>
               <a:srgbClr val="1A1A1A"/>
             </a:solidFill>
             <a:prstDash val="solid"/>
           </a:ln>
           <a:effectLst>
-            <a:outerShdw sx="100000" sy="100000" kx="0" ky="0" algn="bl" rotWithShape="0" blurRad="101600" dist="38100" dir="2700000">
-              <a:srgbClr val="000000">
-                <a:alpha val="18000"/>
+            <a:outerShdw sx="100000" sy="100000" kx="0" ky="0" algn="bl" rotWithShape="0" blurRad="101600" dist="50800" dir="2700000">
+              <a:srgbClr val="1A1A1A">
+                <a:alpha val="100000"/>
               </a:srgbClr>
             </a:outerShdw>
           </a:effectLst>
@@ -5904,20 +6209,26 @@
       </p:sp>
       <p:sp>
         <p:nvSpPr>
-          <p:cNvPr id="15" name="Text 10"/>
+          <p:cNvPr id="14" name="Text 9"/>
           <p:cNvSpPr txBox="1"/>
           <p:nvPr/>
         </p:nvSpPr>
         <p:spPr>
-          <a:xfrm>
-            <a:off x="4764024" y="1993392"/>
-            <a:ext cx="1723644" cy="274320"/>
-          </a:xfrm>
-          <a:prstGeom prst="rect">
-            <a:avLst/>
-          </a:prstGeom>
-          <a:noFill/>
-          <a:ln/>
+          <a:xfrm rot="-180000">
+            <a:off x="5180076" y="1545336"/>
+            <a:ext cx="914400" cy="292608"/>
+          </a:xfrm>
+          <a:prstGeom prst="rect">
+            <a:avLst/>
+          </a:prstGeom>
+          <a:solidFill>
+            <a:srgbClr val="1A1A1A"/>
+          </a:solidFill>
+          <a:ln>
+            <a:solidFill>
+              <a:srgbClr val="1A1A1A"/>
+            </a:solidFill>
+          </a:ln>
         </p:spPr>
         <p:txBody>
           <a:bodyPr wrap="square" lIns="0" tIns="0" rIns="0" bIns="0" rtlCol="0" anchor="ctr"/>
@@ -5927,27 +6238,30 @@
               <a:buNone/>
             </a:pPr>
             <a:r>
-              <a:rPr lang="en-US" sz="1000" b="1" dirty="0">
-                <a:solidFill>
-                  <a:schemeClr val="accent2"/>
-                </a:solidFill>
+              <a:rPr lang="ja-JP" altLang="en-US" sz="1000" dirty="0">
+                <a:solidFill>
+                  <a:srgbClr val="FFFFFF"/>
+                </a:solidFill>
+                <a:latin typeface="Dela Gothic One" pitchFamily="34" charset="0"/>
+                <a:ea typeface="けいふぉんと" pitchFamily="34" charset="-122"/>
+                <a:cs typeface="Dela Gothic One" pitchFamily="34" charset="-120"/>
               </a:rPr>
               <a:t>STEP 3</a:t>
             </a:r>
-            <a:endParaRPr lang="en-US" sz="1000" dirty="0"/>
-          </a:p>
-        </p:txBody>
-      </p:sp>
-      <p:sp>
-        <p:nvSpPr>
-          <p:cNvPr id="16" name="flow-node"/>
+            <a:endParaRPr lang="ja-JP" sz="1000" dirty="0"/>
+          </a:p>
+        </p:txBody>
+      </p:sp>
+      <p:sp>
+        <p:nvSpPr>
+          <p:cNvPr id="15" name="flow-node"/>
           <p:cNvSpPr txBox="1"/>
           <p:nvPr/>
         </p:nvSpPr>
         <p:spPr>
           <a:xfrm>
-            <a:off x="4855464" y="2286000"/>
-            <a:ext cx="1540764" cy="868680"/>
+            <a:off x="4873752" y="1965960"/>
+            <a:ext cx="1527048" cy="1234440"/>
           </a:xfrm>
           <a:prstGeom prst="rect">
             <a:avLst/>
@@ -5956,27 +6270,32 @@
           <a:ln/>
         </p:spPr>
         <p:txBody>
-          <a:bodyPr wrap="square" lIns="0" tIns="0" rIns="0" bIns="0" rtlCol="0" anchor="ctr"/>
+          <a:bodyPr wrap="square" lIns="0" tIns="0" rIns="0" bIns="0" rtlCol="0" anchor="ctr">
+            <a:normAutofit/>
+          </a:bodyPr>
           <a:lstStyle/>
           <a:p>
             <a:pPr algn="ctr" indent="0" marL="0">
               <a:buNone/>
             </a:pPr>
             <a:r>
-              <a:rPr lang="en-US" sz="1400" b="1" dirty="0">
-                <a:solidFill>
-                  <a:schemeClr val="tx1"/>
-                </a:solidFill>
+              <a:rPr lang="ja-JP" altLang="en-US" sz="1400" b="1" dirty="0">
+                <a:solidFill>
+                  <a:srgbClr val="1A1A1A"/>
+                </a:solidFill>
+                <a:latin typeface="Noto Sans JP" pitchFamily="34" charset="0"/>
+                <a:ea typeface="Noto Sans JP" pitchFamily="34" charset="-122"/>
+                <a:cs typeface="Noto Sans JP" pitchFamily="34" charset="-120"/>
               </a:rPr>
               <a:t>Lark API</a:t>
             </a:r>
-            <a:endParaRPr lang="en-US" sz="1400" dirty="0"/>
+            <a:endParaRPr lang="ja-JP" sz="1400" dirty="0"/>
           </a:p>
         </p:txBody>
       </p:sp>
       <p:pic>
         <p:nvPicPr>
-          <p:cNvPr id="17" name="flow-arrow" descr="preencoded.png">    </p:cNvPr>
+          <p:cNvPr id="16" name="flow-arrow" descr="preencoded.png">    </p:cNvPr>
           <p:cNvPicPr>
             <a:picLocks noChangeAspect="1"/>
           </p:cNvPicPr>
@@ -5990,8 +6309,8 @@
         </p:blipFill>
         <p:spPr>
           <a:xfrm>
-            <a:off x="6560820" y="2441448"/>
-            <a:ext cx="237744" cy="237744"/>
+            <a:off x="6574536" y="2363724"/>
+            <a:ext cx="256032" cy="256032"/>
           </a:xfrm>
           <a:prstGeom prst="rect">
             <a:avLst/>
@@ -6000,33 +6319,33 @@
       </p:pic>
       <p:sp>
         <p:nvSpPr>
-          <p:cNvPr id="18" name="card"/>
+          <p:cNvPr id="17" name="card"/>
           <p:cNvSpPr/>
           <p:nvPr/>
         </p:nvSpPr>
         <p:spPr>
           <a:xfrm>
-            <a:off x="6871716" y="1828800"/>
-            <a:ext cx="1723644" cy="1463040"/>
+            <a:off x="6894576" y="1691640"/>
+            <a:ext cx="1746504" cy="1600200"/>
           </a:xfrm>
           <a:prstGeom prst="roundRect">
             <a:avLst>
-              <a:gd name="adj" fmla="val 7500"/>
+              <a:gd name="adj" fmla="val 5714"/>
             </a:avLst>
           </a:prstGeom>
           <a:solidFill>
-            <a:schemeClr val="accent1"/>
+            <a:srgbClr val="F5A623"/>
           </a:solidFill>
-          <a:ln w="19050">
+          <a:ln w="25400">
             <a:solidFill>
               <a:srgbClr val="1A1A1A"/>
             </a:solidFill>
             <a:prstDash val="solid"/>
           </a:ln>
           <a:effectLst>
-            <a:outerShdw sx="100000" sy="100000" kx="0" ky="0" algn="bl" rotWithShape="0" blurRad="101600" dist="38100" dir="2700000">
-              <a:srgbClr val="000000">
-                <a:alpha val="18000"/>
+            <a:outerShdw sx="100000" sy="100000" kx="0" ky="0" algn="bl" rotWithShape="0" blurRad="101600" dist="50800" dir="2700000">
+              <a:srgbClr val="1A1A1A">
+                <a:alpha val="100000"/>
               </a:srgbClr>
             </a:outerShdw>
           </a:effectLst>
@@ -6034,20 +6353,26 @@
       </p:sp>
       <p:sp>
         <p:nvSpPr>
-          <p:cNvPr id="19" name="Text 13"/>
+          <p:cNvPr id="18" name="Text 12"/>
           <p:cNvSpPr txBox="1"/>
           <p:nvPr/>
         </p:nvSpPr>
         <p:spPr>
-          <a:xfrm>
-            <a:off x="6871716" y="1993392"/>
-            <a:ext cx="1723644" cy="274320"/>
-          </a:xfrm>
-          <a:prstGeom prst="rect">
-            <a:avLst/>
-          </a:prstGeom>
-          <a:noFill/>
-          <a:ln/>
+          <a:xfrm rot="-180000">
+            <a:off x="7310628" y="1545336"/>
+            <a:ext cx="914400" cy="292608"/>
+          </a:xfrm>
+          <a:prstGeom prst="rect">
+            <a:avLst/>
+          </a:prstGeom>
+          <a:solidFill>
+            <a:srgbClr val="1A1A1A"/>
+          </a:solidFill>
+          <a:ln>
+            <a:solidFill>
+              <a:srgbClr val="1A1A1A"/>
+            </a:solidFill>
+          </a:ln>
         </p:spPr>
         <p:txBody>
           <a:bodyPr wrap="square" lIns="0" tIns="0" rIns="0" bIns="0" rtlCol="0" anchor="ctr"/>
@@ -6057,27 +6382,30 @@
               <a:buNone/>
             </a:pPr>
             <a:r>
-              <a:rPr lang="en-US" sz="1000" b="1" dirty="0">
-                <a:solidFill>
-                  <a:schemeClr val="accent2"/>
-                </a:solidFill>
+              <a:rPr lang="ja-JP" altLang="en-US" sz="1000" dirty="0">
+                <a:solidFill>
+                  <a:srgbClr val="FFFFFF"/>
+                </a:solidFill>
+                <a:latin typeface="Dela Gothic One" pitchFamily="34" charset="0"/>
+                <a:ea typeface="けいふぉんと" pitchFamily="34" charset="-122"/>
+                <a:cs typeface="Dela Gothic One" pitchFamily="34" charset="-120"/>
               </a:rPr>
               <a:t>STEP 4</a:t>
             </a:r>
-            <a:endParaRPr lang="en-US" sz="1000" dirty="0"/>
-          </a:p>
-        </p:txBody>
-      </p:sp>
-      <p:sp>
-        <p:nvSpPr>
-          <p:cNvPr id="20" name="flow-node"/>
+            <a:endParaRPr lang="ja-JP" sz="1000" dirty="0"/>
+          </a:p>
+        </p:txBody>
+      </p:sp>
+      <p:sp>
+        <p:nvSpPr>
+          <p:cNvPr id="19" name="flow-node"/>
           <p:cNvSpPr txBox="1"/>
           <p:nvPr/>
         </p:nvSpPr>
         <p:spPr>
           <a:xfrm>
-            <a:off x="6963156" y="2286000"/>
-            <a:ext cx="1540764" cy="868680"/>
+            <a:off x="7004304" y="1965960"/>
+            <a:ext cx="1527048" cy="1234440"/>
           </a:xfrm>
           <a:prstGeom prst="rect">
             <a:avLst/>
@@ -6086,108 +6414,80 @@
           <a:ln/>
         </p:spPr>
         <p:txBody>
-          <a:bodyPr wrap="square" lIns="0" tIns="0" rIns="0" bIns="0" rtlCol="0" anchor="ctr"/>
+          <a:bodyPr wrap="square" lIns="0" tIns="0" rIns="0" bIns="0" rtlCol="0" anchor="ctr">
+            <a:normAutofit/>
+          </a:bodyPr>
           <a:lstStyle/>
           <a:p>
             <a:pPr algn="ctr" indent="0" marL="0">
               <a:buNone/>
             </a:pPr>
             <a:r>
-              <a:rPr lang="en-US" sz="1400" b="1" dirty="0">
-                <a:solidFill>
-                  <a:schemeClr val="tx1"/>
-                </a:solidFill>
+              <a:rPr lang="ja-JP" altLang="en-US" sz="1400" b="1" dirty="0">
+                <a:solidFill>
+                  <a:srgbClr val="1A1A1A"/>
+                </a:solidFill>
+                <a:latin typeface="Noto Sans JP" pitchFamily="34" charset="0"/>
+                <a:ea typeface="Noto Sans JP" pitchFamily="34" charset="-122"/>
+                <a:cs typeface="Noto Sans JP" pitchFamily="34" charset="-120"/>
               </a:rPr>
               <a:t>BASE</a:t>
             </a:r>
-            <a:endParaRPr lang="en-US" sz="1400" dirty="0"/>
-          </a:p>
-        </p:txBody>
-      </p:sp>
-      <p:sp>
-        <p:nvSpPr>
-          <p:cNvPr id="21" name="foot-box"/>
-          <p:cNvSpPr/>
-          <p:nvPr/>
-        </p:nvSpPr>
-        <p:spPr>
-          <a:xfrm>
-            <a:off x="548640" y="3794760"/>
-            <a:ext cx="8046720" cy="502920"/>
-          </a:xfrm>
-          <a:prstGeom prst="roundRect">
-            <a:avLst>
-              <a:gd name="adj" fmla="val 18182"/>
-            </a:avLst>
+            <a:endParaRPr lang="ja-JP" sz="1400" dirty="0"/>
+          </a:p>
+        </p:txBody>
+      </p:sp>
+      <p:sp>
+        <p:nvSpPr>
+          <p:cNvPr id="20" name="Text 14"/>
+          <p:cNvSpPr txBox="1"/>
+          <p:nvPr/>
+        </p:nvSpPr>
+        <p:spPr>
+          <a:xfrm rot="-60000">
+            <a:off x="502920" y="3794760"/>
+            <a:ext cx="8138160" cy="502920"/>
+          </a:xfrm>
+          <a:prstGeom prst="rect">
+            <a:avLst/>
           </a:prstGeom>
           <a:solidFill>
-            <a:schemeClr val="bg2"/>
+            <a:srgbClr val="DD6420"/>
           </a:solidFill>
-          <a:ln w="12700">
+          <a:ln w="19050">
             <a:solidFill>
-              <a:schemeClr val="bg2"/>
+              <a:srgbClr val="1A1A1A"/>
             </a:solidFill>
-            <a:prstDash val="solid"/>
           </a:ln>
-        </p:spPr>
-      </p:sp>
-      <p:pic>
-        <p:nvPicPr>
-          <p:cNvPr id="22" name="foot-icon" descr="preencoded.png">    </p:cNvPr>
-          <p:cNvPicPr>
-            <a:picLocks noChangeAspect="1"/>
-          </p:cNvPicPr>
-          <p:nvPr/>
-        </p:nvPicPr>
-        <p:blipFill>
-          <a:blip r:embed="rId4"/>
-          <a:stretch>
-            <a:fillRect/>
-          </a:stretch>
-        </p:blipFill>
-        <p:spPr>
-          <a:xfrm>
-            <a:off x="685800" y="3922776"/>
-            <a:ext cx="246888" cy="246888"/>
-          </a:xfrm>
-          <a:prstGeom prst="rect">
-            <a:avLst/>
-          </a:prstGeom>
-        </p:spPr>
-      </p:pic>
-      <p:sp>
-        <p:nvSpPr>
-          <p:cNvPr id="23" name="foot-text"/>
-          <p:cNvSpPr txBox="1"/>
-          <p:nvPr/>
-        </p:nvSpPr>
-        <p:spPr>
-          <a:xfrm>
-            <a:off x="1051560" y="3794760"/>
-            <a:ext cx="7406640" cy="502920"/>
-          </a:xfrm>
-          <a:prstGeom prst="rect">
-            <a:avLst/>
-          </a:prstGeom>
-          <a:noFill/>
-          <a:ln/>
-        </p:spPr>
-        <p:txBody>
-          <a:bodyPr wrap="square" lIns="0" tIns="0" rIns="0" bIns="0" rtlCol="0" anchor="ctr"/>
-          <a:lstStyle/>
-          <a:p>
-            <a:pPr indent="0" marL="0">
+          <a:effectLst>
+            <a:outerShdw sx="100000" sy="100000" kx="0" ky="0" algn="bl" rotWithShape="0" blurRad="101600" dist="38100" dir="2700000">
+              <a:srgbClr val="1A1A1A">
+                <a:alpha val="100000"/>
+              </a:srgbClr>
+            </a:outerShdw>
+          </a:effectLst>
+        </p:spPr>
+        <p:txBody>
+          <a:bodyPr wrap="square" lIns="0" tIns="1905" rIns="1905" bIns="0" rtlCol="0" anchor="ctr">
+            <a:normAutofit/>
+          </a:bodyPr>
+          <a:lstStyle/>
+          <a:p>
+            <a:pPr algn="ctr" indent="0" marL="0">
               <a:buNone/>
             </a:pPr>
             <a:r>
-              <a:rPr lang="en-US" sz="1150" dirty="0">
-                <a:solidFill>
-                  <a:schemeClr val="tx1"/>
-                </a:solidFill>
+              <a:rPr lang="ja-JP" altLang="en-US" sz="1300" b="1" dirty="0">
+                <a:solidFill>
+                  <a:srgbClr val="FFFFFF"/>
+                </a:solidFill>
+                <a:latin typeface="Noto Sans JP" pitchFamily="34" charset="0"/>
+                <a:ea typeface="Noto Sans JP" pitchFamily="34" charset="-122"/>
+                <a:cs typeface="Noto Sans JP" pitchFamily="34" charset="-120"/>
               </a:rPr>
               <a:t>公開ページは誰でも中身を見られる。Secretはシークレットに登録し、コードにもGitHubにも書かない</a:t>
             </a:r>
-            <a:endParaRPr lang="en-US" sz="1150" dirty="0"/>
+            <a:endParaRPr lang="ja-JP" sz="1300" dirty="0"/>
           </a:p>
         </p:txBody>
       </p:sp>
@@ -6203,8 +6503,8 @@
         </p:nvSpPr>
         <p:spPr>
           <a:xfrm>
-            <a:off x="8229600" y="4773168"/>
-            <a:ext cx="365760" cy="228600"/>
+            <a:off x="8366760" y="4754880"/>
+            <a:ext cx="365760" cy="274320"/>
           </a:xfrm>
           <a:prstGeom prst="rect">
             <a:avLst/>
@@ -6216,20 +6516,23 @@
           </a:extLst>
         </p:spPr>
         <p:txBody>
-          <a:bodyPr/>
+          <a:bodyPr anchor="ctr"/>
           <a:lstStyle>
             <a:lvl1pPr>
-              <a:defRPr sz="900">
-                <a:solidFill>
-                  <a:srgbClr val="5A6872"/>
-                </a:solidFill>
+              <a:defRPr sz="850">
+                <a:solidFill>
+                  <a:srgbClr val="FFFFFF"/>
+                </a:solidFill>
+                <a:latin typeface="Noto Sans JP"/>
+                <a:ea typeface="Noto Sans JP"/>
+                <a:cs typeface="Noto Sans JP"/>
               </a:defRPr>
             </a:lvl1pPr>
           </a:lstStyle>
           <a:p>
             <a:pPr algn="r"/>
             <a:fld id="{F7021451-1387-4CA6-816F-3879F97B5CBC}" type="slidenum">
-              <a:rPr b="0" lang="en-US"/>
+              <a:rPr b="1" lang="en-US"/>
               <a:t>5</a:t>
             </a:fld>
             <a:endParaRPr lang="en-US"/>
@@ -6264,84 +6567,25 @@
       <p:sp>
         <p:nvSpPr>
           <p:cNvPr id="2" name="Text 0"/>
-          <p:cNvSpPr/>
-          <p:nvPr>
-            <p:ph idx="100" type="title" hasCustomPrompt="1"/>
-          </p:nvPr>
-        </p:nvSpPr>
-        <p:spPr>
-          <a:xfrm>
-            <a:off x="548640" y="658368"/>
-            <a:ext cx="8046720" cy="566928"/>
-          </a:xfrm>
-          <a:prstGeom prst="rect">
-            <a:avLst/>
-          </a:prstGeom>
-          <a:noFill/>
-          <a:ln/>
-        </p:spPr>
-        <p:txBody>
-          <a:bodyPr wrap="square" lIns="0" tIns="0" rIns="0" bIns="0" rtlCol="0" anchor="ctr"/>
-          <a:lstStyle/>
-          <a:p>
-            <a:pPr algn="l" indent="0" marL="0">
-              <a:buNone/>
-            </a:pPr>
-            <a:r>
-              <a:rPr lang="en-US" sz="2400" b="1" dirty="0">
-                <a:solidFill>
-                  <a:schemeClr val="tx1"/>
-                </a:solidFill>
-              </a:rPr>
-              <a:t>送信データをBASEに保存</a:t>
-            </a:r>
-            <a:endParaRPr lang="en-US" sz="2400" dirty="0"/>
-          </a:p>
-        </p:txBody>
-      </p:sp>
-      <p:sp>
-        <p:nvSpPr>
-          <p:cNvPr id="3" name="chip"/>
-          <p:cNvSpPr/>
-          <p:nvPr/>
-        </p:nvSpPr>
-        <p:spPr>
-          <a:xfrm>
-            <a:off x="548640" y="292608"/>
-            <a:ext cx="1755648" cy="292608"/>
-          </a:xfrm>
-          <a:prstGeom prst="roundRect">
-            <a:avLst>
-              <a:gd name="adj" fmla="val 50000"/>
-            </a:avLst>
+          <p:cNvSpPr txBox="1"/>
+          <p:nvPr/>
+        </p:nvSpPr>
+        <p:spPr>
+          <a:xfrm rot="-180000">
+            <a:off x="411480" y="201168"/>
+            <a:ext cx="1915668" cy="352044"/>
+          </a:xfrm>
+          <a:prstGeom prst="rect">
+            <a:avLst/>
           </a:prstGeom>
           <a:solidFill>
-            <a:schemeClr val="accent2"/>
+            <a:srgbClr val="DD6420"/>
           </a:solidFill>
-          <a:ln w="12700">
+          <a:ln>
             <a:solidFill>
-              <a:schemeClr val="accent2"/>
+              <a:srgbClr val="DD6420"/>
             </a:solidFill>
-            <a:prstDash val="solid"/>
           </a:ln>
-        </p:spPr>
-      </p:sp>
-      <p:sp>
-        <p:nvSpPr>
-          <p:cNvPr id="4" name="chip-text"/>
-          <p:cNvSpPr txBox="1"/>
-          <p:nvPr/>
-        </p:nvSpPr>
-        <p:spPr>
-          <a:xfrm>
-            <a:off x="548640" y="292608"/>
-            <a:ext cx="1755648" cy="292608"/>
-          </a:xfrm>
-          <a:prstGeom prst="rect">
-            <a:avLst/>
-          </a:prstGeom>
-          <a:noFill/>
-          <a:ln/>
         </p:spPr>
         <p:txBody>
           <a:bodyPr wrap="square" lIns="0" tIns="0" rIns="0" bIns="0" rtlCol="0" anchor="ctr"/>
@@ -6351,58 +6595,117 @@
               <a:buNone/>
             </a:pPr>
             <a:r>
-              <a:rPr lang="en-US" sz="1100" b="1" dirty="0">
-                <a:solidFill>
-                  <a:schemeClr val="bg1"/>
-                </a:solidFill>
+              <a:rPr lang="ja-JP" altLang="en-US" sz="1100" dirty="0">
+                <a:solidFill>
+                  <a:srgbClr val="FFFFFF"/>
+                </a:solidFill>
+                <a:latin typeface="Dela Gothic One" pitchFamily="34" charset="0"/>
+                <a:ea typeface="けいふぉんと" pitchFamily="34" charset="-122"/>
+                <a:cs typeface="Dela Gothic One" pitchFamily="34" charset="-120"/>
               </a:rPr>
               <a:t>ハンズオン② 20分</a:t>
             </a:r>
-            <a:endParaRPr lang="en-US" sz="1100" dirty="0"/>
-          </a:p>
-        </p:txBody>
-      </p:sp>
-      <p:sp>
-        <p:nvSpPr>
-          <p:cNvPr id="6" name="step-num"/>
+            <a:endParaRPr lang="ja-JP" sz="1100" dirty="0"/>
+          </a:p>
+        </p:txBody>
+      </p:sp>
+      <p:sp>
+        <p:nvSpPr>
+          <p:cNvPr id="3" name="Text 1"/>
+          <p:cNvSpPr txBox="1"/>
+          <p:nvPr/>
+        </p:nvSpPr>
+        <p:spPr>
+          <a:xfrm>
+            <a:off x="411480" y="502920"/>
+            <a:ext cx="8321040" cy="685800"/>
+          </a:xfrm>
+          <a:prstGeom prst="rect">
+            <a:avLst/>
+          </a:prstGeom>
+          <a:noFill/>
+          <a:ln/>
+        </p:spPr>
+        <p:txBody>
+          <a:bodyPr wrap="square" lIns="0" tIns="0" rIns="0" bIns="0" rtlCol="0" anchor="ctr">
+            <a:normAutofit/>
+          </a:bodyPr>
+          <a:lstStyle/>
+          <a:p>
+            <a:pPr indent="0" marL="0">
+              <a:buNone/>
+            </a:pPr>
+            <a:r>
+              <a:rPr lang="ja-JP" altLang="en-US" sz="2600" dirty="0">
+                <a:solidFill>
+                  <a:srgbClr val="1A1A1A"/>
+                </a:solidFill>
+                <a:latin typeface="Dela Gothic One" pitchFamily="34" charset="0"/>
+                <a:ea typeface="けいふぉんと" pitchFamily="34" charset="-122"/>
+                <a:cs typeface="Dela Gothic One" pitchFamily="34" charset="-120"/>
+              </a:rPr>
+              <a:t>送信データをBASEに保存</a:t>
+            </a:r>
+            <a:endParaRPr lang="ja-JP" sz="2600" dirty="0"/>
+          </a:p>
+        </p:txBody>
+      </p:sp>
+      <p:sp>
+        <p:nvSpPr>
+          <p:cNvPr id="5" name="card"/>
           <p:cNvSpPr/>
           <p:nvPr/>
         </p:nvSpPr>
         <p:spPr>
           <a:xfrm>
-            <a:off x="548640" y="1805940"/>
-            <a:ext cx="384048" cy="384048"/>
-          </a:xfrm>
-          <a:prstGeom prst="ellipse">
-            <a:avLst/>
+            <a:off x="502920" y="1600200"/>
+            <a:ext cx="8138160" cy="566928"/>
+          </a:xfrm>
+          <a:prstGeom prst="roundRect">
+            <a:avLst>
+              <a:gd name="adj" fmla="val 16129"/>
+            </a:avLst>
           </a:prstGeom>
           <a:solidFill>
-            <a:schemeClr val="accent1"/>
+            <a:srgbClr val="FFFFFF"/>
           </a:solidFill>
-          <a:ln w="15875">
+          <a:ln w="25400">
             <a:solidFill>
               <a:srgbClr val="1A1A1A"/>
             </a:solidFill>
             <a:prstDash val="solid"/>
           </a:ln>
-        </p:spPr>
-      </p:sp>
-      <p:sp>
-        <p:nvSpPr>
-          <p:cNvPr id="7" name="step-num-text"/>
+          <a:effectLst>
+            <a:outerShdw sx="100000" sy="100000" kx="0" ky="0" algn="bl" rotWithShape="0" blurRad="101600" dist="38100" dir="2700000">
+              <a:srgbClr val="1A1A1A">
+                <a:alpha val="100000"/>
+              </a:srgbClr>
+            </a:outerShdw>
+          </a:effectLst>
+        </p:spPr>
+      </p:sp>
+      <p:sp>
+        <p:nvSpPr>
+          <p:cNvPr id="6" name="Text 3"/>
           <p:cNvSpPr txBox="1"/>
           <p:nvPr/>
         </p:nvSpPr>
         <p:spPr>
           <a:xfrm>
-            <a:off x="548640" y="1805940"/>
-            <a:ext cx="384048" cy="384048"/>
-          </a:xfrm>
-          <a:prstGeom prst="rect">
-            <a:avLst/>
-          </a:prstGeom>
-          <a:noFill/>
-          <a:ln/>
+            <a:off x="640080" y="1682496"/>
+            <a:ext cx="402336" cy="402336"/>
+          </a:xfrm>
+          <a:prstGeom prst="ellipse">
+            <a:avLst/>
+          </a:prstGeom>
+          <a:solidFill>
+            <a:srgbClr val="DD6420"/>
+          </a:solidFill>
+          <a:ln w="19050">
+            <a:solidFill>
+              <a:srgbClr val="1A1A1A"/>
+            </a:solidFill>
+          </a:ln>
         </p:spPr>
         <p:txBody>
           <a:bodyPr wrap="square" lIns="0" tIns="0" rIns="0" bIns="0" rtlCol="0" anchor="ctr"/>
@@ -6412,27 +6715,30 @@
               <a:buNone/>
             </a:pPr>
             <a:r>
-              <a:rPr lang="en-US" sz="1400" b="1" dirty="0">
-                <a:solidFill>
-                  <a:schemeClr val="tx1"/>
-                </a:solidFill>
+              <a:rPr lang="ja-JP" altLang="en-US" sz="1500" dirty="0">
+                <a:solidFill>
+                  <a:srgbClr val="FFFFFF"/>
+                </a:solidFill>
+                <a:latin typeface="Dela Gothic One" pitchFamily="34" charset="0"/>
+                <a:ea typeface="けいふぉんと" pitchFamily="34" charset="-122"/>
+                <a:cs typeface="Dela Gothic One" pitchFamily="34" charset="-120"/>
               </a:rPr>
               <a:t>1</a:t>
             </a:r>
-            <a:endParaRPr lang="en-US" sz="1400" dirty="0"/>
-          </a:p>
-        </p:txBody>
-      </p:sp>
-      <p:sp>
-        <p:nvSpPr>
-          <p:cNvPr id="8" name="step-text"/>
+            <a:endParaRPr lang="ja-JP" sz="1500" dirty="0"/>
+          </a:p>
+        </p:txBody>
+      </p:sp>
+      <p:sp>
+        <p:nvSpPr>
+          <p:cNvPr id="7" name="step-text"/>
           <p:cNvSpPr txBox="1"/>
           <p:nvPr/>
         </p:nvSpPr>
         <p:spPr>
           <a:xfrm>
-            <a:off x="1097280" y="1696212"/>
-            <a:ext cx="7498080" cy="603504"/>
+            <a:off x="1234440" y="1600200"/>
+            <a:ext cx="7269480" cy="566928"/>
           </a:xfrm>
           <a:prstGeom prst="rect">
             <a:avLst/>
@@ -6441,65 +6747,85 @@
           <a:ln/>
         </p:spPr>
         <p:txBody>
-          <a:bodyPr wrap="square" lIns="0" tIns="0" rIns="0" bIns="0" rtlCol="0" anchor="ctr"/>
+          <a:bodyPr wrap="square" lIns="0" tIns="0" rIns="0" bIns="0" rtlCol="0" anchor="ctr">
+            <a:normAutofit/>
+          </a:bodyPr>
           <a:lstStyle/>
           <a:p>
             <a:pPr indent="0" marL="0">
               <a:buNone/>
             </a:pPr>
             <a:r>
-              <a:rPr lang="en-US" sz="1450" dirty="0">
-                <a:solidFill>
-                  <a:schemeClr val="tx1"/>
-                </a:solidFill>
+              <a:rPr lang="ja-JP" altLang="en-US" sz="1400" b="1" dirty="0">
+                <a:solidFill>
+                  <a:srgbClr val="1A1A1A"/>
+                </a:solidFill>
+                <a:latin typeface="Noto Sans JP" pitchFamily="34" charset="0"/>
+                <a:ea typeface="Noto Sans JP" pitchFamily="34" charset="-122"/>
+                <a:cs typeface="Noto Sans JP" pitchFamily="34" charset="-120"/>
               </a:rPr>
               <a:t>Cloudflareにシークレットを登録：LARK_APP_ID／LARK_APP_SECRET／LARK_BASE_TOKEN／LARK_TABLE_ID</a:t>
             </a:r>
-            <a:endParaRPr lang="en-US" sz="1450" dirty="0"/>
-          </a:p>
-        </p:txBody>
-      </p:sp>
-      <p:sp>
-        <p:nvSpPr>
-          <p:cNvPr id="9" name="step-num"/>
+            <a:endParaRPr lang="ja-JP" sz="1400" dirty="0"/>
+          </a:p>
+        </p:txBody>
+      </p:sp>
+      <p:sp>
+        <p:nvSpPr>
+          <p:cNvPr id="8" name="card"/>
           <p:cNvSpPr/>
           <p:nvPr/>
         </p:nvSpPr>
         <p:spPr>
           <a:xfrm>
-            <a:off x="548640" y="2409444"/>
-            <a:ext cx="384048" cy="384048"/>
-          </a:xfrm>
-          <a:prstGeom prst="ellipse">
-            <a:avLst/>
+            <a:off x="502920" y="2295144"/>
+            <a:ext cx="8138160" cy="566928"/>
+          </a:xfrm>
+          <a:prstGeom prst="roundRect">
+            <a:avLst>
+              <a:gd name="adj" fmla="val 16129"/>
+            </a:avLst>
           </a:prstGeom>
           <a:solidFill>
-            <a:schemeClr val="accent1"/>
+            <a:srgbClr val="FFFFFF"/>
           </a:solidFill>
-          <a:ln w="15875">
+          <a:ln w="25400">
             <a:solidFill>
               <a:srgbClr val="1A1A1A"/>
             </a:solidFill>
             <a:prstDash val="solid"/>
           </a:ln>
-        </p:spPr>
-      </p:sp>
-      <p:sp>
-        <p:nvSpPr>
-          <p:cNvPr id="10" name="step-num-text"/>
+          <a:effectLst>
+            <a:outerShdw sx="100000" sy="100000" kx="0" ky="0" algn="bl" rotWithShape="0" blurRad="101600" dist="38100" dir="2700000">
+              <a:srgbClr val="1A1A1A">
+                <a:alpha val="100000"/>
+              </a:srgbClr>
+            </a:outerShdw>
+          </a:effectLst>
+        </p:spPr>
+      </p:sp>
+      <p:sp>
+        <p:nvSpPr>
+          <p:cNvPr id="9" name="Text 6"/>
           <p:cNvSpPr txBox="1"/>
           <p:nvPr/>
         </p:nvSpPr>
         <p:spPr>
           <a:xfrm>
-            <a:off x="548640" y="2409444"/>
-            <a:ext cx="384048" cy="384048"/>
-          </a:xfrm>
-          <a:prstGeom prst="rect">
-            <a:avLst/>
-          </a:prstGeom>
-          <a:noFill/>
-          <a:ln/>
+            <a:off x="640080" y="2377440"/>
+            <a:ext cx="402336" cy="402336"/>
+          </a:xfrm>
+          <a:prstGeom prst="ellipse">
+            <a:avLst/>
+          </a:prstGeom>
+          <a:solidFill>
+            <a:srgbClr val="DD6420"/>
+          </a:solidFill>
+          <a:ln w="19050">
+            <a:solidFill>
+              <a:srgbClr val="1A1A1A"/>
+            </a:solidFill>
+          </a:ln>
         </p:spPr>
         <p:txBody>
           <a:bodyPr wrap="square" lIns="0" tIns="0" rIns="0" bIns="0" rtlCol="0" anchor="ctr"/>
@@ -6509,27 +6835,30 @@
               <a:buNone/>
             </a:pPr>
             <a:r>
-              <a:rPr lang="en-US" sz="1400" b="1" dirty="0">
-                <a:solidFill>
-                  <a:schemeClr val="tx1"/>
-                </a:solidFill>
+              <a:rPr lang="ja-JP" altLang="en-US" sz="1500" dirty="0">
+                <a:solidFill>
+                  <a:srgbClr val="FFFFFF"/>
+                </a:solidFill>
+                <a:latin typeface="Dela Gothic One" pitchFamily="34" charset="0"/>
+                <a:ea typeface="けいふぉんと" pitchFamily="34" charset="-122"/>
+                <a:cs typeface="Dela Gothic One" pitchFamily="34" charset="-120"/>
               </a:rPr>
               <a:t>2</a:t>
             </a:r>
-            <a:endParaRPr lang="en-US" sz="1400" dirty="0"/>
-          </a:p>
-        </p:txBody>
-      </p:sp>
-      <p:sp>
-        <p:nvSpPr>
-          <p:cNvPr id="11" name="step-text"/>
+            <a:endParaRPr lang="ja-JP" sz="1500" dirty="0"/>
+          </a:p>
+        </p:txBody>
+      </p:sp>
+      <p:sp>
+        <p:nvSpPr>
+          <p:cNvPr id="10" name="step-text"/>
           <p:cNvSpPr txBox="1"/>
           <p:nvPr/>
         </p:nvSpPr>
         <p:spPr>
           <a:xfrm>
-            <a:off x="1097280" y="2299716"/>
-            <a:ext cx="7498080" cy="603504"/>
+            <a:off x="1234440" y="2295144"/>
+            <a:ext cx="7269480" cy="566928"/>
           </a:xfrm>
           <a:prstGeom prst="rect">
             <a:avLst/>
@@ -6538,65 +6867,85 @@
           <a:ln/>
         </p:spPr>
         <p:txBody>
-          <a:bodyPr wrap="square" lIns="0" tIns="0" rIns="0" bIns="0" rtlCol="0" anchor="ctr"/>
+          <a:bodyPr wrap="square" lIns="0" tIns="0" rIns="0" bIns="0" rtlCol="0" anchor="ctr">
+            <a:normAutofit/>
+          </a:bodyPr>
           <a:lstStyle/>
           <a:p>
             <a:pPr indent="0" marL="0">
               <a:buNone/>
             </a:pPr>
             <a:r>
-              <a:rPr lang="en-US" sz="1450" dirty="0">
-                <a:solidFill>
-                  <a:schemeClr val="tx1"/>
-                </a:solidFill>
+              <a:rPr lang="ja-JP" altLang="en-US" sz="1400" b="1" dirty="0">
+                <a:solidFill>
+                  <a:srgbClr val="1A1A1A"/>
+                </a:solidFill>
+                <a:latin typeface="Noto Sans JP" pitchFamily="34" charset="0"/>
+                <a:ea typeface="Noto Sans JP" pitchFamily="34" charset="-122"/>
+                <a:cs typeface="Noto Sans JP" pitchFamily="34" charset="-120"/>
               </a:rPr>
               <a:t>Claude Codeに P-06「BASEへ保存」で頼む</a:t>
             </a:r>
-            <a:endParaRPr lang="en-US" sz="1450" dirty="0"/>
-          </a:p>
-        </p:txBody>
-      </p:sp>
-      <p:sp>
-        <p:nvSpPr>
-          <p:cNvPr id="12" name="step-num"/>
+            <a:endParaRPr lang="ja-JP" sz="1400" dirty="0"/>
+          </a:p>
+        </p:txBody>
+      </p:sp>
+      <p:sp>
+        <p:nvSpPr>
+          <p:cNvPr id="11" name="card"/>
           <p:cNvSpPr/>
           <p:nvPr/>
         </p:nvSpPr>
         <p:spPr>
           <a:xfrm>
-            <a:off x="548640" y="3012948"/>
-            <a:ext cx="384048" cy="384048"/>
-          </a:xfrm>
-          <a:prstGeom prst="ellipse">
-            <a:avLst/>
+            <a:off x="502920" y="2990088"/>
+            <a:ext cx="8138160" cy="566928"/>
+          </a:xfrm>
+          <a:prstGeom prst="roundRect">
+            <a:avLst>
+              <a:gd name="adj" fmla="val 16129"/>
+            </a:avLst>
           </a:prstGeom>
           <a:solidFill>
-            <a:schemeClr val="accent1"/>
+            <a:srgbClr val="FFFFFF"/>
           </a:solidFill>
-          <a:ln w="15875">
+          <a:ln w="25400">
             <a:solidFill>
               <a:srgbClr val="1A1A1A"/>
             </a:solidFill>
             <a:prstDash val="solid"/>
           </a:ln>
-        </p:spPr>
-      </p:sp>
-      <p:sp>
-        <p:nvSpPr>
-          <p:cNvPr id="13" name="step-num-text"/>
+          <a:effectLst>
+            <a:outerShdw sx="100000" sy="100000" kx="0" ky="0" algn="bl" rotWithShape="0" blurRad="101600" dist="38100" dir="2700000">
+              <a:srgbClr val="1A1A1A">
+                <a:alpha val="100000"/>
+              </a:srgbClr>
+            </a:outerShdw>
+          </a:effectLst>
+        </p:spPr>
+      </p:sp>
+      <p:sp>
+        <p:nvSpPr>
+          <p:cNvPr id="12" name="Text 9"/>
           <p:cNvSpPr txBox="1"/>
           <p:nvPr/>
         </p:nvSpPr>
         <p:spPr>
           <a:xfrm>
-            <a:off x="548640" y="3012948"/>
-            <a:ext cx="384048" cy="384048"/>
-          </a:xfrm>
-          <a:prstGeom prst="rect">
-            <a:avLst/>
-          </a:prstGeom>
-          <a:noFill/>
-          <a:ln/>
+            <a:off x="640080" y="3072384"/>
+            <a:ext cx="402336" cy="402336"/>
+          </a:xfrm>
+          <a:prstGeom prst="ellipse">
+            <a:avLst/>
+          </a:prstGeom>
+          <a:solidFill>
+            <a:srgbClr val="DD6420"/>
+          </a:solidFill>
+          <a:ln w="19050">
+            <a:solidFill>
+              <a:srgbClr val="1A1A1A"/>
+            </a:solidFill>
+          </a:ln>
         </p:spPr>
         <p:txBody>
           <a:bodyPr wrap="square" lIns="0" tIns="0" rIns="0" bIns="0" rtlCol="0" anchor="ctr"/>
@@ -6606,27 +6955,30 @@
               <a:buNone/>
             </a:pPr>
             <a:r>
-              <a:rPr lang="en-US" sz="1400" b="1" dirty="0">
-                <a:solidFill>
-                  <a:schemeClr val="tx1"/>
-                </a:solidFill>
+              <a:rPr lang="ja-JP" altLang="en-US" sz="1500" dirty="0">
+                <a:solidFill>
+                  <a:srgbClr val="FFFFFF"/>
+                </a:solidFill>
+                <a:latin typeface="Dela Gothic One" pitchFamily="34" charset="0"/>
+                <a:ea typeface="けいふぉんと" pitchFamily="34" charset="-122"/>
+                <a:cs typeface="Dela Gothic One" pitchFamily="34" charset="-120"/>
               </a:rPr>
               <a:t>3</a:t>
             </a:r>
-            <a:endParaRPr lang="en-US" sz="1400" dirty="0"/>
-          </a:p>
-        </p:txBody>
-      </p:sp>
-      <p:sp>
-        <p:nvSpPr>
-          <p:cNvPr id="14" name="step-text"/>
+            <a:endParaRPr lang="ja-JP" sz="1500" dirty="0"/>
+          </a:p>
+        </p:txBody>
+      </p:sp>
+      <p:sp>
+        <p:nvSpPr>
+          <p:cNvPr id="13" name="step-text"/>
           <p:cNvSpPr txBox="1"/>
           <p:nvPr/>
         </p:nvSpPr>
         <p:spPr>
           <a:xfrm>
-            <a:off x="1097280" y="2903220"/>
-            <a:ext cx="7498080" cy="603504"/>
+            <a:off x="1234440" y="2990088"/>
+            <a:ext cx="7269480" cy="566928"/>
           </a:xfrm>
           <a:prstGeom prst="rect">
             <a:avLst/>
@@ -6635,65 +6987,85 @@
           <a:ln/>
         </p:spPr>
         <p:txBody>
-          <a:bodyPr wrap="square" lIns="0" tIns="0" rIns="0" bIns="0" rtlCol="0" anchor="ctr"/>
+          <a:bodyPr wrap="square" lIns="0" tIns="0" rIns="0" bIns="0" rtlCol="0" anchor="ctr">
+            <a:normAutofit/>
+          </a:bodyPr>
           <a:lstStyle/>
           <a:p>
             <a:pPr indent="0" marL="0">
               <a:buNone/>
             </a:pPr>
             <a:r>
-              <a:rPr lang="en-US" sz="1450" dirty="0">
-                <a:solidFill>
-                  <a:schemeClr val="tx1"/>
-                </a:solidFill>
+              <a:rPr lang="ja-JP" altLang="en-US" sz="1400" b="1" dirty="0">
+                <a:solidFill>
+                  <a:srgbClr val="1A1A1A"/>
+                </a:solidFill>
+                <a:latin typeface="Noto Sans JP" pitchFamily="34" charset="0"/>
+                <a:ea typeface="Noto Sans JP" pitchFamily="34" charset="-122"/>
+                <a:cs typeface="Noto Sans JP" pitchFamily="34" charset="-120"/>
               </a:rPr>
               <a:t>記録 → GitHubに保存 → 公開ページから送信し、BASEに1件入るか確かめる</a:t>
             </a:r>
-            <a:endParaRPr lang="en-US" sz="1450" dirty="0"/>
-          </a:p>
-        </p:txBody>
-      </p:sp>
-      <p:sp>
-        <p:nvSpPr>
-          <p:cNvPr id="15" name="step-num"/>
+            <a:endParaRPr lang="ja-JP" sz="1400" dirty="0"/>
+          </a:p>
+        </p:txBody>
+      </p:sp>
+      <p:sp>
+        <p:nvSpPr>
+          <p:cNvPr id="14" name="card"/>
           <p:cNvSpPr/>
           <p:nvPr/>
         </p:nvSpPr>
         <p:spPr>
           <a:xfrm>
-            <a:off x="548640" y="3616452"/>
-            <a:ext cx="384048" cy="384048"/>
-          </a:xfrm>
-          <a:prstGeom prst="ellipse">
-            <a:avLst/>
+            <a:off x="502920" y="3685032"/>
+            <a:ext cx="8138160" cy="566928"/>
+          </a:xfrm>
+          <a:prstGeom prst="roundRect">
+            <a:avLst>
+              <a:gd name="adj" fmla="val 16129"/>
+            </a:avLst>
           </a:prstGeom>
           <a:solidFill>
-            <a:schemeClr val="accent1"/>
+            <a:srgbClr val="FFFFFF"/>
           </a:solidFill>
-          <a:ln w="15875">
+          <a:ln w="25400">
             <a:solidFill>
               <a:srgbClr val="1A1A1A"/>
             </a:solidFill>
             <a:prstDash val="solid"/>
           </a:ln>
-        </p:spPr>
-      </p:sp>
-      <p:sp>
-        <p:nvSpPr>
-          <p:cNvPr id="16" name="step-num-text"/>
+          <a:effectLst>
+            <a:outerShdw sx="100000" sy="100000" kx="0" ky="0" algn="bl" rotWithShape="0" blurRad="101600" dist="38100" dir="2700000">
+              <a:srgbClr val="1A1A1A">
+                <a:alpha val="100000"/>
+              </a:srgbClr>
+            </a:outerShdw>
+          </a:effectLst>
+        </p:spPr>
+      </p:sp>
+      <p:sp>
+        <p:nvSpPr>
+          <p:cNvPr id="15" name="Text 12"/>
           <p:cNvSpPr txBox="1"/>
           <p:nvPr/>
         </p:nvSpPr>
         <p:spPr>
           <a:xfrm>
-            <a:off x="548640" y="3616452"/>
-            <a:ext cx="384048" cy="384048"/>
-          </a:xfrm>
-          <a:prstGeom prst="rect">
-            <a:avLst/>
-          </a:prstGeom>
-          <a:noFill/>
-          <a:ln/>
+            <a:off x="640080" y="3767328"/>
+            <a:ext cx="402336" cy="402336"/>
+          </a:xfrm>
+          <a:prstGeom prst="ellipse">
+            <a:avLst/>
+          </a:prstGeom>
+          <a:solidFill>
+            <a:srgbClr val="DD6420"/>
+          </a:solidFill>
+          <a:ln w="19050">
+            <a:solidFill>
+              <a:srgbClr val="1A1A1A"/>
+            </a:solidFill>
+          </a:ln>
         </p:spPr>
         <p:txBody>
           <a:bodyPr wrap="square" lIns="0" tIns="0" rIns="0" bIns="0" rtlCol="0" anchor="ctr"/>
@@ -6703,27 +7075,30 @@
               <a:buNone/>
             </a:pPr>
             <a:r>
-              <a:rPr lang="en-US" sz="1400" b="1" dirty="0">
-                <a:solidFill>
-                  <a:schemeClr val="tx1"/>
-                </a:solidFill>
+              <a:rPr lang="ja-JP" altLang="en-US" sz="1500" dirty="0">
+                <a:solidFill>
+                  <a:srgbClr val="FFFFFF"/>
+                </a:solidFill>
+                <a:latin typeface="Dela Gothic One" pitchFamily="34" charset="0"/>
+                <a:ea typeface="けいふぉんと" pitchFamily="34" charset="-122"/>
+                <a:cs typeface="Dela Gothic One" pitchFamily="34" charset="-120"/>
               </a:rPr>
               <a:t>4</a:t>
             </a:r>
-            <a:endParaRPr lang="en-US" sz="1400" dirty="0"/>
-          </a:p>
-        </p:txBody>
-      </p:sp>
-      <p:sp>
-        <p:nvSpPr>
-          <p:cNvPr id="17" name="step-text"/>
+            <a:endParaRPr lang="ja-JP" sz="1500" dirty="0"/>
+          </a:p>
+        </p:txBody>
+      </p:sp>
+      <p:sp>
+        <p:nvSpPr>
+          <p:cNvPr id="16" name="step-text"/>
           <p:cNvSpPr txBox="1"/>
           <p:nvPr/>
         </p:nvSpPr>
         <p:spPr>
           <a:xfrm>
-            <a:off x="1097280" y="3506724"/>
-            <a:ext cx="7498080" cy="603504"/>
+            <a:off x="1234440" y="3685032"/>
+            <a:ext cx="7269480" cy="566928"/>
           </a:xfrm>
           <a:prstGeom prst="rect">
             <a:avLst/>
@@ -6732,21 +7107,26 @@
           <a:ln/>
         </p:spPr>
         <p:txBody>
-          <a:bodyPr wrap="square" lIns="0" tIns="0" rIns="0" bIns="0" rtlCol="0" anchor="ctr"/>
+          <a:bodyPr wrap="square" lIns="0" tIns="0" rIns="0" bIns="0" rtlCol="0" anchor="ctr">
+            <a:normAutofit/>
+          </a:bodyPr>
           <a:lstStyle/>
           <a:p>
             <a:pPr indent="0" marL="0">
               <a:buNone/>
             </a:pPr>
             <a:r>
-              <a:rPr lang="en-US" sz="1450" dirty="0">
-                <a:solidFill>
-                  <a:schemeClr val="tx1"/>
-                </a:solidFill>
+              <a:rPr lang="ja-JP" altLang="en-US" sz="1400" b="1" dirty="0">
+                <a:solidFill>
+                  <a:srgbClr val="1A1A1A"/>
+                </a:solidFill>
+                <a:latin typeface="Noto Sans JP" pitchFamily="34" charset="0"/>
+                <a:ea typeface="Noto Sans JP" pitchFamily="34" charset="-122"/>
+                <a:cs typeface="Noto Sans JP" pitchFamily="34" charset="-120"/>
               </a:rPr>
               <a:t>第6回の自動化（新規レコードで通知）が動くかも確かめる</a:t>
             </a:r>
-            <a:endParaRPr lang="en-US" sz="1450" dirty="0"/>
+            <a:endParaRPr lang="ja-JP" sz="1400" dirty="0"/>
           </a:p>
         </p:txBody>
       </p:sp>
@@ -6762,8 +7142,8 @@
         </p:nvSpPr>
         <p:spPr>
           <a:xfrm>
-            <a:off x="8229600" y="4773168"/>
-            <a:ext cx="365760" cy="228600"/>
+            <a:off x="8366760" y="4754880"/>
+            <a:ext cx="365760" cy="274320"/>
           </a:xfrm>
           <a:prstGeom prst="rect">
             <a:avLst/>
@@ -6775,20 +7155,23 @@
           </a:extLst>
         </p:spPr>
         <p:txBody>
-          <a:bodyPr/>
+          <a:bodyPr anchor="ctr"/>
           <a:lstStyle>
             <a:lvl1pPr>
-              <a:defRPr sz="900">
-                <a:solidFill>
-                  <a:srgbClr val="5A6872"/>
-                </a:solidFill>
+              <a:defRPr sz="850">
+                <a:solidFill>
+                  <a:srgbClr val="FFFFFF"/>
+                </a:solidFill>
+                <a:latin typeface="Noto Sans JP"/>
+                <a:ea typeface="Noto Sans JP"/>
+                <a:cs typeface="Noto Sans JP"/>
               </a:defRPr>
             </a:lvl1pPr>
           </a:lstStyle>
           <a:p>
             <a:pPr algn="r"/>
             <a:fld id="{F7021451-1387-4CA6-816F-3879F97B5CBC}" type="slidenum">
-              <a:rPr b="0" lang="en-US"/>
+              <a:rPr b="1" lang="en-US"/>
               <a:t>6</a:t>
             </a:fld>
             <a:endParaRPr lang="en-US"/>
@@ -6823,84 +7206,25 @@
       <p:sp>
         <p:nvSpPr>
           <p:cNvPr id="2" name="Text 0"/>
-          <p:cNvSpPr/>
-          <p:nvPr>
-            <p:ph idx="100" type="title" hasCustomPrompt="1"/>
-          </p:nvPr>
-        </p:nvSpPr>
-        <p:spPr>
-          <a:xfrm>
-            <a:off x="548640" y="658368"/>
-            <a:ext cx="8046720" cy="566928"/>
-          </a:xfrm>
-          <a:prstGeom prst="rect">
-            <a:avLst/>
-          </a:prstGeom>
-          <a:noFill/>
-          <a:ln/>
-        </p:spPr>
-        <p:txBody>
-          <a:bodyPr wrap="square" lIns="0" tIns="0" rIns="0" bIns="0" rtlCol="0" anchor="ctr"/>
-          <a:lstStyle/>
-          <a:p>
-            <a:pPr algn="l" indent="0" marL="0">
-              <a:buNone/>
-            </a:pPr>
-            <a:r>
-              <a:rPr lang="en-US" sz="2400" b="1" dirty="0">
-                <a:solidFill>
-                  <a:schemeClr val="tx1"/>
-                </a:solidFill>
-              </a:rPr>
-              <a:t>送信すると、BASEに1件入る</a:t>
-            </a:r>
-            <a:endParaRPr lang="en-US" sz="2400" dirty="0"/>
-          </a:p>
-        </p:txBody>
-      </p:sp>
-      <p:sp>
-        <p:nvSpPr>
-          <p:cNvPr id="3" name="chip"/>
-          <p:cNvSpPr/>
-          <p:nvPr/>
-        </p:nvSpPr>
-        <p:spPr>
-          <a:xfrm>
-            <a:off x="548640" y="292608"/>
-            <a:ext cx="1207008" cy="292608"/>
-          </a:xfrm>
-          <a:prstGeom prst="roundRect">
-            <a:avLst>
-              <a:gd name="adj" fmla="val 50000"/>
-            </a:avLst>
+          <p:cNvSpPr txBox="1"/>
+          <p:nvPr/>
+        </p:nvSpPr>
+        <p:spPr>
+          <a:xfrm rot="-180000">
+            <a:off x="411480" y="201168"/>
+            <a:ext cx="1332281" cy="352044"/>
+          </a:xfrm>
+          <a:prstGeom prst="rect">
+            <a:avLst/>
           </a:prstGeom>
           <a:solidFill>
-            <a:schemeClr val="tx1"/>
+            <a:srgbClr val="1A1A1A"/>
           </a:solidFill>
-          <a:ln w="12700">
+          <a:ln>
             <a:solidFill>
-              <a:schemeClr val="tx1"/>
+              <a:srgbClr val="1A1A1A"/>
             </a:solidFill>
-            <a:prstDash val="solid"/>
           </a:ln>
-        </p:spPr>
-      </p:sp>
-      <p:sp>
-        <p:nvSpPr>
-          <p:cNvPr id="4" name="chip-text"/>
-          <p:cNvSpPr txBox="1"/>
-          <p:nvPr/>
-        </p:nvSpPr>
-        <p:spPr>
-          <a:xfrm>
-            <a:off x="548640" y="292608"/>
-            <a:ext cx="1207008" cy="292608"/>
-          </a:xfrm>
-          <a:prstGeom prst="rect">
-            <a:avLst/>
-          </a:prstGeom>
-          <a:noFill/>
-          <a:ln/>
         </p:spPr>
         <p:txBody>
           <a:bodyPr wrap="square" lIns="0" tIns="0" rIns="0" bIns="0" rtlCol="0" anchor="ctr"/>
@@ -6910,31 +7234,75 @@
               <a:buNone/>
             </a:pPr>
             <a:r>
-              <a:rPr lang="en-US" sz="1100" b="1" dirty="0">
-                <a:solidFill>
-                  <a:schemeClr val="accent1"/>
-                </a:solidFill>
+              <a:rPr lang="ja-JP" altLang="en-US" sz="1100" dirty="0">
+                <a:solidFill>
+                  <a:srgbClr val="FFFFFF"/>
+                </a:solidFill>
+                <a:latin typeface="Dela Gothic One" pitchFamily="34" charset="0"/>
+                <a:ea typeface="けいふぉんと" pitchFamily="34" charset="-122"/>
+                <a:cs typeface="Dela Gothic One" pitchFamily="34" charset="-120"/>
               </a:rPr>
               <a:t>完成イメージ</a:t>
             </a:r>
-            <a:endParaRPr lang="en-US" sz="1100" dirty="0"/>
-          </a:p>
-        </p:txBody>
-      </p:sp>
-      <p:sp>
-        <p:nvSpPr>
-          <p:cNvPr id="6" name="phone-frame"/>
+            <a:endParaRPr lang="ja-JP" sz="1100" dirty="0"/>
+          </a:p>
+        </p:txBody>
+      </p:sp>
+      <p:sp>
+        <p:nvSpPr>
+          <p:cNvPr id="3" name="Text 1"/>
+          <p:cNvSpPr txBox="1"/>
+          <p:nvPr/>
+        </p:nvSpPr>
+        <p:spPr>
+          <a:xfrm>
+            <a:off x="411480" y="502920"/>
+            <a:ext cx="8321040" cy="685800"/>
+          </a:xfrm>
+          <a:prstGeom prst="rect">
+            <a:avLst/>
+          </a:prstGeom>
+          <a:noFill/>
+          <a:ln/>
+        </p:spPr>
+        <p:txBody>
+          <a:bodyPr wrap="square" lIns="0" tIns="0" rIns="0" bIns="0" rtlCol="0" anchor="ctr">
+            <a:normAutofit/>
+          </a:bodyPr>
+          <a:lstStyle/>
+          <a:p>
+            <a:pPr indent="0" marL="0">
+              <a:buNone/>
+            </a:pPr>
+            <a:r>
+              <a:rPr lang="ja-JP" altLang="en-US" sz="2600" dirty="0">
+                <a:solidFill>
+                  <a:srgbClr val="1A1A1A"/>
+                </a:solidFill>
+                <a:latin typeface="Dela Gothic One" pitchFamily="34" charset="0"/>
+                <a:ea typeface="けいふぉんと" pitchFamily="34" charset="-122"/>
+                <a:cs typeface="Dela Gothic One" pitchFamily="34" charset="-120"/>
+              </a:rPr>
+              <a:t>送信すると、BASEに1件入る</a:t>
+            </a:r>
+            <a:endParaRPr lang="ja-JP" sz="2600" dirty="0"/>
+          </a:p>
+        </p:txBody>
+      </p:sp>
+      <p:sp>
+        <p:nvSpPr>
+          <p:cNvPr id="5" name="phone-frame"/>
           <p:cNvSpPr/>
           <p:nvPr/>
         </p:nvSpPr>
         <p:spPr>
-          <a:xfrm>
-            <a:off x="548640" y="1417320"/>
-            <a:ext cx="1563178" cy="3145536"/>
+          <a:xfrm rot="-180000">
+            <a:off x="640080" y="1463040"/>
+            <a:ext cx="1541433" cy="3099816"/>
           </a:xfrm>
           <a:prstGeom prst="roundRect">
             <a:avLst>
-              <a:gd name="adj" fmla="val 8189"/>
+              <a:gd name="adj" fmla="val 8305"/>
             </a:avLst>
           </a:prstGeom>
           <a:solidFill>
@@ -6947,9 +7315,9 @@
             <a:prstDash val="solid"/>
           </a:ln>
           <a:effectLst>
-            <a:outerShdw sx="100000" sy="100000" kx="0" ky="0" algn="bl" rotWithShape="0" blurRad="101600" dist="38100" dir="2700000">
-              <a:srgbClr val="000000">
-                <a:alpha val="18000"/>
+            <a:outerShdw sx="100000" sy="100000" kx="0" ky="0" algn="bl" rotWithShape="0" blurRad="101600" dist="50800" dir="2700000">
+              <a:srgbClr val="1A1A1A">
+                <a:alpha val="100000"/>
               </a:srgbClr>
             </a:outerShdw>
           </a:effectLst>
@@ -6957,7 +7325,7 @@
       </p:sp>
       <p:pic>
         <p:nvPicPr>
-          <p:cNvPr id="7" name="phone-screen" descr="予約を受け付けた後の完了メッセージ">    </p:cNvPr>
+          <p:cNvPr id="6" name="phone-screen" descr="予約を受け付けた後の完了メッセージ">    </p:cNvPr>
           <p:cNvPicPr>
             <a:picLocks noChangeAspect="1"/>
           </p:cNvPicPr>
@@ -6970,9 +7338,9 @@
           </a:stretch>
         </p:blipFill>
         <p:spPr>
-          <a:xfrm>
-            <a:off x="612648" y="1481328"/>
-            <a:ext cx="1435162" cy="3017520"/>
+          <a:xfrm rot="-180000">
+            <a:off x="704088" y="1527048"/>
+            <a:ext cx="1413417" cy="2971800"/>
           </a:xfrm>
           <a:prstGeom prst="rect">
             <a:avLst/>
@@ -6981,39 +7349,97 @@
       </p:pic>
       <p:sp>
         <p:nvSpPr>
-          <p:cNvPr id="8" name="phone-num"/>
+          <p:cNvPr id="7" name="card"/>
           <p:cNvSpPr/>
           <p:nvPr/>
         </p:nvSpPr>
         <p:spPr>
           <a:xfrm>
-            <a:off x="438912" y="1307592"/>
-            <a:ext cx="365760" cy="365760"/>
-          </a:xfrm>
-          <a:prstGeom prst="ellipse">
-            <a:avLst/>
+            <a:off x="2547273" y="1417320"/>
+            <a:ext cx="6093807" cy="3154680"/>
+          </a:xfrm>
+          <a:prstGeom prst="roundRect">
+            <a:avLst>
+              <a:gd name="adj" fmla="val 2899"/>
+            </a:avLst>
           </a:prstGeom>
           <a:solidFill>
-            <a:schemeClr val="accent1"/>
+            <a:srgbClr val="FFFFFF"/>
           </a:solidFill>
-          <a:ln w="15875">
+          <a:ln w="25400">
             <a:solidFill>
               <a:srgbClr val="1A1A1A"/>
             </a:solidFill>
             <a:prstDash val="solid"/>
           </a:ln>
-        </p:spPr>
-      </p:sp>
-      <p:sp>
-        <p:nvSpPr>
-          <p:cNvPr id="9" name="Text 5"/>
+          <a:effectLst>
+            <a:outerShdw sx="100000" sy="100000" kx="0" ky="0" algn="bl" rotWithShape="0" blurRad="101600" dist="50800" dir="2700000">
+              <a:srgbClr val="1A1A1A">
+                <a:alpha val="100000"/>
+              </a:srgbClr>
+            </a:outerShdw>
+          </a:effectLst>
+        </p:spPr>
+      </p:sp>
+      <p:sp>
+        <p:nvSpPr>
+          <p:cNvPr id="8" name="icon-circle"/>
+          <p:cNvSpPr/>
+          <p:nvPr/>
+        </p:nvSpPr>
+        <p:spPr>
+          <a:xfrm>
+            <a:off x="2730153" y="1655064"/>
+            <a:ext cx="292608" cy="292608"/>
+          </a:xfrm>
+          <a:prstGeom prst="ellipse">
+            <a:avLst/>
+          </a:prstGeom>
+          <a:solidFill>
+            <a:srgbClr val="DD6420"/>
+          </a:solidFill>
+          <a:ln w="19050">
+            <a:solidFill>
+              <a:srgbClr val="1A1A1A"/>
+            </a:solidFill>
+            <a:prstDash val="solid"/>
+          </a:ln>
+        </p:spPr>
+      </p:sp>
+      <p:pic>
+        <p:nvPicPr>
+          <p:cNvPr id="9" name="icon" descr="preencoded.png">    </p:cNvPr>
+          <p:cNvPicPr>
+            <a:picLocks noChangeAspect="1"/>
+          </p:cNvPicPr>
+          <p:nvPr/>
+        </p:nvPicPr>
+        <p:blipFill>
+          <a:blip r:embed="rId2"/>
+          <a:stretch>
+            <a:fillRect/>
+          </a:stretch>
+        </p:blipFill>
+        <p:spPr>
+          <a:xfrm>
+            <a:off x="2803305" y="1728216"/>
+            <a:ext cx="146304" cy="146304"/>
+          </a:xfrm>
+          <a:prstGeom prst="rect">
+            <a:avLst/>
+          </a:prstGeom>
+        </p:spPr>
+      </p:pic>
+      <p:sp>
+        <p:nvSpPr>
+          <p:cNvPr id="10" name="point-head"/>
           <p:cNvSpPr txBox="1"/>
           <p:nvPr/>
         </p:nvSpPr>
         <p:spPr>
           <a:xfrm>
-            <a:off x="438912" y="1307592"/>
-            <a:ext cx="365760" cy="365760"/>
+            <a:off x="3114201" y="1572768"/>
+            <a:ext cx="5362287" cy="457200"/>
           </a:xfrm>
           <a:prstGeom prst="rect">
             <a:avLst/>
@@ -7022,57 +7448,26 @@
           <a:ln/>
         </p:spPr>
         <p:txBody>
-          <a:bodyPr wrap="square" lIns="0" tIns="0" rIns="0" bIns="0" rtlCol="0" anchor="ctr"/>
-          <a:lstStyle/>
-          <a:p>
-            <a:pPr algn="ctr" indent="0" marL="0">
-              <a:buNone/>
-            </a:pPr>
-            <a:r>
-              <a:rPr lang="en-US" sz="1300" b="1" dirty="0">
-                <a:solidFill>
-                  <a:schemeClr val="tx1"/>
-                </a:solidFill>
-              </a:rPr>
-              <a:t>1</a:t>
-            </a:r>
-            <a:endParaRPr lang="en-US" sz="1300" dirty="0"/>
-          </a:p>
-        </p:txBody>
-      </p:sp>
-      <p:sp>
-        <p:nvSpPr>
-          <p:cNvPr id="10" name="point-head"/>
-          <p:cNvSpPr txBox="1"/>
-          <p:nvPr/>
-        </p:nvSpPr>
-        <p:spPr>
-          <a:xfrm>
-            <a:off x="2477578" y="1417320"/>
-            <a:ext cx="6117782" cy="365760"/>
-          </a:xfrm>
-          <a:prstGeom prst="rect">
-            <a:avLst/>
-          </a:prstGeom>
-          <a:noFill/>
-          <a:ln/>
-        </p:spPr>
-        <p:txBody>
-          <a:bodyPr wrap="square" lIns="0" tIns="0" rIns="0" bIns="0" rtlCol="0" anchor="t"/>
+          <a:bodyPr wrap="square" lIns="0" tIns="0" rIns="0" bIns="0" rtlCol="0" anchor="ctr">
+            <a:normAutofit/>
+          </a:bodyPr>
           <a:lstStyle/>
           <a:p>
             <a:pPr indent="0" marL="0">
               <a:buNone/>
             </a:pPr>
             <a:r>
-              <a:rPr lang="en-US" sz="1500" b="1" dirty="0">
-                <a:solidFill>
-                  <a:schemeClr val="tx1"/>
-                </a:solidFill>
+              <a:rPr lang="ja-JP" altLang="en-US" sz="1300" b="1" dirty="0">
+                <a:solidFill>
+                  <a:srgbClr val="DD6420"/>
+                </a:solidFill>
+                <a:latin typeface="Noto Sans JP" pitchFamily="34" charset="0"/>
+                <a:ea typeface="Noto Sans JP" pitchFamily="34" charset="-122"/>
+                <a:cs typeface="Noto Sans JP" pitchFamily="34" charset="-120"/>
               </a:rPr>
               <a:t>1 お客様には「受け付けました」とだけ見せる</a:t>
             </a:r>
-            <a:endParaRPr lang="en-US" sz="1500" dirty="0"/>
+            <a:endParaRPr lang="ja-JP" sz="1300" dirty="0"/>
           </a:p>
         </p:txBody>
       </p:sp>
@@ -7084,8 +7479,8 @@
         </p:nvSpPr>
         <p:spPr>
           <a:xfrm>
-            <a:off x="2477578" y="1801368"/>
-            <a:ext cx="6117782" cy="548640"/>
+            <a:off x="3114201" y="2048256"/>
+            <a:ext cx="5362287" cy="429768"/>
           </a:xfrm>
           <a:prstGeom prst="rect">
             <a:avLst/>
@@ -7094,34 +7489,88 @@
           <a:ln/>
         </p:spPr>
         <p:txBody>
-          <a:bodyPr wrap="square" lIns="0" tIns="0" rIns="0" bIns="0" rtlCol="0" anchor="t"/>
+          <a:bodyPr wrap="square" lIns="0" tIns="0" rIns="0" bIns="0" rtlCol="0" anchor="t">
+            <a:normAutofit/>
+          </a:bodyPr>
           <a:lstStyle/>
           <a:p>
             <a:pPr indent="0" marL="0">
               <a:buNone/>
             </a:pPr>
             <a:r>
-              <a:rPr lang="en-US" sz="1250" dirty="0">
-                <a:solidFill>
-                  <a:schemeClr val="tx1"/>
-                </a:solidFill>
+              <a:rPr lang="ja-JP" altLang="en-US" sz="1150" dirty="0">
+                <a:solidFill>
+                  <a:srgbClr val="1A1A1A"/>
+                </a:solidFill>
+                <a:latin typeface="Noto Sans JP Medium" pitchFamily="34" charset="0"/>
+                <a:ea typeface="Noto Sans JP Medium" pitchFamily="34" charset="-122"/>
+                <a:cs typeface="Noto Sans JP Medium" pitchFamily="34" charset="-120"/>
               </a:rPr>
               <a:t>裏では受付係（Pages Functions）がLarkのAPIでBASEに1件追加している</a:t>
             </a:r>
-            <a:endParaRPr lang="en-US" sz="1250" dirty="0"/>
-          </a:p>
-        </p:txBody>
-      </p:sp>
-      <p:sp>
-        <p:nvSpPr>
-          <p:cNvPr id="12" name="point-head"/>
+            <a:endParaRPr lang="ja-JP" sz="1150" dirty="0"/>
+          </a:p>
+        </p:txBody>
+      </p:sp>
+      <p:sp>
+        <p:nvSpPr>
+          <p:cNvPr id="12" name="icon-circle"/>
+          <p:cNvSpPr/>
+          <p:nvPr/>
+        </p:nvSpPr>
+        <p:spPr>
+          <a:xfrm>
+            <a:off x="2730153" y="2615184"/>
+            <a:ext cx="292608" cy="292608"/>
+          </a:xfrm>
+          <a:prstGeom prst="ellipse">
+            <a:avLst/>
+          </a:prstGeom>
+          <a:solidFill>
+            <a:srgbClr val="DD6420"/>
+          </a:solidFill>
+          <a:ln w="19050">
+            <a:solidFill>
+              <a:srgbClr val="1A1A1A"/>
+            </a:solidFill>
+            <a:prstDash val="solid"/>
+          </a:ln>
+        </p:spPr>
+      </p:sp>
+      <p:pic>
+        <p:nvPicPr>
+          <p:cNvPr id="13" name="icon" descr="preencoded.png">    </p:cNvPr>
+          <p:cNvPicPr>
+            <a:picLocks noChangeAspect="1"/>
+          </p:cNvPicPr>
+          <p:nvPr/>
+        </p:nvPicPr>
+        <p:blipFill>
+          <a:blip r:embed="rId3"/>
+          <a:stretch>
+            <a:fillRect/>
+          </a:stretch>
+        </p:blipFill>
+        <p:spPr>
+          <a:xfrm>
+            <a:off x="2803305" y="2688336"/>
+            <a:ext cx="146304" cy="146304"/>
+          </a:xfrm>
+          <a:prstGeom prst="rect">
+            <a:avLst/>
+          </a:prstGeom>
+        </p:spPr>
+      </p:pic>
+      <p:sp>
+        <p:nvSpPr>
+          <p:cNvPr id="14" name="point-head"/>
           <p:cNvSpPr txBox="1"/>
           <p:nvPr/>
         </p:nvSpPr>
         <p:spPr>
           <a:xfrm>
-            <a:off x="2477578" y="2423160"/>
-            <a:ext cx="6117782" cy="365760"/>
+            <a:off x="3114201" y="2532888"/>
+            <a:ext cx="5362287" cy="457200"/>
           </a:xfrm>
           <a:prstGeom prst="rect">
             <a:avLst/>
@@ -7130,34 +7579,39 @@
           <a:ln/>
         </p:spPr>
         <p:txBody>
-          <a:bodyPr wrap="square" lIns="0" tIns="0" rIns="0" bIns="0" rtlCol="0" anchor="t"/>
+          <a:bodyPr wrap="square" lIns="0" tIns="0" rIns="0" bIns="0" rtlCol="0" anchor="ctr">
+            <a:normAutofit/>
+          </a:bodyPr>
           <a:lstStyle/>
           <a:p>
             <a:pPr indent="0" marL="0">
               <a:buNone/>
             </a:pPr>
             <a:r>
-              <a:rPr lang="en-US" sz="1500" b="1" dirty="0">
-                <a:solidFill>
-                  <a:schemeClr val="tx1"/>
-                </a:solidFill>
+              <a:rPr lang="ja-JP" altLang="en-US" sz="1300" b="1" dirty="0">
+                <a:solidFill>
+                  <a:srgbClr val="DD6420"/>
+                </a:solidFill>
+                <a:latin typeface="Noto Sans JP" pitchFamily="34" charset="0"/>
+                <a:ea typeface="Noto Sans JP" pitchFamily="34" charset="-122"/>
+                <a:cs typeface="Noto Sans JP" pitchFamily="34" charset="-120"/>
               </a:rPr>
               <a:t>BASEとグループで確かめる</a:t>
             </a:r>
-            <a:endParaRPr lang="en-US" sz="1500" dirty="0"/>
-          </a:p>
-        </p:txBody>
-      </p:sp>
-      <p:sp>
-        <p:nvSpPr>
-          <p:cNvPr id="13" name="point-body"/>
+            <a:endParaRPr lang="ja-JP" sz="1300" dirty="0"/>
+          </a:p>
+        </p:txBody>
+      </p:sp>
+      <p:sp>
+        <p:nvSpPr>
+          <p:cNvPr id="15" name="point-body"/>
           <p:cNvSpPr txBox="1"/>
           <p:nvPr/>
         </p:nvSpPr>
         <p:spPr>
           <a:xfrm>
-            <a:off x="2477578" y="2807208"/>
-            <a:ext cx="6117782" cy="548640"/>
+            <a:off x="3114201" y="3008376"/>
+            <a:ext cx="5362287" cy="429768"/>
           </a:xfrm>
           <a:prstGeom prst="rect">
             <a:avLst/>
@@ -7166,34 +7620,88 @@
           <a:ln/>
         </p:spPr>
         <p:txBody>
-          <a:bodyPr wrap="square" lIns="0" tIns="0" rIns="0" bIns="0" rtlCol="0" anchor="t"/>
+          <a:bodyPr wrap="square" lIns="0" tIns="0" rIns="0" bIns="0" rtlCol="0" anchor="t">
+            <a:normAutofit/>
+          </a:bodyPr>
           <a:lstStyle/>
           <a:p>
             <a:pPr indent="0" marL="0">
               <a:buNone/>
             </a:pPr>
             <a:r>
-              <a:rPr lang="en-US" sz="1250" dirty="0">
-                <a:solidFill>
-                  <a:schemeClr val="tx1"/>
-                </a:solidFill>
+              <a:rPr lang="ja-JP" altLang="en-US" sz="1150" dirty="0">
+                <a:solidFill>
+                  <a:srgbClr val="1A1A1A"/>
+                </a:solidFill>
+                <a:latin typeface="Noto Sans JP Medium" pitchFamily="34" charset="0"/>
+                <a:ea typeface="Noto Sans JP Medium" pitchFamily="34" charset="-122"/>
+                <a:cs typeface="Noto Sans JP Medium" pitchFamily="34" charset="-120"/>
               </a:rPr>
               <a:t>BASEの予約テーブルに1件増え、第6回の自動化で講座グループに通知が届けば完成</a:t>
             </a:r>
-            <a:endParaRPr lang="en-US" sz="1250" dirty="0"/>
-          </a:p>
-        </p:txBody>
-      </p:sp>
-      <p:sp>
-        <p:nvSpPr>
-          <p:cNvPr id="14" name="point-head"/>
+            <a:endParaRPr lang="ja-JP" sz="1150" dirty="0"/>
+          </a:p>
+        </p:txBody>
+      </p:sp>
+      <p:sp>
+        <p:nvSpPr>
+          <p:cNvPr id="16" name="icon-circle"/>
+          <p:cNvSpPr/>
+          <p:nvPr/>
+        </p:nvSpPr>
+        <p:spPr>
+          <a:xfrm>
+            <a:off x="2730153" y="3575304"/>
+            <a:ext cx="292608" cy="292608"/>
+          </a:xfrm>
+          <a:prstGeom prst="ellipse">
+            <a:avLst/>
+          </a:prstGeom>
+          <a:solidFill>
+            <a:srgbClr val="DD6420"/>
+          </a:solidFill>
+          <a:ln w="19050">
+            <a:solidFill>
+              <a:srgbClr val="1A1A1A"/>
+            </a:solidFill>
+            <a:prstDash val="solid"/>
+          </a:ln>
+        </p:spPr>
+      </p:sp>
+      <p:pic>
+        <p:nvPicPr>
+          <p:cNvPr id="17" name="icon" descr="preencoded.png">    </p:cNvPr>
+          <p:cNvPicPr>
+            <a:picLocks noChangeAspect="1"/>
+          </p:cNvPicPr>
+          <p:nvPr/>
+        </p:nvPicPr>
+        <p:blipFill>
+          <a:blip r:embed="rId4"/>
+          <a:stretch>
+            <a:fillRect/>
+          </a:stretch>
+        </p:blipFill>
+        <p:spPr>
+          <a:xfrm>
+            <a:off x="2803305" y="3648456"/>
+            <a:ext cx="146304" cy="146304"/>
+          </a:xfrm>
+          <a:prstGeom prst="rect">
+            <a:avLst/>
+          </a:prstGeom>
+        </p:spPr>
+      </p:pic>
+      <p:sp>
+        <p:nvSpPr>
+          <p:cNvPr id="18" name="point-head"/>
           <p:cNvSpPr txBox="1"/>
           <p:nvPr/>
         </p:nvSpPr>
         <p:spPr>
           <a:xfrm>
-            <a:off x="2477578" y="3429000"/>
-            <a:ext cx="6117782" cy="365760"/>
+            <a:off x="3114201" y="3493008"/>
+            <a:ext cx="5362287" cy="457200"/>
           </a:xfrm>
           <a:prstGeom prst="rect">
             <a:avLst/>
@@ -7202,34 +7710,39 @@
           <a:ln/>
         </p:spPr>
         <p:txBody>
-          <a:bodyPr wrap="square" lIns="0" tIns="0" rIns="0" bIns="0" rtlCol="0" anchor="t"/>
+          <a:bodyPr wrap="square" lIns="0" tIns="0" rIns="0" bIns="0" rtlCol="0" anchor="ctr">
+            <a:normAutofit/>
+          </a:bodyPr>
           <a:lstStyle/>
           <a:p>
             <a:pPr indent="0" marL="0">
               <a:buNone/>
             </a:pPr>
             <a:r>
-              <a:rPr lang="en-US" sz="1500" b="1" dirty="0">
-                <a:solidFill>
-                  <a:schemeClr val="tx1"/>
-                </a:solidFill>
+              <a:rPr lang="ja-JP" altLang="en-US" sz="1300" b="1" dirty="0">
+                <a:solidFill>
+                  <a:srgbClr val="DD6420"/>
+                </a:solidFill>
+                <a:latin typeface="Noto Sans JP" pitchFamily="34" charset="0"/>
+                <a:ea typeface="Noto Sans JP" pitchFamily="34" charset="-122"/>
+                <a:cs typeface="Noto Sans JP" pitchFamily="34" charset="-120"/>
               </a:rPr>
               <a:t>失敗したときの見せ方</a:t>
             </a:r>
-            <a:endParaRPr lang="en-US" sz="1500" dirty="0"/>
-          </a:p>
-        </p:txBody>
-      </p:sp>
-      <p:sp>
-        <p:nvSpPr>
-          <p:cNvPr id="15" name="point-body"/>
+            <a:endParaRPr lang="ja-JP" sz="1300" dirty="0"/>
+          </a:p>
+        </p:txBody>
+      </p:sp>
+      <p:sp>
+        <p:nvSpPr>
+          <p:cNvPr id="19" name="point-body"/>
           <p:cNvSpPr txBox="1"/>
           <p:nvPr/>
         </p:nvSpPr>
         <p:spPr>
           <a:xfrm>
-            <a:off x="2477578" y="3813048"/>
-            <a:ext cx="6117782" cy="548640"/>
+            <a:off x="3114201" y="3968496"/>
+            <a:ext cx="5362287" cy="429768"/>
           </a:xfrm>
           <a:prstGeom prst="rect">
             <a:avLst/>
@@ -7238,21 +7751,26 @@
           <a:ln/>
         </p:spPr>
         <p:txBody>
-          <a:bodyPr wrap="square" lIns="0" tIns="0" rIns="0" bIns="0" rtlCol="0" anchor="t"/>
+          <a:bodyPr wrap="square" lIns="0" tIns="0" rIns="0" bIns="0" rtlCol="0" anchor="t">
+            <a:normAutofit/>
+          </a:bodyPr>
           <a:lstStyle/>
           <a:p>
             <a:pPr indent="0" marL="0">
               <a:buNone/>
             </a:pPr>
             <a:r>
-              <a:rPr lang="en-US" sz="1250" dirty="0">
-                <a:solidFill>
-                  <a:schemeClr val="tx1"/>
-                </a:solidFill>
+              <a:rPr lang="ja-JP" altLang="en-US" sz="1150" dirty="0">
+                <a:solidFill>
+                  <a:srgbClr val="1A1A1A"/>
+                </a:solidFill>
+                <a:latin typeface="Noto Sans JP Medium" pitchFamily="34" charset="0"/>
+                <a:ea typeface="Noto Sans JP Medium" pitchFamily="34" charset="-122"/>
+                <a:cs typeface="Noto Sans JP Medium" pitchFamily="34" charset="-120"/>
               </a:rPr>
               <a:t>エラーの詳しい理由はお客様に見せず、ログにだけ残す。画面には電話での連絡をお願いする</a:t>
             </a:r>
-            <a:endParaRPr lang="en-US" sz="1250" dirty="0"/>
+            <a:endParaRPr lang="ja-JP" sz="1150" dirty="0"/>
           </a:p>
         </p:txBody>
       </p:sp>
@@ -7268,8 +7786,8 @@
         </p:nvSpPr>
         <p:spPr>
           <a:xfrm>
-            <a:off x="8229600" y="4773168"/>
-            <a:ext cx="365760" cy="228600"/>
+            <a:off x="8366760" y="4754880"/>
+            <a:ext cx="365760" cy="274320"/>
           </a:xfrm>
           <a:prstGeom prst="rect">
             <a:avLst/>
@@ -7281,20 +7799,23 @@
           </a:extLst>
         </p:spPr>
         <p:txBody>
-          <a:bodyPr/>
+          <a:bodyPr anchor="ctr"/>
           <a:lstStyle>
             <a:lvl1pPr>
-              <a:defRPr sz="900">
-                <a:solidFill>
-                  <a:srgbClr val="5A6872"/>
-                </a:solidFill>
+              <a:defRPr sz="850">
+                <a:solidFill>
+                  <a:srgbClr val="FFFFFF"/>
+                </a:solidFill>
+                <a:latin typeface="Noto Sans JP"/>
+                <a:ea typeface="Noto Sans JP"/>
+                <a:cs typeface="Noto Sans JP"/>
               </a:defRPr>
             </a:lvl1pPr>
           </a:lstStyle>
           <a:p>
             <a:pPr algn="r"/>
             <a:fld id="{F7021451-1387-4CA6-816F-3879F97B5CBC}" type="slidenum">
-              <a:rPr b="0" lang="en-US"/>
+              <a:rPr b="1" lang="en-US"/>
               <a:t>7</a:t>
             </a:fld>
             <a:endParaRPr lang="en-US"/>
@@ -7329,15 +7850,58 @@
       <p:sp>
         <p:nvSpPr>
           <p:cNvPr id="2" name="Text 0"/>
-          <p:cNvSpPr/>
-          <p:nvPr>
-            <p:ph idx="100" type="title" hasCustomPrompt="1"/>
-          </p:nvPr>
-        </p:nvSpPr>
-        <p:spPr>
-          <a:xfrm>
-            <a:off x="548640" y="658368"/>
-            <a:ext cx="8046720" cy="566928"/>
+          <p:cNvSpPr txBox="1"/>
+          <p:nvPr/>
+        </p:nvSpPr>
+        <p:spPr>
+          <a:xfrm rot="-180000">
+            <a:off x="411480" y="201168"/>
+            <a:ext cx="1332281" cy="352044"/>
+          </a:xfrm>
+          <a:prstGeom prst="rect">
+            <a:avLst/>
+          </a:prstGeom>
+          <a:solidFill>
+            <a:srgbClr val="1A1A1A"/>
+          </a:solidFill>
+          <a:ln>
+            <a:solidFill>
+              <a:srgbClr val="1A1A1A"/>
+            </a:solidFill>
+          </a:ln>
+        </p:spPr>
+        <p:txBody>
+          <a:bodyPr wrap="square" lIns="0" tIns="0" rIns="0" bIns="0" rtlCol="0" anchor="ctr"/>
+          <a:lstStyle/>
+          <a:p>
+            <a:pPr algn="ctr" indent="0" marL="0">
+              <a:buNone/>
+            </a:pPr>
+            <a:r>
+              <a:rPr lang="ja-JP" altLang="en-US" sz="1100" dirty="0">
+                <a:solidFill>
+                  <a:srgbClr val="FFFFFF"/>
+                </a:solidFill>
+                <a:latin typeface="Dela Gothic One" pitchFamily="34" charset="0"/>
+                <a:ea typeface="けいふぉんと" pitchFamily="34" charset="-122"/>
+                <a:cs typeface="Dela Gothic One" pitchFamily="34" charset="-120"/>
+              </a:rPr>
+              <a:t>つまずいたら</a:t>
+            </a:r>
+            <a:endParaRPr lang="ja-JP" sz="1100" dirty="0"/>
+          </a:p>
+        </p:txBody>
+      </p:sp>
+      <p:sp>
+        <p:nvSpPr>
+          <p:cNvPr id="3" name="Text 1"/>
+          <p:cNvSpPr txBox="1"/>
+          <p:nvPr/>
+        </p:nvSpPr>
+        <p:spPr>
+          <a:xfrm>
+            <a:off x="411480" y="502920"/>
+            <a:ext cx="8321040" cy="685800"/>
           </a:xfrm>
           <a:prstGeom prst="rect">
             <a:avLst/>
@@ -7346,86 +7910,60 @@
           <a:ln/>
         </p:spPr>
         <p:txBody>
-          <a:bodyPr wrap="square" lIns="0" tIns="0" rIns="0" bIns="0" rtlCol="0" anchor="ctr"/>
-          <a:lstStyle/>
-          <a:p>
-            <a:pPr algn="l" indent="0" marL="0">
+          <a:bodyPr wrap="square" lIns="0" tIns="0" rIns="0" bIns="0" rtlCol="0" anchor="ctr">
+            <a:normAutofit/>
+          </a:bodyPr>
+          <a:lstStyle/>
+          <a:p>
+            <a:pPr indent="0" marL="0">
               <a:buNone/>
             </a:pPr>
             <a:r>
-              <a:rPr lang="en-US" sz="2400" b="1" dirty="0">
-                <a:solidFill>
-                  <a:schemeClr val="tx1"/>
-                </a:solidFill>
+              <a:rPr lang="ja-JP" altLang="en-US" sz="2600" dirty="0">
+                <a:solidFill>
+                  <a:srgbClr val="1A1A1A"/>
+                </a:solidFill>
+                <a:latin typeface="Dela Gothic One" pitchFamily="34" charset="0"/>
+                <a:ea typeface="けいふぉんと" pitchFamily="34" charset="-122"/>
+                <a:cs typeface="Dela Gothic One" pitchFamily="34" charset="-120"/>
               </a:rPr>
               <a:t>よくあるつまずき</a:t>
             </a:r>
-            <a:endParaRPr lang="en-US" sz="2400" dirty="0"/>
-          </a:p>
-        </p:txBody>
-      </p:sp>
-      <p:sp>
-        <p:nvSpPr>
-          <p:cNvPr id="3" name="chip"/>
+            <a:endParaRPr lang="ja-JP" sz="2600" dirty="0"/>
+          </a:p>
+        </p:txBody>
+      </p:sp>
+      <p:sp>
+        <p:nvSpPr>
+          <p:cNvPr id="4" name="Shape 2"/>
           <p:cNvSpPr/>
           <p:nvPr/>
         </p:nvSpPr>
         <p:spPr>
           <a:xfrm>
-            <a:off x="548640" y="292608"/>
-            <a:ext cx="1207008" cy="292608"/>
-          </a:xfrm>
-          <a:prstGeom prst="roundRect">
-            <a:avLst>
-              <a:gd name="adj" fmla="val 50000"/>
-            </a:avLst>
+            <a:off x="502920" y="1417320"/>
+            <a:ext cx="8138160" cy="2194560"/>
+          </a:xfrm>
+          <a:prstGeom prst="rect">
+            <a:avLst/>
           </a:prstGeom>
           <a:solidFill>
-            <a:schemeClr val="tx1"/>
+            <a:srgbClr val="FFFFFF"/>
           </a:solidFill>
-          <a:ln w="12700">
+          <a:ln w="25400">
             <a:solidFill>
-              <a:schemeClr val="tx1"/>
+              <a:srgbClr val="1A1A1A"/>
             </a:solidFill>
             <a:prstDash val="solid"/>
           </a:ln>
-        </p:spPr>
-      </p:sp>
-      <p:sp>
-        <p:nvSpPr>
-          <p:cNvPr id="4" name="chip-text"/>
-          <p:cNvSpPr txBox="1"/>
-          <p:nvPr/>
-        </p:nvSpPr>
-        <p:spPr>
-          <a:xfrm>
-            <a:off x="548640" y="292608"/>
-            <a:ext cx="1207008" cy="292608"/>
-          </a:xfrm>
-          <a:prstGeom prst="rect">
-            <a:avLst/>
-          </a:prstGeom>
-          <a:noFill/>
-          <a:ln/>
-        </p:spPr>
-        <p:txBody>
-          <a:bodyPr wrap="square" lIns="0" tIns="0" rIns="0" bIns="0" rtlCol="0" anchor="ctr"/>
-          <a:lstStyle/>
-          <a:p>
-            <a:pPr algn="ctr" indent="0" marL="0">
-              <a:buNone/>
-            </a:pPr>
-            <a:r>
-              <a:rPr lang="en-US" sz="1100" b="1" dirty="0">
-                <a:solidFill>
-                  <a:schemeClr val="accent1"/>
-                </a:solidFill>
-              </a:rPr>
-              <a:t>つまずいたら</a:t>
-            </a:r>
-            <a:endParaRPr lang="en-US" sz="1100" dirty="0"/>
-          </a:p>
-        </p:txBody>
+          <a:effectLst>
+            <a:outerShdw sx="100000" sy="100000" kx="0" ky="0" algn="bl" rotWithShape="0" blurRad="101600" dist="50800" dir="2700000">
+              <a:srgbClr val="1A1A1A">
+                <a:alpha val="100000"/>
+              </a:srgbClr>
+            </a:outerShdw>
+          </a:effectLst>
+        </p:spPr>
       </p:sp>
       <p:graphicFrame>
         <p:nvGraphicFramePr>
@@ -7442,16 +7980,16 @@
           </p:nvPr>
         </p:nvGraphicFramePr>
         <p:xfrm>
-          <a:off x="548640" y="1463040"/>
-          <a:ext cx="8046720" cy="914400"/>
+          <a:off x="502920" y="1417320"/>
+          <a:ext cx="8138160" cy="914400"/>
         </p:xfrm>
         <a:graphic>
           <a:graphicData uri="http://schemas.openxmlformats.org/drawingml/2006/table">
             <a:tbl>
               <a:tblPr/>
               <a:tblGrid>
-                <a:gridCol w="3039872"/>
-                <a:gridCol w="5006848"/>
+                <a:gridCol w="3074416"/>
+                <a:gridCol w="5063744"/>
               </a:tblGrid>
               <a:tr h="438912">
                 <a:tc>
@@ -7463,47 +8001,54 @@
                         <a:buNone/>
                       </a:pPr>
                       <a:r>
-                        <a:rPr lang="en-US" sz="1200" b="1" dirty="0">
+                        <a:rPr lang="en-US" sz="1250" b="1" dirty="0">
                           <a:solidFill>
-                            <a:srgbClr val="FFD600"/>
+                            <a:srgbClr val="FFFFFF"/>
                           </a:solidFill>
+                          <a:latin typeface="Noto Sans JP" pitchFamily="34" charset="0"/>
+                          <a:ea typeface="Noto Sans JP" pitchFamily="34" charset="-122"/>
+                          <a:cs typeface="Noto Sans JP" pitchFamily="34" charset="-120"/>
                         </a:rPr>
                         <a:t>症状</a:t>
                       </a:r>
-                      <a:endParaRPr lang="en-US" sz="1200" dirty="0"/>
+                      <a:endParaRPr lang="en-US" sz="1250" dirty="0">
+                        <a:latin typeface="Noto Sans JP" charset="0"/>
+                        <a:ea typeface="Noto Sans JP" charset="0"/>
+                        <a:cs typeface="Noto Sans JP" charset="0"/>
+                      </a:endParaRPr>
                     </a:p>
                   </a:txBody>
                   <a:tcPr marL="91440" marR="91440" marT="0" marB="0" anchor="ctr">
-                    <a:lnL w="9525" cap="flat" cmpd="sng" algn="ctr">
-                      <a:solidFill>
-                        <a:srgbClr val="BBBBBB"/>
+                    <a:lnL w="12700" cap="flat" cmpd="sng" algn="ctr">
+                      <a:solidFill>
+                        <a:srgbClr val="1A1A1A"/>
                       </a:solidFill>
                       <a:prstDash val="solid"/>
                       <a:round/>
                       <a:headEnd type="none" w="med" len="med"/>
                       <a:tailEnd type="none" w="med" len="med"/>
                     </a:lnL>
-                    <a:lnR w="9525" cap="flat" cmpd="sng" algn="ctr">
-                      <a:solidFill>
-                        <a:srgbClr val="BBBBBB"/>
+                    <a:lnR w="12700" cap="flat" cmpd="sng" algn="ctr">
+                      <a:solidFill>
+                        <a:srgbClr val="1A1A1A"/>
                       </a:solidFill>
                       <a:prstDash val="solid"/>
                       <a:round/>
                       <a:headEnd type="none" w="med" len="med"/>
                       <a:tailEnd type="none" w="med" len="med"/>
                     </a:lnR>
-                    <a:lnT w="9525" cap="flat" cmpd="sng" algn="ctr">
-                      <a:solidFill>
-                        <a:srgbClr val="BBBBBB"/>
+                    <a:lnT w="12700" cap="flat" cmpd="sng" algn="ctr">
+                      <a:solidFill>
+                        <a:srgbClr val="1A1A1A"/>
                       </a:solidFill>
                       <a:prstDash val="solid"/>
                       <a:round/>
                       <a:headEnd type="none" w="med" len="med"/>
                       <a:tailEnd type="none" w="med" len="med"/>
                     </a:lnT>
-                    <a:lnB w="9525" cap="flat" cmpd="sng" algn="ctr">
-                      <a:solidFill>
-                        <a:srgbClr val="BBBBBB"/>
+                    <a:lnB w="12700" cap="flat" cmpd="sng" algn="ctr">
+                      <a:solidFill>
+                        <a:srgbClr val="1A1A1A"/>
                       </a:solidFill>
                       <a:prstDash val="solid"/>
                       <a:round/>
@@ -7524,47 +8069,54 @@
                         <a:buNone/>
                       </a:pPr>
                       <a:r>
-                        <a:rPr lang="en-US" sz="1200" b="1" dirty="0">
+                        <a:rPr lang="en-US" sz="1250" b="1" dirty="0">
                           <a:solidFill>
-                            <a:srgbClr val="FFD600"/>
+                            <a:srgbClr val="FFFFFF"/>
                           </a:solidFill>
+                          <a:latin typeface="Noto Sans JP" pitchFamily="34" charset="0"/>
+                          <a:ea typeface="Noto Sans JP" pitchFamily="34" charset="-122"/>
+                          <a:cs typeface="Noto Sans JP" pitchFamily="34" charset="-120"/>
                         </a:rPr>
                         <a:t>見るところ</a:t>
                       </a:r>
-                      <a:endParaRPr lang="en-US" sz="1200" dirty="0"/>
+                      <a:endParaRPr lang="en-US" sz="1250" dirty="0">
+                        <a:latin typeface="Noto Sans JP" charset="0"/>
+                        <a:ea typeface="Noto Sans JP" charset="0"/>
+                        <a:cs typeface="Noto Sans JP" charset="0"/>
+                      </a:endParaRPr>
                     </a:p>
                   </a:txBody>
                   <a:tcPr marL="91440" marR="91440" marT="0" marB="0" anchor="ctr">
-                    <a:lnL w="9525" cap="flat" cmpd="sng" algn="ctr">
-                      <a:solidFill>
-                        <a:srgbClr val="BBBBBB"/>
+                    <a:lnL w="12700" cap="flat" cmpd="sng" algn="ctr">
+                      <a:solidFill>
+                        <a:srgbClr val="1A1A1A"/>
                       </a:solidFill>
                       <a:prstDash val="solid"/>
                       <a:round/>
                       <a:headEnd type="none" w="med" len="med"/>
                       <a:tailEnd type="none" w="med" len="med"/>
                     </a:lnL>
-                    <a:lnR w="9525" cap="flat" cmpd="sng" algn="ctr">
-                      <a:solidFill>
-                        <a:srgbClr val="BBBBBB"/>
+                    <a:lnR w="12700" cap="flat" cmpd="sng" algn="ctr">
+                      <a:solidFill>
+                        <a:srgbClr val="1A1A1A"/>
                       </a:solidFill>
                       <a:prstDash val="solid"/>
                       <a:round/>
                       <a:headEnd type="none" w="med" len="med"/>
                       <a:tailEnd type="none" w="med" len="med"/>
                     </a:lnR>
-                    <a:lnT w="9525" cap="flat" cmpd="sng" algn="ctr">
-                      <a:solidFill>
-                        <a:srgbClr val="BBBBBB"/>
+                    <a:lnT w="12700" cap="flat" cmpd="sng" algn="ctr">
+                      <a:solidFill>
+                        <a:srgbClr val="1A1A1A"/>
                       </a:solidFill>
                       <a:prstDash val="solid"/>
                       <a:round/>
                       <a:headEnd type="none" w="med" len="med"/>
                       <a:tailEnd type="none" w="med" len="med"/>
                     </a:lnT>
-                    <a:lnB w="9525" cap="flat" cmpd="sng" algn="ctr">
-                      <a:solidFill>
-                        <a:srgbClr val="BBBBBB"/>
+                    <a:lnB w="12700" cap="flat" cmpd="sng" algn="ctr">
+                      <a:solidFill>
+                        <a:srgbClr val="1A1A1A"/>
                       </a:solidFill>
                       <a:prstDash val="solid"/>
                       <a:round/>
@@ -7589,45 +8141,52 @@
                       <a:r>
                         <a:rPr lang="en-US" sz="1200" b="1" dirty="0">
                           <a:solidFill>
-                            <a:srgbClr val="1A1A1A"/>
+                            <a:srgbClr val="DD6420"/>
                           </a:solidFill>
+                          <a:latin typeface="Noto Sans JP" pitchFamily="34" charset="0"/>
+                          <a:ea typeface="Noto Sans JP" pitchFamily="34" charset="-122"/>
+                          <a:cs typeface="Noto Sans JP" pitchFamily="34" charset="-120"/>
                         </a:rPr>
                         <a:t>権限エラー（codeが0以外）</a:t>
                       </a:r>
-                      <a:endParaRPr lang="en-US" sz="1200" dirty="0"/>
+                      <a:endParaRPr lang="en-US" sz="1200" dirty="0">
+                        <a:latin typeface="Noto Sans JP" charset="0"/>
+                        <a:ea typeface="Noto Sans JP" charset="0"/>
+                        <a:cs typeface="Noto Sans JP" charset="0"/>
+                      </a:endParaRPr>
                     </a:p>
                   </a:txBody>
                   <a:tcPr marL="91440" marR="91440" marT="0" marB="0" anchor="ctr">
-                    <a:lnL w="9525" cap="flat" cmpd="sng" algn="ctr">
-                      <a:solidFill>
-                        <a:srgbClr val="BBBBBB"/>
+                    <a:lnL w="12700" cap="flat" cmpd="sng" algn="ctr">
+                      <a:solidFill>
+                        <a:srgbClr val="1A1A1A"/>
                       </a:solidFill>
                       <a:prstDash val="solid"/>
                       <a:round/>
                       <a:headEnd type="none" w="med" len="med"/>
                       <a:tailEnd type="none" w="med" len="med"/>
                     </a:lnL>
-                    <a:lnR w="9525" cap="flat" cmpd="sng" algn="ctr">
-                      <a:solidFill>
-                        <a:srgbClr val="BBBBBB"/>
+                    <a:lnR w="12700" cap="flat" cmpd="sng" algn="ctr">
+                      <a:solidFill>
+                        <a:srgbClr val="1A1A1A"/>
                       </a:solidFill>
                       <a:prstDash val="solid"/>
                       <a:round/>
                       <a:headEnd type="none" w="med" len="med"/>
                       <a:tailEnd type="none" w="med" len="med"/>
                     </a:lnR>
-                    <a:lnT w="9525" cap="flat" cmpd="sng" algn="ctr">
-                      <a:solidFill>
-                        <a:srgbClr val="BBBBBB"/>
+                    <a:lnT w="12700" cap="flat" cmpd="sng" algn="ctr">
+                      <a:solidFill>
+                        <a:srgbClr val="1A1A1A"/>
                       </a:solidFill>
                       <a:prstDash val="solid"/>
                       <a:round/>
                       <a:headEnd type="none" w="med" len="med"/>
                       <a:tailEnd type="none" w="med" len="med"/>
                     </a:lnT>
-                    <a:lnB w="9525" cap="flat" cmpd="sng" algn="ctr">
-                      <a:solidFill>
-                        <a:srgbClr val="BBBBBB"/>
+                    <a:lnB w="12700" cap="flat" cmpd="sng" algn="ctr">
+                      <a:solidFill>
+                        <a:srgbClr val="1A1A1A"/>
                       </a:solidFill>
                       <a:prstDash val="solid"/>
                       <a:round/>
@@ -7648,47 +8207,54 @@
                         <a:buNone/>
                       </a:pPr>
                       <a:r>
-                        <a:rPr lang="en-US" sz="1200" dirty="0">
+                        <a:rPr lang="en-US" sz="1200" b="1" dirty="0">
                           <a:solidFill>
                             <a:srgbClr val="1A1A1A"/>
                           </a:solidFill>
+                          <a:latin typeface="Noto Sans JP Medium" pitchFamily="34" charset="0"/>
+                          <a:ea typeface="Noto Sans JP Medium" pitchFamily="34" charset="-122"/>
+                          <a:cs typeface="Noto Sans JP Medium" pitchFamily="34" charset="-120"/>
                         </a:rPr>
                         <a:t>権限の公開・承認、BASEへのアプリ追加</a:t>
                       </a:r>
-                      <a:endParaRPr lang="en-US" sz="1200" dirty="0"/>
+                      <a:endParaRPr lang="en-US" sz="1200" dirty="0">
+                        <a:latin typeface="Noto Sans JP Medium" charset="0"/>
+                        <a:ea typeface="Noto Sans JP Medium" charset="0"/>
+                        <a:cs typeface="Noto Sans JP Medium" charset="0"/>
+                      </a:endParaRPr>
                     </a:p>
                   </a:txBody>
                   <a:tcPr marL="91440" marR="91440" marT="0" marB="0" anchor="ctr">
-                    <a:lnL w="9525" cap="flat" cmpd="sng" algn="ctr">
-                      <a:solidFill>
-                        <a:srgbClr val="BBBBBB"/>
+                    <a:lnL w="12700" cap="flat" cmpd="sng" algn="ctr">
+                      <a:solidFill>
+                        <a:srgbClr val="1A1A1A"/>
                       </a:solidFill>
                       <a:prstDash val="solid"/>
                       <a:round/>
                       <a:headEnd type="none" w="med" len="med"/>
                       <a:tailEnd type="none" w="med" len="med"/>
                     </a:lnL>
-                    <a:lnR w="9525" cap="flat" cmpd="sng" algn="ctr">
-                      <a:solidFill>
-                        <a:srgbClr val="BBBBBB"/>
+                    <a:lnR w="12700" cap="flat" cmpd="sng" algn="ctr">
+                      <a:solidFill>
+                        <a:srgbClr val="1A1A1A"/>
                       </a:solidFill>
                       <a:prstDash val="solid"/>
                       <a:round/>
                       <a:headEnd type="none" w="med" len="med"/>
                       <a:tailEnd type="none" w="med" len="med"/>
                     </a:lnR>
-                    <a:lnT w="9525" cap="flat" cmpd="sng" algn="ctr">
-                      <a:solidFill>
-                        <a:srgbClr val="BBBBBB"/>
+                    <a:lnT w="12700" cap="flat" cmpd="sng" algn="ctr">
+                      <a:solidFill>
+                        <a:srgbClr val="1A1A1A"/>
                       </a:solidFill>
                       <a:prstDash val="solid"/>
                       <a:round/>
                       <a:headEnd type="none" w="med" len="med"/>
                       <a:tailEnd type="none" w="med" len="med"/>
                     </a:lnT>
-                    <a:lnB w="9525" cap="flat" cmpd="sng" algn="ctr">
-                      <a:solidFill>
-                        <a:srgbClr val="BBBBBB"/>
+                    <a:lnB w="12700" cap="flat" cmpd="sng" algn="ctr">
+                      <a:solidFill>
+                        <a:srgbClr val="1A1A1A"/>
                       </a:solidFill>
                       <a:prstDash val="solid"/>
                       <a:round/>
@@ -7713,169 +8279,52 @@
                       <a:r>
                         <a:rPr lang="en-US" sz="1200" b="1" dirty="0">
                           <a:solidFill>
-                            <a:srgbClr val="1A1A1A"/>
+                            <a:srgbClr val="DD6420"/>
                           </a:solidFill>
+                          <a:latin typeface="Noto Sans JP" pitchFamily="34" charset="0"/>
+                          <a:ea typeface="Noto Sans JP" pitchFamily="34" charset="-122"/>
+                          <a:cs typeface="Noto Sans JP" pitchFamily="34" charset="-120"/>
                         </a:rPr>
                         <a:t>フィールドが見つからない</a:t>
                       </a:r>
-                      <a:endParaRPr lang="en-US" sz="1200" dirty="0"/>
+                      <a:endParaRPr lang="en-US" sz="1200" dirty="0">
+                        <a:latin typeface="Noto Sans JP" charset="0"/>
+                        <a:ea typeface="Noto Sans JP" charset="0"/>
+                        <a:cs typeface="Noto Sans JP" charset="0"/>
+                      </a:endParaRPr>
                     </a:p>
                   </a:txBody>
                   <a:tcPr marL="91440" marR="91440" marT="0" marB="0" anchor="ctr">
-                    <a:lnL w="9525" cap="flat" cmpd="sng" algn="ctr">
-                      <a:solidFill>
-                        <a:srgbClr val="BBBBBB"/>
+                    <a:lnL w="12700" cap="flat" cmpd="sng" algn="ctr">
+                      <a:solidFill>
+                        <a:srgbClr val="1A1A1A"/>
                       </a:solidFill>
                       <a:prstDash val="solid"/>
                       <a:round/>
                       <a:headEnd type="none" w="med" len="med"/>
                       <a:tailEnd type="none" w="med" len="med"/>
                     </a:lnL>
-                    <a:lnR w="9525" cap="flat" cmpd="sng" algn="ctr">
-                      <a:solidFill>
-                        <a:srgbClr val="BBBBBB"/>
+                    <a:lnR w="12700" cap="flat" cmpd="sng" algn="ctr">
+                      <a:solidFill>
+                        <a:srgbClr val="1A1A1A"/>
                       </a:solidFill>
                       <a:prstDash val="solid"/>
                       <a:round/>
                       <a:headEnd type="none" w="med" len="med"/>
                       <a:tailEnd type="none" w="med" len="med"/>
                     </a:lnR>
-                    <a:lnT w="9525" cap="flat" cmpd="sng" algn="ctr">
-                      <a:solidFill>
-                        <a:srgbClr val="BBBBBB"/>
+                    <a:lnT w="12700" cap="flat" cmpd="sng" algn="ctr">
+                      <a:solidFill>
+                        <a:srgbClr val="1A1A1A"/>
                       </a:solidFill>
                       <a:prstDash val="solid"/>
                       <a:round/>
                       <a:headEnd type="none" w="med" len="med"/>
                       <a:tailEnd type="none" w="med" len="med"/>
                     </a:lnT>
-                    <a:lnB w="9525" cap="flat" cmpd="sng" algn="ctr">
-                      <a:solidFill>
-                        <a:srgbClr val="BBBBBB"/>
-                      </a:solidFill>
-                      <a:prstDash val="solid"/>
-                      <a:round/>
-                      <a:headEnd type="none" w="med" len="med"/>
-                      <a:tailEnd type="none" w="med" len="med"/>
-                    </a:lnB>
-                    <a:solidFill>
-                      <a:srgbClr val="F4F4F4"/>
-                    </a:solidFill>
-                  </a:tcPr>
-                </a:tc>
-                <a:tc>
-                  <a:txBody>
-                    <a:bodyPr/>
-                    <a:lstStyle/>
-                    <a:p>
-                      <a:pPr indent="0" marL="0">
-                        <a:buNone/>
-                      </a:pPr>
-                      <a:r>
-                        <a:rPr lang="en-US" sz="1200" dirty="0">
-                          <a:solidFill>
-                            <a:srgbClr val="1A1A1A"/>
-                          </a:solidFill>
-                        </a:rPr>
-                        <a:t>BASEとプログラムのフィールド名が1文字でも違わないか</a:t>
-                      </a:r>
-                      <a:endParaRPr lang="en-US" sz="1200" dirty="0"/>
-                    </a:p>
-                  </a:txBody>
-                  <a:tcPr marL="91440" marR="91440" marT="0" marB="0" anchor="ctr">
-                    <a:lnL w="9525" cap="flat" cmpd="sng" algn="ctr">
-                      <a:solidFill>
-                        <a:srgbClr val="BBBBBB"/>
-                      </a:solidFill>
-                      <a:prstDash val="solid"/>
-                      <a:round/>
-                      <a:headEnd type="none" w="med" len="med"/>
-                      <a:tailEnd type="none" w="med" len="med"/>
-                    </a:lnL>
-                    <a:lnR w="9525" cap="flat" cmpd="sng" algn="ctr">
-                      <a:solidFill>
-                        <a:srgbClr val="BBBBBB"/>
-                      </a:solidFill>
-                      <a:prstDash val="solid"/>
-                      <a:round/>
-                      <a:headEnd type="none" w="med" len="med"/>
-                      <a:tailEnd type="none" w="med" len="med"/>
-                    </a:lnR>
-                    <a:lnT w="9525" cap="flat" cmpd="sng" algn="ctr">
-                      <a:solidFill>
-                        <a:srgbClr val="BBBBBB"/>
-                      </a:solidFill>
-                      <a:prstDash val="solid"/>
-                      <a:round/>
-                      <a:headEnd type="none" w="med" len="med"/>
-                      <a:tailEnd type="none" w="med" len="med"/>
-                    </a:lnT>
-                    <a:lnB w="9525" cap="flat" cmpd="sng" algn="ctr">
-                      <a:solidFill>
-                        <a:srgbClr val="BBBBBB"/>
-                      </a:solidFill>
-                      <a:prstDash val="solid"/>
-                      <a:round/>
-                      <a:headEnd type="none" w="med" len="med"/>
-                      <a:tailEnd type="none" w="med" len="med"/>
-                    </a:lnB>
-                    <a:solidFill>
-                      <a:srgbClr val="F4F4F4"/>
-                    </a:solidFill>
-                  </a:tcPr>
-                </a:tc>
-              </a:tr>
-              <a:tr h="438912">
-                <a:tc>
-                  <a:txBody>
-                    <a:bodyPr/>
-                    <a:lstStyle/>
-                    <a:p>
-                      <a:pPr indent="0" marL="0">
-                        <a:buNone/>
-                      </a:pPr>
-                      <a:r>
-                        <a:rPr lang="en-US" sz="1200" b="1" dirty="0">
-                          <a:solidFill>
-                            <a:srgbClr val="1A1A1A"/>
-                          </a:solidFill>
-                        </a:rPr>
-                        <a:t>日付が入らない</a:t>
-                      </a:r>
-                      <a:endParaRPr lang="en-US" sz="1200" dirty="0"/>
-                    </a:p>
-                  </a:txBody>
-                  <a:tcPr marL="91440" marR="91440" marT="0" marB="0" anchor="ctr">
-                    <a:lnL w="9525" cap="flat" cmpd="sng" algn="ctr">
-                      <a:solidFill>
-                        <a:srgbClr val="BBBBBB"/>
-                      </a:solidFill>
-                      <a:prstDash val="solid"/>
-                      <a:round/>
-                      <a:headEnd type="none" w="med" len="med"/>
-                      <a:tailEnd type="none" w="med" len="med"/>
-                    </a:lnL>
-                    <a:lnR w="9525" cap="flat" cmpd="sng" algn="ctr">
-                      <a:solidFill>
-                        <a:srgbClr val="BBBBBB"/>
-                      </a:solidFill>
-                      <a:prstDash val="solid"/>
-                      <a:round/>
-                      <a:headEnd type="none" w="med" len="med"/>
-                      <a:tailEnd type="none" w="med" len="med"/>
-                    </a:lnR>
-                    <a:lnT w="9525" cap="flat" cmpd="sng" algn="ctr">
-                      <a:solidFill>
-                        <a:srgbClr val="BBBBBB"/>
-                      </a:solidFill>
-                      <a:prstDash val="solid"/>
-                      <a:round/>
-                      <a:headEnd type="none" w="med" len="med"/>
-                      <a:tailEnd type="none" w="med" len="med"/>
-                    </a:lnT>
-                    <a:lnB w="9525" cap="flat" cmpd="sng" algn="ctr">
-                      <a:solidFill>
-                        <a:srgbClr val="BBBBBB"/>
+                    <a:lnB w="12700" cap="flat" cmpd="sng" algn="ctr">
+                      <a:solidFill>
+                        <a:srgbClr val="1A1A1A"/>
                       </a:solidFill>
                       <a:prstDash val="solid"/>
                       <a:round/>
@@ -7896,47 +8345,54 @@
                         <a:buNone/>
                       </a:pPr>
                       <a:r>
-                        <a:rPr lang="en-US" sz="1200" dirty="0">
+                        <a:rPr lang="en-US" sz="1200" b="1" dirty="0">
                           <a:solidFill>
                             <a:srgbClr val="1A1A1A"/>
                           </a:solidFill>
+                          <a:latin typeface="Noto Sans JP Medium" pitchFamily="34" charset="0"/>
+                          <a:ea typeface="Noto Sans JP Medium" pitchFamily="34" charset="-122"/>
+                          <a:cs typeface="Noto Sans JP Medium" pitchFamily="34" charset="-120"/>
                         </a:rPr>
-                        <a:t>ミリ秒の数値で渡しているか／日本時間で解釈しているか</a:t>
+                        <a:t>BASEとプログラムのフィールド名が1文字でも違わないか</a:t>
                       </a:r>
-                      <a:endParaRPr lang="en-US" sz="1200" dirty="0"/>
+                      <a:endParaRPr lang="en-US" sz="1200" dirty="0">
+                        <a:latin typeface="Noto Sans JP Medium" charset="0"/>
+                        <a:ea typeface="Noto Sans JP Medium" charset="0"/>
+                        <a:cs typeface="Noto Sans JP Medium" charset="0"/>
+                      </a:endParaRPr>
                     </a:p>
                   </a:txBody>
                   <a:tcPr marL="91440" marR="91440" marT="0" marB="0" anchor="ctr">
-                    <a:lnL w="9525" cap="flat" cmpd="sng" algn="ctr">
-                      <a:solidFill>
-                        <a:srgbClr val="BBBBBB"/>
+                    <a:lnL w="12700" cap="flat" cmpd="sng" algn="ctr">
+                      <a:solidFill>
+                        <a:srgbClr val="1A1A1A"/>
                       </a:solidFill>
                       <a:prstDash val="solid"/>
                       <a:round/>
                       <a:headEnd type="none" w="med" len="med"/>
                       <a:tailEnd type="none" w="med" len="med"/>
                     </a:lnL>
-                    <a:lnR w="9525" cap="flat" cmpd="sng" algn="ctr">
-                      <a:solidFill>
-                        <a:srgbClr val="BBBBBB"/>
+                    <a:lnR w="12700" cap="flat" cmpd="sng" algn="ctr">
+                      <a:solidFill>
+                        <a:srgbClr val="1A1A1A"/>
                       </a:solidFill>
                       <a:prstDash val="solid"/>
                       <a:round/>
                       <a:headEnd type="none" w="med" len="med"/>
                       <a:tailEnd type="none" w="med" len="med"/>
                     </a:lnR>
-                    <a:lnT w="9525" cap="flat" cmpd="sng" algn="ctr">
-                      <a:solidFill>
-                        <a:srgbClr val="BBBBBB"/>
+                    <a:lnT w="12700" cap="flat" cmpd="sng" algn="ctr">
+                      <a:solidFill>
+                        <a:srgbClr val="1A1A1A"/>
                       </a:solidFill>
                       <a:prstDash val="solid"/>
                       <a:round/>
                       <a:headEnd type="none" w="med" len="med"/>
                       <a:tailEnd type="none" w="med" len="med"/>
                     </a:lnT>
-                    <a:lnB w="9525" cap="flat" cmpd="sng" algn="ctr">
-                      <a:solidFill>
-                        <a:srgbClr val="BBBBBB"/>
+                    <a:lnB w="12700" cap="flat" cmpd="sng" algn="ctr">
+                      <a:solidFill>
+                        <a:srgbClr val="1A1A1A"/>
                       </a:solidFill>
                       <a:prstDash val="solid"/>
                       <a:round/>
@@ -7961,45 +8417,52 @@
                       <a:r>
                         <a:rPr lang="en-US" sz="1200" b="1" dirty="0">
                           <a:solidFill>
-                            <a:srgbClr val="1A1A1A"/>
+                            <a:srgbClr val="DD6420"/>
                           </a:solidFill>
+                          <a:latin typeface="Noto Sans JP" pitchFamily="34" charset="0"/>
+                          <a:ea typeface="Noto Sans JP" pitchFamily="34" charset="-122"/>
+                          <a:cs typeface="Noto Sans JP" pitchFamily="34" charset="-120"/>
                         </a:rPr>
-                        <a:t>公開先だけ動かない</a:t>
+                        <a:t>日付が入らない</a:t>
                       </a:r>
-                      <a:endParaRPr lang="en-US" sz="1200" dirty="0"/>
+                      <a:endParaRPr lang="en-US" sz="1200" dirty="0">
+                        <a:latin typeface="Noto Sans JP" charset="0"/>
+                        <a:ea typeface="Noto Sans JP" charset="0"/>
+                        <a:cs typeface="Noto Sans JP" charset="0"/>
+                      </a:endParaRPr>
                     </a:p>
                   </a:txBody>
                   <a:tcPr marL="91440" marR="91440" marT="0" marB="0" anchor="ctr">
-                    <a:lnL w="9525" cap="flat" cmpd="sng" algn="ctr">
-                      <a:solidFill>
-                        <a:srgbClr val="BBBBBB"/>
+                    <a:lnL w="12700" cap="flat" cmpd="sng" algn="ctr">
+                      <a:solidFill>
+                        <a:srgbClr val="1A1A1A"/>
                       </a:solidFill>
                       <a:prstDash val="solid"/>
                       <a:round/>
                       <a:headEnd type="none" w="med" len="med"/>
                       <a:tailEnd type="none" w="med" len="med"/>
                     </a:lnL>
-                    <a:lnR w="9525" cap="flat" cmpd="sng" algn="ctr">
-                      <a:solidFill>
-                        <a:srgbClr val="BBBBBB"/>
+                    <a:lnR w="12700" cap="flat" cmpd="sng" algn="ctr">
+                      <a:solidFill>
+                        <a:srgbClr val="1A1A1A"/>
                       </a:solidFill>
                       <a:prstDash val="solid"/>
                       <a:round/>
                       <a:headEnd type="none" w="med" len="med"/>
                       <a:tailEnd type="none" w="med" len="med"/>
                     </a:lnR>
-                    <a:lnT w="9525" cap="flat" cmpd="sng" algn="ctr">
-                      <a:solidFill>
-                        <a:srgbClr val="BBBBBB"/>
+                    <a:lnT w="12700" cap="flat" cmpd="sng" algn="ctr">
+                      <a:solidFill>
+                        <a:srgbClr val="1A1A1A"/>
                       </a:solidFill>
                       <a:prstDash val="solid"/>
                       <a:round/>
                       <a:headEnd type="none" w="med" len="med"/>
                       <a:tailEnd type="none" w="med" len="med"/>
                     </a:lnT>
-                    <a:lnB w="9525" cap="flat" cmpd="sng" algn="ctr">
-                      <a:solidFill>
-                        <a:srgbClr val="BBBBBB"/>
+                    <a:lnB w="12700" cap="flat" cmpd="sng" algn="ctr">
+                      <a:solidFill>
+                        <a:srgbClr val="1A1A1A"/>
                       </a:solidFill>
                       <a:prstDash val="solid"/>
                       <a:round/>
@@ -8007,7 +8470,7 @@
                       <a:tailEnd type="none" w="med" len="med"/>
                     </a:lnB>
                     <a:solidFill>
-                      <a:srgbClr val="F4F4F4"/>
+                      <a:srgbClr val="FFFFFF"/>
                     </a:solidFill>
                   </a:tcPr>
                 </a:tc>
@@ -8020,47 +8483,192 @@
                         <a:buNone/>
                       </a:pPr>
                       <a:r>
-                        <a:rPr lang="en-US" sz="1200" dirty="0">
+                        <a:rPr lang="en-US" sz="1200" b="1" dirty="0">
                           <a:solidFill>
                             <a:srgbClr val="1A1A1A"/>
                           </a:solidFill>
+                          <a:latin typeface="Noto Sans JP Medium" pitchFamily="34" charset="0"/>
+                          <a:ea typeface="Noto Sans JP Medium" pitchFamily="34" charset="-122"/>
+                          <a:cs typeface="Noto Sans JP Medium" pitchFamily="34" charset="-120"/>
+                        </a:rPr>
+                        <a:t>ミリ秒の数値で渡しているか／日本時間で解釈しているか</a:t>
+                      </a:r>
+                      <a:endParaRPr lang="en-US" sz="1200" dirty="0">
+                        <a:latin typeface="Noto Sans JP Medium" charset="0"/>
+                        <a:ea typeface="Noto Sans JP Medium" charset="0"/>
+                        <a:cs typeface="Noto Sans JP Medium" charset="0"/>
+                      </a:endParaRPr>
+                    </a:p>
+                  </a:txBody>
+                  <a:tcPr marL="91440" marR="91440" marT="0" marB="0" anchor="ctr">
+                    <a:lnL w="12700" cap="flat" cmpd="sng" algn="ctr">
+                      <a:solidFill>
+                        <a:srgbClr val="1A1A1A"/>
+                      </a:solidFill>
+                      <a:prstDash val="solid"/>
+                      <a:round/>
+                      <a:headEnd type="none" w="med" len="med"/>
+                      <a:tailEnd type="none" w="med" len="med"/>
+                    </a:lnL>
+                    <a:lnR w="12700" cap="flat" cmpd="sng" algn="ctr">
+                      <a:solidFill>
+                        <a:srgbClr val="1A1A1A"/>
+                      </a:solidFill>
+                      <a:prstDash val="solid"/>
+                      <a:round/>
+                      <a:headEnd type="none" w="med" len="med"/>
+                      <a:tailEnd type="none" w="med" len="med"/>
+                    </a:lnR>
+                    <a:lnT w="12700" cap="flat" cmpd="sng" algn="ctr">
+                      <a:solidFill>
+                        <a:srgbClr val="1A1A1A"/>
+                      </a:solidFill>
+                      <a:prstDash val="solid"/>
+                      <a:round/>
+                      <a:headEnd type="none" w="med" len="med"/>
+                      <a:tailEnd type="none" w="med" len="med"/>
+                    </a:lnT>
+                    <a:lnB w="12700" cap="flat" cmpd="sng" algn="ctr">
+                      <a:solidFill>
+                        <a:srgbClr val="1A1A1A"/>
+                      </a:solidFill>
+                      <a:prstDash val="solid"/>
+                      <a:round/>
+                      <a:headEnd type="none" w="med" len="med"/>
+                      <a:tailEnd type="none" w="med" len="med"/>
+                    </a:lnB>
+                    <a:solidFill>
+                      <a:srgbClr val="FFFFFF"/>
+                    </a:solidFill>
+                  </a:tcPr>
+                </a:tc>
+              </a:tr>
+              <a:tr h="438912">
+                <a:tc>
+                  <a:txBody>
+                    <a:bodyPr/>
+                    <a:lstStyle/>
+                    <a:p>
+                      <a:pPr indent="0" marL="0">
+                        <a:buNone/>
+                      </a:pPr>
+                      <a:r>
+                        <a:rPr lang="en-US" sz="1200" b="1" dirty="0">
+                          <a:solidFill>
+                            <a:srgbClr val="DD6420"/>
+                          </a:solidFill>
+                          <a:latin typeface="Noto Sans JP" pitchFamily="34" charset="0"/>
+                          <a:ea typeface="Noto Sans JP" pitchFamily="34" charset="-122"/>
+                          <a:cs typeface="Noto Sans JP" pitchFamily="34" charset="-120"/>
+                        </a:rPr>
+                        <a:t>公開先だけ動かない</a:t>
+                      </a:r>
+                      <a:endParaRPr lang="en-US" sz="1200" dirty="0">
+                        <a:latin typeface="Noto Sans JP" charset="0"/>
+                        <a:ea typeface="Noto Sans JP" charset="0"/>
+                        <a:cs typeface="Noto Sans JP" charset="0"/>
+                      </a:endParaRPr>
+                    </a:p>
+                  </a:txBody>
+                  <a:tcPr marL="91440" marR="91440" marT="0" marB="0" anchor="ctr">
+                    <a:lnL w="12700" cap="flat" cmpd="sng" algn="ctr">
+                      <a:solidFill>
+                        <a:srgbClr val="1A1A1A"/>
+                      </a:solidFill>
+                      <a:prstDash val="solid"/>
+                      <a:round/>
+                      <a:headEnd type="none" w="med" len="med"/>
+                      <a:tailEnd type="none" w="med" len="med"/>
+                    </a:lnL>
+                    <a:lnR w="12700" cap="flat" cmpd="sng" algn="ctr">
+                      <a:solidFill>
+                        <a:srgbClr val="1A1A1A"/>
+                      </a:solidFill>
+                      <a:prstDash val="solid"/>
+                      <a:round/>
+                      <a:headEnd type="none" w="med" len="med"/>
+                      <a:tailEnd type="none" w="med" len="med"/>
+                    </a:lnR>
+                    <a:lnT w="12700" cap="flat" cmpd="sng" algn="ctr">
+                      <a:solidFill>
+                        <a:srgbClr val="1A1A1A"/>
+                      </a:solidFill>
+                      <a:prstDash val="solid"/>
+                      <a:round/>
+                      <a:headEnd type="none" w="med" len="med"/>
+                      <a:tailEnd type="none" w="med" len="med"/>
+                    </a:lnT>
+                    <a:lnB w="12700" cap="flat" cmpd="sng" algn="ctr">
+                      <a:solidFill>
+                        <a:srgbClr val="1A1A1A"/>
+                      </a:solidFill>
+                      <a:prstDash val="solid"/>
+                      <a:round/>
+                      <a:headEnd type="none" w="med" len="med"/>
+                      <a:tailEnd type="none" w="med" len="med"/>
+                    </a:lnB>
+                    <a:solidFill>
+                      <a:srgbClr val="FFFFFF"/>
+                    </a:solidFill>
+                  </a:tcPr>
+                </a:tc>
+                <a:tc>
+                  <a:txBody>
+                    <a:bodyPr/>
+                    <a:lstStyle/>
+                    <a:p>
+                      <a:pPr indent="0" marL="0">
+                        <a:buNone/>
+                      </a:pPr>
+                      <a:r>
+                        <a:rPr lang="en-US" sz="1200" b="1" dirty="0">
+                          <a:solidFill>
+                            <a:srgbClr val="1A1A1A"/>
+                          </a:solidFill>
+                          <a:latin typeface="Noto Sans JP Medium" pitchFamily="34" charset="0"/>
+                          <a:ea typeface="Noto Sans JP Medium" pitchFamily="34" charset="-122"/>
+                          <a:cs typeface="Noto Sans JP Medium" pitchFamily="34" charset="-120"/>
                         </a:rPr>
                         <a:t>シークレット登録後に再デプロイしたか</a:t>
                       </a:r>
-                      <a:endParaRPr lang="en-US" sz="1200" dirty="0"/>
+                      <a:endParaRPr lang="en-US" sz="1200" dirty="0">
+                        <a:latin typeface="Noto Sans JP Medium" charset="0"/>
+                        <a:ea typeface="Noto Sans JP Medium" charset="0"/>
+                        <a:cs typeface="Noto Sans JP Medium" charset="0"/>
+                      </a:endParaRPr>
                     </a:p>
                   </a:txBody>
                   <a:tcPr marL="91440" marR="91440" marT="0" marB="0" anchor="ctr">
-                    <a:lnL w="9525" cap="flat" cmpd="sng" algn="ctr">
-                      <a:solidFill>
-                        <a:srgbClr val="BBBBBB"/>
+                    <a:lnL w="12700" cap="flat" cmpd="sng" algn="ctr">
+                      <a:solidFill>
+                        <a:srgbClr val="1A1A1A"/>
                       </a:solidFill>
                       <a:prstDash val="solid"/>
                       <a:round/>
                       <a:headEnd type="none" w="med" len="med"/>
                       <a:tailEnd type="none" w="med" len="med"/>
                     </a:lnL>
-                    <a:lnR w="9525" cap="flat" cmpd="sng" algn="ctr">
-                      <a:solidFill>
-                        <a:srgbClr val="BBBBBB"/>
+                    <a:lnR w="12700" cap="flat" cmpd="sng" algn="ctr">
+                      <a:solidFill>
+                        <a:srgbClr val="1A1A1A"/>
                       </a:solidFill>
                       <a:prstDash val="solid"/>
                       <a:round/>
                       <a:headEnd type="none" w="med" len="med"/>
                       <a:tailEnd type="none" w="med" len="med"/>
                     </a:lnR>
-                    <a:lnT w="9525" cap="flat" cmpd="sng" algn="ctr">
-                      <a:solidFill>
-                        <a:srgbClr val="BBBBBB"/>
+                    <a:lnT w="12700" cap="flat" cmpd="sng" algn="ctr">
+                      <a:solidFill>
+                        <a:srgbClr val="1A1A1A"/>
                       </a:solidFill>
                       <a:prstDash val="solid"/>
                       <a:round/>
                       <a:headEnd type="none" w="med" len="med"/>
                       <a:tailEnd type="none" w="med" len="med"/>
                     </a:lnT>
-                    <a:lnB w="9525" cap="flat" cmpd="sng" algn="ctr">
-                      <a:solidFill>
-                        <a:srgbClr val="BBBBBB"/>
+                    <a:lnB w="12700" cap="flat" cmpd="sng" algn="ctr">
+                      <a:solidFill>
+                        <a:srgbClr val="1A1A1A"/>
                       </a:solidFill>
                       <a:prstDash val="solid"/>
                       <a:round/>
@@ -8068,7 +8676,7 @@
                       <a:tailEnd type="none" w="med" len="med"/>
                     </a:lnB>
                     <a:solidFill>
-                      <a:srgbClr val="F4F4F4"/>
+                      <a:srgbClr val="FFFFFF"/>
                     </a:solidFill>
                   </a:tcPr>
                 </a:tc>
@@ -8089,8 +8697,8 @@
         </p:nvSpPr>
         <p:spPr>
           <a:xfrm>
-            <a:off x="8229600" y="4773168"/>
-            <a:ext cx="365760" cy="228600"/>
+            <a:off x="8366760" y="4754880"/>
+            <a:ext cx="365760" cy="274320"/>
           </a:xfrm>
           <a:prstGeom prst="rect">
             <a:avLst/>
@@ -8102,20 +8710,23 @@
           </a:extLst>
         </p:spPr>
         <p:txBody>
-          <a:bodyPr/>
+          <a:bodyPr anchor="ctr"/>
           <a:lstStyle>
             <a:lvl1pPr>
-              <a:defRPr sz="900">
-                <a:solidFill>
-                  <a:srgbClr val="5A6872"/>
-                </a:solidFill>
+              <a:defRPr sz="850">
+                <a:solidFill>
+                  <a:srgbClr val="FFFFFF"/>
+                </a:solidFill>
+                <a:latin typeface="Noto Sans JP"/>
+                <a:ea typeface="Noto Sans JP"/>
+                <a:cs typeface="Noto Sans JP"/>
               </a:defRPr>
             </a:lvl1pPr>
           </a:lstStyle>
           <a:p>
             <a:pPr algn="r"/>
             <a:fld id="{F7021451-1387-4CA6-816F-3879F97B5CBC}" type="slidenum">
-              <a:rPr b="0" lang="en-US"/>
+              <a:rPr b="1" lang="en-US"/>
               <a:t>8</a:t>
             </a:fld>
             <a:endParaRPr lang="en-US"/>
@@ -8150,15 +8761,58 @@
       <p:sp>
         <p:nvSpPr>
           <p:cNvPr id="2" name="Text 0"/>
-          <p:cNvSpPr/>
-          <p:nvPr>
-            <p:ph idx="100" type="title" hasCustomPrompt="1"/>
-          </p:nvPr>
-        </p:nvSpPr>
-        <p:spPr>
-          <a:xfrm>
-            <a:off x="548640" y="658368"/>
-            <a:ext cx="8046720" cy="566928"/>
+          <p:cNvSpPr txBox="1"/>
+          <p:nvPr/>
+        </p:nvSpPr>
+        <p:spPr>
+          <a:xfrm rot="-180000">
+            <a:off x="411480" y="201168"/>
+            <a:ext cx="894740" cy="352044"/>
+          </a:xfrm>
+          <a:prstGeom prst="rect">
+            <a:avLst/>
+          </a:prstGeom>
+          <a:solidFill>
+            <a:srgbClr val="1A1A1A"/>
+          </a:solidFill>
+          <a:ln>
+            <a:solidFill>
+              <a:srgbClr val="1A1A1A"/>
+            </a:solidFill>
+          </a:ln>
+        </p:spPr>
+        <p:txBody>
+          <a:bodyPr wrap="square" lIns="0" tIns="0" rIns="0" bIns="0" rtlCol="0" anchor="ctr"/>
+          <a:lstStyle/>
+          <a:p>
+            <a:pPr algn="ctr" indent="0" marL="0">
+              <a:buNone/>
+            </a:pPr>
+            <a:r>
+              <a:rPr lang="ja-JP" altLang="en-US" sz="1100" dirty="0">
+                <a:solidFill>
+                  <a:srgbClr val="FFFFFF"/>
+                </a:solidFill>
+                <a:latin typeface="Dela Gothic One" pitchFamily="34" charset="0"/>
+                <a:ea typeface="けいふぉんと" pitchFamily="34" charset="-122"/>
+                <a:cs typeface="Dela Gothic One" pitchFamily="34" charset="-120"/>
+              </a:rPr>
+              <a:t>まとめ</a:t>
+            </a:r>
+            <a:endParaRPr lang="ja-JP" sz="1100" dirty="0"/>
+          </a:p>
+        </p:txBody>
+      </p:sp>
+      <p:sp>
+        <p:nvSpPr>
+          <p:cNvPr id="3" name="Text 1"/>
+          <p:cNvSpPr txBox="1"/>
+          <p:nvPr/>
+        </p:nvSpPr>
+        <p:spPr>
+          <a:xfrm>
+            <a:off x="411480" y="502920"/>
+            <a:ext cx="8321040" cy="685800"/>
           </a:xfrm>
           <a:prstGeom prst="rect">
             <a:avLst/>
@@ -8167,105 +8821,79 @@
           <a:ln/>
         </p:spPr>
         <p:txBody>
-          <a:bodyPr wrap="square" lIns="0" tIns="0" rIns="0" bIns="0" rtlCol="0" anchor="ctr"/>
-          <a:lstStyle/>
-          <a:p>
-            <a:pPr algn="l" indent="0" marL="0">
+          <a:bodyPr wrap="square" lIns="0" tIns="0" rIns="0" bIns="0" rtlCol="0" anchor="ctr">
+            <a:normAutofit/>
+          </a:bodyPr>
+          <a:lstStyle/>
+          <a:p>
+            <a:pPr indent="0" marL="0">
               <a:buNone/>
             </a:pPr>
             <a:r>
-              <a:rPr lang="en-US" sz="2400" b="1" dirty="0">
-                <a:solidFill>
-                  <a:schemeClr val="tx1"/>
-                </a:solidFill>
+              <a:rPr lang="ja-JP" altLang="en-US" sz="2600" dirty="0">
+                <a:solidFill>
+                  <a:srgbClr val="1A1A1A"/>
+                </a:solidFill>
+                <a:latin typeface="Dela Gothic One" pitchFamily="34" charset="0"/>
+                <a:ea typeface="けいふぉんと" pitchFamily="34" charset="-122"/>
+                <a:cs typeface="Dela Gothic One" pitchFamily="34" charset="-120"/>
               </a:rPr>
               <a:t>宿題と、今日のチェック</a:t>
             </a:r>
-            <a:endParaRPr lang="en-US" sz="2400" dirty="0"/>
-          </a:p>
-        </p:txBody>
-      </p:sp>
-      <p:sp>
-        <p:nvSpPr>
-          <p:cNvPr id="3" name="chip"/>
+            <a:endParaRPr lang="ja-JP" sz="2600" dirty="0"/>
+          </a:p>
+        </p:txBody>
+      </p:sp>
+      <p:sp>
+        <p:nvSpPr>
+          <p:cNvPr id="4" name="card"/>
           <p:cNvSpPr/>
           <p:nvPr/>
         </p:nvSpPr>
         <p:spPr>
           <a:xfrm>
-            <a:off x="548640" y="292608"/>
-            <a:ext cx="795528" cy="292608"/>
+            <a:off x="502920" y="1417320"/>
+            <a:ext cx="3931920" cy="3108960"/>
           </a:xfrm>
           <a:prstGeom prst="roundRect">
             <a:avLst>
-              <a:gd name="adj" fmla="val 50000"/>
+              <a:gd name="adj" fmla="val 2941"/>
             </a:avLst>
           </a:prstGeom>
           <a:solidFill>
-            <a:schemeClr val="tx1"/>
+            <a:srgbClr val="FFFFFF"/>
           </a:solidFill>
-          <a:ln w="12700">
+          <a:ln w="25400">
             <a:solidFill>
-              <a:schemeClr val="tx1"/>
+              <a:srgbClr val="1A1A1A"/>
             </a:solidFill>
             <a:prstDash val="solid"/>
           </a:ln>
-        </p:spPr>
-      </p:sp>
-      <p:sp>
-        <p:nvSpPr>
-          <p:cNvPr id="4" name="chip-text"/>
-          <p:cNvSpPr txBox="1"/>
-          <p:nvPr/>
-        </p:nvSpPr>
-        <p:spPr>
-          <a:xfrm>
-            <a:off x="548640" y="292608"/>
-            <a:ext cx="795528" cy="292608"/>
-          </a:xfrm>
-          <a:prstGeom prst="rect">
-            <a:avLst/>
-          </a:prstGeom>
-          <a:noFill/>
-          <a:ln/>
-        </p:spPr>
-        <p:txBody>
-          <a:bodyPr wrap="square" lIns="0" tIns="0" rIns="0" bIns="0" rtlCol="0" anchor="ctr"/>
-          <a:lstStyle/>
-          <a:p>
-            <a:pPr algn="ctr" indent="0" marL="0">
-              <a:buNone/>
-            </a:pPr>
-            <a:r>
-              <a:rPr lang="en-US" sz="1100" b="1" dirty="0">
-                <a:solidFill>
-                  <a:schemeClr val="accent1"/>
-                </a:solidFill>
-              </a:rPr>
-              <a:t>まとめ</a:t>
-            </a:r>
-            <a:endParaRPr lang="en-US" sz="1100" dirty="0"/>
-          </a:p>
-        </p:txBody>
-      </p:sp>
-      <p:sp>
-        <p:nvSpPr>
-          <p:cNvPr id="5" name="card"/>
+          <a:effectLst>
+            <a:outerShdw sx="100000" sy="100000" kx="0" ky="0" algn="bl" rotWithShape="0" blurRad="101600" dist="50800" dir="2700000">
+              <a:srgbClr val="1A1A1A">
+                <a:alpha val="100000"/>
+              </a:srgbClr>
+            </a:outerShdw>
+          </a:effectLst>
+        </p:spPr>
+      </p:sp>
+      <p:sp>
+        <p:nvSpPr>
+          <p:cNvPr id="5" name="icon-circle"/>
           <p:cNvSpPr/>
           <p:nvPr/>
         </p:nvSpPr>
         <p:spPr>
           <a:xfrm>
-            <a:off x="548640" y="1463040"/>
-            <a:ext cx="3886200" cy="3017520"/>
-          </a:xfrm>
-          <a:prstGeom prst="roundRect">
-            <a:avLst>
-              <a:gd name="adj" fmla="val 3636"/>
-            </a:avLst>
+            <a:off x="704088" y="1600200"/>
+            <a:ext cx="457200" cy="457200"/>
+          </a:xfrm>
+          <a:prstGeom prst="ellipse">
+            <a:avLst/>
           </a:prstGeom>
           <a:solidFill>
-            <a:schemeClr val="bg2"/>
+            <a:srgbClr val="DD6420"/>
           </a:solidFill>
           <a:ln w="19050">
             <a:solidFill>
@@ -8273,43 +8901,11 @@
             </a:solidFill>
             <a:prstDash val="solid"/>
           </a:ln>
-          <a:effectLst>
-            <a:outerShdw sx="100000" sy="100000" kx="0" ky="0" algn="bl" rotWithShape="0" blurRad="101600" dist="38100" dir="2700000">
-              <a:srgbClr val="000000">
-                <a:alpha val="18000"/>
-              </a:srgbClr>
-            </a:outerShdw>
-          </a:effectLst>
-        </p:spPr>
-      </p:sp>
-      <p:sp>
-        <p:nvSpPr>
-          <p:cNvPr id="6" name="icon-circle"/>
-          <p:cNvSpPr/>
-          <p:nvPr/>
-        </p:nvSpPr>
-        <p:spPr>
-          <a:xfrm>
-            <a:off x="777240" y="1645920"/>
-            <a:ext cx="457200" cy="457200"/>
-          </a:xfrm>
-          <a:prstGeom prst="ellipse">
-            <a:avLst/>
-          </a:prstGeom>
-          <a:solidFill>
-            <a:schemeClr val="accent1"/>
-          </a:solidFill>
-          <a:ln w="15875">
-            <a:solidFill>
-              <a:srgbClr val="1A1A1A"/>
-            </a:solidFill>
-            <a:prstDash val="solid"/>
-          </a:ln>
         </p:spPr>
       </p:sp>
       <p:pic>
         <p:nvPicPr>
-          <p:cNvPr id="7" name="icon" descr="preencoded.png">    </p:cNvPr>
+          <p:cNvPr id="6" name="icon" descr="preencoded.png">    </p:cNvPr>
           <p:cNvPicPr>
             <a:picLocks noChangeAspect="1"/>
           </p:cNvPicPr>
@@ -8323,8 +8919,8 @@
         </p:blipFill>
         <p:spPr>
           <a:xfrm>
-            <a:off x="896112" y="1764792"/>
-            <a:ext cx="219456" cy="219456"/>
+            <a:off x="818388" y="1714500"/>
+            <a:ext cx="228600" cy="228600"/>
           </a:xfrm>
           <a:prstGeom prst="rect">
             <a:avLst/>
@@ -8333,13 +8929,13 @@
       </p:pic>
       <p:sp>
         <p:nvSpPr>
-          <p:cNvPr id="8" name="Text 5"/>
+          <p:cNvPr id="7" name="Text 4"/>
           <p:cNvSpPr txBox="1"/>
           <p:nvPr/>
         </p:nvSpPr>
         <p:spPr>
           <a:xfrm>
-            <a:off x="1371600" y="1645920"/>
+            <a:off x="1280160" y="1600200"/>
             <a:ext cx="2743200" cy="457200"/>
           </a:xfrm>
           <a:prstGeom prst="rect">
@@ -8356,27 +8952,30 @@
               <a:buNone/>
             </a:pPr>
             <a:r>
-              <a:rPr lang="en-US" sz="1700" b="1" dirty="0">
-                <a:solidFill>
-                  <a:schemeClr val="tx1"/>
-                </a:solidFill>
+              <a:rPr lang="ja-JP" altLang="en-US" sz="1800" dirty="0">
+                <a:solidFill>
+                  <a:srgbClr val="1A1A1A"/>
+                </a:solidFill>
+                <a:latin typeface="Dela Gothic One" pitchFamily="34" charset="0"/>
+                <a:ea typeface="けいふぉんと" pitchFamily="34" charset="-122"/>
+                <a:cs typeface="Dela Gothic One" pitchFamily="34" charset="-120"/>
               </a:rPr>
               <a:t>宿題</a:t>
             </a:r>
-            <a:endParaRPr lang="en-US" sz="1700" dirty="0"/>
-          </a:p>
-        </p:txBody>
-      </p:sp>
-      <p:sp>
-        <p:nvSpPr>
-          <p:cNvPr id="9" name="Text 6"/>
+            <a:endParaRPr lang="ja-JP" sz="1800" dirty="0"/>
+          </a:p>
+        </p:txBody>
+      </p:sp>
+      <p:sp>
+        <p:nvSpPr>
+          <p:cNvPr id="8" name="Text 5"/>
           <p:cNvSpPr txBox="1"/>
           <p:nvPr/>
         </p:nvSpPr>
         <p:spPr>
           <a:xfrm>
-            <a:off x="777240" y="2286000"/>
-            <a:ext cx="3474720" cy="2057400"/>
+            <a:off x="731520" y="2240280"/>
+            <a:ext cx="3474720" cy="2148840"/>
           </a:xfrm>
           <a:prstGeom prst="rect">
             <a:avLst/>
@@ -8385,7 +8984,9 @@
           <a:ln/>
         </p:spPr>
         <p:txBody>
-          <a:bodyPr wrap="square" lIns="0" tIns="0" rIns="0" bIns="0" rtlCol="0" anchor="t"/>
+          <a:bodyPr wrap="square" lIns="0" tIns="0" rIns="0" bIns="0" rtlCol="0" anchor="t">
+            <a:normAutofit/>
+          </a:bodyPr>
           <a:lstStyle/>
           <a:p>
             <a:pPr marL="342900" indent="-342900">
@@ -8393,17 +8994,20 @@
                 <a:spcPts val="800"/>
               </a:spcAft>
               <a:buSzPct val="100000"/>
-              <a:buChar char="•"/>
+              <a:buChar char="●"/>
             </a:pPr>
             <a:r>
-              <a:rPr lang="en-US" sz="1350" dirty="0">
-                <a:solidFill>
-                  <a:schemeClr val="tx1"/>
-                </a:solidFill>
+              <a:rPr lang="ja-JP" altLang="en-US" sz="1350" b="1" dirty="0">
+                <a:solidFill>
+                  <a:srgbClr val="1A1A1A"/>
+                </a:solidFill>
+                <a:latin typeface="Noto Sans JP" pitchFamily="34" charset="0"/>
+                <a:ea typeface="Noto Sans JP" pitchFamily="34" charset="-122"/>
+                <a:cs typeface="Noto Sans JP" pitchFamily="34" charset="-120"/>
               </a:rPr>
               <a:t>BASEのデータを読み出し、ページに一覧表示する機能を足す（個人情報は表示しない）</a:t>
             </a:r>
-            <a:endParaRPr lang="en-US" sz="1350" dirty="0"/>
+            <a:endParaRPr lang="ja-JP" sz="1350" dirty="0"/>
           </a:p>
           <a:p>
             <a:pPr marL="342900" indent="-342900">
@@ -8411,38 +9015,73 @@
                 <a:spcPts val="800"/>
               </a:spcAft>
               <a:buSzPct val="100000"/>
-              <a:buChar char="•"/>
+              <a:buChar char="●"/>
             </a:pPr>
             <a:r>
-              <a:rPr lang="en-US" sz="1350" dirty="0">
-                <a:solidFill>
-                  <a:schemeClr val="tx1"/>
-                </a:solidFill>
+              <a:rPr lang="ja-JP" altLang="en-US" sz="1350" b="1" dirty="0">
+                <a:solidFill>
+                  <a:srgbClr val="1A1A1A"/>
+                </a:solidFill>
+                <a:latin typeface="Noto Sans JP" pitchFamily="34" charset="0"/>
+                <a:ea typeface="Noto Sans JP" pitchFamily="34" charset="-122"/>
+                <a:cs typeface="Noto Sans JP" pitchFamily="34" charset="-120"/>
               </a:rPr>
               <a:t>今週中に個別レビュー（30分）を受ける</a:t>
             </a:r>
-            <a:endParaRPr lang="en-US" sz="1350" dirty="0"/>
-          </a:p>
-        </p:txBody>
-      </p:sp>
-      <p:sp>
-        <p:nvSpPr>
-          <p:cNvPr id="10" name="card"/>
+            <a:endParaRPr lang="ja-JP" sz="1350" dirty="0"/>
+          </a:p>
+        </p:txBody>
+      </p:sp>
+      <p:sp>
+        <p:nvSpPr>
+          <p:cNvPr id="9" name="card"/>
           <p:cNvSpPr/>
           <p:nvPr/>
         </p:nvSpPr>
         <p:spPr>
           <a:xfrm>
-            <a:off x="4709160" y="1463040"/>
-            <a:ext cx="3886200" cy="3017520"/>
+            <a:off x="4709160" y="1417320"/>
+            <a:ext cx="3931920" cy="3108960"/>
           </a:xfrm>
           <a:prstGeom prst="roundRect">
             <a:avLst>
-              <a:gd name="adj" fmla="val 3636"/>
+              <a:gd name="adj" fmla="val 2941"/>
             </a:avLst>
           </a:prstGeom>
           <a:solidFill>
-            <a:schemeClr val="bg1"/>
+            <a:srgbClr val="FFFFFF"/>
+          </a:solidFill>
+          <a:ln w="25400">
+            <a:solidFill>
+              <a:srgbClr val="1A1A1A"/>
+            </a:solidFill>
+            <a:prstDash val="solid"/>
+          </a:ln>
+          <a:effectLst>
+            <a:outerShdw sx="100000" sy="100000" kx="0" ky="0" algn="bl" rotWithShape="0" blurRad="101600" dist="50800" dir="2700000">
+              <a:srgbClr val="1A1A1A">
+                <a:alpha val="100000"/>
+              </a:srgbClr>
+            </a:outerShdw>
+          </a:effectLst>
+        </p:spPr>
+      </p:sp>
+      <p:sp>
+        <p:nvSpPr>
+          <p:cNvPr id="10" name="icon-circle"/>
+          <p:cNvSpPr/>
+          <p:nvPr/>
+        </p:nvSpPr>
+        <p:spPr>
+          <a:xfrm>
+            <a:off x="4910328" y="1600200"/>
+            <a:ext cx="457200" cy="457200"/>
+          </a:xfrm>
+          <a:prstGeom prst="ellipse">
+            <a:avLst/>
+          </a:prstGeom>
+          <a:solidFill>
+            <a:srgbClr val="DD6420"/>
           </a:solidFill>
           <a:ln w="19050">
             <a:solidFill>
@@ -8450,43 +9089,11 @@
             </a:solidFill>
             <a:prstDash val="solid"/>
           </a:ln>
-          <a:effectLst>
-            <a:outerShdw sx="100000" sy="100000" kx="0" ky="0" algn="bl" rotWithShape="0" blurRad="101600" dist="38100" dir="2700000">
-              <a:srgbClr val="000000">
-                <a:alpha val="18000"/>
-              </a:srgbClr>
-            </a:outerShdw>
-          </a:effectLst>
-        </p:spPr>
-      </p:sp>
-      <p:sp>
-        <p:nvSpPr>
-          <p:cNvPr id="11" name="icon-circle"/>
-          <p:cNvSpPr/>
-          <p:nvPr/>
-        </p:nvSpPr>
-        <p:spPr>
-          <a:xfrm>
-            <a:off x="4937760" y="1645920"/>
-            <a:ext cx="457200" cy="457200"/>
-          </a:xfrm>
-          <a:prstGeom prst="ellipse">
-            <a:avLst/>
-          </a:prstGeom>
-          <a:solidFill>
-            <a:schemeClr val="accent1"/>
-          </a:solidFill>
-          <a:ln w="15875">
-            <a:solidFill>
-              <a:srgbClr val="1A1A1A"/>
-            </a:solidFill>
-            <a:prstDash val="solid"/>
-          </a:ln>
         </p:spPr>
       </p:sp>
       <p:pic>
         <p:nvPicPr>
-          <p:cNvPr id="12" name="icon" descr="preencoded.png">    </p:cNvPr>
+          <p:cNvPr id="11" name="icon" descr="preencoded.png">    </p:cNvPr>
           <p:cNvPicPr>
             <a:picLocks noChangeAspect="1"/>
           </p:cNvPicPr>
@@ -8500,8 +9107,8 @@
         </p:blipFill>
         <p:spPr>
           <a:xfrm>
-            <a:off x="5056632" y="1764792"/>
-            <a:ext cx="219456" cy="219456"/>
+            <a:off x="5024628" y="1714500"/>
+            <a:ext cx="228600" cy="228600"/>
           </a:xfrm>
           <a:prstGeom prst="rect">
             <a:avLst/>
@@ -8510,13 +9117,13 @@
       </p:pic>
       <p:sp>
         <p:nvSpPr>
-          <p:cNvPr id="13" name="Text 9"/>
+          <p:cNvPr id="12" name="Text 8"/>
           <p:cNvSpPr txBox="1"/>
           <p:nvPr/>
         </p:nvSpPr>
         <p:spPr>
           <a:xfrm>
-            <a:off x="5532120" y="1645920"/>
+            <a:off x="5486400" y="1600200"/>
             <a:ext cx="2743200" cy="457200"/>
           </a:xfrm>
           <a:prstGeom prst="rect">
@@ -8533,27 +9140,30 @@
               <a:buNone/>
             </a:pPr>
             <a:r>
-              <a:rPr lang="en-US" sz="1700" b="1" dirty="0">
-                <a:solidFill>
-                  <a:schemeClr val="tx1"/>
-                </a:solidFill>
+              <a:rPr lang="ja-JP" altLang="en-US" sz="1800" dirty="0">
+                <a:solidFill>
+                  <a:srgbClr val="1A1A1A"/>
+                </a:solidFill>
+                <a:latin typeface="Dela Gothic One" pitchFamily="34" charset="0"/>
+                <a:ea typeface="けいふぉんと" pitchFamily="34" charset="-122"/>
+                <a:cs typeface="Dela Gothic One" pitchFamily="34" charset="-120"/>
               </a:rPr>
               <a:t>できたらチェック</a:t>
             </a:r>
-            <a:endParaRPr lang="en-US" sz="1700" dirty="0"/>
-          </a:p>
-        </p:txBody>
-      </p:sp>
-      <p:sp>
-        <p:nvSpPr>
-          <p:cNvPr id="14" name="Text 10"/>
+            <a:endParaRPr lang="ja-JP" sz="1800" dirty="0"/>
+          </a:p>
+        </p:txBody>
+      </p:sp>
+      <p:sp>
+        <p:nvSpPr>
+          <p:cNvPr id="13" name="Text 9"/>
           <p:cNvSpPr txBox="1"/>
           <p:nvPr/>
         </p:nvSpPr>
         <p:spPr>
           <a:xfrm>
-            <a:off x="4937760" y="2286000"/>
-            <a:ext cx="3474720" cy="2057400"/>
+            <a:off x="4937760" y="2240280"/>
+            <a:ext cx="3474720" cy="2148840"/>
           </a:xfrm>
           <a:prstGeom prst="rect">
             <a:avLst/>
@@ -8562,7 +9172,9 @@
           <a:ln/>
         </p:spPr>
         <p:txBody>
-          <a:bodyPr wrap="square" lIns="0" tIns="0" rIns="0" bIns="0" rtlCol="0" anchor="t"/>
+          <a:bodyPr wrap="square" lIns="0" tIns="0" rIns="0" bIns="0" rtlCol="0" anchor="t">
+            <a:normAutofit/>
+          </a:bodyPr>
           <a:lstStyle/>
           <a:p>
             <a:pPr indent="0" marL="0">
@@ -8572,14 +9184,17 @@
               <a:buNone/>
             </a:pPr>
             <a:r>
-              <a:rPr lang="en-US" sz="1350" dirty="0">
-                <a:solidFill>
-                  <a:schemeClr val="tx1"/>
-                </a:solidFill>
+              <a:rPr lang="ja-JP" altLang="en-US" sz="1350" b="1" dirty="0">
+                <a:solidFill>
+                  <a:srgbClr val="1A1A1A"/>
+                </a:solidFill>
+                <a:latin typeface="Noto Sans JP" pitchFamily="34" charset="0"/>
+                <a:ea typeface="Noto Sans JP" pitchFamily="34" charset="-122"/>
+                <a:cs typeface="Noto Sans JP" pitchFamily="34" charset="-120"/>
               </a:rPr>
               <a:t>☐ App Secretがプログラム・GitHubに書かれていない</a:t>
             </a:r>
-            <a:endParaRPr lang="en-US" sz="1350" dirty="0"/>
+            <a:endParaRPr lang="ja-JP" sz="1350" dirty="0"/>
           </a:p>
           <a:p>
             <a:pPr indent="0" marL="0">
@@ -8589,14 +9204,17 @@
               <a:buNone/>
             </a:pPr>
             <a:r>
-              <a:rPr lang="en-US" sz="1350" dirty="0">
-                <a:solidFill>
-                  <a:schemeClr val="tx1"/>
-                </a:solidFill>
+              <a:rPr lang="ja-JP" altLang="en-US" sz="1350" b="1" dirty="0">
+                <a:solidFill>
+                  <a:srgbClr val="1A1A1A"/>
+                </a:solidFill>
+                <a:latin typeface="Noto Sans JP" pitchFamily="34" charset="0"/>
+                <a:ea typeface="Noto Sans JP" pitchFamily="34" charset="-122"/>
+                <a:cs typeface="Noto Sans JP" pitchFamily="34" charset="-120"/>
               </a:rPr>
               <a:t>☐ 公開ページから送ったデータがBASEに入った</a:t>
             </a:r>
-            <a:endParaRPr lang="en-US" sz="1350" dirty="0"/>
+            <a:endParaRPr lang="ja-JP" sz="1350" dirty="0"/>
           </a:p>
         </p:txBody>
       </p:sp>
@@ -8612,8 +9230,8 @@
         </p:nvSpPr>
         <p:spPr>
           <a:xfrm>
-            <a:off x="8229600" y="4773168"/>
-            <a:ext cx="365760" cy="228600"/>
+            <a:off x="8366760" y="4754880"/>
+            <a:ext cx="365760" cy="274320"/>
           </a:xfrm>
           <a:prstGeom prst="rect">
             <a:avLst/>
@@ -8625,20 +9243,23 @@
           </a:extLst>
         </p:spPr>
         <p:txBody>
-          <a:bodyPr/>
+          <a:bodyPr anchor="ctr"/>
           <a:lstStyle>
             <a:lvl1pPr>
-              <a:defRPr sz="900">
-                <a:solidFill>
-                  <a:srgbClr val="5A6872"/>
-                </a:solidFill>
+              <a:defRPr sz="850">
+                <a:solidFill>
+                  <a:srgbClr val="FFFFFF"/>
+                </a:solidFill>
+                <a:latin typeface="Noto Sans JP"/>
+                <a:ea typeface="Noto Sans JP"/>
+                <a:cs typeface="Noto Sans JP"/>
               </a:defRPr>
             </a:lvl1pPr>
           </a:lstStyle>
           <a:p>
             <a:pPr algn="r"/>
             <a:fld id="{F7021451-1387-4CA6-816F-3879F97B5CBC}" type="slidenum">
-              <a:rPr b="0" lang="en-US"/>
+              <a:rPr b="1" lang="en-US"/>
               <a:t>9</a:t>
             </a:fld>
             <a:endParaRPr lang="en-US"/>
@@ -8654,9 +9275,9 @@
 </file>
 
 <file path=ppt/theme/theme1.xml><?xml version="1.0" encoding="utf-8"?>
-<a:theme xmlns:a="http://schemas.openxmlformats.org/drawingml/2006/main" name="Manaberu">
+<a:theme xmlns:a="http://schemas.openxmlformats.org/drawingml/2006/main" name="SasaYell">
   <a:themeElements>
-    <a:clrScheme name="Manaberu">
+    <a:clrScheme name="SasaYell">
       <a:dk1>
         <a:srgbClr val="1A1A1A"/>
       </a:dk1>
@@ -8664,10 +9285,10 @@
         <a:srgbClr val="FFFFFF"/>
       </a:lt1>
       <a:dk2>
-        <a:srgbClr val="5A6872"/>
+        <a:srgbClr val="1A1A1A"/>
       </a:dk2>
       <a:lt2>
-        <a:srgbClr val="FFF6CC"/>
+        <a:srgbClr val="FFD600"/>
       </a:lt2>
       <a:accent1>
         <a:srgbClr val="FFD600"/>
@@ -8676,128 +9297,34 @@
         <a:srgbClr val="DD6420"/>
       </a:accent2>
       <a:accent3>
-        <a:srgbClr val="3370FF"/>
+        <a:srgbClr val="F5A623"/>
       </a:accent3>
       <a:accent4>
-        <a:srgbClr val="06C755"/>
+        <a:srgbClr val="1A1A1A"/>
       </a:accent4>
       <a:accent5>
-        <a:srgbClr val="E53935"/>
+        <a:srgbClr val="FFFFFF"/>
       </a:accent5>
       <a:accent6>
-        <a:srgbClr val="F5A623"/>
+        <a:srgbClr val="DD6420"/>
       </a:accent6>
       <a:hlink>
-        <a:srgbClr val="3370FF"/>
+        <a:srgbClr val="DD6420"/>
       </a:hlink>
       <a:folHlink>
-        <a:srgbClr val="6B4FBB"/>
+        <a:srgbClr val="F5A623"/>
       </a:folHlink>
     </a:clrScheme>
-    <a:fontScheme name="Manaberu">
+    <a:fontScheme name="SasaYell">
       <a:majorFont>
-        <a:latin typeface="Yu Gothic"/>
-        <a:ea typeface=""/>
+        <a:latin typeface="Dela Gothic One"/>
+        <a:ea typeface="けいふぉんと"/>
         <a:cs typeface=""/>
-        <a:font script="Jpan" typeface="游ゴシック Light"/>
-        <a:font script="Hang" typeface="맑은 고딕"/>
-        <a:font script="Hans" typeface="等线 Light"/>
-        <a:font script="Hant" typeface="新細明體"/>
-        <a:font script="Arab" typeface="Times New Roman"/>
-        <a:font script="Hebr" typeface="Times New Roman"/>
-        <a:font script="Thai" typeface="Angsana New"/>
-        <a:font script="Ethi" typeface="Nyala"/>
-        <a:font script="Beng" typeface="Vrinda"/>
-        <a:font script="Gujr" typeface="Shruti"/>
-        <a:font script="Khmr" typeface="MoolBoran"/>
-        <a:font script="Knda" typeface="Tunga"/>
-        <a:font script="Guru" typeface="Raavi"/>
-        <a:font script="Cans" typeface="Euphemia"/>
-        <a:font script="Cher" typeface="Plantagenet Cherokee"/>
-        <a:font script="Yiii" typeface="Microsoft Yi Baiti"/>
-        <a:font script="Tibt" typeface="Microsoft Himalaya"/>
-        <a:font script="Thaa" typeface="MV Boli"/>
-        <a:font script="Deva" typeface="Mangal"/>
-        <a:font script="Telu" typeface="Gautami"/>
-        <a:font script="Taml" typeface="Latha"/>
-        <a:font script="Syrc" typeface="Estrangelo Edessa"/>
-        <a:font script="Orya" typeface="Kalinga"/>
-        <a:font script="Mlym" typeface="Kartika"/>
-        <a:font script="Laoo" typeface="DokChampa"/>
-        <a:font script="Sinh" typeface="Iskoola Pota"/>
-        <a:font script="Mong" typeface="Mongolian Baiti"/>
-        <a:font script="Viet" typeface="Times New Roman"/>
-        <a:font script="Uigh" typeface="Microsoft Uighur"/>
-        <a:font script="Geor" typeface="Sylfaen"/>
-        <a:font script="Armn" typeface="Arial"/>
-        <a:font script="Bugi" typeface="Leelawadee UI"/>
-        <a:font script="Bopo" typeface="Microsoft JhengHei"/>
-        <a:font script="Java" typeface="Javanese Text"/>
-        <a:font script="Lisu" typeface="Segoe UI"/>
-        <a:font script="Mymr" typeface="Myanmar Text"/>
-        <a:font script="Nkoo" typeface="Ebrima"/>
-        <a:font script="Olck" typeface="Nirmala UI"/>
-        <a:font script="Osma" typeface="Ebrima"/>
-        <a:font script="Phag" typeface="Phagspa"/>
-        <a:font script="Syrn" typeface="Estrangelo Edessa"/>
-        <a:font script="Syrj" typeface="Estrangelo Edessa"/>
-        <a:font script="Syre" typeface="Estrangelo Edessa"/>
-        <a:font script="Sora" typeface="Nirmala UI"/>
-        <a:font script="Tale" typeface="Microsoft Tai Le"/>
-        <a:font script="Talu" typeface="Microsoft New Tai Lue"/>
-        <a:font script="Tfng" typeface="Ebrima"/>
       </a:majorFont>
       <a:minorFont>
-        <a:latin typeface="Yu Gothic"/>
-        <a:ea typeface=""/>
+        <a:latin typeface="Noto Sans JP"/>
+        <a:ea typeface="Noto Sans JP"/>
         <a:cs typeface=""/>
-        <a:font script="Jpan" typeface="游ゴシック"/>
-        <a:font script="Hang" typeface="맑은 고딕"/>
-        <a:font script="Hans" typeface="等线"/>
-        <a:font script="Hant" typeface="新細明體"/>
-        <a:font script="Arab" typeface="Arial"/>
-        <a:font script="Hebr" typeface="Arial"/>
-        <a:font script="Thai" typeface="Cordia New"/>
-        <a:font script="Ethi" typeface="Nyala"/>
-        <a:font script="Beng" typeface="Vrinda"/>
-        <a:font script="Gujr" typeface="Shruti"/>
-        <a:font script="Khmr" typeface="DaunPenh"/>
-        <a:font script="Knda" typeface="Tunga"/>
-        <a:font script="Guru" typeface="Raavi"/>
-        <a:font script="Cans" typeface="Euphemia"/>
-        <a:font script="Cher" typeface="Plantagenet Cherokee"/>
-        <a:font script="Yiii" typeface="Microsoft Yi Baiti"/>
-        <a:font script="Tibt" typeface="Microsoft Himalaya"/>
-        <a:font script="Thaa" typeface="MV Boli"/>
-        <a:font script="Deva" typeface="Mangal"/>
-        <a:font script="Telu" typeface="Gautami"/>
-        <a:font script="Taml" typeface="Latha"/>
-        <a:font script="Syrc" typeface="Estrangelo Edessa"/>
-        <a:font script="Orya" typeface="Kalinga"/>
-        <a:font script="Mlym" typeface="Kartika"/>
-        <a:font script="Laoo" typeface="DokChampa"/>
-        <a:font script="Sinh" typeface="Iskoola Pota"/>
-        <a:font script="Mong" typeface="Mongolian Baiti"/>
-        <a:font script="Viet" typeface="Arial"/>
-        <a:font script="Uigh" typeface="Microsoft Uighur"/>
-        <a:font script="Geor" typeface="Sylfaen"/>
-        <a:font script="Armn" typeface="Arial"/>
-        <a:font script="Bugi" typeface="Leelawadee UI"/>
-        <a:font script="Bopo" typeface="Microsoft JhengHei"/>
-        <a:font script="Java" typeface="Javanese Text"/>
-        <a:font script="Lisu" typeface="Segoe UI"/>
-        <a:font script="Mymr" typeface="Myanmar Text"/>
-        <a:font script="Nkoo" typeface="Ebrima"/>
-        <a:font script="Olck" typeface="Nirmala UI"/>
-        <a:font script="Osma" typeface="Ebrima"/>
-        <a:font script="Phag" typeface="Phagspa"/>
-        <a:font script="Syrn" typeface="Estrangelo Edessa"/>
-        <a:font script="Syrj" typeface="Estrangelo Edessa"/>
-        <a:font script="Syre" typeface="Estrangelo Edessa"/>
-        <a:font script="Sora" typeface="Nirmala UI"/>
-        <a:font script="Tale" typeface="Microsoft Tai Le"/>
-        <a:font script="Talu" typeface="Microsoft New Tai Lue"/>
-        <a:font script="Tfng" typeface="Ebrima"/>
       </a:minorFont>
     </a:fontScheme>
     <a:fmtScheme name="Office">
